--- a/4_Estimation.pptx
+++ b/4_Estimation.pptx
@@ -5,10 +5,10 @@
     <p:sldMasterId id="2147483648" r:id="rId4"/>
   </p:sldMasterIdLst>
   <p:notesMasterIdLst>
-    <p:notesMasterId r:id="rId30"/>
+    <p:notesMasterId r:id="rId27"/>
   </p:notesMasterIdLst>
   <p:handoutMasterIdLst>
-    <p:handoutMasterId r:id="rId31"/>
+    <p:handoutMasterId r:id="rId28"/>
   </p:handoutMasterIdLst>
   <p:sldIdLst>
     <p:sldId id="256" r:id="rId5"/>
@@ -16,26 +16,23 @@
     <p:sldId id="361" r:id="rId7"/>
     <p:sldId id="368" r:id="rId8"/>
     <p:sldId id="314" r:id="rId9"/>
-    <p:sldId id="271" r:id="rId10"/>
-    <p:sldId id="366" r:id="rId11"/>
-    <p:sldId id="272" r:id="rId12"/>
-    <p:sldId id="273" r:id="rId13"/>
-    <p:sldId id="274" r:id="rId14"/>
-    <p:sldId id="282" r:id="rId15"/>
-    <p:sldId id="275" r:id="rId16"/>
-    <p:sldId id="280" r:id="rId17"/>
-    <p:sldId id="277" r:id="rId18"/>
-    <p:sldId id="362" r:id="rId19"/>
-    <p:sldId id="369" r:id="rId20"/>
-    <p:sldId id="278" r:id="rId21"/>
-    <p:sldId id="370" r:id="rId22"/>
-    <p:sldId id="371" r:id="rId23"/>
-    <p:sldId id="372" r:id="rId24"/>
-    <p:sldId id="363" r:id="rId25"/>
-    <p:sldId id="279" r:id="rId26"/>
-    <p:sldId id="364" r:id="rId27"/>
-    <p:sldId id="281" r:id="rId28"/>
-    <p:sldId id="365" r:id="rId29"/>
+    <p:sldId id="366" r:id="rId10"/>
+    <p:sldId id="272" r:id="rId11"/>
+    <p:sldId id="273" r:id="rId12"/>
+    <p:sldId id="274" r:id="rId13"/>
+    <p:sldId id="275" r:id="rId14"/>
+    <p:sldId id="277" r:id="rId15"/>
+    <p:sldId id="362" r:id="rId16"/>
+    <p:sldId id="369" r:id="rId17"/>
+    <p:sldId id="278" r:id="rId18"/>
+    <p:sldId id="370" r:id="rId19"/>
+    <p:sldId id="371" r:id="rId20"/>
+    <p:sldId id="372" r:id="rId21"/>
+    <p:sldId id="363" r:id="rId22"/>
+    <p:sldId id="279" r:id="rId23"/>
+    <p:sldId id="364" r:id="rId24"/>
+    <p:sldId id="281" r:id="rId25"/>
+    <p:sldId id="365" r:id="rId26"/>
   </p:sldIdLst>
   <p:sldSz cx="12188825" cy="6858000"/>
   <p:notesSz cx="6858000" cy="9144000"/>
@@ -880,7 +877,7 @@
     </p:spTree>
     <p:extLst>
       <p:ext uri="{BB962C8B-B14F-4D97-AF65-F5344CB8AC3E}">
-        <p14:creationId xmlns:p14="http://schemas.microsoft.com/office/powerpoint/2010/main" val="3259237565"/>
+        <p14:creationId xmlns:p14="http://schemas.microsoft.com/office/powerpoint/2010/main" val="3628120198"/>
       </p:ext>
     </p:extLst>
   </p:cSld>
@@ -891,115 +888,6 @@
 </file>
 
 <file path=ppt/notesSlides/notesSlide11.xml><?xml version="1.0" encoding="utf-8"?>
-<p:notes xmlns:a="http://schemas.openxmlformats.org/drawingml/2006/main" xmlns:r="http://schemas.openxmlformats.org/officeDocument/2006/relationships" xmlns:p="http://schemas.openxmlformats.org/presentationml/2006/main">
-  <p:cSld>
-    <p:spTree>
-      <p:nvGrpSpPr>
-        <p:cNvPr id="1" name="">
-          <a:extLst>
-            <a:ext uri="{FF2B5EF4-FFF2-40B4-BE49-F238E27FC236}">
-              <a16:creationId xmlns:a16="http://schemas.microsoft.com/office/drawing/2014/main" id="{7FFE48B6-8181-F485-483D-74B530894E3E}"/>
-            </a:ext>
-          </a:extLst>
-        </p:cNvPr>
-        <p:cNvGrpSpPr/>
-        <p:nvPr/>
-      </p:nvGrpSpPr>
-      <p:grpSpPr>
-        <a:xfrm>
-          <a:off x="0" y="0"/>
-          <a:ext cx="0" cy="0"/>
-          <a:chOff x="0" y="0"/>
-          <a:chExt cx="0" cy="0"/>
-        </a:xfrm>
-      </p:grpSpPr>
-      <p:sp>
-        <p:nvSpPr>
-          <p:cNvPr id="2" name="슬라이드 이미지 개체 틀 1">
-            <a:extLst>
-              <a:ext uri="{FF2B5EF4-FFF2-40B4-BE49-F238E27FC236}">
-                <a16:creationId xmlns:a16="http://schemas.microsoft.com/office/drawing/2014/main" id="{ABA4750D-9A32-1465-3219-6D24F3105F42}"/>
-              </a:ext>
-            </a:extLst>
-          </p:cNvPr>
-          <p:cNvSpPr>
-            <a:spLocks noGrp="1" noRot="1" noChangeAspect="1"/>
-          </p:cNvSpPr>
-          <p:nvPr>
-            <p:ph type="sldImg"/>
-          </p:nvPr>
-        </p:nvSpPr>
-        <p:spPr/>
-      </p:sp>
-      <p:sp>
-        <p:nvSpPr>
-          <p:cNvPr id="3" name="슬라이드 노트 개체 틀 2">
-            <a:extLst>
-              <a:ext uri="{FF2B5EF4-FFF2-40B4-BE49-F238E27FC236}">
-                <a16:creationId xmlns:a16="http://schemas.microsoft.com/office/drawing/2014/main" id="{6E012341-B157-0FA0-B642-6A8375F85540}"/>
-              </a:ext>
-            </a:extLst>
-          </p:cNvPr>
-          <p:cNvSpPr>
-            <a:spLocks noGrp="1"/>
-          </p:cNvSpPr>
-          <p:nvPr>
-            <p:ph type="body" idx="1"/>
-          </p:nvPr>
-        </p:nvSpPr>
-        <p:spPr/>
-        <p:txBody>
-          <a:bodyPr/>
-          <a:lstStyle/>
-          <a:p>
-            <a:endParaRPr lang="ko-KR" altLang="en-US" dirty="0"/>
-          </a:p>
-        </p:txBody>
-      </p:sp>
-      <p:sp>
-        <p:nvSpPr>
-          <p:cNvPr id="4" name="슬라이드 번호 개체 틀 3">
-            <a:extLst>
-              <a:ext uri="{FF2B5EF4-FFF2-40B4-BE49-F238E27FC236}">
-                <a16:creationId xmlns:a16="http://schemas.microsoft.com/office/drawing/2014/main" id="{68637A8C-9EC5-48D4-4FED-AD011394FDE8}"/>
-              </a:ext>
-            </a:extLst>
-          </p:cNvPr>
-          <p:cNvSpPr>
-            <a:spLocks noGrp="1"/>
-          </p:cNvSpPr>
-          <p:nvPr>
-            <p:ph type="sldNum" sz="quarter" idx="10"/>
-          </p:nvPr>
-        </p:nvSpPr>
-        <p:spPr/>
-        <p:txBody>
-          <a:bodyPr/>
-          <a:lstStyle/>
-          <a:p>
-            <a:pPr rtl="0"/>
-            <a:fld id="{5FB91549-43BF-425A-AF25-75262019208C}" type="slidenum">
-              <a:rPr lang="en-US" altLang="ko-KR" smtClean="0"/>
-              <a:t>11</a:t>
-            </a:fld>
-            <a:endParaRPr lang="ko-KR" altLang="en-US" dirty="0"/>
-          </a:p>
-        </p:txBody>
-      </p:sp>
-    </p:spTree>
-    <p:extLst>
-      <p:ext uri="{BB962C8B-B14F-4D97-AF65-F5344CB8AC3E}">
-        <p14:creationId xmlns:p14="http://schemas.microsoft.com/office/powerpoint/2010/main" val="151068689"/>
-      </p:ext>
-    </p:extLst>
-  </p:cSld>
-  <p:clrMapOvr>
-    <a:masterClrMapping/>
-  </p:clrMapOvr>
-</p:notes>
-</file>
-
-<file path=ppt/notesSlides/notesSlide12.xml><?xml version="1.0" encoding="utf-8"?>
 <p:notes xmlns:a="http://schemas.openxmlformats.org/drawingml/2006/main" xmlns:r="http://schemas.openxmlformats.org/officeDocument/2006/relationships" xmlns:p="http://schemas.openxmlformats.org/presentationml/2006/main">
   <p:cSld>
     <p:spTree>
@@ -1065,6 +953,115 @@
             <a:pPr rtl="0"/>
             <a:fld id="{5FB91549-43BF-425A-AF25-75262019208C}" type="slidenum">
               <a:rPr lang="en-US" altLang="ko-KR" smtClean="0"/>
+              <a:t>11</a:t>
+            </a:fld>
+            <a:endParaRPr lang="ko-KR" altLang="en-US" dirty="0"/>
+          </a:p>
+        </p:txBody>
+      </p:sp>
+    </p:spTree>
+    <p:extLst>
+      <p:ext uri="{BB962C8B-B14F-4D97-AF65-F5344CB8AC3E}">
+        <p14:creationId xmlns:p14="http://schemas.microsoft.com/office/powerpoint/2010/main" val="1329391888"/>
+      </p:ext>
+    </p:extLst>
+  </p:cSld>
+  <p:clrMapOvr>
+    <a:masterClrMapping/>
+  </p:clrMapOvr>
+</p:notes>
+</file>
+
+<file path=ppt/notesSlides/notesSlide12.xml><?xml version="1.0" encoding="utf-8"?>
+<p:notes xmlns:a="http://schemas.openxmlformats.org/drawingml/2006/main" xmlns:r="http://schemas.openxmlformats.org/officeDocument/2006/relationships" xmlns:p="http://schemas.openxmlformats.org/presentationml/2006/main">
+  <p:cSld>
+    <p:spTree>
+      <p:nvGrpSpPr>
+        <p:cNvPr id="1" name="">
+          <a:extLst>
+            <a:ext uri="{FF2B5EF4-FFF2-40B4-BE49-F238E27FC236}">
+              <a16:creationId xmlns:a16="http://schemas.microsoft.com/office/drawing/2014/main" id="{3959997E-FCBA-57BD-FA26-6E0D974345BF}"/>
+            </a:ext>
+          </a:extLst>
+        </p:cNvPr>
+        <p:cNvGrpSpPr/>
+        <p:nvPr/>
+      </p:nvGrpSpPr>
+      <p:grpSpPr>
+        <a:xfrm>
+          <a:off x="0" y="0"/>
+          <a:ext cx="0" cy="0"/>
+          <a:chOff x="0" y="0"/>
+          <a:chExt cx="0" cy="0"/>
+        </a:xfrm>
+      </p:grpSpPr>
+      <p:sp>
+        <p:nvSpPr>
+          <p:cNvPr id="2" name="슬라이드 이미지 개체 틀 1">
+            <a:extLst>
+              <a:ext uri="{FF2B5EF4-FFF2-40B4-BE49-F238E27FC236}">
+                <a16:creationId xmlns:a16="http://schemas.microsoft.com/office/drawing/2014/main" id="{4AC5868B-65CA-7446-67AA-687959BA6E3D}"/>
+              </a:ext>
+            </a:extLst>
+          </p:cNvPr>
+          <p:cNvSpPr>
+            <a:spLocks noGrp="1" noRot="1" noChangeAspect="1"/>
+          </p:cNvSpPr>
+          <p:nvPr>
+            <p:ph type="sldImg"/>
+          </p:nvPr>
+        </p:nvSpPr>
+        <p:spPr/>
+      </p:sp>
+      <p:sp>
+        <p:nvSpPr>
+          <p:cNvPr id="3" name="슬라이드 노트 개체 틀 2">
+            <a:extLst>
+              <a:ext uri="{FF2B5EF4-FFF2-40B4-BE49-F238E27FC236}">
+                <a16:creationId xmlns:a16="http://schemas.microsoft.com/office/drawing/2014/main" id="{FA53A8AB-378C-BFC6-6F41-4B8191A695E0}"/>
+              </a:ext>
+            </a:extLst>
+          </p:cNvPr>
+          <p:cNvSpPr>
+            <a:spLocks noGrp="1"/>
+          </p:cNvSpPr>
+          <p:nvPr>
+            <p:ph type="body" idx="1"/>
+          </p:nvPr>
+        </p:nvSpPr>
+        <p:spPr/>
+        <p:txBody>
+          <a:bodyPr/>
+          <a:lstStyle/>
+          <a:p>
+            <a:endParaRPr lang="ko-KR" altLang="en-US" dirty="0"/>
+          </a:p>
+        </p:txBody>
+      </p:sp>
+      <p:sp>
+        <p:nvSpPr>
+          <p:cNvPr id="4" name="슬라이드 번호 개체 틀 3">
+            <a:extLst>
+              <a:ext uri="{FF2B5EF4-FFF2-40B4-BE49-F238E27FC236}">
+                <a16:creationId xmlns:a16="http://schemas.microsoft.com/office/drawing/2014/main" id="{3B8861B1-46FB-45DE-209A-49F5883A26E3}"/>
+              </a:ext>
+            </a:extLst>
+          </p:cNvPr>
+          <p:cNvSpPr>
+            <a:spLocks noGrp="1"/>
+          </p:cNvSpPr>
+          <p:nvPr>
+            <p:ph type="sldNum" sz="quarter" idx="10"/>
+          </p:nvPr>
+        </p:nvSpPr>
+        <p:spPr/>
+        <p:txBody>
+          <a:bodyPr/>
+          <a:lstStyle/>
+          <a:p>
+            <a:pPr rtl="0"/>
+            <a:fld id="{5FB91549-43BF-425A-AF25-75262019208C}" type="slidenum">
+              <a:rPr lang="en-US" altLang="ko-KR" smtClean="0"/>
               <a:t>12</a:t>
             </a:fld>
             <a:endParaRPr lang="ko-KR" altLang="en-US" dirty="0"/>
@@ -1074,7 +1071,7 @@
     </p:spTree>
     <p:extLst>
       <p:ext uri="{BB962C8B-B14F-4D97-AF65-F5344CB8AC3E}">
-        <p14:creationId xmlns:p14="http://schemas.microsoft.com/office/powerpoint/2010/main" val="3628120198"/>
+        <p14:creationId xmlns:p14="http://schemas.microsoft.com/office/powerpoint/2010/main" val="2399581243"/>
       </p:ext>
     </p:extLst>
   </p:cSld>
@@ -1159,7 +1156,7 @@
     </p:spTree>
     <p:extLst>
       <p:ext uri="{BB962C8B-B14F-4D97-AF65-F5344CB8AC3E}">
-        <p14:creationId xmlns:p14="http://schemas.microsoft.com/office/powerpoint/2010/main" val="1932367812"/>
+        <p14:creationId xmlns:p14="http://schemas.microsoft.com/office/powerpoint/2010/main" val="390987337"/>
       </p:ext>
     </p:extLst>
   </p:cSld>
@@ -1244,7 +1241,7 @@
     </p:spTree>
     <p:extLst>
       <p:ext uri="{BB962C8B-B14F-4D97-AF65-F5344CB8AC3E}">
-        <p14:creationId xmlns:p14="http://schemas.microsoft.com/office/powerpoint/2010/main" val="1329391888"/>
+        <p14:creationId xmlns:p14="http://schemas.microsoft.com/office/powerpoint/2010/main" val="114399789"/>
       </p:ext>
     </p:extLst>
   </p:cSld>
@@ -1255,285 +1252,6 @@
 </file>
 
 <file path=ppt/notesSlides/notesSlide15.xml><?xml version="1.0" encoding="utf-8"?>
-<p:notes xmlns:a="http://schemas.openxmlformats.org/drawingml/2006/main" xmlns:r="http://schemas.openxmlformats.org/officeDocument/2006/relationships" xmlns:p="http://schemas.openxmlformats.org/presentationml/2006/main">
-  <p:cSld>
-    <p:spTree>
-      <p:nvGrpSpPr>
-        <p:cNvPr id="1" name="">
-          <a:extLst>
-            <a:ext uri="{FF2B5EF4-FFF2-40B4-BE49-F238E27FC236}">
-              <a16:creationId xmlns:a16="http://schemas.microsoft.com/office/drawing/2014/main" id="{3959997E-FCBA-57BD-FA26-6E0D974345BF}"/>
-            </a:ext>
-          </a:extLst>
-        </p:cNvPr>
-        <p:cNvGrpSpPr/>
-        <p:nvPr/>
-      </p:nvGrpSpPr>
-      <p:grpSpPr>
-        <a:xfrm>
-          <a:off x="0" y="0"/>
-          <a:ext cx="0" cy="0"/>
-          <a:chOff x="0" y="0"/>
-          <a:chExt cx="0" cy="0"/>
-        </a:xfrm>
-      </p:grpSpPr>
-      <p:sp>
-        <p:nvSpPr>
-          <p:cNvPr id="2" name="슬라이드 이미지 개체 틀 1">
-            <a:extLst>
-              <a:ext uri="{FF2B5EF4-FFF2-40B4-BE49-F238E27FC236}">
-                <a16:creationId xmlns:a16="http://schemas.microsoft.com/office/drawing/2014/main" id="{4AC5868B-65CA-7446-67AA-687959BA6E3D}"/>
-              </a:ext>
-            </a:extLst>
-          </p:cNvPr>
-          <p:cNvSpPr>
-            <a:spLocks noGrp="1" noRot="1" noChangeAspect="1"/>
-          </p:cNvSpPr>
-          <p:nvPr>
-            <p:ph type="sldImg"/>
-          </p:nvPr>
-        </p:nvSpPr>
-        <p:spPr/>
-      </p:sp>
-      <p:sp>
-        <p:nvSpPr>
-          <p:cNvPr id="3" name="슬라이드 노트 개체 틀 2">
-            <a:extLst>
-              <a:ext uri="{FF2B5EF4-FFF2-40B4-BE49-F238E27FC236}">
-                <a16:creationId xmlns:a16="http://schemas.microsoft.com/office/drawing/2014/main" id="{FA53A8AB-378C-BFC6-6F41-4B8191A695E0}"/>
-              </a:ext>
-            </a:extLst>
-          </p:cNvPr>
-          <p:cNvSpPr>
-            <a:spLocks noGrp="1"/>
-          </p:cNvSpPr>
-          <p:nvPr>
-            <p:ph type="body" idx="1"/>
-          </p:nvPr>
-        </p:nvSpPr>
-        <p:spPr/>
-        <p:txBody>
-          <a:bodyPr/>
-          <a:lstStyle/>
-          <a:p>
-            <a:endParaRPr lang="ko-KR" altLang="en-US" dirty="0"/>
-          </a:p>
-        </p:txBody>
-      </p:sp>
-      <p:sp>
-        <p:nvSpPr>
-          <p:cNvPr id="4" name="슬라이드 번호 개체 틀 3">
-            <a:extLst>
-              <a:ext uri="{FF2B5EF4-FFF2-40B4-BE49-F238E27FC236}">
-                <a16:creationId xmlns:a16="http://schemas.microsoft.com/office/drawing/2014/main" id="{3B8861B1-46FB-45DE-209A-49F5883A26E3}"/>
-              </a:ext>
-            </a:extLst>
-          </p:cNvPr>
-          <p:cNvSpPr>
-            <a:spLocks noGrp="1"/>
-          </p:cNvSpPr>
-          <p:nvPr>
-            <p:ph type="sldNum" sz="quarter" idx="10"/>
-          </p:nvPr>
-        </p:nvSpPr>
-        <p:spPr/>
-        <p:txBody>
-          <a:bodyPr/>
-          <a:lstStyle/>
-          <a:p>
-            <a:pPr rtl="0"/>
-            <a:fld id="{5FB91549-43BF-425A-AF25-75262019208C}" type="slidenum">
-              <a:rPr lang="en-US" altLang="ko-KR" smtClean="0"/>
-              <a:t>15</a:t>
-            </a:fld>
-            <a:endParaRPr lang="ko-KR" altLang="en-US" dirty="0"/>
-          </a:p>
-        </p:txBody>
-      </p:sp>
-    </p:spTree>
-    <p:extLst>
-      <p:ext uri="{BB962C8B-B14F-4D97-AF65-F5344CB8AC3E}">
-        <p14:creationId xmlns:p14="http://schemas.microsoft.com/office/powerpoint/2010/main" val="2399581243"/>
-      </p:ext>
-    </p:extLst>
-  </p:cSld>
-  <p:clrMapOvr>
-    <a:masterClrMapping/>
-  </p:clrMapOvr>
-</p:notes>
-</file>
-
-<file path=ppt/notesSlides/notesSlide16.xml><?xml version="1.0" encoding="utf-8"?>
-<p:notes xmlns:a="http://schemas.openxmlformats.org/drawingml/2006/main" xmlns:r="http://schemas.openxmlformats.org/officeDocument/2006/relationships" xmlns:p="http://schemas.openxmlformats.org/presentationml/2006/main">
-  <p:cSld>
-    <p:spTree>
-      <p:nvGrpSpPr>
-        <p:cNvPr id="1" name=""/>
-        <p:cNvGrpSpPr/>
-        <p:nvPr/>
-      </p:nvGrpSpPr>
-      <p:grpSpPr>
-        <a:xfrm>
-          <a:off x="0" y="0"/>
-          <a:ext cx="0" cy="0"/>
-          <a:chOff x="0" y="0"/>
-          <a:chExt cx="0" cy="0"/>
-        </a:xfrm>
-      </p:grpSpPr>
-      <p:sp>
-        <p:nvSpPr>
-          <p:cNvPr id="2" name="슬라이드 이미지 개체 틀 1"/>
-          <p:cNvSpPr>
-            <a:spLocks noGrp="1" noRot="1" noChangeAspect="1"/>
-          </p:cNvSpPr>
-          <p:nvPr>
-            <p:ph type="sldImg"/>
-          </p:nvPr>
-        </p:nvSpPr>
-        <p:spPr/>
-      </p:sp>
-      <p:sp>
-        <p:nvSpPr>
-          <p:cNvPr id="3" name="슬라이드 노트 개체 틀 2"/>
-          <p:cNvSpPr>
-            <a:spLocks noGrp="1"/>
-          </p:cNvSpPr>
-          <p:nvPr>
-            <p:ph type="body" idx="1"/>
-          </p:nvPr>
-        </p:nvSpPr>
-        <p:spPr/>
-        <p:txBody>
-          <a:bodyPr/>
-          <a:lstStyle/>
-          <a:p>
-            <a:endParaRPr lang="ko-KR" altLang="en-US" dirty="0"/>
-          </a:p>
-        </p:txBody>
-      </p:sp>
-      <p:sp>
-        <p:nvSpPr>
-          <p:cNvPr id="4" name="슬라이드 번호 개체 틀 3"/>
-          <p:cNvSpPr>
-            <a:spLocks noGrp="1"/>
-          </p:cNvSpPr>
-          <p:nvPr>
-            <p:ph type="sldNum" sz="quarter" idx="10"/>
-          </p:nvPr>
-        </p:nvSpPr>
-        <p:spPr/>
-        <p:txBody>
-          <a:bodyPr/>
-          <a:lstStyle/>
-          <a:p>
-            <a:pPr rtl="0"/>
-            <a:fld id="{5FB91549-43BF-425A-AF25-75262019208C}" type="slidenum">
-              <a:rPr lang="en-US" altLang="ko-KR" smtClean="0"/>
-              <a:t>16</a:t>
-            </a:fld>
-            <a:endParaRPr lang="ko-KR" altLang="en-US" dirty="0"/>
-          </a:p>
-        </p:txBody>
-      </p:sp>
-    </p:spTree>
-    <p:extLst>
-      <p:ext uri="{BB962C8B-B14F-4D97-AF65-F5344CB8AC3E}">
-        <p14:creationId xmlns:p14="http://schemas.microsoft.com/office/powerpoint/2010/main" val="390987337"/>
-      </p:ext>
-    </p:extLst>
-  </p:cSld>
-  <p:clrMapOvr>
-    <a:masterClrMapping/>
-  </p:clrMapOvr>
-</p:notes>
-</file>
-
-<file path=ppt/notesSlides/notesSlide17.xml><?xml version="1.0" encoding="utf-8"?>
-<p:notes xmlns:a="http://schemas.openxmlformats.org/drawingml/2006/main" xmlns:r="http://schemas.openxmlformats.org/officeDocument/2006/relationships" xmlns:p="http://schemas.openxmlformats.org/presentationml/2006/main">
-  <p:cSld>
-    <p:spTree>
-      <p:nvGrpSpPr>
-        <p:cNvPr id="1" name=""/>
-        <p:cNvGrpSpPr/>
-        <p:nvPr/>
-      </p:nvGrpSpPr>
-      <p:grpSpPr>
-        <a:xfrm>
-          <a:off x="0" y="0"/>
-          <a:ext cx="0" cy="0"/>
-          <a:chOff x="0" y="0"/>
-          <a:chExt cx="0" cy="0"/>
-        </a:xfrm>
-      </p:grpSpPr>
-      <p:sp>
-        <p:nvSpPr>
-          <p:cNvPr id="2" name="슬라이드 이미지 개체 틀 1"/>
-          <p:cNvSpPr>
-            <a:spLocks noGrp="1" noRot="1" noChangeAspect="1"/>
-          </p:cNvSpPr>
-          <p:nvPr>
-            <p:ph type="sldImg"/>
-          </p:nvPr>
-        </p:nvSpPr>
-        <p:spPr/>
-      </p:sp>
-      <p:sp>
-        <p:nvSpPr>
-          <p:cNvPr id="3" name="슬라이드 노트 개체 틀 2"/>
-          <p:cNvSpPr>
-            <a:spLocks noGrp="1"/>
-          </p:cNvSpPr>
-          <p:nvPr>
-            <p:ph type="body" idx="1"/>
-          </p:nvPr>
-        </p:nvSpPr>
-        <p:spPr/>
-        <p:txBody>
-          <a:bodyPr/>
-          <a:lstStyle/>
-          <a:p>
-            <a:endParaRPr lang="ko-KR" altLang="en-US" dirty="0"/>
-          </a:p>
-        </p:txBody>
-      </p:sp>
-      <p:sp>
-        <p:nvSpPr>
-          <p:cNvPr id="4" name="슬라이드 번호 개체 틀 3"/>
-          <p:cNvSpPr>
-            <a:spLocks noGrp="1"/>
-          </p:cNvSpPr>
-          <p:nvPr>
-            <p:ph type="sldNum" sz="quarter" idx="10"/>
-          </p:nvPr>
-        </p:nvSpPr>
-        <p:spPr/>
-        <p:txBody>
-          <a:bodyPr/>
-          <a:lstStyle/>
-          <a:p>
-            <a:pPr rtl="0"/>
-            <a:fld id="{5FB91549-43BF-425A-AF25-75262019208C}" type="slidenum">
-              <a:rPr lang="en-US" altLang="ko-KR" smtClean="0"/>
-              <a:t>17</a:t>
-            </a:fld>
-            <a:endParaRPr lang="ko-KR" altLang="en-US" dirty="0"/>
-          </a:p>
-        </p:txBody>
-      </p:sp>
-    </p:spTree>
-    <p:extLst>
-      <p:ext uri="{BB962C8B-B14F-4D97-AF65-F5344CB8AC3E}">
-        <p14:creationId xmlns:p14="http://schemas.microsoft.com/office/powerpoint/2010/main" val="114399789"/>
-      </p:ext>
-    </p:extLst>
-  </p:cSld>
-  <p:clrMapOvr>
-    <a:masterClrMapping/>
-  </p:clrMapOvr>
-</p:notes>
-</file>
-
-<file path=ppt/notesSlides/notesSlide18.xml><?xml version="1.0" encoding="utf-8"?>
 <p:notes xmlns:a="http://schemas.openxmlformats.org/drawingml/2006/main" xmlns:r="http://schemas.openxmlformats.org/officeDocument/2006/relationships" xmlns:p="http://schemas.openxmlformats.org/presentationml/2006/main">
   <p:cSld>
     <p:spTree>
@@ -1623,7 +1341,7 @@
             <a:pPr rtl="0"/>
             <a:fld id="{5FB91549-43BF-425A-AF25-75262019208C}" type="slidenum">
               <a:rPr lang="en-US" altLang="ko-KR" smtClean="0"/>
-              <a:t>18</a:t>
+              <a:t>15</a:t>
             </a:fld>
             <a:endParaRPr lang="ko-KR" altLang="en-US" dirty="0"/>
           </a:p>
@@ -1642,7 +1360,7 @@
 </p:notes>
 </file>
 
-<file path=ppt/notesSlides/notesSlide19.xml><?xml version="1.0" encoding="utf-8"?>
+<file path=ppt/notesSlides/notesSlide16.xml><?xml version="1.0" encoding="utf-8"?>
 <p:notes xmlns:a="http://schemas.openxmlformats.org/drawingml/2006/main" xmlns:r="http://schemas.openxmlformats.org/officeDocument/2006/relationships" xmlns:p="http://schemas.openxmlformats.org/presentationml/2006/main">
   <p:cSld>
     <p:spTree>
@@ -1732,7 +1450,7 @@
             <a:pPr rtl="0"/>
             <a:fld id="{5FB91549-43BF-425A-AF25-75262019208C}" type="slidenum">
               <a:rPr lang="en-US" altLang="ko-KR" smtClean="0"/>
-              <a:t>19</a:t>
+              <a:t>16</a:t>
             </a:fld>
             <a:endParaRPr lang="ko-KR" altLang="en-US" dirty="0"/>
           </a:p>
@@ -1742,6 +1460,309 @@
     <p:extLst>
       <p:ext uri="{BB962C8B-B14F-4D97-AF65-F5344CB8AC3E}">
         <p14:creationId xmlns:p14="http://schemas.microsoft.com/office/powerpoint/2010/main" val="2060246545"/>
+      </p:ext>
+    </p:extLst>
+  </p:cSld>
+  <p:clrMapOvr>
+    <a:masterClrMapping/>
+  </p:clrMapOvr>
+</p:notes>
+</file>
+
+<file path=ppt/notesSlides/notesSlide17.xml><?xml version="1.0" encoding="utf-8"?>
+<p:notes xmlns:a="http://schemas.openxmlformats.org/drawingml/2006/main" xmlns:r="http://schemas.openxmlformats.org/officeDocument/2006/relationships" xmlns:p="http://schemas.openxmlformats.org/presentationml/2006/main">
+  <p:cSld>
+    <p:spTree>
+      <p:nvGrpSpPr>
+        <p:cNvPr id="1" name="">
+          <a:extLst>
+            <a:ext uri="{FF2B5EF4-FFF2-40B4-BE49-F238E27FC236}">
+              <a16:creationId xmlns:a16="http://schemas.microsoft.com/office/drawing/2014/main" id="{D7CF794A-4B67-554B-2857-A5FC16BA6A8D}"/>
+            </a:ext>
+          </a:extLst>
+        </p:cNvPr>
+        <p:cNvGrpSpPr/>
+        <p:nvPr/>
+      </p:nvGrpSpPr>
+      <p:grpSpPr>
+        <a:xfrm>
+          <a:off x="0" y="0"/>
+          <a:ext cx="0" cy="0"/>
+          <a:chOff x="0" y="0"/>
+          <a:chExt cx="0" cy="0"/>
+        </a:xfrm>
+      </p:grpSpPr>
+      <p:sp>
+        <p:nvSpPr>
+          <p:cNvPr id="2" name="슬라이드 이미지 개체 틀 1">
+            <a:extLst>
+              <a:ext uri="{FF2B5EF4-FFF2-40B4-BE49-F238E27FC236}">
+                <a16:creationId xmlns:a16="http://schemas.microsoft.com/office/drawing/2014/main" id="{E87FDCB3-6052-3F4F-9110-A582273FF49B}"/>
+              </a:ext>
+            </a:extLst>
+          </p:cNvPr>
+          <p:cNvSpPr>
+            <a:spLocks noGrp="1" noRot="1" noChangeAspect="1"/>
+          </p:cNvSpPr>
+          <p:nvPr>
+            <p:ph type="sldImg"/>
+          </p:nvPr>
+        </p:nvSpPr>
+        <p:spPr/>
+      </p:sp>
+      <p:sp>
+        <p:nvSpPr>
+          <p:cNvPr id="3" name="슬라이드 노트 개체 틀 2">
+            <a:extLst>
+              <a:ext uri="{FF2B5EF4-FFF2-40B4-BE49-F238E27FC236}">
+                <a16:creationId xmlns:a16="http://schemas.microsoft.com/office/drawing/2014/main" id="{65E432C9-D0A8-0BE1-41E0-26F2DCBC5702}"/>
+              </a:ext>
+            </a:extLst>
+          </p:cNvPr>
+          <p:cNvSpPr>
+            <a:spLocks noGrp="1"/>
+          </p:cNvSpPr>
+          <p:nvPr>
+            <p:ph type="body" idx="1"/>
+          </p:nvPr>
+        </p:nvSpPr>
+        <p:spPr/>
+        <p:txBody>
+          <a:bodyPr/>
+          <a:lstStyle/>
+          <a:p>
+            <a:endParaRPr lang="ko-KR" altLang="en-US" dirty="0"/>
+          </a:p>
+        </p:txBody>
+      </p:sp>
+      <p:sp>
+        <p:nvSpPr>
+          <p:cNvPr id="4" name="슬라이드 번호 개체 틀 3">
+            <a:extLst>
+              <a:ext uri="{FF2B5EF4-FFF2-40B4-BE49-F238E27FC236}">
+                <a16:creationId xmlns:a16="http://schemas.microsoft.com/office/drawing/2014/main" id="{86D509EC-14BC-0FC9-60D6-A050BEA32AE2}"/>
+              </a:ext>
+            </a:extLst>
+          </p:cNvPr>
+          <p:cNvSpPr>
+            <a:spLocks noGrp="1"/>
+          </p:cNvSpPr>
+          <p:nvPr>
+            <p:ph type="sldNum" sz="quarter" idx="10"/>
+          </p:nvPr>
+        </p:nvSpPr>
+        <p:spPr/>
+        <p:txBody>
+          <a:bodyPr/>
+          <a:lstStyle/>
+          <a:p>
+            <a:pPr rtl="0"/>
+            <a:fld id="{5FB91549-43BF-425A-AF25-75262019208C}" type="slidenum">
+              <a:rPr lang="en-US" altLang="ko-KR" smtClean="0"/>
+              <a:t>17</a:t>
+            </a:fld>
+            <a:endParaRPr lang="ko-KR" altLang="en-US" dirty="0"/>
+          </a:p>
+        </p:txBody>
+      </p:sp>
+    </p:spTree>
+    <p:extLst>
+      <p:ext uri="{BB962C8B-B14F-4D97-AF65-F5344CB8AC3E}">
+        <p14:creationId xmlns:p14="http://schemas.microsoft.com/office/powerpoint/2010/main" val="3760084939"/>
+      </p:ext>
+    </p:extLst>
+  </p:cSld>
+  <p:clrMapOvr>
+    <a:masterClrMapping/>
+  </p:clrMapOvr>
+</p:notes>
+</file>
+
+<file path=ppt/notesSlides/notesSlide18.xml><?xml version="1.0" encoding="utf-8"?>
+<p:notes xmlns:a="http://schemas.openxmlformats.org/drawingml/2006/main" xmlns:r="http://schemas.openxmlformats.org/officeDocument/2006/relationships" xmlns:p="http://schemas.openxmlformats.org/presentationml/2006/main">
+  <p:cSld>
+    <p:spTree>
+      <p:nvGrpSpPr>
+        <p:cNvPr id="1" name="">
+          <a:extLst>
+            <a:ext uri="{FF2B5EF4-FFF2-40B4-BE49-F238E27FC236}">
+              <a16:creationId xmlns:a16="http://schemas.microsoft.com/office/drawing/2014/main" id="{B21AA8D9-600A-F975-AF39-7C4A71BDC3D6}"/>
+            </a:ext>
+          </a:extLst>
+        </p:cNvPr>
+        <p:cNvGrpSpPr/>
+        <p:nvPr/>
+      </p:nvGrpSpPr>
+      <p:grpSpPr>
+        <a:xfrm>
+          <a:off x="0" y="0"/>
+          <a:ext cx="0" cy="0"/>
+          <a:chOff x="0" y="0"/>
+          <a:chExt cx="0" cy="0"/>
+        </a:xfrm>
+      </p:grpSpPr>
+      <p:sp>
+        <p:nvSpPr>
+          <p:cNvPr id="2" name="슬라이드 이미지 개체 틀 1">
+            <a:extLst>
+              <a:ext uri="{FF2B5EF4-FFF2-40B4-BE49-F238E27FC236}">
+                <a16:creationId xmlns:a16="http://schemas.microsoft.com/office/drawing/2014/main" id="{4B17B488-9014-47F4-B025-68110CD11323}"/>
+              </a:ext>
+            </a:extLst>
+          </p:cNvPr>
+          <p:cNvSpPr>
+            <a:spLocks noGrp="1" noRot="1" noChangeAspect="1"/>
+          </p:cNvSpPr>
+          <p:nvPr>
+            <p:ph type="sldImg"/>
+          </p:nvPr>
+        </p:nvSpPr>
+        <p:spPr/>
+      </p:sp>
+      <p:sp>
+        <p:nvSpPr>
+          <p:cNvPr id="3" name="슬라이드 노트 개체 틀 2">
+            <a:extLst>
+              <a:ext uri="{FF2B5EF4-FFF2-40B4-BE49-F238E27FC236}">
+                <a16:creationId xmlns:a16="http://schemas.microsoft.com/office/drawing/2014/main" id="{274C337A-0E33-780B-F888-436B2DCF500D}"/>
+              </a:ext>
+            </a:extLst>
+          </p:cNvPr>
+          <p:cNvSpPr>
+            <a:spLocks noGrp="1"/>
+          </p:cNvSpPr>
+          <p:nvPr>
+            <p:ph type="body" idx="1"/>
+          </p:nvPr>
+        </p:nvSpPr>
+        <p:spPr/>
+        <p:txBody>
+          <a:bodyPr/>
+          <a:lstStyle/>
+          <a:p>
+            <a:endParaRPr lang="ko-KR" altLang="en-US" dirty="0"/>
+          </a:p>
+        </p:txBody>
+      </p:sp>
+      <p:sp>
+        <p:nvSpPr>
+          <p:cNvPr id="4" name="슬라이드 번호 개체 틀 3">
+            <a:extLst>
+              <a:ext uri="{FF2B5EF4-FFF2-40B4-BE49-F238E27FC236}">
+                <a16:creationId xmlns:a16="http://schemas.microsoft.com/office/drawing/2014/main" id="{28D3F98F-1801-D05E-7B68-8901BBFD8101}"/>
+              </a:ext>
+            </a:extLst>
+          </p:cNvPr>
+          <p:cNvSpPr>
+            <a:spLocks noGrp="1"/>
+          </p:cNvSpPr>
+          <p:nvPr>
+            <p:ph type="sldNum" sz="quarter" idx="10"/>
+          </p:nvPr>
+        </p:nvSpPr>
+        <p:spPr/>
+        <p:txBody>
+          <a:bodyPr/>
+          <a:lstStyle/>
+          <a:p>
+            <a:pPr rtl="0"/>
+            <a:fld id="{5FB91549-43BF-425A-AF25-75262019208C}" type="slidenum">
+              <a:rPr lang="en-US" altLang="ko-KR" smtClean="0"/>
+              <a:t>18</a:t>
+            </a:fld>
+            <a:endParaRPr lang="ko-KR" altLang="en-US" dirty="0"/>
+          </a:p>
+        </p:txBody>
+      </p:sp>
+    </p:spTree>
+    <p:extLst>
+      <p:ext uri="{BB962C8B-B14F-4D97-AF65-F5344CB8AC3E}">
+        <p14:creationId xmlns:p14="http://schemas.microsoft.com/office/powerpoint/2010/main" val="1252142345"/>
+      </p:ext>
+    </p:extLst>
+  </p:cSld>
+  <p:clrMapOvr>
+    <a:masterClrMapping/>
+  </p:clrMapOvr>
+</p:notes>
+</file>
+
+<file path=ppt/notesSlides/notesSlide19.xml><?xml version="1.0" encoding="utf-8"?>
+<p:notes xmlns:a="http://schemas.openxmlformats.org/drawingml/2006/main" xmlns:r="http://schemas.openxmlformats.org/officeDocument/2006/relationships" xmlns:p="http://schemas.openxmlformats.org/presentationml/2006/main">
+  <p:cSld>
+    <p:spTree>
+      <p:nvGrpSpPr>
+        <p:cNvPr id="1" name=""/>
+        <p:cNvGrpSpPr/>
+        <p:nvPr/>
+      </p:nvGrpSpPr>
+      <p:grpSpPr>
+        <a:xfrm>
+          <a:off x="0" y="0"/>
+          <a:ext cx="0" cy="0"/>
+          <a:chOff x="0" y="0"/>
+          <a:chExt cx="0" cy="0"/>
+        </a:xfrm>
+      </p:grpSpPr>
+      <p:sp>
+        <p:nvSpPr>
+          <p:cNvPr id="2" name="슬라이드 이미지 개체 틀 1"/>
+          <p:cNvSpPr>
+            <a:spLocks noGrp="1" noRot="1" noChangeAspect="1"/>
+          </p:cNvSpPr>
+          <p:nvPr>
+            <p:ph type="sldImg"/>
+          </p:nvPr>
+        </p:nvSpPr>
+        <p:spPr/>
+      </p:sp>
+      <p:sp>
+        <p:nvSpPr>
+          <p:cNvPr id="3" name="슬라이드 노트 개체 틀 2"/>
+          <p:cNvSpPr>
+            <a:spLocks noGrp="1"/>
+          </p:cNvSpPr>
+          <p:nvPr>
+            <p:ph type="body" idx="1"/>
+          </p:nvPr>
+        </p:nvSpPr>
+        <p:spPr/>
+        <p:txBody>
+          <a:bodyPr/>
+          <a:lstStyle/>
+          <a:p>
+            <a:endParaRPr lang="ko-KR" altLang="en-US" dirty="0"/>
+          </a:p>
+        </p:txBody>
+      </p:sp>
+      <p:sp>
+        <p:nvSpPr>
+          <p:cNvPr id="4" name="슬라이드 번호 개체 틀 3"/>
+          <p:cNvSpPr>
+            <a:spLocks noGrp="1"/>
+          </p:cNvSpPr>
+          <p:nvPr>
+            <p:ph type="sldNum" sz="quarter" idx="10"/>
+          </p:nvPr>
+        </p:nvSpPr>
+        <p:spPr/>
+        <p:txBody>
+          <a:bodyPr/>
+          <a:lstStyle/>
+          <a:p>
+            <a:pPr rtl="0"/>
+            <a:fld id="{5FB91549-43BF-425A-AF25-75262019208C}" type="slidenum">
+              <a:rPr lang="en-US" altLang="ko-KR" smtClean="0"/>
+              <a:t>19</a:t>
+            </a:fld>
+            <a:endParaRPr lang="ko-KR" altLang="en-US" dirty="0"/>
+          </a:p>
+        </p:txBody>
+      </p:sp>
+    </p:spTree>
+    <p:extLst>
+      <p:ext uri="{BB962C8B-B14F-4D97-AF65-F5344CB8AC3E}">
+        <p14:creationId xmlns:p14="http://schemas.microsoft.com/office/powerpoint/2010/main" val="945868928"/>
       </p:ext>
     </p:extLst>
   </p:cSld>
@@ -1868,7 +1889,7 @@
         <p:cNvPr id="1" name="">
           <a:extLst>
             <a:ext uri="{FF2B5EF4-FFF2-40B4-BE49-F238E27FC236}">
-              <a16:creationId xmlns:a16="http://schemas.microsoft.com/office/drawing/2014/main" id="{D7CF794A-4B67-554B-2857-A5FC16BA6A8D}"/>
+              <a16:creationId xmlns:a16="http://schemas.microsoft.com/office/drawing/2014/main" id="{219B0E1B-93AF-FF85-F781-97C74771B763}"/>
             </a:ext>
           </a:extLst>
         </p:cNvPr>
@@ -1888,7 +1909,7 @@
           <p:cNvPr id="2" name="슬라이드 이미지 개체 틀 1">
             <a:extLst>
               <a:ext uri="{FF2B5EF4-FFF2-40B4-BE49-F238E27FC236}">
-                <a16:creationId xmlns:a16="http://schemas.microsoft.com/office/drawing/2014/main" id="{E87FDCB3-6052-3F4F-9110-A582273FF49B}"/>
+                <a16:creationId xmlns:a16="http://schemas.microsoft.com/office/drawing/2014/main" id="{368BEF73-EC5B-45F0-8957-614B1CF499CC}"/>
               </a:ext>
             </a:extLst>
           </p:cNvPr>
@@ -1906,7 +1927,7 @@
           <p:cNvPr id="3" name="슬라이드 노트 개체 틀 2">
             <a:extLst>
               <a:ext uri="{FF2B5EF4-FFF2-40B4-BE49-F238E27FC236}">
-                <a16:creationId xmlns:a16="http://schemas.microsoft.com/office/drawing/2014/main" id="{65E432C9-D0A8-0BE1-41E0-26F2DCBC5702}"/>
+                <a16:creationId xmlns:a16="http://schemas.microsoft.com/office/drawing/2014/main" id="{A71D8B4C-753F-4EC2-9EB9-1B5812533C2C}"/>
               </a:ext>
             </a:extLst>
           </p:cNvPr>
@@ -1931,7 +1952,7 @@
           <p:cNvPr id="4" name="슬라이드 번호 개체 틀 3">
             <a:extLst>
               <a:ext uri="{FF2B5EF4-FFF2-40B4-BE49-F238E27FC236}">
-                <a16:creationId xmlns:a16="http://schemas.microsoft.com/office/drawing/2014/main" id="{86D509EC-14BC-0FC9-60D6-A050BEA32AE2}"/>
+                <a16:creationId xmlns:a16="http://schemas.microsoft.com/office/drawing/2014/main" id="{BA0A74EC-1E8C-0429-EE5F-0040A8C472CC}"/>
               </a:ext>
             </a:extLst>
           </p:cNvPr>
@@ -1959,7 +1980,7 @@
     </p:spTree>
     <p:extLst>
       <p:ext uri="{BB962C8B-B14F-4D97-AF65-F5344CB8AC3E}">
-        <p14:creationId xmlns:p14="http://schemas.microsoft.com/office/powerpoint/2010/main" val="3760084939"/>
+        <p14:creationId xmlns:p14="http://schemas.microsoft.com/office/powerpoint/2010/main" val="266090397"/>
       </p:ext>
     </p:extLst>
   </p:cSld>
@@ -1970,115 +1991,6 @@
 </file>
 
 <file path=ppt/notesSlides/notesSlide21.xml><?xml version="1.0" encoding="utf-8"?>
-<p:notes xmlns:a="http://schemas.openxmlformats.org/drawingml/2006/main" xmlns:r="http://schemas.openxmlformats.org/officeDocument/2006/relationships" xmlns:p="http://schemas.openxmlformats.org/presentationml/2006/main">
-  <p:cSld>
-    <p:spTree>
-      <p:nvGrpSpPr>
-        <p:cNvPr id="1" name="">
-          <a:extLst>
-            <a:ext uri="{FF2B5EF4-FFF2-40B4-BE49-F238E27FC236}">
-              <a16:creationId xmlns:a16="http://schemas.microsoft.com/office/drawing/2014/main" id="{B21AA8D9-600A-F975-AF39-7C4A71BDC3D6}"/>
-            </a:ext>
-          </a:extLst>
-        </p:cNvPr>
-        <p:cNvGrpSpPr/>
-        <p:nvPr/>
-      </p:nvGrpSpPr>
-      <p:grpSpPr>
-        <a:xfrm>
-          <a:off x="0" y="0"/>
-          <a:ext cx="0" cy="0"/>
-          <a:chOff x="0" y="0"/>
-          <a:chExt cx="0" cy="0"/>
-        </a:xfrm>
-      </p:grpSpPr>
-      <p:sp>
-        <p:nvSpPr>
-          <p:cNvPr id="2" name="슬라이드 이미지 개체 틀 1">
-            <a:extLst>
-              <a:ext uri="{FF2B5EF4-FFF2-40B4-BE49-F238E27FC236}">
-                <a16:creationId xmlns:a16="http://schemas.microsoft.com/office/drawing/2014/main" id="{4B17B488-9014-47F4-B025-68110CD11323}"/>
-              </a:ext>
-            </a:extLst>
-          </p:cNvPr>
-          <p:cNvSpPr>
-            <a:spLocks noGrp="1" noRot="1" noChangeAspect="1"/>
-          </p:cNvSpPr>
-          <p:nvPr>
-            <p:ph type="sldImg"/>
-          </p:nvPr>
-        </p:nvSpPr>
-        <p:spPr/>
-      </p:sp>
-      <p:sp>
-        <p:nvSpPr>
-          <p:cNvPr id="3" name="슬라이드 노트 개체 틀 2">
-            <a:extLst>
-              <a:ext uri="{FF2B5EF4-FFF2-40B4-BE49-F238E27FC236}">
-                <a16:creationId xmlns:a16="http://schemas.microsoft.com/office/drawing/2014/main" id="{274C337A-0E33-780B-F888-436B2DCF500D}"/>
-              </a:ext>
-            </a:extLst>
-          </p:cNvPr>
-          <p:cNvSpPr>
-            <a:spLocks noGrp="1"/>
-          </p:cNvSpPr>
-          <p:nvPr>
-            <p:ph type="body" idx="1"/>
-          </p:nvPr>
-        </p:nvSpPr>
-        <p:spPr/>
-        <p:txBody>
-          <a:bodyPr/>
-          <a:lstStyle/>
-          <a:p>
-            <a:endParaRPr lang="ko-KR" altLang="en-US" dirty="0"/>
-          </a:p>
-        </p:txBody>
-      </p:sp>
-      <p:sp>
-        <p:nvSpPr>
-          <p:cNvPr id="4" name="슬라이드 번호 개체 틀 3">
-            <a:extLst>
-              <a:ext uri="{FF2B5EF4-FFF2-40B4-BE49-F238E27FC236}">
-                <a16:creationId xmlns:a16="http://schemas.microsoft.com/office/drawing/2014/main" id="{28D3F98F-1801-D05E-7B68-8901BBFD8101}"/>
-              </a:ext>
-            </a:extLst>
-          </p:cNvPr>
-          <p:cNvSpPr>
-            <a:spLocks noGrp="1"/>
-          </p:cNvSpPr>
-          <p:nvPr>
-            <p:ph type="sldNum" sz="quarter" idx="10"/>
-          </p:nvPr>
-        </p:nvSpPr>
-        <p:spPr/>
-        <p:txBody>
-          <a:bodyPr/>
-          <a:lstStyle/>
-          <a:p>
-            <a:pPr rtl="0"/>
-            <a:fld id="{5FB91549-43BF-425A-AF25-75262019208C}" type="slidenum">
-              <a:rPr lang="en-US" altLang="ko-KR" smtClean="0"/>
-              <a:t>21</a:t>
-            </a:fld>
-            <a:endParaRPr lang="ko-KR" altLang="en-US" dirty="0"/>
-          </a:p>
-        </p:txBody>
-      </p:sp>
-    </p:spTree>
-    <p:extLst>
-      <p:ext uri="{BB962C8B-B14F-4D97-AF65-F5344CB8AC3E}">
-        <p14:creationId xmlns:p14="http://schemas.microsoft.com/office/powerpoint/2010/main" val="1252142345"/>
-      </p:ext>
-    </p:extLst>
-  </p:cSld>
-  <p:clrMapOvr>
-    <a:masterClrMapping/>
-  </p:clrMapOvr>
-</p:notes>
-</file>
-
-<file path=ppt/notesSlides/notesSlide22.xml><?xml version="1.0" encoding="utf-8"?>
 <p:notes xmlns:a="http://schemas.openxmlformats.org/drawingml/2006/main" xmlns:r="http://schemas.openxmlformats.org/officeDocument/2006/relationships" xmlns:p="http://schemas.openxmlformats.org/presentationml/2006/main">
   <p:cSld>
     <p:spTree>
@@ -2144,201 +2056,7 @@
             <a:pPr rtl="0"/>
             <a:fld id="{5FB91549-43BF-425A-AF25-75262019208C}" type="slidenum">
               <a:rPr lang="en-US" altLang="ko-KR" smtClean="0"/>
-              <a:t>22</a:t>
-            </a:fld>
-            <a:endParaRPr lang="ko-KR" altLang="en-US" dirty="0"/>
-          </a:p>
-        </p:txBody>
-      </p:sp>
-    </p:spTree>
-    <p:extLst>
-      <p:ext uri="{BB962C8B-B14F-4D97-AF65-F5344CB8AC3E}">
-        <p14:creationId xmlns:p14="http://schemas.microsoft.com/office/powerpoint/2010/main" val="945868928"/>
-      </p:ext>
-    </p:extLst>
-  </p:cSld>
-  <p:clrMapOvr>
-    <a:masterClrMapping/>
-  </p:clrMapOvr>
-</p:notes>
-</file>
-
-<file path=ppt/notesSlides/notesSlide23.xml><?xml version="1.0" encoding="utf-8"?>
-<p:notes xmlns:a="http://schemas.openxmlformats.org/drawingml/2006/main" xmlns:r="http://schemas.openxmlformats.org/officeDocument/2006/relationships" xmlns:p="http://schemas.openxmlformats.org/presentationml/2006/main">
-  <p:cSld>
-    <p:spTree>
-      <p:nvGrpSpPr>
-        <p:cNvPr id="1" name="">
-          <a:extLst>
-            <a:ext uri="{FF2B5EF4-FFF2-40B4-BE49-F238E27FC236}">
-              <a16:creationId xmlns:a16="http://schemas.microsoft.com/office/drawing/2014/main" id="{219B0E1B-93AF-FF85-F781-97C74771B763}"/>
-            </a:ext>
-          </a:extLst>
-        </p:cNvPr>
-        <p:cNvGrpSpPr/>
-        <p:nvPr/>
-      </p:nvGrpSpPr>
-      <p:grpSpPr>
-        <a:xfrm>
-          <a:off x="0" y="0"/>
-          <a:ext cx="0" cy="0"/>
-          <a:chOff x="0" y="0"/>
-          <a:chExt cx="0" cy="0"/>
-        </a:xfrm>
-      </p:grpSpPr>
-      <p:sp>
-        <p:nvSpPr>
-          <p:cNvPr id="2" name="슬라이드 이미지 개체 틀 1">
-            <a:extLst>
-              <a:ext uri="{FF2B5EF4-FFF2-40B4-BE49-F238E27FC236}">
-                <a16:creationId xmlns:a16="http://schemas.microsoft.com/office/drawing/2014/main" id="{368BEF73-EC5B-45F0-8957-614B1CF499CC}"/>
-              </a:ext>
-            </a:extLst>
-          </p:cNvPr>
-          <p:cNvSpPr>
-            <a:spLocks noGrp="1" noRot="1" noChangeAspect="1"/>
-          </p:cNvSpPr>
-          <p:nvPr>
-            <p:ph type="sldImg"/>
-          </p:nvPr>
-        </p:nvSpPr>
-        <p:spPr/>
-      </p:sp>
-      <p:sp>
-        <p:nvSpPr>
-          <p:cNvPr id="3" name="슬라이드 노트 개체 틀 2">
-            <a:extLst>
-              <a:ext uri="{FF2B5EF4-FFF2-40B4-BE49-F238E27FC236}">
-                <a16:creationId xmlns:a16="http://schemas.microsoft.com/office/drawing/2014/main" id="{A71D8B4C-753F-4EC2-9EB9-1B5812533C2C}"/>
-              </a:ext>
-            </a:extLst>
-          </p:cNvPr>
-          <p:cNvSpPr>
-            <a:spLocks noGrp="1"/>
-          </p:cNvSpPr>
-          <p:nvPr>
-            <p:ph type="body" idx="1"/>
-          </p:nvPr>
-        </p:nvSpPr>
-        <p:spPr/>
-        <p:txBody>
-          <a:bodyPr/>
-          <a:lstStyle/>
-          <a:p>
-            <a:endParaRPr lang="ko-KR" altLang="en-US" dirty="0"/>
-          </a:p>
-        </p:txBody>
-      </p:sp>
-      <p:sp>
-        <p:nvSpPr>
-          <p:cNvPr id="4" name="슬라이드 번호 개체 틀 3">
-            <a:extLst>
-              <a:ext uri="{FF2B5EF4-FFF2-40B4-BE49-F238E27FC236}">
-                <a16:creationId xmlns:a16="http://schemas.microsoft.com/office/drawing/2014/main" id="{BA0A74EC-1E8C-0429-EE5F-0040A8C472CC}"/>
-              </a:ext>
-            </a:extLst>
-          </p:cNvPr>
-          <p:cNvSpPr>
-            <a:spLocks noGrp="1"/>
-          </p:cNvSpPr>
-          <p:nvPr>
-            <p:ph type="sldNum" sz="quarter" idx="10"/>
-          </p:nvPr>
-        </p:nvSpPr>
-        <p:spPr/>
-        <p:txBody>
-          <a:bodyPr/>
-          <a:lstStyle/>
-          <a:p>
-            <a:pPr rtl="0"/>
-            <a:fld id="{5FB91549-43BF-425A-AF25-75262019208C}" type="slidenum">
-              <a:rPr lang="en-US" altLang="ko-KR" smtClean="0"/>
-              <a:t>23</a:t>
-            </a:fld>
-            <a:endParaRPr lang="ko-KR" altLang="en-US" dirty="0"/>
-          </a:p>
-        </p:txBody>
-      </p:sp>
-    </p:spTree>
-    <p:extLst>
-      <p:ext uri="{BB962C8B-B14F-4D97-AF65-F5344CB8AC3E}">
-        <p14:creationId xmlns:p14="http://schemas.microsoft.com/office/powerpoint/2010/main" val="266090397"/>
-      </p:ext>
-    </p:extLst>
-  </p:cSld>
-  <p:clrMapOvr>
-    <a:masterClrMapping/>
-  </p:clrMapOvr>
-</p:notes>
-</file>
-
-<file path=ppt/notesSlides/notesSlide24.xml><?xml version="1.0" encoding="utf-8"?>
-<p:notes xmlns:a="http://schemas.openxmlformats.org/drawingml/2006/main" xmlns:r="http://schemas.openxmlformats.org/officeDocument/2006/relationships" xmlns:p="http://schemas.openxmlformats.org/presentationml/2006/main">
-  <p:cSld>
-    <p:spTree>
-      <p:nvGrpSpPr>
-        <p:cNvPr id="1" name=""/>
-        <p:cNvGrpSpPr/>
-        <p:nvPr/>
-      </p:nvGrpSpPr>
-      <p:grpSpPr>
-        <a:xfrm>
-          <a:off x="0" y="0"/>
-          <a:ext cx="0" cy="0"/>
-          <a:chOff x="0" y="0"/>
-          <a:chExt cx="0" cy="0"/>
-        </a:xfrm>
-      </p:grpSpPr>
-      <p:sp>
-        <p:nvSpPr>
-          <p:cNvPr id="2" name="슬라이드 이미지 개체 틀 1"/>
-          <p:cNvSpPr>
-            <a:spLocks noGrp="1" noRot="1" noChangeAspect="1"/>
-          </p:cNvSpPr>
-          <p:nvPr>
-            <p:ph type="sldImg"/>
-          </p:nvPr>
-        </p:nvSpPr>
-        <p:spPr/>
-      </p:sp>
-      <p:sp>
-        <p:nvSpPr>
-          <p:cNvPr id="3" name="슬라이드 노트 개체 틀 2"/>
-          <p:cNvSpPr>
-            <a:spLocks noGrp="1"/>
-          </p:cNvSpPr>
-          <p:nvPr>
-            <p:ph type="body" idx="1"/>
-          </p:nvPr>
-        </p:nvSpPr>
-        <p:spPr/>
-        <p:txBody>
-          <a:bodyPr/>
-          <a:lstStyle/>
-          <a:p>
-            <a:endParaRPr lang="ko-KR" altLang="en-US" dirty="0"/>
-          </a:p>
-        </p:txBody>
-      </p:sp>
-      <p:sp>
-        <p:nvSpPr>
-          <p:cNvPr id="4" name="슬라이드 번호 개체 틀 3"/>
-          <p:cNvSpPr>
-            <a:spLocks noGrp="1"/>
-          </p:cNvSpPr>
-          <p:nvPr>
-            <p:ph type="sldNum" sz="quarter" idx="10"/>
-          </p:nvPr>
-        </p:nvSpPr>
-        <p:spPr/>
-        <p:txBody>
-          <a:bodyPr/>
-          <a:lstStyle/>
-          <a:p>
-            <a:pPr rtl="0"/>
-            <a:fld id="{5FB91549-43BF-425A-AF25-75262019208C}" type="slidenum">
-              <a:rPr lang="en-US" altLang="ko-KR" smtClean="0"/>
-              <a:t>24</a:t>
+              <a:t>21</a:t>
             </a:fld>
             <a:endParaRPr lang="ko-KR" altLang="en-US" dirty="0"/>
           </a:p>
@@ -2357,7 +2075,7 @@
 </p:notes>
 </file>
 
-<file path=ppt/notesSlides/notesSlide25.xml><?xml version="1.0" encoding="utf-8"?>
+<file path=ppt/notesSlides/notesSlide22.xml><?xml version="1.0" encoding="utf-8"?>
 <p:notes xmlns:a="http://schemas.openxmlformats.org/drawingml/2006/main" xmlns:r="http://schemas.openxmlformats.org/officeDocument/2006/relationships" xmlns:p="http://schemas.openxmlformats.org/presentationml/2006/main">
   <p:cSld>
     <p:spTree>
@@ -2447,7 +2165,7 @@
             <a:pPr rtl="0"/>
             <a:fld id="{5FB91549-43BF-425A-AF25-75262019208C}" type="slidenum">
               <a:rPr lang="en-US" altLang="ko-KR" smtClean="0"/>
-              <a:t>25</a:t>
+              <a:t>22</a:t>
             </a:fld>
             <a:endParaRPr lang="ko-KR" altLang="en-US" dirty="0"/>
           </a:p>
@@ -2798,91 +2516,6 @@
   <p:cSld>
     <p:spTree>
       <p:nvGrpSpPr>
-        <p:cNvPr id="1" name=""/>
-        <p:cNvGrpSpPr/>
-        <p:nvPr/>
-      </p:nvGrpSpPr>
-      <p:grpSpPr>
-        <a:xfrm>
-          <a:off x="0" y="0"/>
-          <a:ext cx="0" cy="0"/>
-          <a:chOff x="0" y="0"/>
-          <a:chExt cx="0" cy="0"/>
-        </a:xfrm>
-      </p:grpSpPr>
-      <p:sp>
-        <p:nvSpPr>
-          <p:cNvPr id="2" name="슬라이드 이미지 개체 틀 1"/>
-          <p:cNvSpPr>
-            <a:spLocks noGrp="1" noRot="1" noChangeAspect="1"/>
-          </p:cNvSpPr>
-          <p:nvPr>
-            <p:ph type="sldImg"/>
-          </p:nvPr>
-        </p:nvSpPr>
-        <p:spPr/>
-      </p:sp>
-      <p:sp>
-        <p:nvSpPr>
-          <p:cNvPr id="3" name="슬라이드 노트 개체 틀 2"/>
-          <p:cNvSpPr>
-            <a:spLocks noGrp="1"/>
-          </p:cNvSpPr>
-          <p:nvPr>
-            <p:ph type="body" idx="1"/>
-          </p:nvPr>
-        </p:nvSpPr>
-        <p:spPr/>
-        <p:txBody>
-          <a:bodyPr/>
-          <a:lstStyle/>
-          <a:p>
-            <a:endParaRPr lang="ko-KR" altLang="en-US" dirty="0"/>
-          </a:p>
-        </p:txBody>
-      </p:sp>
-      <p:sp>
-        <p:nvSpPr>
-          <p:cNvPr id="4" name="슬라이드 번호 개체 틀 3"/>
-          <p:cNvSpPr>
-            <a:spLocks noGrp="1"/>
-          </p:cNvSpPr>
-          <p:nvPr>
-            <p:ph type="sldNum" sz="quarter" idx="10"/>
-          </p:nvPr>
-        </p:nvSpPr>
-        <p:spPr/>
-        <p:txBody>
-          <a:bodyPr/>
-          <a:lstStyle/>
-          <a:p>
-            <a:pPr rtl="0"/>
-            <a:fld id="{5FB91549-43BF-425A-AF25-75262019208C}" type="slidenum">
-              <a:rPr lang="en-US" altLang="ko-KR" smtClean="0"/>
-              <a:t>6</a:t>
-            </a:fld>
-            <a:endParaRPr lang="ko-KR" altLang="en-US" dirty="0"/>
-          </a:p>
-        </p:txBody>
-      </p:sp>
-    </p:spTree>
-    <p:extLst>
-      <p:ext uri="{BB962C8B-B14F-4D97-AF65-F5344CB8AC3E}">
-        <p14:creationId xmlns:p14="http://schemas.microsoft.com/office/powerpoint/2010/main" val="3674128110"/>
-      </p:ext>
-    </p:extLst>
-  </p:cSld>
-  <p:clrMapOvr>
-    <a:masterClrMapping/>
-  </p:clrMapOvr>
-</p:notes>
-</file>
-
-<file path=ppt/notesSlides/notesSlide7.xml><?xml version="1.0" encoding="utf-8"?>
-<p:notes xmlns:a="http://schemas.openxmlformats.org/drawingml/2006/main" xmlns:r="http://schemas.openxmlformats.org/officeDocument/2006/relationships" xmlns:p="http://schemas.openxmlformats.org/presentationml/2006/main">
-  <p:cSld>
-    <p:spTree>
-      <p:nvGrpSpPr>
         <p:cNvPr id="1" name="">
           <a:extLst>
             <a:ext uri="{FF2B5EF4-FFF2-40B4-BE49-F238E27FC236}">
@@ -2968,7 +2601,7 @@
             <a:pPr rtl="0"/>
             <a:fld id="{5FB91549-43BF-425A-AF25-75262019208C}" type="slidenum">
               <a:rPr lang="en-US" altLang="ko-KR" smtClean="0"/>
-              <a:t>7</a:t>
+              <a:t>6</a:t>
             </a:fld>
             <a:endParaRPr lang="ko-KR" altLang="en-US" dirty="0"/>
           </a:p>
@@ -2978,6 +2611,91 @@
     <p:extLst>
       <p:ext uri="{BB962C8B-B14F-4D97-AF65-F5344CB8AC3E}">
         <p14:creationId xmlns:p14="http://schemas.microsoft.com/office/powerpoint/2010/main" val="3893473488"/>
+      </p:ext>
+    </p:extLst>
+  </p:cSld>
+  <p:clrMapOvr>
+    <a:masterClrMapping/>
+  </p:clrMapOvr>
+</p:notes>
+</file>
+
+<file path=ppt/notesSlides/notesSlide7.xml><?xml version="1.0" encoding="utf-8"?>
+<p:notes xmlns:a="http://schemas.openxmlformats.org/drawingml/2006/main" xmlns:r="http://schemas.openxmlformats.org/officeDocument/2006/relationships" xmlns:p="http://schemas.openxmlformats.org/presentationml/2006/main">
+  <p:cSld>
+    <p:spTree>
+      <p:nvGrpSpPr>
+        <p:cNvPr id="1" name=""/>
+        <p:cNvGrpSpPr/>
+        <p:nvPr/>
+      </p:nvGrpSpPr>
+      <p:grpSpPr>
+        <a:xfrm>
+          <a:off x="0" y="0"/>
+          <a:ext cx="0" cy="0"/>
+          <a:chOff x="0" y="0"/>
+          <a:chExt cx="0" cy="0"/>
+        </a:xfrm>
+      </p:grpSpPr>
+      <p:sp>
+        <p:nvSpPr>
+          <p:cNvPr id="2" name="슬라이드 이미지 개체 틀 1"/>
+          <p:cNvSpPr>
+            <a:spLocks noGrp="1" noRot="1" noChangeAspect="1"/>
+          </p:cNvSpPr>
+          <p:nvPr>
+            <p:ph type="sldImg"/>
+          </p:nvPr>
+        </p:nvSpPr>
+        <p:spPr/>
+      </p:sp>
+      <p:sp>
+        <p:nvSpPr>
+          <p:cNvPr id="3" name="슬라이드 노트 개체 틀 2"/>
+          <p:cNvSpPr>
+            <a:spLocks noGrp="1"/>
+          </p:cNvSpPr>
+          <p:nvPr>
+            <p:ph type="body" idx="1"/>
+          </p:nvPr>
+        </p:nvSpPr>
+        <p:spPr/>
+        <p:txBody>
+          <a:bodyPr/>
+          <a:lstStyle/>
+          <a:p>
+            <a:endParaRPr lang="ko-KR" altLang="en-US" dirty="0"/>
+          </a:p>
+        </p:txBody>
+      </p:sp>
+      <p:sp>
+        <p:nvSpPr>
+          <p:cNvPr id="4" name="슬라이드 번호 개체 틀 3"/>
+          <p:cNvSpPr>
+            <a:spLocks noGrp="1"/>
+          </p:cNvSpPr>
+          <p:nvPr>
+            <p:ph type="sldNum" sz="quarter" idx="10"/>
+          </p:nvPr>
+        </p:nvSpPr>
+        <p:spPr/>
+        <p:txBody>
+          <a:bodyPr/>
+          <a:lstStyle/>
+          <a:p>
+            <a:pPr rtl="0"/>
+            <a:fld id="{5FB91549-43BF-425A-AF25-75262019208C}" type="slidenum">
+              <a:rPr lang="en-US" altLang="ko-KR" smtClean="0"/>
+              <a:t>7</a:t>
+            </a:fld>
+            <a:endParaRPr lang="ko-KR" altLang="en-US" dirty="0"/>
+          </a:p>
+        </p:txBody>
+      </p:sp>
+    </p:spTree>
+    <p:extLst>
+      <p:ext uri="{BB962C8B-B14F-4D97-AF65-F5344CB8AC3E}">
+        <p14:creationId xmlns:p14="http://schemas.microsoft.com/office/powerpoint/2010/main" val="962635640"/>
       </p:ext>
     </p:extLst>
   </p:cSld>
@@ -3062,7 +2780,7 @@
     </p:spTree>
     <p:extLst>
       <p:ext uri="{BB962C8B-B14F-4D97-AF65-F5344CB8AC3E}">
-        <p14:creationId xmlns:p14="http://schemas.microsoft.com/office/powerpoint/2010/main" val="962635640"/>
+        <p14:creationId xmlns:p14="http://schemas.microsoft.com/office/powerpoint/2010/main" val="3912811316"/>
       </p:ext>
     </p:extLst>
   </p:cSld>
@@ -3147,7 +2865,7 @@
     </p:spTree>
     <p:extLst>
       <p:ext uri="{BB962C8B-B14F-4D97-AF65-F5344CB8AC3E}">
-        <p14:creationId xmlns:p14="http://schemas.microsoft.com/office/powerpoint/2010/main" val="3912811316"/>
+        <p14:creationId xmlns:p14="http://schemas.microsoft.com/office/powerpoint/2010/main" val="3259237565"/>
       </p:ext>
     </p:extLst>
   </p:cSld>
@@ -6814,7 +6532,13 @@
       </p:sp>
       <p:pic>
         <p:nvPicPr>
-          <p:cNvPr id="4" name="그림 3"/>
+          <p:cNvPr id="4" name="그림 3">
+            <a:extLst>
+              <a:ext uri="{FF2B5EF4-FFF2-40B4-BE49-F238E27FC236}">
+                <a16:creationId xmlns:a16="http://schemas.microsoft.com/office/drawing/2014/main" id="{C4DDB505-F65C-7ED8-BC6B-911FDE3D61EB}"/>
+              </a:ext>
+            </a:extLst>
+          </p:cNvPr>
           <p:cNvPicPr>
             <a:picLocks noChangeAspect="1"/>
           </p:cNvPicPr>
@@ -6828,8 +6552,8 @@
         </p:blipFill>
         <p:spPr>
           <a:xfrm>
-            <a:off x="943780" y="1601264"/>
-            <a:ext cx="7559835" cy="1258912"/>
+            <a:off x="271956" y="1052736"/>
+            <a:ext cx="6247314" cy="3672408"/>
           </a:xfrm>
           <a:prstGeom prst="rect">
             <a:avLst/>
@@ -6838,211 +6562,10 @@
       </p:pic>
       <p:pic>
         <p:nvPicPr>
-          <p:cNvPr id="3" name="그림 2"/>
-          <p:cNvPicPr>
-            <a:picLocks noChangeAspect="1"/>
-          </p:cNvPicPr>
-          <p:nvPr/>
-        </p:nvPicPr>
-        <p:blipFill>
-          <a:blip r:embed="rId4"/>
-          <a:stretch>
-            <a:fillRect/>
-          </a:stretch>
-        </p:blipFill>
-        <p:spPr>
-          <a:xfrm>
-            <a:off x="4654253" y="4293096"/>
-            <a:ext cx="2664296" cy="867445"/>
-          </a:xfrm>
-          <a:prstGeom prst="rect">
-            <a:avLst/>
-          </a:prstGeom>
-        </p:spPr>
-      </p:pic>
-      <mc:AlternateContent xmlns:mc="http://schemas.openxmlformats.org/markup-compatibility/2006">
-        <mc:Choice xmlns:a14="http://schemas.microsoft.com/office/drawing/2010/main" Requires="a14">
-          <p:sp>
-            <p:nvSpPr>
-              <p:cNvPr id="5" name="TextBox 4"/>
-              <p:cNvSpPr txBox="1"/>
-              <p:nvPr/>
-            </p:nvSpPr>
-            <p:spPr>
-              <a:xfrm>
-                <a:off x="909836" y="3573016"/>
-                <a:ext cx="11161240" cy="400110"/>
-              </a:xfrm>
-              <a:prstGeom prst="rect">
-                <a:avLst/>
-              </a:prstGeom>
-              <a:noFill/>
-            </p:spPr>
-            <p:txBody>
-              <a:bodyPr wrap="square" rtlCol="0">
-                <a:spAutoFit/>
-              </a:bodyPr>
-              <a:lstStyle/>
-              <a:p>
-                <a:pPr marL="342900" indent="-342900">
-                  <a:buFont typeface="Wingdings" panose="05000000000000000000" pitchFamily="2" charset="2"/>
-                  <a:buChar char="v"/>
-                </a:pPr>
-                <a:r>
-                  <a:rPr lang="ko-KR" altLang="en-US" sz="2000" dirty="0">
-                    <a:latin typeface="맑은 고딕 Semilight" panose="020B0502040204020203" pitchFamily="50" charset="-127"/>
-                    <a:ea typeface="맑은 고딕 Semilight" panose="020B0502040204020203" pitchFamily="50" charset="-127"/>
-                    <a:cs typeface="맑은 고딕 Semilight" panose="020B0502040204020203" pitchFamily="50" charset="-127"/>
-                  </a:rPr>
-                  <a:t>모집단 평균에 대한 </a:t>
-                </a:r>
-                <a:r>
-                  <a:rPr lang="ko-KR" altLang="en-US" sz="2000" dirty="0" err="1">
-                    <a:latin typeface="맑은 고딕 Semilight" panose="020B0502040204020203" pitchFamily="50" charset="-127"/>
-                    <a:ea typeface="맑은 고딕 Semilight" panose="020B0502040204020203" pitchFamily="50" charset="-127"/>
-                    <a:cs typeface="맑은 고딕 Semilight" panose="020B0502040204020203" pitchFamily="50" charset="-127"/>
-                  </a:rPr>
-                  <a:t>불편추정량</a:t>
-                </a:r>
-                <a:r>
-                  <a:rPr lang="en-US" altLang="ko-KR" sz="2000" dirty="0">
-                    <a:latin typeface="맑은 고딕 Semilight" panose="020B0502040204020203" pitchFamily="50" charset="-127"/>
-                    <a:ea typeface="맑은 고딕 Semilight" panose="020B0502040204020203" pitchFamily="50" charset="-127"/>
-                    <a:cs typeface="맑은 고딕 Semilight" panose="020B0502040204020203" pitchFamily="50" charset="-127"/>
-                  </a:rPr>
-                  <a:t>(Unbiased Estimator of</a:t>
-                </a:r>
-                <a:r>
-                  <a:rPr lang="ko-KR" altLang="en-US" sz="2000" dirty="0">
-                    <a:latin typeface="맑은 고딕 Semilight" panose="020B0502040204020203" pitchFamily="50" charset="-127"/>
-                    <a:ea typeface="맑은 고딕 Semilight" panose="020B0502040204020203" pitchFamily="50" charset="-127"/>
-                    <a:cs typeface="맑은 고딕 Semilight" panose="020B0502040204020203" pitchFamily="50" charset="-127"/>
-                  </a:rPr>
-                  <a:t> </a:t>
-                </a:r>
-                <a14:m>
-                  <m:oMath xmlns:m="http://schemas.openxmlformats.org/officeDocument/2006/math">
-                    <m:r>
-                      <a:rPr lang="ko-KR" altLang="en-US" sz="2000" i="1" smtClean="0">
-                        <a:latin typeface="Cambria Math" panose="02040503050406030204" pitchFamily="18" charset="0"/>
-                      </a:rPr>
-                      <m:t>𝜃</m:t>
-                    </m:r>
-                  </m:oMath>
-                </a14:m>
-                <a:r>
-                  <a:rPr lang="en-US" altLang="ko-KR" sz="2000" dirty="0">
-                    <a:latin typeface="맑은 고딕 Semilight" panose="020B0502040204020203" pitchFamily="50" charset="-127"/>
-                    <a:ea typeface="맑은 고딕 Semilight" panose="020B0502040204020203" pitchFamily="50" charset="-127"/>
-                    <a:cs typeface="맑은 고딕 Semilight" panose="020B0502040204020203" pitchFamily="50" charset="-127"/>
-                  </a:rPr>
-                  <a:t>)</a:t>
-                </a:r>
-                <a:r>
-                  <a:rPr lang="ko-KR" altLang="en-US" sz="2000" dirty="0">
-                    <a:latin typeface="맑은 고딕 Semilight" panose="020B0502040204020203" pitchFamily="50" charset="-127"/>
-                    <a:ea typeface="맑은 고딕 Semilight" panose="020B0502040204020203" pitchFamily="50" charset="-127"/>
-                    <a:cs typeface="맑은 고딕 Semilight" panose="020B0502040204020203" pitchFamily="50" charset="-127"/>
-                  </a:rPr>
-                  <a:t>은 </a:t>
-                </a:r>
-                <a:r>
-                  <a:rPr lang="ko-KR" altLang="en-US" sz="2000" dirty="0" err="1">
-                    <a:latin typeface="맑은 고딕 Semilight" panose="020B0502040204020203" pitchFamily="50" charset="-127"/>
-                    <a:ea typeface="맑은 고딕 Semilight" panose="020B0502040204020203" pitchFamily="50" charset="-127"/>
-                    <a:cs typeface="맑은 고딕 Semilight" panose="020B0502040204020203" pitchFamily="50" charset="-127"/>
-                  </a:rPr>
-                  <a:t>표본평균</a:t>
-                </a:r>
-                <a:endParaRPr lang="ko-KR" altLang="en-US" sz="2000" dirty="0">
-                  <a:latin typeface="맑은 고딕 Semilight" panose="020B0502040204020203" pitchFamily="50" charset="-127"/>
-                  <a:ea typeface="맑은 고딕 Semilight" panose="020B0502040204020203" pitchFamily="50" charset="-127"/>
-                  <a:cs typeface="맑은 고딕 Semilight" panose="020B0502040204020203" pitchFamily="50" charset="-127"/>
-                </a:endParaRPr>
-              </a:p>
-            </p:txBody>
-          </p:sp>
-        </mc:Choice>
-        <mc:Fallback>
-          <p:sp>
-            <p:nvSpPr>
-              <p:cNvPr id="5" name="TextBox 4"/>
-              <p:cNvSpPr txBox="1">
-                <a:spLocks noRot="1" noChangeAspect="1" noMove="1" noResize="1" noEditPoints="1" noAdjustHandles="1" noChangeArrowheads="1" noChangeShapeType="1" noTextEdit="1"/>
-              </p:cNvSpPr>
-              <p:nvPr/>
-            </p:nvSpPr>
-            <p:spPr>
-              <a:xfrm>
-                <a:off x="909836" y="3573016"/>
-                <a:ext cx="11161240" cy="400110"/>
-              </a:xfrm>
-              <a:prstGeom prst="rect">
-                <a:avLst/>
-              </a:prstGeom>
-              <a:blipFill>
-                <a:blip r:embed="rId5"/>
-                <a:stretch>
-                  <a:fillRect l="-492" t="-7576" b="-25758"/>
-                </a:stretch>
-              </a:blipFill>
-            </p:spPr>
-            <p:txBody>
-              <a:bodyPr/>
-              <a:lstStyle/>
-              <a:p>
-                <a:r>
-                  <a:rPr lang="ko-KR" altLang="en-US">
-                    <a:noFill/>
-                  </a:rPr>
-                  <a:t> </a:t>
-                </a:r>
-              </a:p>
-            </p:txBody>
-          </p:sp>
-        </mc:Fallback>
-      </mc:AlternateContent>
-      <p:sp>
-        <p:nvSpPr>
-          <p:cNvPr id="2" name="TextBox 1">
+          <p:cNvPr id="5" name="Picture 2" descr="https://wikidocs.net/images/page/163985/ci02.png">
             <a:extLst>
               <a:ext uri="{FF2B5EF4-FFF2-40B4-BE49-F238E27FC236}">
-                <a16:creationId xmlns:a16="http://schemas.microsoft.com/office/drawing/2014/main" id="{6B261840-E42D-89D5-94C4-189F0954CD4F}"/>
-              </a:ext>
-            </a:extLst>
-          </p:cNvPr>
-          <p:cNvSpPr txBox="1"/>
-          <p:nvPr/>
-        </p:nvSpPr>
-        <p:spPr>
-          <a:xfrm>
-            <a:off x="117748" y="260648"/>
-            <a:ext cx="2592288" cy="584775"/>
-          </a:xfrm>
-          <a:prstGeom prst="rect">
-            <a:avLst/>
-          </a:prstGeom>
-          <a:noFill/>
-        </p:spPr>
-        <p:txBody>
-          <a:bodyPr wrap="square" rtlCol="0">
-            <a:spAutoFit/>
-          </a:bodyPr>
-          <a:lstStyle/>
-          <a:p>
-            <a:r>
-              <a:rPr lang="ko-KR" altLang="en-US" sz="3200" b="1" dirty="0"/>
-              <a:t>실습하기</a:t>
-            </a:r>
-          </a:p>
-        </p:txBody>
-      </p:sp>
-      <p:pic>
-        <p:nvPicPr>
-          <p:cNvPr id="6" name="Picture 2" descr="한 여자가 노트북 컴퓨터에 타이핑을 하고 있다">
-            <a:extLst>
-              <a:ext uri="{FF2B5EF4-FFF2-40B4-BE49-F238E27FC236}">
-                <a16:creationId xmlns:a16="http://schemas.microsoft.com/office/drawing/2014/main" id="{BAE13FD5-E6E3-B98A-63C3-AD0C55C58B00}"/>
+                <a16:creationId xmlns:a16="http://schemas.microsoft.com/office/drawing/2014/main" id="{A38F5258-87D3-D73E-CCD9-A8598D8F4574}"/>
               </a:ext>
             </a:extLst>
           </p:cNvPr>
@@ -7052,7 +6575,7 @@
           <p:nvPr/>
         </p:nvPicPr>
         <p:blipFill>
-          <a:blip r:embed="rId6" cstate="print">
+          <a:blip r:embed="rId4">
             <a:extLst>
               <a:ext uri="{28A0092B-C50C-407E-A947-70E740481C1C}">
                 <a14:useLocalDpi xmlns:a14="http://schemas.microsoft.com/office/drawing/2010/main" val="0"/>
@@ -7066,8 +6589,8 @@
         </p:blipFill>
         <p:spPr bwMode="auto">
           <a:xfrm>
-            <a:off x="9918426" y="260648"/>
-            <a:ext cx="2152650" cy="1424329"/>
+            <a:off x="5230316" y="3528301"/>
+            <a:ext cx="5773003" cy="2808312"/>
           </a:xfrm>
           <a:prstGeom prst="rect">
             <a:avLst/>
@@ -7084,10 +6607,79 @@
           </a:extLst>
         </p:spPr>
       </p:pic>
+      <p:sp>
+        <p:nvSpPr>
+          <p:cNvPr id="6" name="TextBox 5">
+            <a:extLst>
+              <a:ext uri="{FF2B5EF4-FFF2-40B4-BE49-F238E27FC236}">
+                <a16:creationId xmlns:a16="http://schemas.microsoft.com/office/drawing/2014/main" id="{6BF76A63-858E-F27B-01C0-77EB20992B61}"/>
+              </a:ext>
+            </a:extLst>
+          </p:cNvPr>
+          <p:cNvSpPr txBox="1"/>
+          <p:nvPr/>
+        </p:nvSpPr>
+        <p:spPr>
+          <a:xfrm>
+            <a:off x="117748" y="260648"/>
+            <a:ext cx="11521280" cy="584775"/>
+          </a:xfrm>
+          <a:prstGeom prst="rect">
+            <a:avLst/>
+          </a:prstGeom>
+          <a:noFill/>
+        </p:spPr>
+        <p:txBody>
+          <a:bodyPr wrap="square" rtlCol="0">
+            <a:spAutoFit/>
+          </a:bodyPr>
+          <a:lstStyle/>
+          <a:p>
+            <a:pPr algn="ctr"/>
+            <a:r>
+              <a:rPr lang="ko-KR" altLang="en-US" sz="3200" b="1" dirty="0">
+                <a:latin typeface="맑은 고딕 Semilight" panose="020B0502040204020203" pitchFamily="50" charset="-127"/>
+                <a:ea typeface="맑은 고딕 Semilight" panose="020B0502040204020203" pitchFamily="50" charset="-127"/>
+                <a:cs typeface="맑은 고딕 Semilight" panose="020B0502040204020203" pitchFamily="50" charset="-127"/>
+              </a:rPr>
+              <a:t>구간 추정</a:t>
+            </a:r>
+            <a:r>
+              <a:rPr lang="en-US" altLang="ko-KR" sz="3200" b="1" dirty="0">
+                <a:latin typeface="맑은 고딕 Semilight" panose="020B0502040204020203" pitchFamily="50" charset="-127"/>
+                <a:ea typeface="맑은 고딕 Semilight" panose="020B0502040204020203" pitchFamily="50" charset="-127"/>
+                <a:cs typeface="맑은 고딕 Semilight" panose="020B0502040204020203" pitchFamily="50" charset="-127"/>
+              </a:rPr>
+              <a:t>(Interval</a:t>
+            </a:r>
+            <a:r>
+              <a:rPr lang="ko-KR" altLang="en-US" sz="3200" b="1" dirty="0">
+                <a:latin typeface="맑은 고딕 Semilight" panose="020B0502040204020203" pitchFamily="50" charset="-127"/>
+                <a:ea typeface="맑은 고딕 Semilight" panose="020B0502040204020203" pitchFamily="50" charset="-127"/>
+                <a:cs typeface="맑은 고딕 Semilight" panose="020B0502040204020203" pitchFamily="50" charset="-127"/>
+              </a:rPr>
+              <a:t> </a:t>
+            </a:r>
+            <a:r>
+              <a:rPr lang="en-US" altLang="ko-KR" sz="3200" b="1" dirty="0">
+                <a:latin typeface="맑은 고딕 Semilight" panose="020B0502040204020203" pitchFamily="50" charset="-127"/>
+                <a:ea typeface="맑은 고딕 Semilight" panose="020B0502040204020203" pitchFamily="50" charset="-127"/>
+                <a:cs typeface="맑은 고딕 Semilight" panose="020B0502040204020203" pitchFamily="50" charset="-127"/>
+              </a:rPr>
+              <a:t>Estimation)</a:t>
+            </a:r>
+            <a:endParaRPr lang="ko-KR" altLang="en-US" sz="3200" b="1" dirty="0">
+              <a:latin typeface="맑은 고딕 Semilight" panose="020B0502040204020203" pitchFamily="50" charset="-127"/>
+              <a:ea typeface="맑은 고딕 Semilight" panose="020B0502040204020203" pitchFamily="50" charset="-127"/>
+              <a:cs typeface="맑은 고딕 Semilight" panose="020B0502040204020203" pitchFamily="50" charset="-127"/>
+            </a:endParaRPr>
+          </a:p>
+        </p:txBody>
+      </p:sp>
     </p:spTree>
     <p:extLst>
       <p:ext uri="{BB962C8B-B14F-4D97-AF65-F5344CB8AC3E}">
-        <p14:creationId xmlns:p14="http://schemas.microsoft.com/office/powerpoint/2010/main" val="2648513285"/>
+        <p14:creationId xmlns:p14="http://schemas.microsoft.com/office/powerpoint/2010/main" val="3590809602"/>
       </p:ext>
     </p:extLst>
   </p:cSld>
@@ -7114,489 +6706,6 @@
   <p:cSld>
     <p:spTree>
       <p:nvGrpSpPr>
-        <p:cNvPr id="1" name="">
-          <a:extLst>
-            <a:ext uri="{FF2B5EF4-FFF2-40B4-BE49-F238E27FC236}">
-              <a16:creationId xmlns:a16="http://schemas.microsoft.com/office/drawing/2014/main" id="{EE79E9C0-81B0-8C4F-5C8C-787A71062EC8}"/>
-            </a:ext>
-          </a:extLst>
-        </p:cNvPr>
-        <p:cNvGrpSpPr/>
-        <p:nvPr/>
-      </p:nvGrpSpPr>
-      <p:grpSpPr>
-        <a:xfrm>
-          <a:off x="0" y="0"/>
-          <a:ext cx="0" cy="0"/>
-          <a:chOff x="0" y="0"/>
-          <a:chExt cx="0" cy="0"/>
-        </a:xfrm>
-      </p:grpSpPr>
-      <p:sp>
-        <p:nvSpPr>
-          <p:cNvPr id="8" name="슬라이드 번호 개체 틀 7">
-            <a:extLst>
-              <a:ext uri="{FF2B5EF4-FFF2-40B4-BE49-F238E27FC236}">
-                <a16:creationId xmlns:a16="http://schemas.microsoft.com/office/drawing/2014/main" id="{BBD3D25E-EFF0-5F40-330C-23098F2AD3E2}"/>
-              </a:ext>
-            </a:extLst>
-          </p:cNvPr>
-          <p:cNvSpPr>
-            <a:spLocks noGrp="1"/>
-          </p:cNvSpPr>
-          <p:nvPr>
-            <p:ph type="sldNum" sz="quarter" idx="12"/>
-          </p:nvPr>
-        </p:nvSpPr>
-        <p:spPr/>
-        <p:txBody>
-          <a:bodyPr/>
-          <a:lstStyle/>
-          <a:p>
-            <a:pPr rtl="0"/>
-            <a:fld id="{A3F31473-23EB-4724-8B59-FE6D21D89FA4}" type="slidenum">
-              <a:rPr lang="en-US" altLang="ko-KR" noProof="0" smtClean="0"/>
-              <a:t>11</a:t>
-            </a:fld>
-            <a:endParaRPr lang="en-US" altLang="ko-KR" noProof="0" dirty="0"/>
-          </a:p>
-        </p:txBody>
-      </p:sp>
-      <mc:AlternateContent xmlns:mc="http://schemas.openxmlformats.org/markup-compatibility/2006">
-        <mc:Choice xmlns:a14="http://schemas.microsoft.com/office/drawing/2010/main" Requires="a14">
-          <p:sp>
-            <p:nvSpPr>
-              <p:cNvPr id="5" name="TextBox 4">
-                <a:extLst>
-                  <a:ext uri="{FF2B5EF4-FFF2-40B4-BE49-F238E27FC236}">
-                    <a16:creationId xmlns:a16="http://schemas.microsoft.com/office/drawing/2014/main" id="{CB8A57C6-BE01-3B58-9166-EA79E5C13F5A}"/>
-                  </a:ext>
-                </a:extLst>
-              </p:cNvPr>
-              <p:cNvSpPr txBox="1"/>
-              <p:nvPr/>
-            </p:nvSpPr>
-            <p:spPr>
-              <a:xfrm>
-                <a:off x="562161" y="1112067"/>
-                <a:ext cx="11292891" cy="616836"/>
-              </a:xfrm>
-              <a:prstGeom prst="rect">
-                <a:avLst/>
-              </a:prstGeom>
-              <a:noFill/>
-            </p:spPr>
-            <p:txBody>
-              <a:bodyPr wrap="square" rtlCol="0">
-                <a:spAutoFit/>
-              </a:bodyPr>
-              <a:lstStyle/>
-              <a:p>
-                <a:r>
-                  <a:rPr lang="en-US" altLang="ko-KR" sz="2400" dirty="0">
-                    <a:latin typeface="맑은 고딕 Semilight" panose="020B0502040204020203" pitchFamily="50" charset="-127"/>
-                    <a:ea typeface="맑은 고딕 Semilight" panose="020B0502040204020203" pitchFamily="50" charset="-127"/>
-                    <a:cs typeface="맑은 고딕 Semilight" panose="020B0502040204020203" pitchFamily="50" charset="-127"/>
-                    <a:hlinkClick r:id="rId3">
-                      <a:extLst>
-                        <a:ext uri="{A12FA001-AC4F-418D-AE19-62706E023703}">
-                          <ahyp:hlinkClr xmlns:ahyp="http://schemas.microsoft.com/office/drawing/2018/hyperlinkcolor" val="tx"/>
-                        </a:ext>
-                      </a:extLst>
-                    </a:hlinkClick>
-                  </a:rPr>
-                  <a:t>standard-normal-distribution</a:t>
-                </a:r>
-                <a:r>
-                  <a:rPr lang="en-US" altLang="ko-KR" sz="2400" dirty="0">
-                    <a:latin typeface="맑은 고딕 Semilight" panose="020B0502040204020203" pitchFamily="50" charset="-127"/>
-                    <a:ea typeface="맑은 고딕 Semilight" panose="020B0502040204020203" pitchFamily="50" charset="-127"/>
-                    <a:cs typeface="맑은 고딕 Semilight" panose="020B0502040204020203" pitchFamily="50" charset="-127"/>
-                  </a:rPr>
-                  <a:t> </a:t>
-                </a:r>
-                <a:r>
-                  <a:rPr lang="ko-KR" altLang="en-US" sz="2400" dirty="0">
-                    <a:latin typeface="맑은 고딕 Semilight" panose="020B0502040204020203" pitchFamily="50" charset="-127"/>
-                    <a:ea typeface="맑은 고딕 Semilight" panose="020B0502040204020203" pitchFamily="50" charset="-127"/>
-                    <a:cs typeface="맑은 고딕 Semilight" panose="020B0502040204020203" pitchFamily="50" charset="-127"/>
-                  </a:rPr>
-                  <a:t>통계량 </a:t>
-                </a:r>
-                <a14:m>
-                  <m:oMath xmlns:m="http://schemas.openxmlformats.org/officeDocument/2006/math">
-                    <m:r>
-                      <a:rPr lang="en-US" altLang="ko-KR" sz="2400" b="0" i="1" smtClean="0">
-                        <a:latin typeface="Cambria Math" panose="02040503050406030204" pitchFamily="18" charset="0"/>
-                        <a:ea typeface="+mj-ea"/>
-                      </a:rPr>
-                      <m:t>𝑍</m:t>
-                    </m:r>
-                    <m:r>
-                      <a:rPr lang="en-US" altLang="ko-KR" sz="2400" b="0" i="1" smtClean="0">
-                        <a:latin typeface="Cambria Math" panose="02040503050406030204" pitchFamily="18" charset="0"/>
-                        <a:ea typeface="+mj-ea"/>
-                      </a:rPr>
-                      <m:t>=</m:t>
-                    </m:r>
-                    <m:f>
-                      <m:fPr>
-                        <m:ctrlPr>
-                          <a:rPr lang="en-US" altLang="ko-KR" sz="2400" i="1" smtClean="0">
-                            <a:latin typeface="Cambria Math" panose="02040503050406030204" pitchFamily="18" charset="0"/>
-                            <a:ea typeface="+mj-ea"/>
-                          </a:rPr>
-                        </m:ctrlPr>
-                      </m:fPr>
-                      <m:num>
-                        <m:r>
-                          <a:rPr lang="en-US" altLang="ko-KR" sz="2400" b="0" i="1" smtClean="0">
-                            <a:latin typeface="Cambria Math" panose="02040503050406030204" pitchFamily="18" charset="0"/>
-                            <a:ea typeface="+mj-ea"/>
-                          </a:rPr>
-                          <m:t>𝑋</m:t>
-                        </m:r>
-                        <m:r>
-                          <a:rPr lang="en-US" altLang="ko-KR" sz="2400" b="0" i="1" smtClean="0">
-                            <a:latin typeface="Cambria Math" panose="02040503050406030204" pitchFamily="18" charset="0"/>
-                            <a:ea typeface="+mj-ea"/>
-                          </a:rPr>
-                          <m:t>−</m:t>
-                        </m:r>
-                        <m:r>
-                          <a:rPr lang="ko-KR" altLang="en-US" sz="2400" b="0" i="1" smtClean="0">
-                            <a:latin typeface="Cambria Math" panose="02040503050406030204" pitchFamily="18" charset="0"/>
-                            <a:ea typeface="+mj-ea"/>
-                          </a:rPr>
-                          <m:t>𝜇</m:t>
-                        </m:r>
-                      </m:num>
-                      <m:den>
-                        <m:r>
-                          <a:rPr lang="ko-KR" altLang="en-US" sz="2400" b="0" i="1" smtClean="0">
-                            <a:latin typeface="Cambria Math" panose="02040503050406030204" pitchFamily="18" charset="0"/>
-                            <a:ea typeface="+mj-ea"/>
-                          </a:rPr>
-                          <m:t>𝜎</m:t>
-                        </m:r>
-                      </m:den>
-                    </m:f>
-                  </m:oMath>
-                </a14:m>
-                <a:r>
-                  <a:rPr lang="ko-KR" altLang="en-US" sz="2400" dirty="0">
-                    <a:latin typeface="맑은 고딕 Semilight" panose="020B0502040204020203" pitchFamily="50" charset="-127"/>
-                    <a:ea typeface="맑은 고딕 Semilight" panose="020B0502040204020203" pitchFamily="50" charset="-127"/>
-                    <a:cs typeface="맑은 고딕 Semilight" panose="020B0502040204020203" pitchFamily="50" charset="-127"/>
-                  </a:rPr>
-                  <a:t> 을 바탕으로 모집단에 대한 신뢰구간</a:t>
-                </a:r>
-              </a:p>
-            </p:txBody>
-          </p:sp>
-        </mc:Choice>
-        <mc:Fallback>
-          <p:sp>
-            <p:nvSpPr>
-              <p:cNvPr id="5" name="TextBox 4">
-                <a:extLst>
-                  <a:ext uri="{FF2B5EF4-FFF2-40B4-BE49-F238E27FC236}">
-                    <a16:creationId xmlns:a16="http://schemas.microsoft.com/office/drawing/2014/main" id="{CB8A57C6-BE01-3B58-9166-EA79E5C13F5A}"/>
-                  </a:ext>
-                </a:extLst>
-              </p:cNvPr>
-              <p:cNvSpPr txBox="1">
-                <a:spLocks noRot="1" noChangeAspect="1" noMove="1" noResize="1" noEditPoints="1" noAdjustHandles="1" noChangeArrowheads="1" noChangeShapeType="1" noTextEdit="1"/>
-              </p:cNvSpPr>
-              <p:nvPr/>
-            </p:nvSpPr>
-            <p:spPr>
-              <a:xfrm>
-                <a:off x="562161" y="1112067"/>
-                <a:ext cx="11292891" cy="616836"/>
-              </a:xfrm>
-              <a:prstGeom prst="rect">
-                <a:avLst/>
-              </a:prstGeom>
-              <a:blipFill>
-                <a:blip r:embed="rId4"/>
-                <a:stretch>
-                  <a:fillRect l="-809" b="-6863"/>
-                </a:stretch>
-              </a:blipFill>
-            </p:spPr>
-            <p:txBody>
-              <a:bodyPr/>
-              <a:lstStyle/>
-              <a:p>
-                <a:r>
-                  <a:rPr lang="ko-KR" altLang="en-US">
-                    <a:noFill/>
-                  </a:rPr>
-                  <a:t> </a:t>
-                </a:r>
-              </a:p>
-            </p:txBody>
-          </p:sp>
-        </mc:Fallback>
-      </mc:AlternateContent>
-      <p:grpSp>
-        <p:nvGrpSpPr>
-          <p:cNvPr id="17" name="그룹 16">
-            <a:extLst>
-              <a:ext uri="{FF2B5EF4-FFF2-40B4-BE49-F238E27FC236}">
-                <a16:creationId xmlns:a16="http://schemas.microsoft.com/office/drawing/2014/main" id="{FF56E844-D725-AF36-2B16-EC85B405439E}"/>
-              </a:ext>
-            </a:extLst>
-          </p:cNvPr>
-          <p:cNvGrpSpPr/>
-          <p:nvPr/>
-        </p:nvGrpSpPr>
-        <p:grpSpPr>
-          <a:xfrm>
-            <a:off x="693812" y="2010408"/>
-            <a:ext cx="10585176" cy="4338013"/>
-            <a:chOff x="261764" y="1323235"/>
-            <a:chExt cx="11317620" cy="4801390"/>
-          </a:xfrm>
-        </p:grpSpPr>
-        <p:pic>
-          <p:nvPicPr>
-            <p:cNvPr id="4" name="그림 3">
-              <a:extLst>
-                <a:ext uri="{FF2B5EF4-FFF2-40B4-BE49-F238E27FC236}">
-                  <a16:creationId xmlns:a16="http://schemas.microsoft.com/office/drawing/2014/main" id="{D0AEC730-96C0-FDED-EAAB-33E4F3BFD9D7}"/>
-                </a:ext>
-              </a:extLst>
-            </p:cNvPr>
-            <p:cNvPicPr>
-              <a:picLocks noChangeAspect="1"/>
-            </p:cNvPicPr>
-            <p:nvPr/>
-          </p:nvPicPr>
-          <p:blipFill>
-            <a:blip r:embed="rId5"/>
-            <a:stretch>
-              <a:fillRect/>
-            </a:stretch>
-          </p:blipFill>
-          <p:spPr>
-            <a:xfrm>
-              <a:off x="4078188" y="1323235"/>
-              <a:ext cx="1882303" cy="800169"/>
-            </a:xfrm>
-            <a:prstGeom prst="rect">
-              <a:avLst/>
-            </a:prstGeom>
-          </p:spPr>
-        </p:pic>
-        <p:pic>
-          <p:nvPicPr>
-            <p:cNvPr id="7" name="그림 6">
-              <a:extLst>
-                <a:ext uri="{FF2B5EF4-FFF2-40B4-BE49-F238E27FC236}">
-                  <a16:creationId xmlns:a16="http://schemas.microsoft.com/office/drawing/2014/main" id="{9EDC347C-1170-0C74-BF60-0FE9675C19C2}"/>
-                </a:ext>
-              </a:extLst>
-            </p:cNvPr>
-            <p:cNvPicPr>
-              <a:picLocks noChangeAspect="1"/>
-            </p:cNvPicPr>
-            <p:nvPr/>
-          </p:nvPicPr>
-          <p:blipFill>
-            <a:blip r:embed="rId6"/>
-            <a:stretch>
-              <a:fillRect/>
-            </a:stretch>
-          </p:blipFill>
-          <p:spPr>
-            <a:xfrm>
-              <a:off x="6455784" y="2425451"/>
-              <a:ext cx="5123600" cy="3699174"/>
-            </a:xfrm>
-            <a:prstGeom prst="rect">
-              <a:avLst/>
-            </a:prstGeom>
-          </p:spPr>
-        </p:pic>
-        <p:pic>
-          <p:nvPicPr>
-            <p:cNvPr id="10" name="그림 9">
-              <a:extLst>
-                <a:ext uri="{FF2B5EF4-FFF2-40B4-BE49-F238E27FC236}">
-                  <a16:creationId xmlns:a16="http://schemas.microsoft.com/office/drawing/2014/main" id="{4A8B8853-47C3-831B-B202-1FEE598974BC}"/>
-                </a:ext>
-              </a:extLst>
-            </p:cNvPr>
-            <p:cNvPicPr>
-              <a:picLocks noChangeAspect="1"/>
-            </p:cNvPicPr>
-            <p:nvPr/>
-          </p:nvPicPr>
-          <p:blipFill>
-            <a:blip r:embed="rId7"/>
-            <a:stretch>
-              <a:fillRect/>
-            </a:stretch>
-          </p:blipFill>
-          <p:spPr>
-            <a:xfrm>
-              <a:off x="261764" y="2435450"/>
-              <a:ext cx="4392488" cy="2800906"/>
-            </a:xfrm>
-            <a:prstGeom prst="rect">
-              <a:avLst/>
-            </a:prstGeom>
-          </p:spPr>
-        </p:pic>
-        <p:cxnSp>
-          <p:nvCxnSpPr>
-            <p:cNvPr id="12" name="연결선: 구부러짐 11">
-              <a:extLst>
-                <a:ext uri="{FF2B5EF4-FFF2-40B4-BE49-F238E27FC236}">
-                  <a16:creationId xmlns:a16="http://schemas.microsoft.com/office/drawing/2014/main" id="{2B89B2F7-740E-AE2E-91B8-B7CD467955D1}"/>
-                </a:ext>
-              </a:extLst>
-            </p:cNvPr>
-            <p:cNvCxnSpPr>
-              <a:cxnSpLocks/>
-              <a:stCxn id="10" idx="0"/>
-              <a:endCxn id="4" idx="1"/>
-            </p:cNvCxnSpPr>
-            <p:nvPr/>
-          </p:nvCxnSpPr>
-          <p:spPr>
-            <a:xfrm rot="5400000" flipH="1" flipV="1">
-              <a:off x="2912033" y="1269295"/>
-              <a:ext cx="712130" cy="1620180"/>
-            </a:xfrm>
-            <a:prstGeom prst="curvedConnector2">
-              <a:avLst/>
-            </a:prstGeom>
-            <a:ln>
-              <a:tailEnd type="triangle"/>
-            </a:ln>
-          </p:spPr>
-          <p:style>
-            <a:lnRef idx="1">
-              <a:schemeClr val="accent1"/>
-            </a:lnRef>
-            <a:fillRef idx="0">
-              <a:schemeClr val="accent1"/>
-            </a:fillRef>
-            <a:effectRef idx="0">
-              <a:schemeClr val="accent1"/>
-            </a:effectRef>
-            <a:fontRef idx="minor">
-              <a:schemeClr val="tx1"/>
-            </a:fontRef>
-          </p:style>
-        </p:cxnSp>
-        <p:cxnSp>
-          <p:nvCxnSpPr>
-            <p:cNvPr id="13" name="연결선: 구부러짐 12">
-              <a:extLst>
-                <a:ext uri="{FF2B5EF4-FFF2-40B4-BE49-F238E27FC236}">
-                  <a16:creationId xmlns:a16="http://schemas.microsoft.com/office/drawing/2014/main" id="{88D6A85B-4015-7ACD-5625-59966C8135C8}"/>
-                </a:ext>
-              </a:extLst>
-            </p:cNvPr>
-            <p:cNvCxnSpPr>
-              <a:cxnSpLocks/>
-              <a:stCxn id="4" idx="3"/>
-              <a:endCxn id="7" idx="0"/>
-            </p:cNvCxnSpPr>
-            <p:nvPr/>
-          </p:nvCxnSpPr>
-          <p:spPr>
-            <a:xfrm>
-              <a:off x="5960491" y="1723320"/>
-              <a:ext cx="3057093" cy="702131"/>
-            </a:xfrm>
-            <a:prstGeom prst="curvedConnector2">
-              <a:avLst/>
-            </a:prstGeom>
-            <a:ln>
-              <a:tailEnd type="triangle"/>
-            </a:ln>
-          </p:spPr>
-          <p:style>
-            <a:lnRef idx="1">
-              <a:schemeClr val="accent1"/>
-            </a:lnRef>
-            <a:fillRef idx="0">
-              <a:schemeClr val="accent1"/>
-            </a:fillRef>
-            <a:effectRef idx="0">
-              <a:schemeClr val="accent1"/>
-            </a:effectRef>
-            <a:fontRef idx="minor">
-              <a:schemeClr val="tx1"/>
-            </a:fontRef>
-          </p:style>
-        </p:cxnSp>
-      </p:grpSp>
-      <p:pic>
-        <p:nvPicPr>
-          <p:cNvPr id="16" name="그림 15">
-            <a:extLst>
-              <a:ext uri="{FF2B5EF4-FFF2-40B4-BE49-F238E27FC236}">
-                <a16:creationId xmlns:a16="http://schemas.microsoft.com/office/drawing/2014/main" id="{4BD754D0-C57D-8D91-5E7B-716F723F92EE}"/>
-              </a:ext>
-            </a:extLst>
-          </p:cNvPr>
-          <p:cNvPicPr>
-            <a:picLocks noChangeAspect="1"/>
-          </p:cNvPicPr>
-          <p:nvPr/>
-        </p:nvPicPr>
-        <p:blipFill>
-          <a:blip r:embed="rId8"/>
-          <a:stretch>
-            <a:fillRect/>
-          </a:stretch>
-        </p:blipFill>
-        <p:spPr>
-          <a:xfrm>
-            <a:off x="2205980" y="225036"/>
-            <a:ext cx="6904318" cy="548688"/>
-          </a:xfrm>
-          <a:prstGeom prst="rect">
-            <a:avLst/>
-          </a:prstGeom>
-        </p:spPr>
-      </p:pic>
-    </p:spTree>
-    <p:extLst>
-      <p:ext uri="{BB962C8B-B14F-4D97-AF65-F5344CB8AC3E}">
-        <p14:creationId xmlns:p14="http://schemas.microsoft.com/office/powerpoint/2010/main" val="2011196701"/>
-      </p:ext>
-    </p:extLst>
-  </p:cSld>
-  <p:clrMapOvr>
-    <a:masterClrMapping/>
-  </p:clrMapOvr>
-  <mc:AlternateContent xmlns:mc="http://schemas.openxmlformats.org/markup-compatibility/2006" xmlns:p14="http://schemas.microsoft.com/office/powerpoint/2010/main">
-    <mc:Choice Requires="p14">
-      <p:transition spd="med" p14:dur="700">
-        <p:fade/>
-      </p:transition>
-    </mc:Choice>
-    <mc:Fallback xmlns="">
-      <p:transition spd="med">
-        <p:fade/>
-      </p:transition>
-    </mc:Fallback>
-  </mc:AlternateContent>
-</p:sld>
-</file>
-
-<file path=ppt/slides/slide12.xml><?xml version="1.0" encoding="utf-8"?>
-<p:sld xmlns:a="http://schemas.openxmlformats.org/drawingml/2006/main" xmlns:r="http://schemas.openxmlformats.org/officeDocument/2006/relationships" xmlns:p="http://schemas.openxmlformats.org/presentationml/2006/main">
-  <p:cSld>
-    <p:spTree>
-      <p:nvGrpSpPr>
         <p:cNvPr id="1" name=""/>
         <p:cNvGrpSpPr/>
         <p:nvPr/>
@@ -7627,149 +6736,12 @@
             <a:pPr rtl="0"/>
             <a:fld id="{A3F31473-23EB-4724-8B59-FE6D21D89FA4}" type="slidenum">
               <a:rPr lang="en-US" altLang="ko-KR" noProof="0" smtClean="0"/>
-              <a:t>12</a:t>
+              <a:t>11</a:t>
             </a:fld>
             <a:endParaRPr lang="en-US" altLang="ko-KR" noProof="0" dirty="0"/>
           </a:p>
         </p:txBody>
       </p:sp>
-      <p:pic>
-        <p:nvPicPr>
-          <p:cNvPr id="4" name="그림 3">
-            <a:extLst>
-              <a:ext uri="{FF2B5EF4-FFF2-40B4-BE49-F238E27FC236}">
-                <a16:creationId xmlns:a16="http://schemas.microsoft.com/office/drawing/2014/main" id="{C4DDB505-F65C-7ED8-BC6B-911FDE3D61EB}"/>
-              </a:ext>
-            </a:extLst>
-          </p:cNvPr>
-          <p:cNvPicPr>
-            <a:picLocks noChangeAspect="1"/>
-          </p:cNvPicPr>
-          <p:nvPr/>
-        </p:nvPicPr>
-        <p:blipFill>
-          <a:blip r:embed="rId3"/>
-          <a:stretch>
-            <a:fillRect/>
-          </a:stretch>
-        </p:blipFill>
-        <p:spPr>
-          <a:xfrm>
-            <a:off x="1845940" y="1340768"/>
-            <a:ext cx="7915939" cy="4653289"/>
-          </a:xfrm>
-          <a:prstGeom prst="rect">
-            <a:avLst/>
-          </a:prstGeom>
-        </p:spPr>
-      </p:pic>
-    </p:spTree>
-    <p:extLst>
-      <p:ext uri="{BB962C8B-B14F-4D97-AF65-F5344CB8AC3E}">
-        <p14:creationId xmlns:p14="http://schemas.microsoft.com/office/powerpoint/2010/main" val="3590809602"/>
-      </p:ext>
-    </p:extLst>
-  </p:cSld>
-  <p:clrMapOvr>
-    <a:masterClrMapping/>
-  </p:clrMapOvr>
-  <mc:AlternateContent xmlns:mc="http://schemas.openxmlformats.org/markup-compatibility/2006" xmlns:p14="http://schemas.microsoft.com/office/powerpoint/2010/main">
-    <mc:Choice Requires="p14">
-      <p:transition spd="med" p14:dur="700">
-        <p:fade/>
-      </p:transition>
-    </mc:Choice>
-    <mc:Fallback xmlns="">
-      <p:transition spd="med">
-        <p:fade/>
-      </p:transition>
-    </mc:Fallback>
-  </mc:AlternateContent>
-</p:sld>
-</file>
-
-<file path=ppt/slides/slide13.xml><?xml version="1.0" encoding="utf-8"?>
-<p:sld xmlns:a="http://schemas.openxmlformats.org/drawingml/2006/main" xmlns:r="http://schemas.openxmlformats.org/officeDocument/2006/relationships" xmlns:p="http://schemas.openxmlformats.org/presentationml/2006/main">
-  <p:cSld>
-    <p:spTree>
-      <p:nvGrpSpPr>
-        <p:cNvPr id="1" name=""/>
-        <p:cNvGrpSpPr/>
-        <p:nvPr/>
-      </p:nvGrpSpPr>
-      <p:grpSpPr>
-        <a:xfrm>
-          <a:off x="0" y="0"/>
-          <a:ext cx="0" cy="0"/>
-          <a:chOff x="0" y="0"/>
-          <a:chExt cx="0" cy="0"/>
-        </a:xfrm>
-      </p:grpSpPr>
-      <p:sp>
-        <p:nvSpPr>
-          <p:cNvPr id="8" name="슬라이드 번호 개체 틀 7"/>
-          <p:cNvSpPr>
-            <a:spLocks noGrp="1"/>
-          </p:cNvSpPr>
-          <p:nvPr>
-            <p:ph type="sldNum" sz="quarter" idx="12"/>
-          </p:nvPr>
-        </p:nvSpPr>
-        <p:spPr/>
-        <p:txBody>
-          <a:bodyPr/>
-          <a:lstStyle/>
-          <a:p>
-            <a:pPr rtl="0"/>
-            <a:fld id="{A3F31473-23EB-4724-8B59-FE6D21D89FA4}" type="slidenum">
-              <a:rPr lang="en-US" altLang="ko-KR" noProof="0" smtClean="0"/>
-              <a:t>13</a:t>
-            </a:fld>
-            <a:endParaRPr lang="en-US" altLang="ko-KR" noProof="0" dirty="0"/>
-          </a:p>
-        </p:txBody>
-      </p:sp>
-      <p:pic>
-        <p:nvPicPr>
-          <p:cNvPr id="2050" name="Picture 2" descr="https://wikidocs.net/images/page/163985/ci02.png"/>
-          <p:cNvPicPr>
-            <a:picLocks noChangeAspect="1" noChangeArrowheads="1"/>
-          </p:cNvPicPr>
-          <p:nvPr/>
-        </p:nvPicPr>
-        <p:blipFill>
-          <a:blip r:embed="rId3">
-            <a:extLst>
-              <a:ext uri="{28A0092B-C50C-407E-A947-70E740481C1C}">
-                <a14:useLocalDpi xmlns:a14="http://schemas.microsoft.com/office/drawing/2010/main" val="0"/>
-              </a:ext>
-            </a:extLst>
-          </a:blip>
-          <a:srcRect/>
-          <a:stretch>
-            <a:fillRect/>
-          </a:stretch>
-        </p:blipFill>
-        <p:spPr bwMode="auto">
-          <a:xfrm>
-            <a:off x="1718204" y="1484784"/>
-            <a:ext cx="8439150" cy="4105275"/>
-          </a:xfrm>
-          <a:prstGeom prst="rect">
-            <a:avLst/>
-          </a:prstGeom>
-          <a:noFill/>
-          <a:extLst>
-            <a:ext uri="{909E8E84-426E-40DD-AFC4-6F175D3DCCD1}">
-              <a14:hiddenFill xmlns:a14="http://schemas.microsoft.com/office/drawing/2010/main">
-                <a:solidFill>
-                  <a:srgbClr val="FFFFFF"/>
-                </a:solidFill>
-              </a14:hiddenFill>
-            </a:ext>
-          </a:extLst>
-        </p:spPr>
-      </p:pic>
       <p:sp>
         <p:nvSpPr>
           <p:cNvPr id="2" name="직사각형 1"/>
@@ -7778,113 +6750,7 @@
         </p:nvSpPr>
         <p:spPr>
           <a:xfrm>
-            <a:off x="1629916" y="5661248"/>
-            <a:ext cx="2565126" cy="338554"/>
-          </a:xfrm>
-          <a:prstGeom prst="rect">
-            <a:avLst/>
-          </a:prstGeom>
-        </p:spPr>
-        <p:txBody>
-          <a:bodyPr wrap="none">
-            <a:spAutoFit/>
-          </a:bodyPr>
-          <a:lstStyle/>
-          <a:p>
-            <a:r>
-              <a:rPr lang="ko-KR" altLang="en-US" sz="1600" dirty="0">
-                <a:hlinkClick r:id="rId4">
-                  <a:extLst>
-                    <a:ext uri="{A12FA001-AC4F-418D-AE19-62706E023703}">
-                      <ahyp:hlinkClr xmlns:ahyp="http://schemas.microsoft.com/office/drawing/2018/hyperlinkcolor" val="tx"/>
-                    </a:ext>
-                  </a:extLst>
-                </a:hlinkClick>
-              </a:rPr>
-              <a:t>https://wikidocs.net/163985</a:t>
-            </a:r>
-            <a:r>
-              <a:rPr lang="ko-KR" altLang="en-US" sz="1600" dirty="0"/>
-              <a:t> </a:t>
-            </a:r>
-          </a:p>
-        </p:txBody>
-      </p:sp>
-    </p:spTree>
-    <p:extLst>
-      <p:ext uri="{BB962C8B-B14F-4D97-AF65-F5344CB8AC3E}">
-        <p14:creationId xmlns:p14="http://schemas.microsoft.com/office/powerpoint/2010/main" val="4127239139"/>
-      </p:ext>
-    </p:extLst>
-  </p:cSld>
-  <p:clrMapOvr>
-    <a:masterClrMapping/>
-  </p:clrMapOvr>
-  <mc:AlternateContent xmlns:mc="http://schemas.openxmlformats.org/markup-compatibility/2006" xmlns:p14="http://schemas.microsoft.com/office/powerpoint/2010/main">
-    <mc:Choice Requires="p14">
-      <p:transition spd="med" p14:dur="700">
-        <p:fade/>
-      </p:transition>
-    </mc:Choice>
-    <mc:Fallback xmlns="">
-      <p:transition spd="med">
-        <p:fade/>
-      </p:transition>
-    </mc:Fallback>
-  </mc:AlternateContent>
-</p:sld>
-</file>
-
-<file path=ppt/slides/slide14.xml><?xml version="1.0" encoding="utf-8"?>
-<p:sld xmlns:a="http://schemas.openxmlformats.org/drawingml/2006/main" xmlns:r="http://schemas.openxmlformats.org/officeDocument/2006/relationships" xmlns:p="http://schemas.openxmlformats.org/presentationml/2006/main">
-  <p:cSld>
-    <p:spTree>
-      <p:nvGrpSpPr>
-        <p:cNvPr id="1" name=""/>
-        <p:cNvGrpSpPr/>
-        <p:nvPr/>
-      </p:nvGrpSpPr>
-      <p:grpSpPr>
-        <a:xfrm>
-          <a:off x="0" y="0"/>
-          <a:ext cx="0" cy="0"/>
-          <a:chOff x="0" y="0"/>
-          <a:chExt cx="0" cy="0"/>
-        </a:xfrm>
-      </p:grpSpPr>
-      <p:sp>
-        <p:nvSpPr>
-          <p:cNvPr id="8" name="슬라이드 번호 개체 틀 7"/>
-          <p:cNvSpPr>
-            <a:spLocks noGrp="1"/>
-          </p:cNvSpPr>
-          <p:nvPr>
-            <p:ph type="sldNum" sz="quarter" idx="12"/>
-          </p:nvPr>
-        </p:nvSpPr>
-        <p:spPr/>
-        <p:txBody>
-          <a:bodyPr/>
-          <a:lstStyle/>
-          <a:p>
-            <a:pPr rtl="0"/>
-            <a:fld id="{A3F31473-23EB-4724-8B59-FE6D21D89FA4}" type="slidenum">
-              <a:rPr lang="en-US" altLang="ko-KR" noProof="0" smtClean="0"/>
-              <a:t>14</a:t>
-            </a:fld>
-            <a:endParaRPr lang="en-US" altLang="ko-KR" noProof="0" dirty="0"/>
-          </a:p>
-        </p:txBody>
-      </p:sp>
-      <p:sp>
-        <p:nvSpPr>
-          <p:cNvPr id="2" name="직사각형 1"/>
-          <p:cNvSpPr/>
-          <p:nvPr/>
-        </p:nvSpPr>
-        <p:spPr>
-          <a:xfrm>
-            <a:off x="369720" y="5373216"/>
+            <a:off x="657752" y="5032173"/>
             <a:ext cx="5760640" cy="307777"/>
           </a:xfrm>
           <a:prstGeom prst="rect">
@@ -7932,7 +6798,7 @@
         </p:blipFill>
         <p:spPr>
           <a:xfrm>
-            <a:off x="477788" y="3337995"/>
+            <a:off x="765820" y="2996952"/>
             <a:ext cx="6521168" cy="1976800"/>
           </a:xfrm>
           <a:prstGeom prst="rect">
@@ -7968,8 +6834,8 @@
           </a:stretch>
         </p:blipFill>
         <p:spPr bwMode="auto">
-          <a:xfrm rot="5400000">
-            <a:off x="7443292" y="2760147"/>
+          <a:xfrm rot="2293590">
+            <a:off x="8179180" y="2623184"/>
             <a:ext cx="3027025" cy="3132497"/>
           </a:xfrm>
           <a:prstGeom prst="rect">
@@ -8001,8 +6867,8 @@
         </p:nvSpPr>
         <p:spPr>
           <a:xfrm>
-            <a:off x="477788" y="764704"/>
-            <a:ext cx="11233248" cy="1689693"/>
+            <a:off x="477788" y="1105678"/>
+            <a:ext cx="11233248" cy="1142877"/>
           </a:xfrm>
           <a:prstGeom prst="rect">
             <a:avLst/>
@@ -8032,19 +6898,19 @@
               <a:tabLst/>
             </a:pPr>
             <a:r>
-              <a:rPr lang="ko-KR" altLang="en-US" dirty="0">
+              <a:rPr lang="ko-KR" altLang="en-US" sz="1600" dirty="0">
                 <a:latin typeface="+mn-ea"/>
               </a:rPr>
               <a:t>구간추정은</a:t>
             </a:r>
             <a:r>
-              <a:rPr lang="en-US" altLang="ko-KR" dirty="0">
+              <a:rPr lang="en-US" altLang="ko-KR" sz="1600" dirty="0">
                 <a:latin typeface="+mn-ea"/>
               </a:rPr>
               <a:t> </a:t>
             </a:r>
             <a:r>
-              <a:rPr kumimoji="0" lang="ko-KR" altLang="ko-KR" b="0" i="0" u="none" strike="noStrike" cap="none" normalizeH="0" baseline="0" dirty="0">
+              <a:rPr kumimoji="0" lang="ko-KR" altLang="ko-KR" sz="1600" b="0" i="0" u="none" strike="noStrike" cap="none" normalizeH="0" baseline="0" dirty="0">
                 <a:ln>
                   <a:noFill/>
                 </a:ln>
@@ -8057,7 +6923,7 @@
               <a:t>말편자(</a:t>
             </a:r>
             <a:r>
-              <a:rPr kumimoji="0" lang="ko-KR" altLang="ko-KR" b="0" i="0" u="none" strike="noStrike" cap="none" normalizeH="0" baseline="0" dirty="0" err="1">
+              <a:rPr kumimoji="0" lang="ko-KR" altLang="ko-KR" sz="1600" b="0" i="0" u="none" strike="noStrike" cap="none" normalizeH="0" baseline="0" dirty="0" err="1">
                 <a:ln>
                   <a:noFill/>
                 </a:ln>
@@ -8070,7 +6936,7 @@
               <a:t>Horseshoe</a:t>
             </a:r>
             <a:r>
-              <a:rPr kumimoji="0" lang="ko-KR" altLang="ko-KR" b="0" i="0" u="none" strike="noStrike" cap="none" normalizeH="0" baseline="0" dirty="0">
+              <a:rPr kumimoji="0" lang="ko-KR" altLang="ko-KR" sz="1600" b="0" i="0" u="none" strike="noStrike" cap="none" normalizeH="0" baseline="0" dirty="0">
                 <a:ln>
                   <a:noFill/>
                 </a:ln>
@@ -8083,19 +6949,19 @@
               <a:t>)를 던져서 막대에 끼우는 게임</a:t>
             </a:r>
             <a:r>
-              <a:rPr lang="ko-KR" altLang="en-US" dirty="0">
+              <a:rPr lang="ko-KR" altLang="en-US" sz="1600" dirty="0">
                 <a:latin typeface="+mn-ea"/>
               </a:rPr>
               <a:t>으로</a:t>
             </a:r>
             <a:r>
-              <a:rPr lang="en-US" altLang="ko-KR" dirty="0">
+              <a:rPr lang="en-US" altLang="ko-KR" sz="1600" dirty="0">
                 <a:latin typeface="+mn-ea"/>
               </a:rPr>
               <a:t> </a:t>
             </a:r>
             <a:r>
-              <a:rPr kumimoji="0" lang="ko-KR" altLang="ko-KR" b="0" i="0" u="none" strike="noStrike" cap="none" normalizeH="0" baseline="0" dirty="0" err="1">
+              <a:rPr kumimoji="0" lang="ko-KR" altLang="ko-KR" sz="1600" b="0" i="0" u="none" strike="noStrike" cap="none" normalizeH="0" baseline="0" dirty="0" err="1">
                 <a:ln>
                   <a:noFill/>
                 </a:ln>
@@ -8108,7 +6974,7 @@
               <a:t>막대'는</a:t>
             </a:r>
             <a:r>
-              <a:rPr kumimoji="0" lang="ko-KR" altLang="ko-KR" b="0" i="0" u="none" strike="noStrike" cap="none" normalizeH="0" baseline="0" dirty="0">
+              <a:rPr kumimoji="0" lang="ko-KR" altLang="ko-KR" sz="1600" b="0" i="0" u="none" strike="noStrike" cap="none" normalizeH="0" baseline="0" dirty="0">
                 <a:ln>
                   <a:noFill/>
                 </a:ln>
@@ -8121,7 +6987,7 @@
               <a:t> 우리가 알고 싶은 진짜 값(</a:t>
             </a:r>
             <a:r>
-              <a:rPr kumimoji="0" lang="ko-KR" altLang="ko-KR" b="0" i="0" u="none" strike="noStrike" cap="none" normalizeH="0" baseline="0" dirty="0" err="1">
+              <a:rPr kumimoji="0" lang="ko-KR" altLang="ko-KR" sz="1600" b="0" i="0" u="none" strike="noStrike" cap="none" normalizeH="0" baseline="0" dirty="0" err="1">
                 <a:ln>
                   <a:noFill/>
                 </a:ln>
@@ -8134,7 +7000,7 @@
               <a:t>모수</a:t>
             </a:r>
             <a:r>
-              <a:rPr kumimoji="0" lang="ko-KR" altLang="ko-KR" b="0" i="0" u="none" strike="noStrike" cap="none" normalizeH="0" baseline="0" dirty="0">
+              <a:rPr kumimoji="0" lang="ko-KR" altLang="ko-KR" sz="1600" b="0" i="0" u="none" strike="noStrike" cap="none" normalizeH="0" baseline="0" dirty="0">
                 <a:ln>
                   <a:noFill/>
                 </a:ln>
@@ -8147,7 +7013,7 @@
               <a:t>)이고, 말편자는 우리가 데이터를 통해 추정한 </a:t>
             </a:r>
             <a:r>
-              <a:rPr kumimoji="0" lang="ko-KR" altLang="ko-KR" b="1" i="0" u="none" strike="noStrike" cap="none" normalizeH="0" baseline="0" dirty="0">
+              <a:rPr kumimoji="0" lang="ko-KR" altLang="ko-KR" sz="1600" b="1" i="0" u="none" strike="noStrike" cap="none" normalizeH="0" baseline="0" dirty="0">
                 <a:ln>
                   <a:noFill/>
                 </a:ln>
@@ -8160,18 +7026,109 @@
               <a:t>신뢰구간</a:t>
             </a:r>
             <a:r>
-              <a:rPr lang="ko-KR" altLang="en-US" dirty="0">
+              <a:rPr lang="ko-KR" altLang="en-US" sz="1600" dirty="0">
                 <a:latin typeface="+mn-ea"/>
               </a:rPr>
               <a:t>으로</a:t>
             </a:r>
             <a:r>
-              <a:rPr lang="en-US" altLang="ko-KR" dirty="0">
+              <a:rPr lang="en-US" altLang="ko-KR" sz="1600" dirty="0">
                 <a:latin typeface="+mn-ea"/>
               </a:rPr>
               <a:t> </a:t>
             </a:r>
-            <a:endParaRPr kumimoji="0" lang="ko-KR" altLang="ko-KR" b="0" i="0" u="none" strike="noStrike" cap="none" normalizeH="0" baseline="0" dirty="0">
+            <a:r>
+              <a:rPr kumimoji="0" lang="ko-KR" altLang="ko-KR" sz="1600" b="0" i="0" u="none" strike="noStrike" cap="none" normalizeH="0" baseline="0" dirty="0">
+                <a:ln>
+                  <a:noFill/>
+                </a:ln>
+                <a:solidFill>
+                  <a:schemeClr val="tx1"/>
+                </a:solidFill>
+                <a:effectLst/>
+                <a:latin typeface="+mn-ea"/>
+              </a:rPr>
+              <a:t>말편자가 막대를 포함하면(끼워지면) 예측이 성공한 것</a:t>
+            </a:r>
+            <a:r>
+              <a:rPr kumimoji="0" lang="ko-KR" altLang="en-US" sz="1600" b="0" i="0" u="none" strike="noStrike" cap="none" normalizeH="0" baseline="0" dirty="0">
+                <a:ln>
+                  <a:noFill/>
+                </a:ln>
+                <a:solidFill>
+                  <a:schemeClr val="tx1"/>
+                </a:solidFill>
+                <a:effectLst/>
+                <a:latin typeface="+mn-ea"/>
+              </a:rPr>
+              <a:t>이</a:t>
+            </a:r>
+            <a:r>
+              <a:rPr kumimoji="0" lang="en-US" altLang="ko-KR" sz="1600" b="0" i="0" u="none" strike="noStrike" cap="none" normalizeH="0" baseline="0" dirty="0">
+                <a:ln>
+                  <a:noFill/>
+                </a:ln>
+                <a:solidFill>
+                  <a:schemeClr val="tx1"/>
+                </a:solidFill>
+                <a:effectLst/>
+                <a:latin typeface="+mn-ea"/>
+              </a:rPr>
+              <a:t> </a:t>
+            </a:r>
+            <a:r>
+              <a:rPr kumimoji="0" lang="ko-KR" altLang="en-US" sz="1600" b="0" i="0" u="none" strike="noStrike" cap="none" normalizeH="0" baseline="0" dirty="0">
+                <a:ln>
+                  <a:noFill/>
+                </a:ln>
+                <a:solidFill>
+                  <a:schemeClr val="tx1"/>
+                </a:solidFill>
+                <a:effectLst/>
+                <a:latin typeface="+mn-ea"/>
+              </a:rPr>
+              <a:t>신뢰구간임 </a:t>
+            </a:r>
+            <a:r>
+              <a:rPr kumimoji="0" lang="en-US" altLang="ko-KR" sz="1600" b="0" i="0" u="none" strike="noStrike" cap="none" normalizeH="0" baseline="0" dirty="0">
+                <a:ln>
+                  <a:noFill/>
+                </a:ln>
+                <a:solidFill>
+                  <a:schemeClr val="tx1"/>
+                </a:solidFill>
+                <a:effectLst/>
+                <a:latin typeface="+mn-ea"/>
+              </a:rPr>
+              <a:t>(90%, 95%, 99% </a:t>
+            </a:r>
+            <a:r>
+              <a:rPr kumimoji="0" lang="ko-KR" altLang="en-US" sz="1600" b="0" i="0" u="none" strike="noStrike" cap="none" normalizeH="0" baseline="0" dirty="0">
+                <a:ln>
+                  <a:noFill/>
+                </a:ln>
+                <a:solidFill>
+                  <a:schemeClr val="tx1"/>
+                </a:solidFill>
+                <a:effectLst/>
+                <a:latin typeface="+mn-ea"/>
+              </a:rPr>
+              <a:t>등</a:t>
+            </a:r>
+            <a:r>
+              <a:rPr kumimoji="0" lang="en-US" altLang="ko-KR" sz="1600" b="0" i="0" u="none" strike="noStrike" cap="none" normalizeH="0" baseline="0" dirty="0">
+                <a:ln>
+                  <a:noFill/>
+                </a:ln>
+                <a:solidFill>
+                  <a:schemeClr val="tx1"/>
+                </a:solidFill>
+                <a:effectLst/>
+                <a:latin typeface="+mn-ea"/>
+              </a:rPr>
+              <a:t>)</a:t>
+            </a:r>
+            <a:endParaRPr kumimoji="0" lang="ko-KR" altLang="ko-KR" sz="1600" b="0" i="0" u="none" strike="noStrike" cap="none" normalizeH="0" baseline="0" dirty="0">
               <a:ln>
                 <a:noFill/>
               </a:ln>
@@ -8182,179 +7139,73 @@
               <a:latin typeface="+mn-ea"/>
             </a:endParaRPr>
           </a:p>
-          <a:p>
-            <a:pPr marL="285750" marR="0" lvl="0" indent="-285750" algn="l" defTabSz="914400" rtl="0" eaLnBrk="0" fontAlgn="base" latinLnBrk="0" hangingPunct="0">
-              <a:lnSpc>
-                <a:spcPct val="150000"/>
-              </a:lnSpc>
-              <a:spcBef>
-                <a:spcPct val="0"/>
-              </a:spcBef>
-              <a:spcAft>
-                <a:spcPct val="0"/>
-              </a:spcAft>
-              <a:buClrTx/>
-              <a:buSzTx/>
-              <a:buFont typeface="Wingdings" panose="05000000000000000000" pitchFamily="2" charset="2"/>
-              <a:buChar char="v"/>
-              <a:tabLst/>
-            </a:pPr>
-            <a:r>
-              <a:rPr kumimoji="0" lang="ko-KR" altLang="ko-KR" b="0" i="0" u="none" strike="noStrike" cap="none" normalizeH="0" baseline="0" dirty="0">
-                <a:ln>
-                  <a:noFill/>
-                </a:ln>
-                <a:solidFill>
-                  <a:schemeClr val="tx1"/>
-                </a:solidFill>
-                <a:effectLst/>
-                <a:latin typeface="+mn-ea"/>
-              </a:rPr>
-              <a:t>말편자가 막대를 포함하면(끼워지면) 예측이 성공한 것이고, 비껴가면 실패한 것</a:t>
-            </a:r>
-            <a:r>
-              <a:rPr lang="ko-KR" altLang="en-US" dirty="0">
-                <a:latin typeface="+mn-ea"/>
-              </a:rPr>
-              <a:t>으로</a:t>
-            </a:r>
-            <a:endParaRPr lang="en-US" altLang="ko-KR" dirty="0">
-              <a:latin typeface="+mn-ea"/>
-            </a:endParaRPr>
-          </a:p>
-          <a:p>
-            <a:pPr marL="285750" marR="0" lvl="0" indent="-285750" algn="l" defTabSz="914400" rtl="0" eaLnBrk="0" fontAlgn="base" latinLnBrk="0" hangingPunct="0">
-              <a:lnSpc>
-                <a:spcPct val="150000"/>
-              </a:lnSpc>
-              <a:spcBef>
-                <a:spcPct val="0"/>
-              </a:spcBef>
-              <a:spcAft>
-                <a:spcPct val="0"/>
-              </a:spcAft>
-              <a:buClrTx/>
-              <a:buSzTx/>
-              <a:buFont typeface="Wingdings" panose="05000000000000000000" pitchFamily="2" charset="2"/>
-              <a:buChar char="v"/>
-              <a:tabLst/>
-            </a:pPr>
-            <a:r>
-              <a:rPr kumimoji="0" lang="ko-KR" altLang="en-US" b="0" i="0" u="none" strike="noStrike" cap="none" normalizeH="0" baseline="0" dirty="0">
-                <a:ln>
-                  <a:noFill/>
-                </a:ln>
-                <a:solidFill>
-                  <a:schemeClr val="tx1"/>
-                </a:solidFill>
-                <a:effectLst/>
-                <a:latin typeface="+mn-ea"/>
-              </a:rPr>
-              <a:t>신뢰구간이</a:t>
-            </a:r>
-            <a:r>
-              <a:rPr kumimoji="0" lang="en-US" altLang="ko-KR" b="0" i="0" u="none" strike="noStrike" cap="none" normalizeH="0" baseline="0" dirty="0">
-                <a:ln>
-                  <a:noFill/>
-                </a:ln>
-                <a:solidFill>
-                  <a:schemeClr val="tx1"/>
-                </a:solidFill>
-                <a:effectLst/>
-                <a:latin typeface="+mn-ea"/>
-              </a:rPr>
-              <a:t> 99%</a:t>
-            </a:r>
-            <a:r>
-              <a:rPr kumimoji="0" lang="ko-KR" altLang="en-US" b="0" i="0" u="none" strike="noStrike" cap="none" normalizeH="0" baseline="0" dirty="0">
-                <a:ln>
-                  <a:noFill/>
-                </a:ln>
-                <a:solidFill>
-                  <a:schemeClr val="tx1"/>
-                </a:solidFill>
-                <a:effectLst/>
-                <a:latin typeface="+mn-ea"/>
-              </a:rPr>
-              <a:t>는</a:t>
-            </a:r>
-            <a:r>
-              <a:rPr kumimoji="0" lang="en-US" altLang="ko-KR" b="0" i="0" u="none" strike="noStrike" cap="none" normalizeH="0" baseline="0" dirty="0">
-                <a:ln>
-                  <a:noFill/>
-                </a:ln>
-                <a:solidFill>
-                  <a:schemeClr val="tx1"/>
-                </a:solidFill>
-                <a:effectLst/>
-                <a:latin typeface="+mn-ea"/>
+        </p:txBody>
+      </p:sp>
+      <p:sp>
+        <p:nvSpPr>
+          <p:cNvPr id="3" name="TextBox 2">
+            <a:extLst>
+              <a:ext uri="{FF2B5EF4-FFF2-40B4-BE49-F238E27FC236}">
+                <a16:creationId xmlns:a16="http://schemas.microsoft.com/office/drawing/2014/main" id="{BBAE4996-11B8-D682-0EF3-84AD784BACC7}"/>
+              </a:ext>
+            </a:extLst>
+          </p:cNvPr>
+          <p:cNvSpPr txBox="1"/>
+          <p:nvPr/>
+        </p:nvSpPr>
+        <p:spPr>
+          <a:xfrm>
+            <a:off x="117748" y="260648"/>
+            <a:ext cx="11521280" cy="584775"/>
+          </a:xfrm>
+          <a:prstGeom prst="rect">
+            <a:avLst/>
+          </a:prstGeom>
+          <a:noFill/>
+        </p:spPr>
+        <p:txBody>
+          <a:bodyPr wrap="square" rtlCol="0">
+            <a:spAutoFit/>
+          </a:bodyPr>
+          <a:lstStyle/>
+          <a:p>
+            <a:pPr algn="ctr"/>
+            <a:r>
+              <a:rPr lang="ko-KR" altLang="en-US" sz="3200" b="1" dirty="0">
+                <a:latin typeface="맑은 고딕 Semilight" panose="020B0502040204020203" pitchFamily="50" charset="-127"/>
+                <a:ea typeface="맑은 고딕 Semilight" panose="020B0502040204020203" pitchFamily="50" charset="-127"/>
+                <a:cs typeface="맑은 고딕 Semilight" panose="020B0502040204020203" pitchFamily="50" charset="-127"/>
+              </a:rPr>
+              <a:t>구간 추정</a:t>
+            </a:r>
+            <a:r>
+              <a:rPr lang="en-US" altLang="ko-KR" sz="3200" b="1" dirty="0">
+                <a:latin typeface="맑은 고딕 Semilight" panose="020B0502040204020203" pitchFamily="50" charset="-127"/>
+                <a:ea typeface="맑은 고딕 Semilight" panose="020B0502040204020203" pitchFamily="50" charset="-127"/>
+                <a:cs typeface="맑은 고딕 Semilight" panose="020B0502040204020203" pitchFamily="50" charset="-127"/>
+              </a:rPr>
+              <a:t>(Interval</a:t>
+            </a:r>
+            <a:r>
+              <a:rPr lang="ko-KR" altLang="en-US" sz="3200" b="1" dirty="0">
+                <a:latin typeface="맑은 고딕 Semilight" panose="020B0502040204020203" pitchFamily="50" charset="-127"/>
+                <a:ea typeface="맑은 고딕 Semilight" panose="020B0502040204020203" pitchFamily="50" charset="-127"/>
+                <a:cs typeface="맑은 고딕 Semilight" panose="020B0502040204020203" pitchFamily="50" charset="-127"/>
               </a:rPr>
               <a:t> </a:t>
             </a:r>
             <a:r>
-              <a:rPr kumimoji="0" lang="ko-KR" altLang="en-US" b="0" i="0" u="none" strike="noStrike" cap="none" normalizeH="0" baseline="0" dirty="0">
-                <a:ln>
-                  <a:noFill/>
-                </a:ln>
-                <a:solidFill>
-                  <a:schemeClr val="tx1"/>
-                </a:solidFill>
-                <a:effectLst/>
-                <a:latin typeface="+mn-ea"/>
-              </a:rPr>
-              <a:t>말편자</a:t>
-            </a:r>
-            <a:r>
-              <a:rPr lang="en-US" altLang="ko-KR" dirty="0">
-                <a:latin typeface="+mn-ea"/>
-              </a:rPr>
-              <a:t> </a:t>
-            </a:r>
-            <a:r>
-              <a:rPr lang="ko-KR" altLang="en-US" dirty="0">
-                <a:latin typeface="+mn-ea"/>
-              </a:rPr>
-              <a:t>폭이</a:t>
-            </a:r>
-            <a:r>
-              <a:rPr lang="en-US" altLang="ko-KR" dirty="0">
-                <a:latin typeface="+mn-ea"/>
-              </a:rPr>
-              <a:t> 90% </a:t>
-            </a:r>
-            <a:r>
-              <a:rPr lang="ko-KR" altLang="en-US" dirty="0">
-                <a:latin typeface="+mn-ea"/>
-              </a:rPr>
-              <a:t>편자보다</a:t>
-            </a:r>
-            <a:r>
-              <a:rPr lang="en-US" altLang="ko-KR" dirty="0">
-                <a:latin typeface="+mn-ea"/>
-              </a:rPr>
-              <a:t> </a:t>
-            </a:r>
-            <a:r>
-              <a:rPr lang="ko-KR" altLang="en-US" dirty="0">
-                <a:latin typeface="+mn-ea"/>
-              </a:rPr>
-              <a:t>넓다</a:t>
-            </a:r>
-            <a:r>
-              <a:rPr lang="en-US" altLang="ko-KR" dirty="0">
-                <a:latin typeface="+mn-ea"/>
-              </a:rPr>
-              <a:t>.</a:t>
-            </a:r>
-            <a:endParaRPr kumimoji="0" lang="ko-KR" altLang="ko-KR" b="0" i="0" u="none" strike="noStrike" cap="none" normalizeH="0" baseline="0" dirty="0">
-              <a:ln>
-                <a:noFill/>
-              </a:ln>
-              <a:solidFill>
-                <a:schemeClr val="tx1"/>
-              </a:solidFill>
-              <a:effectLst/>
-              <a:latin typeface="+mn-ea"/>
+              <a:rPr lang="en-US" altLang="ko-KR" sz="3200" b="1" dirty="0">
+                <a:latin typeface="맑은 고딕 Semilight" panose="020B0502040204020203" pitchFamily="50" charset="-127"/>
+                <a:ea typeface="맑은 고딕 Semilight" panose="020B0502040204020203" pitchFamily="50" charset="-127"/>
+                <a:cs typeface="맑은 고딕 Semilight" panose="020B0502040204020203" pitchFamily="50" charset="-127"/>
+              </a:rPr>
+              <a:t>Estimation)</a:t>
+            </a:r>
+            <a:endParaRPr lang="ko-KR" altLang="en-US" sz="3200" b="1" dirty="0">
+              <a:latin typeface="맑은 고딕 Semilight" panose="020B0502040204020203" pitchFamily="50" charset="-127"/>
+              <a:ea typeface="맑은 고딕 Semilight" panose="020B0502040204020203" pitchFamily="50" charset="-127"/>
+              <a:cs typeface="맑은 고딕 Semilight" panose="020B0502040204020203" pitchFamily="50" charset="-127"/>
             </a:endParaRPr>
           </a:p>
         </p:txBody>
@@ -8384,7 +7235,7 @@
 </p:sld>
 </file>
 
-<file path=ppt/slides/slide15.xml><?xml version="1.0" encoding="utf-8"?>
+<file path=ppt/slides/slide12.xml><?xml version="1.0" encoding="utf-8"?>
 <p:sld xmlns:a="http://schemas.openxmlformats.org/drawingml/2006/main" xmlns:r="http://schemas.openxmlformats.org/officeDocument/2006/relationships" xmlns:p="http://schemas.openxmlformats.org/presentationml/2006/main">
   <p:cSld>
     <p:spTree>
@@ -8461,7 +7312,7 @@
             <a:pPr rtl="0"/>
             <a:fld id="{A3F31473-23EB-4724-8B59-FE6D21D89FA4}" type="slidenum">
               <a:rPr lang="en-US" altLang="ko-KR" noProof="0" smtClean="0"/>
-              <a:t>15</a:t>
+              <a:t>12</a:t>
             </a:fld>
             <a:endParaRPr lang="en-US" altLang="ko-KR" noProof="0" dirty="0"/>
           </a:p>
@@ -8801,7 +7652,7 @@
 </p:sld>
 </file>
 
-<file path=ppt/slides/slide16.xml><?xml version="1.0" encoding="utf-8"?>
+<file path=ppt/slides/slide13.xml><?xml version="1.0" encoding="utf-8"?>
 <p:sld xmlns:a="http://schemas.openxmlformats.org/drawingml/2006/main" xmlns:r="http://schemas.openxmlformats.org/officeDocument/2006/relationships" xmlns:p="http://schemas.openxmlformats.org/presentationml/2006/main">
   <p:cSld>
     <p:spTree>
@@ -8836,7 +7687,7 @@
             <a:pPr rtl="0"/>
             <a:fld id="{A3F31473-23EB-4724-8B59-FE6D21D89FA4}" type="slidenum">
               <a:rPr lang="en-US" altLang="ko-KR" noProof="0" smtClean="0"/>
-              <a:t>16</a:t>
+              <a:t>13</a:t>
             </a:fld>
             <a:endParaRPr lang="en-US" altLang="ko-KR" noProof="0" dirty="0"/>
           </a:p>
@@ -9305,7 +8156,7 @@
 </p:sld>
 </file>
 
-<file path=ppt/slides/slide17.xml><?xml version="1.0" encoding="utf-8"?>
+<file path=ppt/slides/slide14.xml><?xml version="1.0" encoding="utf-8"?>
 <p:sld xmlns:a="http://schemas.openxmlformats.org/drawingml/2006/main" xmlns:r="http://schemas.openxmlformats.org/officeDocument/2006/relationships" xmlns:p="http://schemas.openxmlformats.org/presentationml/2006/main">
   <p:cSld>
     <p:spTree>
@@ -9340,7 +8191,7 @@
             <a:pPr rtl="0"/>
             <a:fld id="{A3F31473-23EB-4724-8B59-FE6D21D89FA4}" type="slidenum">
               <a:rPr lang="en-US" altLang="ko-KR" noProof="0" smtClean="0"/>
-              <a:t>17</a:t>
+              <a:t>14</a:t>
             </a:fld>
             <a:endParaRPr lang="en-US" altLang="ko-KR" noProof="0" dirty="0"/>
           </a:p>
@@ -9541,7 +8392,7 @@
 </p:sld>
 </file>
 
-<file path=ppt/slides/slide18.xml><?xml version="1.0" encoding="utf-8"?>
+<file path=ppt/slides/slide15.xml><?xml version="1.0" encoding="utf-8"?>
 <p:sld xmlns:a="http://schemas.openxmlformats.org/drawingml/2006/main" xmlns:r="http://schemas.openxmlformats.org/officeDocument/2006/relationships" xmlns:p="http://schemas.openxmlformats.org/presentationml/2006/main">
   <p:cSld>
     <p:spTree>
@@ -9588,7 +8439,7 @@
             <a:pPr rtl="0"/>
             <a:fld id="{A3F31473-23EB-4724-8B59-FE6D21D89FA4}" type="slidenum">
               <a:rPr lang="en-US" altLang="ko-KR" noProof="0" smtClean="0"/>
-              <a:t>18</a:t>
+              <a:t>15</a:t>
             </a:fld>
             <a:endParaRPr lang="en-US" altLang="ko-KR" noProof="0" dirty="0"/>
           </a:p>
@@ -9962,7 +8813,7 @@
 </p:sld>
 </file>
 
-<file path=ppt/slides/slide19.xml><?xml version="1.0" encoding="utf-8"?>
+<file path=ppt/slides/slide16.xml><?xml version="1.0" encoding="utf-8"?>
 <p:sld xmlns:a="http://schemas.openxmlformats.org/drawingml/2006/main" xmlns:r="http://schemas.openxmlformats.org/officeDocument/2006/relationships" xmlns:p="http://schemas.openxmlformats.org/presentationml/2006/main">
   <p:cSld>
     <p:spTree>
@@ -10039,7 +8890,7 @@
             <a:pPr rtl="0"/>
             <a:fld id="{A3F31473-23EB-4724-8B59-FE6D21D89FA4}" type="slidenum">
               <a:rPr lang="en-US" altLang="ko-KR" noProof="0" smtClean="0"/>
-              <a:t>19</a:t>
+              <a:t>16</a:t>
             </a:fld>
             <a:endParaRPr lang="en-US" altLang="ko-KR" noProof="0" dirty="0"/>
           </a:p>
@@ -10394,1047 +9245,7 @@
 </p:sld>
 </file>
 
-<file path=ppt/slides/slide2.xml><?xml version="1.0" encoding="utf-8"?>
-<p:sld xmlns:a="http://schemas.openxmlformats.org/drawingml/2006/main" xmlns:r="http://schemas.openxmlformats.org/officeDocument/2006/relationships" xmlns:p="http://schemas.openxmlformats.org/presentationml/2006/main">
-  <p:cSld>
-    <p:spTree>
-      <p:nvGrpSpPr>
-        <p:cNvPr id="1" name="">
-          <a:extLst>
-            <a:ext uri="{FF2B5EF4-FFF2-40B4-BE49-F238E27FC236}">
-              <a16:creationId xmlns:a16="http://schemas.microsoft.com/office/drawing/2014/main" id="{159EFBF4-C854-8B0C-402B-64EA26703B45}"/>
-            </a:ext>
-          </a:extLst>
-        </p:cNvPr>
-        <p:cNvGrpSpPr/>
-        <p:nvPr/>
-      </p:nvGrpSpPr>
-      <p:grpSpPr>
-        <a:xfrm>
-          <a:off x="0" y="0"/>
-          <a:ext cx="0" cy="0"/>
-          <a:chOff x="0" y="0"/>
-          <a:chExt cx="0" cy="0"/>
-        </a:xfrm>
-      </p:grpSpPr>
-      <p:sp>
-        <p:nvSpPr>
-          <p:cNvPr id="8" name="슬라이드 번호 개체 틀 7">
-            <a:extLst>
-              <a:ext uri="{FF2B5EF4-FFF2-40B4-BE49-F238E27FC236}">
-                <a16:creationId xmlns:a16="http://schemas.microsoft.com/office/drawing/2014/main" id="{AF9FE9E7-8E5C-1FC2-1EE6-F20BF189E252}"/>
-              </a:ext>
-            </a:extLst>
-          </p:cNvPr>
-          <p:cNvSpPr>
-            <a:spLocks noGrp="1"/>
-          </p:cNvSpPr>
-          <p:nvPr>
-            <p:ph type="sldNum" sz="quarter" idx="12"/>
-          </p:nvPr>
-        </p:nvSpPr>
-        <p:spPr/>
-        <p:txBody>
-          <a:bodyPr/>
-          <a:lstStyle/>
-          <a:p>
-            <a:pPr rtl="0"/>
-            <a:fld id="{A3F31473-23EB-4724-8B59-FE6D21D89FA4}" type="slidenum">
-              <a:rPr lang="en-US" altLang="ko-KR" noProof="0" smtClean="0"/>
-              <a:t>2</a:t>
-            </a:fld>
-            <a:endParaRPr lang="en-US" altLang="ko-KR" noProof="0" dirty="0"/>
-          </a:p>
-        </p:txBody>
-      </p:sp>
-      <p:sp>
-        <p:nvSpPr>
-          <p:cNvPr id="3" name="TextBox 2">
-            <a:extLst>
-              <a:ext uri="{FF2B5EF4-FFF2-40B4-BE49-F238E27FC236}">
-                <a16:creationId xmlns:a16="http://schemas.microsoft.com/office/drawing/2014/main" id="{A6FF4407-06FD-C08E-3FB8-E256F08DB85E}"/>
-              </a:ext>
-            </a:extLst>
-          </p:cNvPr>
-          <p:cNvSpPr txBox="1"/>
-          <p:nvPr/>
-        </p:nvSpPr>
-        <p:spPr>
-          <a:xfrm>
-            <a:off x="246509" y="198588"/>
-            <a:ext cx="11191750" cy="660565"/>
-          </a:xfrm>
-          <a:prstGeom prst="rect">
-            <a:avLst/>
-          </a:prstGeom>
-          <a:noFill/>
-        </p:spPr>
-        <p:txBody>
-          <a:bodyPr wrap="square">
-            <a:spAutoFit/>
-          </a:bodyPr>
-          <a:lstStyle/>
-          <a:p>
-            <a:pPr>
-              <a:lnSpc>
-                <a:spcPct val="150000"/>
-              </a:lnSpc>
-            </a:pPr>
-            <a:r>
-              <a:rPr lang="en-US" altLang="ko-KR" sz="2800" dirty="0">
-                <a:latin typeface="한컴 말랑말랑 Bold" panose="020F0803000000000000" pitchFamily="50" charset="-127"/>
-                <a:ea typeface="한컴 말랑말랑 Bold" panose="020F0803000000000000" pitchFamily="50" charset="-127"/>
-              </a:rPr>
-              <a:t>Summary</a:t>
-            </a:r>
-          </a:p>
-        </p:txBody>
-      </p:sp>
-      <p:sp>
-        <p:nvSpPr>
-          <p:cNvPr id="7" name="직사각형 6">
-            <a:extLst>
-              <a:ext uri="{FF2B5EF4-FFF2-40B4-BE49-F238E27FC236}">
-                <a16:creationId xmlns:a16="http://schemas.microsoft.com/office/drawing/2014/main" id="{4EBF83CB-FCBF-055A-5E05-21C631832BD5}"/>
-              </a:ext>
-            </a:extLst>
-          </p:cNvPr>
-          <p:cNvSpPr/>
-          <p:nvPr/>
-        </p:nvSpPr>
-        <p:spPr>
-          <a:xfrm>
-            <a:off x="4870276" y="836712"/>
-            <a:ext cx="1944216" cy="504056"/>
-          </a:xfrm>
-          <a:prstGeom prst="rect">
-            <a:avLst/>
-          </a:prstGeom>
-        </p:spPr>
-        <p:style>
-          <a:lnRef idx="2">
-            <a:schemeClr val="accent1">
-              <a:shade val="15000"/>
-            </a:schemeClr>
-          </a:lnRef>
-          <a:fillRef idx="1">
-            <a:schemeClr val="accent1"/>
-          </a:fillRef>
-          <a:effectRef idx="0">
-            <a:schemeClr val="accent1"/>
-          </a:effectRef>
-          <a:fontRef idx="minor">
-            <a:schemeClr val="lt1"/>
-          </a:fontRef>
-        </p:style>
-        <p:txBody>
-          <a:bodyPr rtlCol="0" anchor="ctr"/>
-          <a:lstStyle/>
-          <a:p>
-            <a:pPr algn="ctr"/>
-            <a:r>
-              <a:rPr lang="ko-KR" altLang="en-US" sz="2400" dirty="0">
-                <a:latin typeface="한컴 말랑말랑 Bold" panose="020F0803000000000000" pitchFamily="50" charset="-127"/>
-                <a:ea typeface="한컴 말랑말랑 Bold" panose="020F0803000000000000" pitchFamily="50" charset="-127"/>
-              </a:rPr>
-              <a:t>통계학</a:t>
-            </a:r>
-            <a:endParaRPr lang="ko-KR" altLang="en-US" sz="3200" dirty="0">
-              <a:latin typeface="한컴 말랑말랑 Bold" panose="020F0803000000000000" pitchFamily="50" charset="-127"/>
-              <a:ea typeface="한컴 말랑말랑 Bold" panose="020F0803000000000000" pitchFamily="50" charset="-127"/>
-            </a:endParaRPr>
-          </a:p>
-        </p:txBody>
-      </p:sp>
-      <p:sp>
-        <p:nvSpPr>
-          <p:cNvPr id="9" name="직사각형 8">
-            <a:extLst>
-              <a:ext uri="{FF2B5EF4-FFF2-40B4-BE49-F238E27FC236}">
-                <a16:creationId xmlns:a16="http://schemas.microsoft.com/office/drawing/2014/main" id="{E79824AE-C6FC-79CD-A30A-40E889349193}"/>
-              </a:ext>
-            </a:extLst>
-          </p:cNvPr>
-          <p:cNvSpPr/>
-          <p:nvPr/>
-        </p:nvSpPr>
-        <p:spPr>
-          <a:xfrm>
-            <a:off x="1413892" y="2420888"/>
-            <a:ext cx="1944216" cy="504056"/>
-          </a:xfrm>
-          <a:prstGeom prst="rect">
-            <a:avLst/>
-          </a:prstGeom>
-        </p:spPr>
-        <p:style>
-          <a:lnRef idx="2">
-            <a:schemeClr val="accent1">
-              <a:shade val="15000"/>
-            </a:schemeClr>
-          </a:lnRef>
-          <a:fillRef idx="1">
-            <a:schemeClr val="accent1"/>
-          </a:fillRef>
-          <a:effectRef idx="0">
-            <a:schemeClr val="accent1"/>
-          </a:effectRef>
-          <a:fontRef idx="minor">
-            <a:schemeClr val="lt1"/>
-          </a:fontRef>
-        </p:style>
-        <p:txBody>
-          <a:bodyPr rtlCol="0" anchor="ctr"/>
-          <a:lstStyle/>
-          <a:p>
-            <a:pPr algn="ctr"/>
-            <a:r>
-              <a:rPr lang="ko-KR" altLang="en-US" sz="2400" dirty="0">
-                <a:latin typeface="한컴 말랑말랑 Bold" panose="020F0803000000000000" pitchFamily="50" charset="-127"/>
-                <a:ea typeface="한컴 말랑말랑 Bold" panose="020F0803000000000000" pitchFamily="50" charset="-127"/>
-              </a:rPr>
-              <a:t>기술통계</a:t>
-            </a:r>
-            <a:endParaRPr lang="ko-KR" altLang="en-US" sz="3200" dirty="0">
-              <a:latin typeface="한컴 말랑말랑 Bold" panose="020F0803000000000000" pitchFamily="50" charset="-127"/>
-              <a:ea typeface="한컴 말랑말랑 Bold" panose="020F0803000000000000" pitchFamily="50" charset="-127"/>
-            </a:endParaRPr>
-          </a:p>
-        </p:txBody>
-      </p:sp>
-      <p:sp>
-        <p:nvSpPr>
-          <p:cNvPr id="10" name="직사각형 9">
-            <a:extLst>
-              <a:ext uri="{FF2B5EF4-FFF2-40B4-BE49-F238E27FC236}">
-                <a16:creationId xmlns:a16="http://schemas.microsoft.com/office/drawing/2014/main" id="{3C41D334-29FF-4873-077B-1CA764FC20AA}"/>
-              </a:ext>
-            </a:extLst>
-          </p:cNvPr>
-          <p:cNvSpPr/>
-          <p:nvPr/>
-        </p:nvSpPr>
-        <p:spPr>
-          <a:xfrm>
-            <a:off x="8398668" y="2420888"/>
-            <a:ext cx="1944216" cy="504056"/>
-          </a:xfrm>
-          <a:prstGeom prst="rect">
-            <a:avLst/>
-          </a:prstGeom>
-        </p:spPr>
-        <p:style>
-          <a:lnRef idx="2">
-            <a:schemeClr val="accent1">
-              <a:shade val="15000"/>
-            </a:schemeClr>
-          </a:lnRef>
-          <a:fillRef idx="1">
-            <a:schemeClr val="accent1"/>
-          </a:fillRef>
-          <a:effectRef idx="0">
-            <a:schemeClr val="accent1"/>
-          </a:effectRef>
-          <a:fontRef idx="minor">
-            <a:schemeClr val="lt1"/>
-          </a:fontRef>
-        </p:style>
-        <p:txBody>
-          <a:bodyPr rtlCol="0" anchor="ctr"/>
-          <a:lstStyle/>
-          <a:p>
-            <a:pPr algn="ctr"/>
-            <a:r>
-              <a:rPr lang="ko-KR" altLang="en-US" sz="2400" dirty="0">
-                <a:latin typeface="한컴 말랑말랑 Bold" panose="020F0803000000000000" pitchFamily="50" charset="-127"/>
-                <a:ea typeface="한컴 말랑말랑 Bold" panose="020F0803000000000000" pitchFamily="50" charset="-127"/>
-              </a:rPr>
-              <a:t>추론통계</a:t>
-            </a:r>
-            <a:endParaRPr lang="ko-KR" altLang="en-US" sz="3200" dirty="0">
-              <a:latin typeface="한컴 말랑말랑 Bold" panose="020F0803000000000000" pitchFamily="50" charset="-127"/>
-              <a:ea typeface="한컴 말랑말랑 Bold" panose="020F0803000000000000" pitchFamily="50" charset="-127"/>
-            </a:endParaRPr>
-          </a:p>
-        </p:txBody>
-      </p:sp>
-      <p:sp>
-        <p:nvSpPr>
-          <p:cNvPr id="11" name="직사각형 10">
-            <a:extLst>
-              <a:ext uri="{FF2B5EF4-FFF2-40B4-BE49-F238E27FC236}">
-                <a16:creationId xmlns:a16="http://schemas.microsoft.com/office/drawing/2014/main" id="{C9628176-F633-25A0-F7CB-B44223ECE667}"/>
-              </a:ext>
-            </a:extLst>
-          </p:cNvPr>
-          <p:cNvSpPr/>
-          <p:nvPr/>
-        </p:nvSpPr>
-        <p:spPr>
-          <a:xfrm>
-            <a:off x="9856113" y="4049950"/>
-            <a:ext cx="1944216" cy="504056"/>
-          </a:xfrm>
-          <a:prstGeom prst="rect">
-            <a:avLst/>
-          </a:prstGeom>
-        </p:spPr>
-        <p:style>
-          <a:lnRef idx="2">
-            <a:schemeClr val="accent1">
-              <a:shade val="15000"/>
-            </a:schemeClr>
-          </a:lnRef>
-          <a:fillRef idx="1">
-            <a:schemeClr val="accent1"/>
-          </a:fillRef>
-          <a:effectRef idx="0">
-            <a:schemeClr val="accent1"/>
-          </a:effectRef>
-          <a:fontRef idx="minor">
-            <a:schemeClr val="lt1"/>
-          </a:fontRef>
-        </p:style>
-        <p:txBody>
-          <a:bodyPr rtlCol="0" anchor="ctr"/>
-          <a:lstStyle/>
-          <a:p>
-            <a:pPr algn="ctr"/>
-            <a:r>
-              <a:rPr lang="ko-KR" altLang="en-US" sz="2000" dirty="0">
-                <a:latin typeface="한컴 말랑말랑 Bold" panose="020F0803000000000000" pitchFamily="50" charset="-127"/>
-                <a:ea typeface="한컴 말랑말랑 Bold" panose="020F0803000000000000" pitchFamily="50" charset="-127"/>
-              </a:rPr>
-              <a:t>가설검정</a:t>
-            </a:r>
-            <a:endParaRPr lang="ko-KR" altLang="en-US" sz="2800" dirty="0">
-              <a:latin typeface="한컴 말랑말랑 Bold" panose="020F0803000000000000" pitchFamily="50" charset="-127"/>
-              <a:ea typeface="한컴 말랑말랑 Bold" panose="020F0803000000000000" pitchFamily="50" charset="-127"/>
-            </a:endParaRPr>
-          </a:p>
-        </p:txBody>
-      </p:sp>
-      <p:sp>
-        <p:nvSpPr>
-          <p:cNvPr id="12" name="직사각형 11">
-            <a:extLst>
-              <a:ext uri="{FF2B5EF4-FFF2-40B4-BE49-F238E27FC236}">
-                <a16:creationId xmlns:a16="http://schemas.microsoft.com/office/drawing/2014/main" id="{2B4138A7-8A11-225A-36D5-14E270727BAE}"/>
-              </a:ext>
-            </a:extLst>
-          </p:cNvPr>
-          <p:cNvSpPr/>
-          <p:nvPr/>
-        </p:nvSpPr>
-        <p:spPr>
-          <a:xfrm>
-            <a:off x="6526460" y="4049950"/>
-            <a:ext cx="1944216" cy="504056"/>
-          </a:xfrm>
-          <a:prstGeom prst="rect">
-            <a:avLst/>
-          </a:prstGeom>
-        </p:spPr>
-        <p:style>
-          <a:lnRef idx="2">
-            <a:schemeClr val="accent1">
-              <a:shade val="15000"/>
-            </a:schemeClr>
-          </a:lnRef>
-          <a:fillRef idx="1">
-            <a:schemeClr val="accent1"/>
-          </a:fillRef>
-          <a:effectRef idx="0">
-            <a:schemeClr val="accent1"/>
-          </a:effectRef>
-          <a:fontRef idx="minor">
-            <a:schemeClr val="lt1"/>
-          </a:fontRef>
-        </p:style>
-        <p:txBody>
-          <a:bodyPr rtlCol="0" anchor="ctr"/>
-          <a:lstStyle/>
-          <a:p>
-            <a:pPr algn="ctr"/>
-            <a:r>
-              <a:rPr lang="ko-KR" altLang="en-US" sz="2000" dirty="0">
-                <a:latin typeface="한컴 말랑말랑 Bold" panose="020F0803000000000000" pitchFamily="50" charset="-127"/>
-                <a:ea typeface="한컴 말랑말랑 Bold" panose="020F0803000000000000" pitchFamily="50" charset="-127"/>
-              </a:rPr>
-              <a:t>추정</a:t>
-            </a:r>
-            <a:endParaRPr lang="ko-KR" altLang="en-US" sz="2800" dirty="0">
-              <a:latin typeface="한컴 말랑말랑 Bold" panose="020F0803000000000000" pitchFamily="50" charset="-127"/>
-              <a:ea typeface="한컴 말랑말랑 Bold" panose="020F0803000000000000" pitchFamily="50" charset="-127"/>
-            </a:endParaRPr>
-          </a:p>
-        </p:txBody>
-      </p:sp>
-      <p:sp>
-        <p:nvSpPr>
-          <p:cNvPr id="13" name="직사각형 12">
-            <a:extLst>
-              <a:ext uri="{FF2B5EF4-FFF2-40B4-BE49-F238E27FC236}">
-                <a16:creationId xmlns:a16="http://schemas.microsoft.com/office/drawing/2014/main" id="{0DC9EE40-F079-ED83-22D5-957CBE13B387}"/>
-              </a:ext>
-            </a:extLst>
-          </p:cNvPr>
-          <p:cNvSpPr/>
-          <p:nvPr/>
-        </p:nvSpPr>
-        <p:spPr>
-          <a:xfrm>
-            <a:off x="5215061" y="5517232"/>
-            <a:ext cx="1944216" cy="504056"/>
-          </a:xfrm>
-          <a:prstGeom prst="rect">
-            <a:avLst/>
-          </a:prstGeom>
-        </p:spPr>
-        <p:style>
-          <a:lnRef idx="2">
-            <a:schemeClr val="accent1">
-              <a:shade val="15000"/>
-            </a:schemeClr>
-          </a:lnRef>
-          <a:fillRef idx="1">
-            <a:schemeClr val="accent1"/>
-          </a:fillRef>
-          <a:effectRef idx="0">
-            <a:schemeClr val="accent1"/>
-          </a:effectRef>
-          <a:fontRef idx="minor">
-            <a:schemeClr val="lt1"/>
-          </a:fontRef>
-        </p:style>
-        <p:txBody>
-          <a:bodyPr rtlCol="0" anchor="ctr"/>
-          <a:lstStyle/>
-          <a:p>
-            <a:pPr algn="ctr"/>
-            <a:r>
-              <a:rPr lang="ko-KR" altLang="en-US">
-                <a:latin typeface="한컴 말랑말랑 Bold" panose="020F0803000000000000" pitchFamily="50" charset="-127"/>
-                <a:ea typeface="한컴 말랑말랑 Bold" panose="020F0803000000000000" pitchFamily="50" charset="-127"/>
-              </a:rPr>
-              <a:t>점 추정</a:t>
-            </a:r>
-            <a:endParaRPr lang="ko-KR" altLang="en-US" sz="2400" dirty="0">
-              <a:latin typeface="한컴 말랑말랑 Bold" panose="020F0803000000000000" pitchFamily="50" charset="-127"/>
-              <a:ea typeface="한컴 말랑말랑 Bold" panose="020F0803000000000000" pitchFamily="50" charset="-127"/>
-            </a:endParaRPr>
-          </a:p>
-        </p:txBody>
-      </p:sp>
-      <p:sp>
-        <p:nvSpPr>
-          <p:cNvPr id="14" name="직사각형 13">
-            <a:extLst>
-              <a:ext uri="{FF2B5EF4-FFF2-40B4-BE49-F238E27FC236}">
-                <a16:creationId xmlns:a16="http://schemas.microsoft.com/office/drawing/2014/main" id="{D97FCA7F-CA07-F0BA-17EE-A0120E977AEE}"/>
-              </a:ext>
-            </a:extLst>
-          </p:cNvPr>
-          <p:cNvSpPr/>
-          <p:nvPr/>
-        </p:nvSpPr>
-        <p:spPr>
-          <a:xfrm>
-            <a:off x="7678588" y="5517232"/>
-            <a:ext cx="1944216" cy="504056"/>
-          </a:xfrm>
-          <a:prstGeom prst="rect">
-            <a:avLst/>
-          </a:prstGeom>
-        </p:spPr>
-        <p:style>
-          <a:lnRef idx="2">
-            <a:schemeClr val="accent1">
-              <a:shade val="15000"/>
-            </a:schemeClr>
-          </a:lnRef>
-          <a:fillRef idx="1">
-            <a:schemeClr val="accent1"/>
-          </a:fillRef>
-          <a:effectRef idx="0">
-            <a:schemeClr val="accent1"/>
-          </a:effectRef>
-          <a:fontRef idx="minor">
-            <a:schemeClr val="lt1"/>
-          </a:fontRef>
-        </p:style>
-        <p:txBody>
-          <a:bodyPr rtlCol="0" anchor="ctr"/>
-          <a:lstStyle/>
-          <a:p>
-            <a:pPr algn="ctr"/>
-            <a:r>
-              <a:rPr lang="ko-KR" altLang="en-US" dirty="0">
-                <a:latin typeface="한컴 말랑말랑 Bold" panose="020F0803000000000000" pitchFamily="50" charset="-127"/>
-                <a:ea typeface="한컴 말랑말랑 Bold" panose="020F0803000000000000" pitchFamily="50" charset="-127"/>
-              </a:rPr>
-              <a:t>구간 추정</a:t>
-            </a:r>
-            <a:endParaRPr lang="ko-KR" altLang="en-US" sz="2400" dirty="0">
-              <a:latin typeface="한컴 말랑말랑 Bold" panose="020F0803000000000000" pitchFamily="50" charset="-127"/>
-              <a:ea typeface="한컴 말랑말랑 Bold" panose="020F0803000000000000" pitchFamily="50" charset="-127"/>
-            </a:endParaRPr>
-          </a:p>
-        </p:txBody>
-      </p:sp>
-      <p:cxnSp>
-        <p:nvCxnSpPr>
-          <p:cNvPr id="16" name="연결선: 꺾임 15">
-            <a:extLst>
-              <a:ext uri="{FF2B5EF4-FFF2-40B4-BE49-F238E27FC236}">
-                <a16:creationId xmlns:a16="http://schemas.microsoft.com/office/drawing/2014/main" id="{79974693-FA6C-1B23-6CAE-B0D257ECD77F}"/>
-              </a:ext>
-            </a:extLst>
-          </p:cNvPr>
-          <p:cNvCxnSpPr>
-            <a:stCxn id="7" idx="2"/>
-            <a:endCxn id="9" idx="0"/>
-          </p:cNvCxnSpPr>
-          <p:nvPr/>
-        </p:nvCxnSpPr>
-        <p:spPr>
-          <a:xfrm rot="5400000">
-            <a:off x="3574132" y="152636"/>
-            <a:ext cx="1080120" cy="3456384"/>
-          </a:xfrm>
-          <a:prstGeom prst="bentConnector3">
-            <a:avLst/>
-          </a:prstGeom>
-        </p:spPr>
-        <p:style>
-          <a:lnRef idx="3">
-            <a:schemeClr val="dk1"/>
-          </a:lnRef>
-          <a:fillRef idx="0">
-            <a:schemeClr val="dk1"/>
-          </a:fillRef>
-          <a:effectRef idx="2">
-            <a:schemeClr val="dk1"/>
-          </a:effectRef>
-          <a:fontRef idx="minor">
-            <a:schemeClr val="tx1"/>
-          </a:fontRef>
-        </p:style>
-      </p:cxnSp>
-      <p:cxnSp>
-        <p:nvCxnSpPr>
-          <p:cNvPr id="17" name="연결선: 꺾임 16">
-            <a:extLst>
-              <a:ext uri="{FF2B5EF4-FFF2-40B4-BE49-F238E27FC236}">
-                <a16:creationId xmlns:a16="http://schemas.microsoft.com/office/drawing/2014/main" id="{8C593572-D7B4-2E80-44D4-089E8626D8F4}"/>
-              </a:ext>
-            </a:extLst>
-          </p:cNvPr>
-          <p:cNvCxnSpPr>
-            <a:cxnSpLocks/>
-            <a:stCxn id="7" idx="2"/>
-            <a:endCxn id="10" idx="0"/>
-          </p:cNvCxnSpPr>
-          <p:nvPr/>
-        </p:nvCxnSpPr>
-        <p:spPr>
-          <a:xfrm rot="16200000" flipH="1">
-            <a:off x="7066520" y="116632"/>
-            <a:ext cx="1080120" cy="3528392"/>
-          </a:xfrm>
-          <a:prstGeom prst="bentConnector3">
-            <a:avLst>
-              <a:gd name="adj1" fmla="val 50000"/>
-            </a:avLst>
-          </a:prstGeom>
-        </p:spPr>
-        <p:style>
-          <a:lnRef idx="3">
-            <a:schemeClr val="dk1"/>
-          </a:lnRef>
-          <a:fillRef idx="0">
-            <a:schemeClr val="dk1"/>
-          </a:fillRef>
-          <a:effectRef idx="2">
-            <a:schemeClr val="dk1"/>
-          </a:effectRef>
-          <a:fontRef idx="minor">
-            <a:schemeClr val="tx1"/>
-          </a:fontRef>
-        </p:style>
-      </p:cxnSp>
-      <p:cxnSp>
-        <p:nvCxnSpPr>
-          <p:cNvPr id="20" name="연결선: 꺾임 19">
-            <a:extLst>
-              <a:ext uri="{FF2B5EF4-FFF2-40B4-BE49-F238E27FC236}">
-                <a16:creationId xmlns:a16="http://schemas.microsoft.com/office/drawing/2014/main" id="{4895DAF6-3C2C-DE41-F201-F449A30C8BC2}"/>
-              </a:ext>
-            </a:extLst>
-          </p:cNvPr>
-          <p:cNvCxnSpPr>
-            <a:cxnSpLocks/>
-            <a:stCxn id="10" idx="2"/>
-            <a:endCxn id="12" idx="0"/>
-          </p:cNvCxnSpPr>
-          <p:nvPr/>
-        </p:nvCxnSpPr>
-        <p:spPr>
-          <a:xfrm rot="5400000">
-            <a:off x="7872169" y="2551343"/>
-            <a:ext cx="1125006" cy="1872208"/>
-          </a:xfrm>
-          <a:prstGeom prst="bentConnector3">
-            <a:avLst>
-              <a:gd name="adj1" fmla="val 50000"/>
-            </a:avLst>
-          </a:prstGeom>
-        </p:spPr>
-        <p:style>
-          <a:lnRef idx="3">
-            <a:schemeClr val="dk1"/>
-          </a:lnRef>
-          <a:fillRef idx="0">
-            <a:schemeClr val="dk1"/>
-          </a:fillRef>
-          <a:effectRef idx="2">
-            <a:schemeClr val="dk1"/>
-          </a:effectRef>
-          <a:fontRef idx="minor">
-            <a:schemeClr val="tx1"/>
-          </a:fontRef>
-        </p:style>
-      </p:cxnSp>
-      <p:cxnSp>
-        <p:nvCxnSpPr>
-          <p:cNvPr id="21" name="연결선: 꺾임 20">
-            <a:extLst>
-              <a:ext uri="{FF2B5EF4-FFF2-40B4-BE49-F238E27FC236}">
-                <a16:creationId xmlns:a16="http://schemas.microsoft.com/office/drawing/2014/main" id="{80DFB1D7-9D5F-44C8-960C-163848C3219C}"/>
-              </a:ext>
-            </a:extLst>
-          </p:cNvPr>
-          <p:cNvCxnSpPr>
-            <a:cxnSpLocks/>
-            <a:stCxn id="10" idx="2"/>
-            <a:endCxn id="11" idx="0"/>
-          </p:cNvCxnSpPr>
-          <p:nvPr/>
-        </p:nvCxnSpPr>
-        <p:spPr>
-          <a:xfrm rot="16200000" flipH="1">
-            <a:off x="9536995" y="2758724"/>
-            <a:ext cx="1125006" cy="1457445"/>
-          </a:xfrm>
-          <a:prstGeom prst="bentConnector3">
-            <a:avLst>
-              <a:gd name="adj1" fmla="val 50000"/>
-            </a:avLst>
-          </a:prstGeom>
-        </p:spPr>
-        <p:style>
-          <a:lnRef idx="3">
-            <a:schemeClr val="dk1"/>
-          </a:lnRef>
-          <a:fillRef idx="0">
-            <a:schemeClr val="dk1"/>
-          </a:fillRef>
-          <a:effectRef idx="2">
-            <a:schemeClr val="dk1"/>
-          </a:effectRef>
-          <a:fontRef idx="minor">
-            <a:schemeClr val="tx1"/>
-          </a:fontRef>
-        </p:style>
-      </p:cxnSp>
-      <p:cxnSp>
-        <p:nvCxnSpPr>
-          <p:cNvPr id="27" name="연결선: 꺾임 26">
-            <a:extLst>
-              <a:ext uri="{FF2B5EF4-FFF2-40B4-BE49-F238E27FC236}">
-                <a16:creationId xmlns:a16="http://schemas.microsoft.com/office/drawing/2014/main" id="{770B1B04-1989-43E7-958B-11AB127AA072}"/>
-              </a:ext>
-            </a:extLst>
-          </p:cNvPr>
-          <p:cNvCxnSpPr>
-            <a:cxnSpLocks/>
-            <a:stCxn id="12" idx="2"/>
-            <a:endCxn id="13" idx="0"/>
-          </p:cNvCxnSpPr>
-          <p:nvPr/>
-        </p:nvCxnSpPr>
-        <p:spPr>
-          <a:xfrm rot="5400000">
-            <a:off x="6361256" y="4379920"/>
-            <a:ext cx="963226" cy="1311399"/>
-          </a:xfrm>
-          <a:prstGeom prst="bentConnector3">
-            <a:avLst>
-              <a:gd name="adj1" fmla="val 50000"/>
-            </a:avLst>
-          </a:prstGeom>
-        </p:spPr>
-        <p:style>
-          <a:lnRef idx="3">
-            <a:schemeClr val="dk1"/>
-          </a:lnRef>
-          <a:fillRef idx="0">
-            <a:schemeClr val="dk1"/>
-          </a:fillRef>
-          <a:effectRef idx="2">
-            <a:schemeClr val="dk1"/>
-          </a:effectRef>
-          <a:fontRef idx="minor">
-            <a:schemeClr val="tx1"/>
-          </a:fontRef>
-        </p:style>
-      </p:cxnSp>
-      <p:cxnSp>
-        <p:nvCxnSpPr>
-          <p:cNvPr id="28" name="연결선: 꺾임 27">
-            <a:extLst>
-              <a:ext uri="{FF2B5EF4-FFF2-40B4-BE49-F238E27FC236}">
-                <a16:creationId xmlns:a16="http://schemas.microsoft.com/office/drawing/2014/main" id="{36C17717-5923-BF72-668E-9BBB810AE42C}"/>
-              </a:ext>
-            </a:extLst>
-          </p:cNvPr>
-          <p:cNvCxnSpPr>
-            <a:cxnSpLocks/>
-            <a:stCxn id="12" idx="2"/>
-            <a:endCxn id="14" idx="0"/>
-          </p:cNvCxnSpPr>
-          <p:nvPr/>
-        </p:nvCxnSpPr>
-        <p:spPr>
-          <a:xfrm rot="16200000" flipH="1">
-            <a:off x="7593019" y="4459555"/>
-            <a:ext cx="963226" cy="1152128"/>
-          </a:xfrm>
-          <a:prstGeom prst="bentConnector3">
-            <a:avLst>
-              <a:gd name="adj1" fmla="val 50000"/>
-            </a:avLst>
-          </a:prstGeom>
-        </p:spPr>
-        <p:style>
-          <a:lnRef idx="3">
-            <a:schemeClr val="dk1"/>
-          </a:lnRef>
-          <a:fillRef idx="0">
-            <a:schemeClr val="dk1"/>
-          </a:fillRef>
-          <a:effectRef idx="2">
-            <a:schemeClr val="dk1"/>
-          </a:effectRef>
-          <a:fontRef idx="minor">
-            <a:schemeClr val="tx1"/>
-          </a:fontRef>
-        </p:style>
-      </p:cxnSp>
-      <p:sp>
-        <p:nvSpPr>
-          <p:cNvPr id="33" name="TextBox 32">
-            <a:extLst>
-              <a:ext uri="{FF2B5EF4-FFF2-40B4-BE49-F238E27FC236}">
-                <a16:creationId xmlns:a16="http://schemas.microsoft.com/office/drawing/2014/main" id="{CF455240-824F-1FFC-FDF1-FF857BFE6523}"/>
-              </a:ext>
-            </a:extLst>
-          </p:cNvPr>
-          <p:cNvSpPr txBox="1"/>
-          <p:nvPr/>
-        </p:nvSpPr>
-        <p:spPr>
-          <a:xfrm>
-            <a:off x="1256042" y="3362479"/>
-            <a:ext cx="2076209" cy="1169551"/>
-          </a:xfrm>
-          <a:prstGeom prst="rect">
-            <a:avLst/>
-          </a:prstGeom>
-          <a:noFill/>
-        </p:spPr>
-        <p:txBody>
-          <a:bodyPr wrap="none" rtlCol="0">
-            <a:spAutoFit/>
-          </a:bodyPr>
-          <a:lstStyle/>
-          <a:p>
-            <a:pPr marL="285750" indent="-285750">
-              <a:buFont typeface="Wingdings" panose="05000000000000000000" pitchFamily="2" charset="2"/>
-              <a:buChar char="§"/>
-            </a:pPr>
-            <a:r>
-              <a:rPr lang="ko-KR" altLang="en-US" sz="1400" dirty="0"/>
-              <a:t>모집단과</a:t>
-            </a:r>
-            <a:r>
-              <a:rPr lang="en-US" altLang="ko-KR" sz="1400" dirty="0"/>
-              <a:t> </a:t>
-            </a:r>
-            <a:r>
-              <a:rPr lang="ko-KR" altLang="en-US" sz="1400" dirty="0"/>
-              <a:t>표본</a:t>
-            </a:r>
-            <a:r>
-              <a:rPr lang="en-US" altLang="ko-KR" sz="1400" dirty="0"/>
-              <a:t> </a:t>
-            </a:r>
-          </a:p>
-          <a:p>
-            <a:pPr marL="285750" indent="-285750">
-              <a:buFont typeface="Wingdings" panose="05000000000000000000" pitchFamily="2" charset="2"/>
-              <a:buChar char="§"/>
-            </a:pPr>
-            <a:r>
-              <a:rPr lang="ko-KR" altLang="en-US" sz="1400" dirty="0"/>
-              <a:t>평균</a:t>
-            </a:r>
-            <a:r>
-              <a:rPr lang="en-US" altLang="ko-KR" sz="1400" dirty="0"/>
-              <a:t>, </a:t>
-            </a:r>
-            <a:r>
-              <a:rPr lang="ko-KR" altLang="en-US" sz="1400" dirty="0"/>
-              <a:t>분산</a:t>
-            </a:r>
-            <a:r>
-              <a:rPr lang="en-US" altLang="ko-KR" sz="1400" dirty="0"/>
-              <a:t>, </a:t>
-            </a:r>
-            <a:r>
-              <a:rPr lang="ko-KR" altLang="en-US" sz="1400" dirty="0"/>
-              <a:t>표준편차</a:t>
-            </a:r>
-            <a:endParaRPr lang="en-US" altLang="ko-KR" sz="1400" dirty="0"/>
-          </a:p>
-          <a:p>
-            <a:pPr marL="285750" indent="-285750">
-              <a:buFont typeface="Wingdings" panose="05000000000000000000" pitchFamily="2" charset="2"/>
-              <a:buChar char="§"/>
-            </a:pPr>
-            <a:r>
-              <a:rPr lang="ko-KR" altLang="en-US" sz="1400" dirty="0"/>
-              <a:t>기술 통계량</a:t>
-            </a:r>
-            <a:endParaRPr lang="en-US" altLang="ko-KR" sz="1400" dirty="0"/>
-          </a:p>
-          <a:p>
-            <a:pPr marL="285750" indent="-285750">
-              <a:buFont typeface="Wingdings" panose="05000000000000000000" pitchFamily="2" charset="2"/>
-              <a:buChar char="§"/>
-            </a:pPr>
-            <a:r>
-              <a:rPr lang="ko-KR" altLang="en-US" sz="1400" dirty="0"/>
-              <a:t>히스토그램</a:t>
-            </a:r>
-            <a:r>
-              <a:rPr lang="en-US" altLang="ko-KR" sz="1400" dirty="0"/>
-              <a:t>. </a:t>
-            </a:r>
-            <a:r>
-              <a:rPr lang="ko-KR" altLang="en-US" sz="1400" dirty="0"/>
-              <a:t>산포도</a:t>
-            </a:r>
-            <a:endParaRPr lang="en-US" altLang="ko-KR" sz="1400" dirty="0"/>
-          </a:p>
-          <a:p>
-            <a:pPr marL="285750" indent="-285750">
-              <a:buFont typeface="Wingdings" panose="05000000000000000000" pitchFamily="2" charset="2"/>
-              <a:buChar char="§"/>
-            </a:pPr>
-            <a:r>
-              <a:rPr lang="ko-KR" altLang="en-US" sz="1400" dirty="0"/>
-              <a:t>상관관계</a:t>
-            </a:r>
-            <a:r>
-              <a:rPr lang="en-US" altLang="ko-KR" sz="1400" dirty="0"/>
-              <a:t>, </a:t>
-            </a:r>
-            <a:r>
-              <a:rPr lang="ko-KR" altLang="en-US" sz="1400" dirty="0"/>
-              <a:t>공분산</a:t>
-            </a:r>
-          </a:p>
-        </p:txBody>
-      </p:sp>
-      <p:cxnSp>
-        <p:nvCxnSpPr>
-          <p:cNvPr id="36" name="직선 화살표 연결선 35">
-            <a:extLst>
-              <a:ext uri="{FF2B5EF4-FFF2-40B4-BE49-F238E27FC236}">
-                <a16:creationId xmlns:a16="http://schemas.microsoft.com/office/drawing/2014/main" id="{FA5CDD18-9280-6EB1-D8BD-A56DE168DF14}"/>
-              </a:ext>
-            </a:extLst>
-          </p:cNvPr>
-          <p:cNvCxnSpPr>
-            <a:cxnSpLocks/>
-            <a:stCxn id="9" idx="3"/>
-            <a:endCxn id="10" idx="1"/>
-          </p:cNvCxnSpPr>
-          <p:nvPr/>
-        </p:nvCxnSpPr>
-        <p:spPr>
-          <a:xfrm>
-            <a:off x="3358108" y="2672916"/>
-            <a:ext cx="5040560" cy="0"/>
-          </a:xfrm>
-          <a:prstGeom prst="straightConnector1">
-            <a:avLst/>
-          </a:prstGeom>
-          <a:ln>
-            <a:tailEnd type="triangle"/>
-          </a:ln>
-        </p:spPr>
-        <p:style>
-          <a:lnRef idx="1">
-            <a:schemeClr val="accent1"/>
-          </a:lnRef>
-          <a:fillRef idx="0">
-            <a:schemeClr val="accent1"/>
-          </a:fillRef>
-          <a:effectRef idx="0">
-            <a:schemeClr val="accent1"/>
-          </a:effectRef>
-          <a:fontRef idx="minor">
-            <a:schemeClr val="tx1"/>
-          </a:fontRef>
-        </p:style>
-      </p:cxnSp>
-      <p:sp>
-        <p:nvSpPr>
-          <p:cNvPr id="34" name="직사각형 33">
-            <a:extLst>
-              <a:ext uri="{FF2B5EF4-FFF2-40B4-BE49-F238E27FC236}">
-                <a16:creationId xmlns:a16="http://schemas.microsoft.com/office/drawing/2014/main" id="{ED5A98A7-C86E-3D41-319D-BA1E4ECEC36E}"/>
-              </a:ext>
-            </a:extLst>
-          </p:cNvPr>
-          <p:cNvSpPr/>
-          <p:nvPr/>
-        </p:nvSpPr>
-        <p:spPr>
-          <a:xfrm>
-            <a:off x="4894706" y="2420887"/>
-            <a:ext cx="1944216" cy="504056"/>
-          </a:xfrm>
-          <a:prstGeom prst="rect">
-            <a:avLst/>
-          </a:prstGeom>
-          <a:solidFill>
-            <a:srgbClr val="C00000"/>
-          </a:solidFill>
-        </p:spPr>
-        <p:style>
-          <a:lnRef idx="2">
-            <a:schemeClr val="accent1">
-              <a:shade val="15000"/>
-            </a:schemeClr>
-          </a:lnRef>
-          <a:fillRef idx="1">
-            <a:schemeClr val="accent1"/>
-          </a:fillRef>
-          <a:effectRef idx="0">
-            <a:schemeClr val="accent1"/>
-          </a:effectRef>
-          <a:fontRef idx="minor">
-            <a:schemeClr val="lt1"/>
-          </a:fontRef>
-        </p:style>
-        <p:txBody>
-          <a:bodyPr rtlCol="0" anchor="ctr"/>
-          <a:lstStyle/>
-          <a:p>
-            <a:pPr algn="ctr"/>
-            <a:r>
-              <a:rPr lang="ko-KR" altLang="en-US" sz="2400" dirty="0">
-                <a:latin typeface="한컴 말랑말랑 Bold" panose="020F0803000000000000" pitchFamily="50" charset="-127"/>
-                <a:ea typeface="한컴 말랑말랑 Bold" panose="020F0803000000000000" pitchFamily="50" charset="-127"/>
-              </a:rPr>
-              <a:t>확률론</a:t>
-            </a:r>
-            <a:endParaRPr lang="ko-KR" altLang="en-US" sz="3200" dirty="0">
-              <a:latin typeface="한컴 말랑말랑 Bold" panose="020F0803000000000000" pitchFamily="50" charset="-127"/>
-              <a:ea typeface="한컴 말랑말랑 Bold" panose="020F0803000000000000" pitchFamily="50" charset="-127"/>
-            </a:endParaRPr>
-          </a:p>
-        </p:txBody>
-      </p:sp>
-      <p:sp>
-        <p:nvSpPr>
-          <p:cNvPr id="38" name="TextBox 37">
-            <a:extLst>
-              <a:ext uri="{FF2B5EF4-FFF2-40B4-BE49-F238E27FC236}">
-                <a16:creationId xmlns:a16="http://schemas.microsoft.com/office/drawing/2014/main" id="{0899A9F2-C66D-BE34-1C34-A3E25F200FBA}"/>
-              </a:ext>
-            </a:extLst>
-          </p:cNvPr>
-          <p:cNvSpPr txBox="1"/>
-          <p:nvPr/>
-        </p:nvSpPr>
-        <p:spPr>
-          <a:xfrm>
-            <a:off x="4849771" y="3376616"/>
-            <a:ext cx="1191352" cy="523220"/>
-          </a:xfrm>
-          <a:prstGeom prst="rect">
-            <a:avLst/>
-          </a:prstGeom>
-          <a:noFill/>
-        </p:spPr>
-        <p:txBody>
-          <a:bodyPr wrap="none" rtlCol="0">
-            <a:spAutoFit/>
-          </a:bodyPr>
-          <a:lstStyle/>
-          <a:p>
-            <a:pPr marL="285750" indent="-285750">
-              <a:buFont typeface="Wingdings" panose="05000000000000000000" pitchFamily="2" charset="2"/>
-              <a:buChar char="§"/>
-            </a:pPr>
-            <a:r>
-              <a:rPr lang="ko-KR" altLang="en-US" sz="1400" dirty="0"/>
-              <a:t>확률변수</a:t>
-            </a:r>
-            <a:endParaRPr lang="en-US" altLang="ko-KR" sz="1400" dirty="0"/>
-          </a:p>
-          <a:p>
-            <a:pPr marL="285750" indent="-285750">
-              <a:buFont typeface="Wingdings" panose="05000000000000000000" pitchFamily="2" charset="2"/>
-              <a:buChar char="§"/>
-            </a:pPr>
-            <a:r>
-              <a:rPr lang="ko-KR" altLang="en-US" sz="1400" dirty="0"/>
-              <a:t>확률분포</a:t>
-            </a:r>
-          </a:p>
-        </p:txBody>
-      </p:sp>
-    </p:spTree>
-    <p:extLst>
-      <p:ext uri="{BB962C8B-B14F-4D97-AF65-F5344CB8AC3E}">
-        <p14:creationId xmlns:p14="http://schemas.microsoft.com/office/powerpoint/2010/main" val="3357988805"/>
-      </p:ext>
-    </p:extLst>
-  </p:cSld>
-  <p:clrMapOvr>
-    <a:masterClrMapping/>
-  </p:clrMapOvr>
-  <mc:AlternateContent xmlns:mc="http://schemas.openxmlformats.org/markup-compatibility/2006" xmlns:p14="http://schemas.microsoft.com/office/powerpoint/2010/main">
-    <mc:Choice Requires="p14">
-      <p:transition spd="med" p14:dur="700">
-        <p:fade/>
-      </p:transition>
-    </mc:Choice>
-    <mc:Fallback xmlns="">
-      <p:transition spd="med">
-        <p:fade/>
-      </p:transition>
-    </mc:Fallback>
-  </mc:AlternateContent>
-</p:sld>
-</file>
-
-<file path=ppt/slides/slide20.xml><?xml version="1.0" encoding="utf-8"?>
+<file path=ppt/slides/slide17.xml><?xml version="1.0" encoding="utf-8"?>
 <p:sld xmlns:a="http://schemas.openxmlformats.org/drawingml/2006/main" xmlns:r="http://schemas.openxmlformats.org/officeDocument/2006/relationships" xmlns:p="http://schemas.openxmlformats.org/presentationml/2006/main">
   <p:cSld>
     <p:spTree>
@@ -11573,7 +9384,7 @@
             <a:pPr rtl="0"/>
             <a:fld id="{A3F31473-23EB-4724-8B59-FE6D21D89FA4}" type="slidenum">
               <a:rPr lang="en-US" altLang="ko-KR" noProof="0" smtClean="0"/>
-              <a:t>20</a:t>
+              <a:t>17</a:t>
             </a:fld>
             <a:endParaRPr lang="en-US" altLang="ko-KR" noProof="0" dirty="0"/>
           </a:p>
@@ -12106,7 +9917,7 @@
 </p:sld>
 </file>
 
-<file path=ppt/slides/slide21.xml><?xml version="1.0" encoding="utf-8"?>
+<file path=ppt/slides/slide18.xml><?xml version="1.0" encoding="utf-8"?>
 <p:sld xmlns:a="http://schemas.openxmlformats.org/drawingml/2006/main" xmlns:r="http://schemas.openxmlformats.org/officeDocument/2006/relationships" xmlns:p="http://schemas.openxmlformats.org/presentationml/2006/main">
   <p:cSld>
     <p:spTree>
@@ -12153,7 +9964,7 @@
             <a:pPr rtl="0"/>
             <a:fld id="{A3F31473-23EB-4724-8B59-FE6D21D89FA4}" type="slidenum">
               <a:rPr lang="en-US" altLang="ko-KR" noProof="0" smtClean="0"/>
-              <a:t>21</a:t>
+              <a:t>18</a:t>
             </a:fld>
             <a:endParaRPr lang="en-US" altLang="ko-KR" noProof="0" dirty="0"/>
           </a:p>
@@ -12801,7 +10612,7 @@
 </p:sld>
 </file>
 
-<file path=ppt/slides/slide22.xml><?xml version="1.0" encoding="utf-8"?>
+<file path=ppt/slides/slide19.xml><?xml version="1.0" encoding="utf-8"?>
 <p:sld xmlns:a="http://schemas.openxmlformats.org/drawingml/2006/main" xmlns:r="http://schemas.openxmlformats.org/officeDocument/2006/relationships" xmlns:p="http://schemas.openxmlformats.org/presentationml/2006/main">
   <p:cSld>
     <p:spTree>
@@ -12836,7 +10647,7 @@
             <a:pPr rtl="0"/>
             <a:fld id="{A3F31473-23EB-4724-8B59-FE6D21D89FA4}" type="slidenum">
               <a:rPr lang="en-US" altLang="ko-KR" noProof="0" smtClean="0"/>
-              <a:t>22</a:t>
+              <a:t>19</a:t>
             </a:fld>
             <a:endParaRPr lang="en-US" altLang="ko-KR" noProof="0" dirty="0"/>
           </a:p>
@@ -13037,7 +10848,1047 @@
 </p:sld>
 </file>
 
-<file path=ppt/slides/slide23.xml><?xml version="1.0" encoding="utf-8"?>
+<file path=ppt/slides/slide2.xml><?xml version="1.0" encoding="utf-8"?>
+<p:sld xmlns:a="http://schemas.openxmlformats.org/drawingml/2006/main" xmlns:r="http://schemas.openxmlformats.org/officeDocument/2006/relationships" xmlns:p="http://schemas.openxmlformats.org/presentationml/2006/main">
+  <p:cSld>
+    <p:spTree>
+      <p:nvGrpSpPr>
+        <p:cNvPr id="1" name="">
+          <a:extLst>
+            <a:ext uri="{FF2B5EF4-FFF2-40B4-BE49-F238E27FC236}">
+              <a16:creationId xmlns:a16="http://schemas.microsoft.com/office/drawing/2014/main" id="{159EFBF4-C854-8B0C-402B-64EA26703B45}"/>
+            </a:ext>
+          </a:extLst>
+        </p:cNvPr>
+        <p:cNvGrpSpPr/>
+        <p:nvPr/>
+      </p:nvGrpSpPr>
+      <p:grpSpPr>
+        <a:xfrm>
+          <a:off x="0" y="0"/>
+          <a:ext cx="0" cy="0"/>
+          <a:chOff x="0" y="0"/>
+          <a:chExt cx="0" cy="0"/>
+        </a:xfrm>
+      </p:grpSpPr>
+      <p:sp>
+        <p:nvSpPr>
+          <p:cNvPr id="8" name="슬라이드 번호 개체 틀 7">
+            <a:extLst>
+              <a:ext uri="{FF2B5EF4-FFF2-40B4-BE49-F238E27FC236}">
+                <a16:creationId xmlns:a16="http://schemas.microsoft.com/office/drawing/2014/main" id="{AF9FE9E7-8E5C-1FC2-1EE6-F20BF189E252}"/>
+              </a:ext>
+            </a:extLst>
+          </p:cNvPr>
+          <p:cNvSpPr>
+            <a:spLocks noGrp="1"/>
+          </p:cNvSpPr>
+          <p:nvPr>
+            <p:ph type="sldNum" sz="quarter" idx="12"/>
+          </p:nvPr>
+        </p:nvSpPr>
+        <p:spPr/>
+        <p:txBody>
+          <a:bodyPr/>
+          <a:lstStyle/>
+          <a:p>
+            <a:pPr rtl="0"/>
+            <a:fld id="{A3F31473-23EB-4724-8B59-FE6D21D89FA4}" type="slidenum">
+              <a:rPr lang="en-US" altLang="ko-KR" noProof="0" smtClean="0"/>
+              <a:t>2</a:t>
+            </a:fld>
+            <a:endParaRPr lang="en-US" altLang="ko-KR" noProof="0" dirty="0"/>
+          </a:p>
+        </p:txBody>
+      </p:sp>
+      <p:sp>
+        <p:nvSpPr>
+          <p:cNvPr id="3" name="TextBox 2">
+            <a:extLst>
+              <a:ext uri="{FF2B5EF4-FFF2-40B4-BE49-F238E27FC236}">
+                <a16:creationId xmlns:a16="http://schemas.microsoft.com/office/drawing/2014/main" id="{A6FF4407-06FD-C08E-3FB8-E256F08DB85E}"/>
+              </a:ext>
+            </a:extLst>
+          </p:cNvPr>
+          <p:cNvSpPr txBox="1"/>
+          <p:nvPr/>
+        </p:nvSpPr>
+        <p:spPr>
+          <a:xfrm>
+            <a:off x="246509" y="198588"/>
+            <a:ext cx="11191750" cy="660565"/>
+          </a:xfrm>
+          <a:prstGeom prst="rect">
+            <a:avLst/>
+          </a:prstGeom>
+          <a:noFill/>
+        </p:spPr>
+        <p:txBody>
+          <a:bodyPr wrap="square">
+            <a:spAutoFit/>
+          </a:bodyPr>
+          <a:lstStyle/>
+          <a:p>
+            <a:pPr>
+              <a:lnSpc>
+                <a:spcPct val="150000"/>
+              </a:lnSpc>
+            </a:pPr>
+            <a:r>
+              <a:rPr lang="en-US" altLang="ko-KR" sz="2800" dirty="0">
+                <a:latin typeface="한컴 말랑말랑 Bold" panose="020F0803000000000000" pitchFamily="50" charset="-127"/>
+                <a:ea typeface="한컴 말랑말랑 Bold" panose="020F0803000000000000" pitchFamily="50" charset="-127"/>
+              </a:rPr>
+              <a:t>Summary</a:t>
+            </a:r>
+          </a:p>
+        </p:txBody>
+      </p:sp>
+      <p:sp>
+        <p:nvSpPr>
+          <p:cNvPr id="7" name="직사각형 6">
+            <a:extLst>
+              <a:ext uri="{FF2B5EF4-FFF2-40B4-BE49-F238E27FC236}">
+                <a16:creationId xmlns:a16="http://schemas.microsoft.com/office/drawing/2014/main" id="{4EBF83CB-FCBF-055A-5E05-21C631832BD5}"/>
+              </a:ext>
+            </a:extLst>
+          </p:cNvPr>
+          <p:cNvSpPr/>
+          <p:nvPr/>
+        </p:nvSpPr>
+        <p:spPr>
+          <a:xfrm>
+            <a:off x="4870276" y="836712"/>
+            <a:ext cx="1944216" cy="504056"/>
+          </a:xfrm>
+          <a:prstGeom prst="rect">
+            <a:avLst/>
+          </a:prstGeom>
+        </p:spPr>
+        <p:style>
+          <a:lnRef idx="2">
+            <a:schemeClr val="accent1">
+              <a:shade val="15000"/>
+            </a:schemeClr>
+          </a:lnRef>
+          <a:fillRef idx="1">
+            <a:schemeClr val="accent1"/>
+          </a:fillRef>
+          <a:effectRef idx="0">
+            <a:schemeClr val="accent1"/>
+          </a:effectRef>
+          <a:fontRef idx="minor">
+            <a:schemeClr val="lt1"/>
+          </a:fontRef>
+        </p:style>
+        <p:txBody>
+          <a:bodyPr rtlCol="0" anchor="ctr"/>
+          <a:lstStyle/>
+          <a:p>
+            <a:pPr algn="ctr"/>
+            <a:r>
+              <a:rPr lang="ko-KR" altLang="en-US" sz="2400" dirty="0">
+                <a:latin typeface="한컴 말랑말랑 Bold" panose="020F0803000000000000" pitchFamily="50" charset="-127"/>
+                <a:ea typeface="한컴 말랑말랑 Bold" panose="020F0803000000000000" pitchFamily="50" charset="-127"/>
+              </a:rPr>
+              <a:t>통계학</a:t>
+            </a:r>
+            <a:endParaRPr lang="ko-KR" altLang="en-US" sz="3200" dirty="0">
+              <a:latin typeface="한컴 말랑말랑 Bold" panose="020F0803000000000000" pitchFamily="50" charset="-127"/>
+              <a:ea typeface="한컴 말랑말랑 Bold" panose="020F0803000000000000" pitchFamily="50" charset="-127"/>
+            </a:endParaRPr>
+          </a:p>
+        </p:txBody>
+      </p:sp>
+      <p:sp>
+        <p:nvSpPr>
+          <p:cNvPr id="9" name="직사각형 8">
+            <a:extLst>
+              <a:ext uri="{FF2B5EF4-FFF2-40B4-BE49-F238E27FC236}">
+                <a16:creationId xmlns:a16="http://schemas.microsoft.com/office/drawing/2014/main" id="{E79824AE-C6FC-79CD-A30A-40E889349193}"/>
+              </a:ext>
+            </a:extLst>
+          </p:cNvPr>
+          <p:cNvSpPr/>
+          <p:nvPr/>
+        </p:nvSpPr>
+        <p:spPr>
+          <a:xfrm>
+            <a:off x="1413892" y="2420888"/>
+            <a:ext cx="1944216" cy="504056"/>
+          </a:xfrm>
+          <a:prstGeom prst="rect">
+            <a:avLst/>
+          </a:prstGeom>
+        </p:spPr>
+        <p:style>
+          <a:lnRef idx="2">
+            <a:schemeClr val="accent1">
+              <a:shade val="15000"/>
+            </a:schemeClr>
+          </a:lnRef>
+          <a:fillRef idx="1">
+            <a:schemeClr val="accent1"/>
+          </a:fillRef>
+          <a:effectRef idx="0">
+            <a:schemeClr val="accent1"/>
+          </a:effectRef>
+          <a:fontRef idx="minor">
+            <a:schemeClr val="lt1"/>
+          </a:fontRef>
+        </p:style>
+        <p:txBody>
+          <a:bodyPr rtlCol="0" anchor="ctr"/>
+          <a:lstStyle/>
+          <a:p>
+            <a:pPr algn="ctr"/>
+            <a:r>
+              <a:rPr lang="ko-KR" altLang="en-US" sz="2400" dirty="0">
+                <a:latin typeface="한컴 말랑말랑 Bold" panose="020F0803000000000000" pitchFamily="50" charset="-127"/>
+                <a:ea typeface="한컴 말랑말랑 Bold" panose="020F0803000000000000" pitchFamily="50" charset="-127"/>
+              </a:rPr>
+              <a:t>기술통계</a:t>
+            </a:r>
+            <a:endParaRPr lang="ko-KR" altLang="en-US" sz="3200" dirty="0">
+              <a:latin typeface="한컴 말랑말랑 Bold" panose="020F0803000000000000" pitchFamily="50" charset="-127"/>
+              <a:ea typeface="한컴 말랑말랑 Bold" panose="020F0803000000000000" pitchFamily="50" charset="-127"/>
+            </a:endParaRPr>
+          </a:p>
+        </p:txBody>
+      </p:sp>
+      <p:sp>
+        <p:nvSpPr>
+          <p:cNvPr id="10" name="직사각형 9">
+            <a:extLst>
+              <a:ext uri="{FF2B5EF4-FFF2-40B4-BE49-F238E27FC236}">
+                <a16:creationId xmlns:a16="http://schemas.microsoft.com/office/drawing/2014/main" id="{3C41D334-29FF-4873-077B-1CA764FC20AA}"/>
+              </a:ext>
+            </a:extLst>
+          </p:cNvPr>
+          <p:cNvSpPr/>
+          <p:nvPr/>
+        </p:nvSpPr>
+        <p:spPr>
+          <a:xfrm>
+            <a:off x="8398668" y="2420888"/>
+            <a:ext cx="1944216" cy="504056"/>
+          </a:xfrm>
+          <a:prstGeom prst="rect">
+            <a:avLst/>
+          </a:prstGeom>
+        </p:spPr>
+        <p:style>
+          <a:lnRef idx="2">
+            <a:schemeClr val="accent1">
+              <a:shade val="15000"/>
+            </a:schemeClr>
+          </a:lnRef>
+          <a:fillRef idx="1">
+            <a:schemeClr val="accent1"/>
+          </a:fillRef>
+          <a:effectRef idx="0">
+            <a:schemeClr val="accent1"/>
+          </a:effectRef>
+          <a:fontRef idx="minor">
+            <a:schemeClr val="lt1"/>
+          </a:fontRef>
+        </p:style>
+        <p:txBody>
+          <a:bodyPr rtlCol="0" anchor="ctr"/>
+          <a:lstStyle/>
+          <a:p>
+            <a:pPr algn="ctr"/>
+            <a:r>
+              <a:rPr lang="ko-KR" altLang="en-US" sz="2400" dirty="0">
+                <a:latin typeface="한컴 말랑말랑 Bold" panose="020F0803000000000000" pitchFamily="50" charset="-127"/>
+                <a:ea typeface="한컴 말랑말랑 Bold" panose="020F0803000000000000" pitchFamily="50" charset="-127"/>
+              </a:rPr>
+              <a:t>추론통계</a:t>
+            </a:r>
+            <a:endParaRPr lang="ko-KR" altLang="en-US" sz="3200" dirty="0">
+              <a:latin typeface="한컴 말랑말랑 Bold" panose="020F0803000000000000" pitchFamily="50" charset="-127"/>
+              <a:ea typeface="한컴 말랑말랑 Bold" panose="020F0803000000000000" pitchFamily="50" charset="-127"/>
+            </a:endParaRPr>
+          </a:p>
+        </p:txBody>
+      </p:sp>
+      <p:sp>
+        <p:nvSpPr>
+          <p:cNvPr id="11" name="직사각형 10">
+            <a:extLst>
+              <a:ext uri="{FF2B5EF4-FFF2-40B4-BE49-F238E27FC236}">
+                <a16:creationId xmlns:a16="http://schemas.microsoft.com/office/drawing/2014/main" id="{C9628176-F633-25A0-F7CB-B44223ECE667}"/>
+              </a:ext>
+            </a:extLst>
+          </p:cNvPr>
+          <p:cNvSpPr/>
+          <p:nvPr/>
+        </p:nvSpPr>
+        <p:spPr>
+          <a:xfrm>
+            <a:off x="9856113" y="4049950"/>
+            <a:ext cx="1944216" cy="504056"/>
+          </a:xfrm>
+          <a:prstGeom prst="rect">
+            <a:avLst/>
+          </a:prstGeom>
+        </p:spPr>
+        <p:style>
+          <a:lnRef idx="2">
+            <a:schemeClr val="accent1">
+              <a:shade val="15000"/>
+            </a:schemeClr>
+          </a:lnRef>
+          <a:fillRef idx="1">
+            <a:schemeClr val="accent1"/>
+          </a:fillRef>
+          <a:effectRef idx="0">
+            <a:schemeClr val="accent1"/>
+          </a:effectRef>
+          <a:fontRef idx="minor">
+            <a:schemeClr val="lt1"/>
+          </a:fontRef>
+        </p:style>
+        <p:txBody>
+          <a:bodyPr rtlCol="0" anchor="ctr"/>
+          <a:lstStyle/>
+          <a:p>
+            <a:pPr algn="ctr"/>
+            <a:r>
+              <a:rPr lang="ko-KR" altLang="en-US" sz="2000" dirty="0">
+                <a:latin typeface="한컴 말랑말랑 Bold" panose="020F0803000000000000" pitchFamily="50" charset="-127"/>
+                <a:ea typeface="한컴 말랑말랑 Bold" panose="020F0803000000000000" pitchFamily="50" charset="-127"/>
+              </a:rPr>
+              <a:t>가설검정</a:t>
+            </a:r>
+            <a:endParaRPr lang="ko-KR" altLang="en-US" sz="2800" dirty="0">
+              <a:latin typeface="한컴 말랑말랑 Bold" panose="020F0803000000000000" pitchFamily="50" charset="-127"/>
+              <a:ea typeface="한컴 말랑말랑 Bold" panose="020F0803000000000000" pitchFamily="50" charset="-127"/>
+            </a:endParaRPr>
+          </a:p>
+        </p:txBody>
+      </p:sp>
+      <p:sp>
+        <p:nvSpPr>
+          <p:cNvPr id="12" name="직사각형 11">
+            <a:extLst>
+              <a:ext uri="{FF2B5EF4-FFF2-40B4-BE49-F238E27FC236}">
+                <a16:creationId xmlns:a16="http://schemas.microsoft.com/office/drawing/2014/main" id="{2B4138A7-8A11-225A-36D5-14E270727BAE}"/>
+              </a:ext>
+            </a:extLst>
+          </p:cNvPr>
+          <p:cNvSpPr/>
+          <p:nvPr/>
+        </p:nvSpPr>
+        <p:spPr>
+          <a:xfrm>
+            <a:off x="6526460" y="4049950"/>
+            <a:ext cx="1944216" cy="504056"/>
+          </a:xfrm>
+          <a:prstGeom prst="rect">
+            <a:avLst/>
+          </a:prstGeom>
+        </p:spPr>
+        <p:style>
+          <a:lnRef idx="2">
+            <a:schemeClr val="accent1">
+              <a:shade val="15000"/>
+            </a:schemeClr>
+          </a:lnRef>
+          <a:fillRef idx="1">
+            <a:schemeClr val="accent1"/>
+          </a:fillRef>
+          <a:effectRef idx="0">
+            <a:schemeClr val="accent1"/>
+          </a:effectRef>
+          <a:fontRef idx="minor">
+            <a:schemeClr val="lt1"/>
+          </a:fontRef>
+        </p:style>
+        <p:txBody>
+          <a:bodyPr rtlCol="0" anchor="ctr"/>
+          <a:lstStyle/>
+          <a:p>
+            <a:pPr algn="ctr"/>
+            <a:r>
+              <a:rPr lang="ko-KR" altLang="en-US" sz="2000" dirty="0">
+                <a:latin typeface="한컴 말랑말랑 Bold" panose="020F0803000000000000" pitchFamily="50" charset="-127"/>
+                <a:ea typeface="한컴 말랑말랑 Bold" panose="020F0803000000000000" pitchFamily="50" charset="-127"/>
+              </a:rPr>
+              <a:t>추정</a:t>
+            </a:r>
+            <a:endParaRPr lang="ko-KR" altLang="en-US" sz="2800" dirty="0">
+              <a:latin typeface="한컴 말랑말랑 Bold" panose="020F0803000000000000" pitchFamily="50" charset="-127"/>
+              <a:ea typeface="한컴 말랑말랑 Bold" panose="020F0803000000000000" pitchFamily="50" charset="-127"/>
+            </a:endParaRPr>
+          </a:p>
+        </p:txBody>
+      </p:sp>
+      <p:sp>
+        <p:nvSpPr>
+          <p:cNvPr id="13" name="직사각형 12">
+            <a:extLst>
+              <a:ext uri="{FF2B5EF4-FFF2-40B4-BE49-F238E27FC236}">
+                <a16:creationId xmlns:a16="http://schemas.microsoft.com/office/drawing/2014/main" id="{0DC9EE40-F079-ED83-22D5-957CBE13B387}"/>
+              </a:ext>
+            </a:extLst>
+          </p:cNvPr>
+          <p:cNvSpPr/>
+          <p:nvPr/>
+        </p:nvSpPr>
+        <p:spPr>
+          <a:xfrm>
+            <a:off x="5215061" y="5517232"/>
+            <a:ext cx="1944216" cy="504056"/>
+          </a:xfrm>
+          <a:prstGeom prst="rect">
+            <a:avLst/>
+          </a:prstGeom>
+        </p:spPr>
+        <p:style>
+          <a:lnRef idx="2">
+            <a:schemeClr val="accent1">
+              <a:shade val="15000"/>
+            </a:schemeClr>
+          </a:lnRef>
+          <a:fillRef idx="1">
+            <a:schemeClr val="accent1"/>
+          </a:fillRef>
+          <a:effectRef idx="0">
+            <a:schemeClr val="accent1"/>
+          </a:effectRef>
+          <a:fontRef idx="minor">
+            <a:schemeClr val="lt1"/>
+          </a:fontRef>
+        </p:style>
+        <p:txBody>
+          <a:bodyPr rtlCol="0" anchor="ctr"/>
+          <a:lstStyle/>
+          <a:p>
+            <a:pPr algn="ctr"/>
+            <a:r>
+              <a:rPr lang="ko-KR" altLang="en-US">
+                <a:latin typeface="한컴 말랑말랑 Bold" panose="020F0803000000000000" pitchFamily="50" charset="-127"/>
+                <a:ea typeface="한컴 말랑말랑 Bold" panose="020F0803000000000000" pitchFamily="50" charset="-127"/>
+              </a:rPr>
+              <a:t>점 추정</a:t>
+            </a:r>
+            <a:endParaRPr lang="ko-KR" altLang="en-US" sz="2400" dirty="0">
+              <a:latin typeface="한컴 말랑말랑 Bold" panose="020F0803000000000000" pitchFamily="50" charset="-127"/>
+              <a:ea typeface="한컴 말랑말랑 Bold" panose="020F0803000000000000" pitchFamily="50" charset="-127"/>
+            </a:endParaRPr>
+          </a:p>
+        </p:txBody>
+      </p:sp>
+      <p:sp>
+        <p:nvSpPr>
+          <p:cNvPr id="14" name="직사각형 13">
+            <a:extLst>
+              <a:ext uri="{FF2B5EF4-FFF2-40B4-BE49-F238E27FC236}">
+                <a16:creationId xmlns:a16="http://schemas.microsoft.com/office/drawing/2014/main" id="{D97FCA7F-CA07-F0BA-17EE-A0120E977AEE}"/>
+              </a:ext>
+            </a:extLst>
+          </p:cNvPr>
+          <p:cNvSpPr/>
+          <p:nvPr/>
+        </p:nvSpPr>
+        <p:spPr>
+          <a:xfrm>
+            <a:off x="7678588" y="5517232"/>
+            <a:ext cx="1944216" cy="504056"/>
+          </a:xfrm>
+          <a:prstGeom prst="rect">
+            <a:avLst/>
+          </a:prstGeom>
+        </p:spPr>
+        <p:style>
+          <a:lnRef idx="2">
+            <a:schemeClr val="accent1">
+              <a:shade val="15000"/>
+            </a:schemeClr>
+          </a:lnRef>
+          <a:fillRef idx="1">
+            <a:schemeClr val="accent1"/>
+          </a:fillRef>
+          <a:effectRef idx="0">
+            <a:schemeClr val="accent1"/>
+          </a:effectRef>
+          <a:fontRef idx="minor">
+            <a:schemeClr val="lt1"/>
+          </a:fontRef>
+        </p:style>
+        <p:txBody>
+          <a:bodyPr rtlCol="0" anchor="ctr"/>
+          <a:lstStyle/>
+          <a:p>
+            <a:pPr algn="ctr"/>
+            <a:r>
+              <a:rPr lang="ko-KR" altLang="en-US" dirty="0">
+                <a:latin typeface="한컴 말랑말랑 Bold" panose="020F0803000000000000" pitchFamily="50" charset="-127"/>
+                <a:ea typeface="한컴 말랑말랑 Bold" panose="020F0803000000000000" pitchFamily="50" charset="-127"/>
+              </a:rPr>
+              <a:t>구간 추정</a:t>
+            </a:r>
+            <a:endParaRPr lang="ko-KR" altLang="en-US" sz="2400" dirty="0">
+              <a:latin typeface="한컴 말랑말랑 Bold" panose="020F0803000000000000" pitchFamily="50" charset="-127"/>
+              <a:ea typeface="한컴 말랑말랑 Bold" panose="020F0803000000000000" pitchFamily="50" charset="-127"/>
+            </a:endParaRPr>
+          </a:p>
+        </p:txBody>
+      </p:sp>
+      <p:cxnSp>
+        <p:nvCxnSpPr>
+          <p:cNvPr id="16" name="연결선: 꺾임 15">
+            <a:extLst>
+              <a:ext uri="{FF2B5EF4-FFF2-40B4-BE49-F238E27FC236}">
+                <a16:creationId xmlns:a16="http://schemas.microsoft.com/office/drawing/2014/main" id="{79974693-FA6C-1B23-6CAE-B0D257ECD77F}"/>
+              </a:ext>
+            </a:extLst>
+          </p:cNvPr>
+          <p:cNvCxnSpPr>
+            <a:stCxn id="7" idx="2"/>
+            <a:endCxn id="9" idx="0"/>
+          </p:cNvCxnSpPr>
+          <p:nvPr/>
+        </p:nvCxnSpPr>
+        <p:spPr>
+          <a:xfrm rot="5400000">
+            <a:off x="3574132" y="152636"/>
+            <a:ext cx="1080120" cy="3456384"/>
+          </a:xfrm>
+          <a:prstGeom prst="bentConnector3">
+            <a:avLst/>
+          </a:prstGeom>
+        </p:spPr>
+        <p:style>
+          <a:lnRef idx="3">
+            <a:schemeClr val="dk1"/>
+          </a:lnRef>
+          <a:fillRef idx="0">
+            <a:schemeClr val="dk1"/>
+          </a:fillRef>
+          <a:effectRef idx="2">
+            <a:schemeClr val="dk1"/>
+          </a:effectRef>
+          <a:fontRef idx="minor">
+            <a:schemeClr val="tx1"/>
+          </a:fontRef>
+        </p:style>
+      </p:cxnSp>
+      <p:cxnSp>
+        <p:nvCxnSpPr>
+          <p:cNvPr id="17" name="연결선: 꺾임 16">
+            <a:extLst>
+              <a:ext uri="{FF2B5EF4-FFF2-40B4-BE49-F238E27FC236}">
+                <a16:creationId xmlns:a16="http://schemas.microsoft.com/office/drawing/2014/main" id="{8C593572-D7B4-2E80-44D4-089E8626D8F4}"/>
+              </a:ext>
+            </a:extLst>
+          </p:cNvPr>
+          <p:cNvCxnSpPr>
+            <a:cxnSpLocks/>
+            <a:stCxn id="7" idx="2"/>
+            <a:endCxn id="10" idx="0"/>
+          </p:cNvCxnSpPr>
+          <p:nvPr/>
+        </p:nvCxnSpPr>
+        <p:spPr>
+          <a:xfrm rot="16200000" flipH="1">
+            <a:off x="7066520" y="116632"/>
+            <a:ext cx="1080120" cy="3528392"/>
+          </a:xfrm>
+          <a:prstGeom prst="bentConnector3">
+            <a:avLst>
+              <a:gd name="adj1" fmla="val 50000"/>
+            </a:avLst>
+          </a:prstGeom>
+        </p:spPr>
+        <p:style>
+          <a:lnRef idx="3">
+            <a:schemeClr val="dk1"/>
+          </a:lnRef>
+          <a:fillRef idx="0">
+            <a:schemeClr val="dk1"/>
+          </a:fillRef>
+          <a:effectRef idx="2">
+            <a:schemeClr val="dk1"/>
+          </a:effectRef>
+          <a:fontRef idx="minor">
+            <a:schemeClr val="tx1"/>
+          </a:fontRef>
+        </p:style>
+      </p:cxnSp>
+      <p:cxnSp>
+        <p:nvCxnSpPr>
+          <p:cNvPr id="20" name="연결선: 꺾임 19">
+            <a:extLst>
+              <a:ext uri="{FF2B5EF4-FFF2-40B4-BE49-F238E27FC236}">
+                <a16:creationId xmlns:a16="http://schemas.microsoft.com/office/drawing/2014/main" id="{4895DAF6-3C2C-DE41-F201-F449A30C8BC2}"/>
+              </a:ext>
+            </a:extLst>
+          </p:cNvPr>
+          <p:cNvCxnSpPr>
+            <a:cxnSpLocks/>
+            <a:stCxn id="10" idx="2"/>
+            <a:endCxn id="12" idx="0"/>
+          </p:cNvCxnSpPr>
+          <p:nvPr/>
+        </p:nvCxnSpPr>
+        <p:spPr>
+          <a:xfrm rot="5400000">
+            <a:off x="7872169" y="2551343"/>
+            <a:ext cx="1125006" cy="1872208"/>
+          </a:xfrm>
+          <a:prstGeom prst="bentConnector3">
+            <a:avLst>
+              <a:gd name="adj1" fmla="val 50000"/>
+            </a:avLst>
+          </a:prstGeom>
+        </p:spPr>
+        <p:style>
+          <a:lnRef idx="3">
+            <a:schemeClr val="dk1"/>
+          </a:lnRef>
+          <a:fillRef idx="0">
+            <a:schemeClr val="dk1"/>
+          </a:fillRef>
+          <a:effectRef idx="2">
+            <a:schemeClr val="dk1"/>
+          </a:effectRef>
+          <a:fontRef idx="minor">
+            <a:schemeClr val="tx1"/>
+          </a:fontRef>
+        </p:style>
+      </p:cxnSp>
+      <p:cxnSp>
+        <p:nvCxnSpPr>
+          <p:cNvPr id="21" name="연결선: 꺾임 20">
+            <a:extLst>
+              <a:ext uri="{FF2B5EF4-FFF2-40B4-BE49-F238E27FC236}">
+                <a16:creationId xmlns:a16="http://schemas.microsoft.com/office/drawing/2014/main" id="{80DFB1D7-9D5F-44C8-960C-163848C3219C}"/>
+              </a:ext>
+            </a:extLst>
+          </p:cNvPr>
+          <p:cNvCxnSpPr>
+            <a:cxnSpLocks/>
+            <a:stCxn id="10" idx="2"/>
+            <a:endCxn id="11" idx="0"/>
+          </p:cNvCxnSpPr>
+          <p:nvPr/>
+        </p:nvCxnSpPr>
+        <p:spPr>
+          <a:xfrm rot="16200000" flipH="1">
+            <a:off x="9536995" y="2758724"/>
+            <a:ext cx="1125006" cy="1457445"/>
+          </a:xfrm>
+          <a:prstGeom prst="bentConnector3">
+            <a:avLst>
+              <a:gd name="adj1" fmla="val 50000"/>
+            </a:avLst>
+          </a:prstGeom>
+        </p:spPr>
+        <p:style>
+          <a:lnRef idx="3">
+            <a:schemeClr val="dk1"/>
+          </a:lnRef>
+          <a:fillRef idx="0">
+            <a:schemeClr val="dk1"/>
+          </a:fillRef>
+          <a:effectRef idx="2">
+            <a:schemeClr val="dk1"/>
+          </a:effectRef>
+          <a:fontRef idx="minor">
+            <a:schemeClr val="tx1"/>
+          </a:fontRef>
+        </p:style>
+      </p:cxnSp>
+      <p:cxnSp>
+        <p:nvCxnSpPr>
+          <p:cNvPr id="27" name="연결선: 꺾임 26">
+            <a:extLst>
+              <a:ext uri="{FF2B5EF4-FFF2-40B4-BE49-F238E27FC236}">
+                <a16:creationId xmlns:a16="http://schemas.microsoft.com/office/drawing/2014/main" id="{770B1B04-1989-43E7-958B-11AB127AA072}"/>
+              </a:ext>
+            </a:extLst>
+          </p:cNvPr>
+          <p:cNvCxnSpPr>
+            <a:cxnSpLocks/>
+            <a:stCxn id="12" idx="2"/>
+            <a:endCxn id="13" idx="0"/>
+          </p:cNvCxnSpPr>
+          <p:nvPr/>
+        </p:nvCxnSpPr>
+        <p:spPr>
+          <a:xfrm rot="5400000">
+            <a:off x="6361256" y="4379920"/>
+            <a:ext cx="963226" cy="1311399"/>
+          </a:xfrm>
+          <a:prstGeom prst="bentConnector3">
+            <a:avLst>
+              <a:gd name="adj1" fmla="val 50000"/>
+            </a:avLst>
+          </a:prstGeom>
+        </p:spPr>
+        <p:style>
+          <a:lnRef idx="3">
+            <a:schemeClr val="dk1"/>
+          </a:lnRef>
+          <a:fillRef idx="0">
+            <a:schemeClr val="dk1"/>
+          </a:fillRef>
+          <a:effectRef idx="2">
+            <a:schemeClr val="dk1"/>
+          </a:effectRef>
+          <a:fontRef idx="minor">
+            <a:schemeClr val="tx1"/>
+          </a:fontRef>
+        </p:style>
+      </p:cxnSp>
+      <p:cxnSp>
+        <p:nvCxnSpPr>
+          <p:cNvPr id="28" name="연결선: 꺾임 27">
+            <a:extLst>
+              <a:ext uri="{FF2B5EF4-FFF2-40B4-BE49-F238E27FC236}">
+                <a16:creationId xmlns:a16="http://schemas.microsoft.com/office/drawing/2014/main" id="{36C17717-5923-BF72-668E-9BBB810AE42C}"/>
+              </a:ext>
+            </a:extLst>
+          </p:cNvPr>
+          <p:cNvCxnSpPr>
+            <a:cxnSpLocks/>
+            <a:stCxn id="12" idx="2"/>
+            <a:endCxn id="14" idx="0"/>
+          </p:cNvCxnSpPr>
+          <p:nvPr/>
+        </p:nvCxnSpPr>
+        <p:spPr>
+          <a:xfrm rot="16200000" flipH="1">
+            <a:off x="7593019" y="4459555"/>
+            <a:ext cx="963226" cy="1152128"/>
+          </a:xfrm>
+          <a:prstGeom prst="bentConnector3">
+            <a:avLst>
+              <a:gd name="adj1" fmla="val 50000"/>
+            </a:avLst>
+          </a:prstGeom>
+        </p:spPr>
+        <p:style>
+          <a:lnRef idx="3">
+            <a:schemeClr val="dk1"/>
+          </a:lnRef>
+          <a:fillRef idx="0">
+            <a:schemeClr val="dk1"/>
+          </a:fillRef>
+          <a:effectRef idx="2">
+            <a:schemeClr val="dk1"/>
+          </a:effectRef>
+          <a:fontRef idx="minor">
+            <a:schemeClr val="tx1"/>
+          </a:fontRef>
+        </p:style>
+      </p:cxnSp>
+      <p:sp>
+        <p:nvSpPr>
+          <p:cNvPr id="33" name="TextBox 32">
+            <a:extLst>
+              <a:ext uri="{FF2B5EF4-FFF2-40B4-BE49-F238E27FC236}">
+                <a16:creationId xmlns:a16="http://schemas.microsoft.com/office/drawing/2014/main" id="{CF455240-824F-1FFC-FDF1-FF857BFE6523}"/>
+              </a:ext>
+            </a:extLst>
+          </p:cNvPr>
+          <p:cNvSpPr txBox="1"/>
+          <p:nvPr/>
+        </p:nvSpPr>
+        <p:spPr>
+          <a:xfrm>
+            <a:off x="1256042" y="3362479"/>
+            <a:ext cx="2076209" cy="1169551"/>
+          </a:xfrm>
+          <a:prstGeom prst="rect">
+            <a:avLst/>
+          </a:prstGeom>
+          <a:noFill/>
+        </p:spPr>
+        <p:txBody>
+          <a:bodyPr wrap="none" rtlCol="0">
+            <a:spAutoFit/>
+          </a:bodyPr>
+          <a:lstStyle/>
+          <a:p>
+            <a:pPr marL="285750" indent="-285750">
+              <a:buFont typeface="Wingdings" panose="05000000000000000000" pitchFamily="2" charset="2"/>
+              <a:buChar char="§"/>
+            </a:pPr>
+            <a:r>
+              <a:rPr lang="ko-KR" altLang="en-US" sz="1400" dirty="0"/>
+              <a:t>모집단과</a:t>
+            </a:r>
+            <a:r>
+              <a:rPr lang="en-US" altLang="ko-KR" sz="1400" dirty="0"/>
+              <a:t> </a:t>
+            </a:r>
+            <a:r>
+              <a:rPr lang="ko-KR" altLang="en-US" sz="1400" dirty="0"/>
+              <a:t>표본</a:t>
+            </a:r>
+            <a:r>
+              <a:rPr lang="en-US" altLang="ko-KR" sz="1400" dirty="0"/>
+              <a:t> </a:t>
+            </a:r>
+          </a:p>
+          <a:p>
+            <a:pPr marL="285750" indent="-285750">
+              <a:buFont typeface="Wingdings" panose="05000000000000000000" pitchFamily="2" charset="2"/>
+              <a:buChar char="§"/>
+            </a:pPr>
+            <a:r>
+              <a:rPr lang="ko-KR" altLang="en-US" sz="1400" dirty="0"/>
+              <a:t>평균</a:t>
+            </a:r>
+            <a:r>
+              <a:rPr lang="en-US" altLang="ko-KR" sz="1400" dirty="0"/>
+              <a:t>, </a:t>
+            </a:r>
+            <a:r>
+              <a:rPr lang="ko-KR" altLang="en-US" sz="1400" dirty="0"/>
+              <a:t>분산</a:t>
+            </a:r>
+            <a:r>
+              <a:rPr lang="en-US" altLang="ko-KR" sz="1400" dirty="0"/>
+              <a:t>, </a:t>
+            </a:r>
+            <a:r>
+              <a:rPr lang="ko-KR" altLang="en-US" sz="1400" dirty="0"/>
+              <a:t>표준편차</a:t>
+            </a:r>
+            <a:endParaRPr lang="en-US" altLang="ko-KR" sz="1400" dirty="0"/>
+          </a:p>
+          <a:p>
+            <a:pPr marL="285750" indent="-285750">
+              <a:buFont typeface="Wingdings" panose="05000000000000000000" pitchFamily="2" charset="2"/>
+              <a:buChar char="§"/>
+            </a:pPr>
+            <a:r>
+              <a:rPr lang="ko-KR" altLang="en-US" sz="1400" dirty="0"/>
+              <a:t>기술 통계량</a:t>
+            </a:r>
+            <a:endParaRPr lang="en-US" altLang="ko-KR" sz="1400" dirty="0"/>
+          </a:p>
+          <a:p>
+            <a:pPr marL="285750" indent="-285750">
+              <a:buFont typeface="Wingdings" panose="05000000000000000000" pitchFamily="2" charset="2"/>
+              <a:buChar char="§"/>
+            </a:pPr>
+            <a:r>
+              <a:rPr lang="ko-KR" altLang="en-US" sz="1400" dirty="0"/>
+              <a:t>히스토그램</a:t>
+            </a:r>
+            <a:r>
+              <a:rPr lang="en-US" altLang="ko-KR" sz="1400" dirty="0"/>
+              <a:t>. </a:t>
+            </a:r>
+            <a:r>
+              <a:rPr lang="ko-KR" altLang="en-US" sz="1400" dirty="0"/>
+              <a:t>산포도</a:t>
+            </a:r>
+            <a:endParaRPr lang="en-US" altLang="ko-KR" sz="1400" dirty="0"/>
+          </a:p>
+          <a:p>
+            <a:pPr marL="285750" indent="-285750">
+              <a:buFont typeface="Wingdings" panose="05000000000000000000" pitchFamily="2" charset="2"/>
+              <a:buChar char="§"/>
+            </a:pPr>
+            <a:r>
+              <a:rPr lang="ko-KR" altLang="en-US" sz="1400" dirty="0"/>
+              <a:t>상관관계</a:t>
+            </a:r>
+            <a:r>
+              <a:rPr lang="en-US" altLang="ko-KR" sz="1400" dirty="0"/>
+              <a:t>, </a:t>
+            </a:r>
+            <a:r>
+              <a:rPr lang="ko-KR" altLang="en-US" sz="1400" dirty="0"/>
+              <a:t>공분산</a:t>
+            </a:r>
+          </a:p>
+        </p:txBody>
+      </p:sp>
+      <p:cxnSp>
+        <p:nvCxnSpPr>
+          <p:cNvPr id="36" name="직선 화살표 연결선 35">
+            <a:extLst>
+              <a:ext uri="{FF2B5EF4-FFF2-40B4-BE49-F238E27FC236}">
+                <a16:creationId xmlns:a16="http://schemas.microsoft.com/office/drawing/2014/main" id="{FA5CDD18-9280-6EB1-D8BD-A56DE168DF14}"/>
+              </a:ext>
+            </a:extLst>
+          </p:cNvPr>
+          <p:cNvCxnSpPr>
+            <a:cxnSpLocks/>
+            <a:stCxn id="9" idx="3"/>
+            <a:endCxn id="10" idx="1"/>
+          </p:cNvCxnSpPr>
+          <p:nvPr/>
+        </p:nvCxnSpPr>
+        <p:spPr>
+          <a:xfrm>
+            <a:off x="3358108" y="2672916"/>
+            <a:ext cx="5040560" cy="0"/>
+          </a:xfrm>
+          <a:prstGeom prst="straightConnector1">
+            <a:avLst/>
+          </a:prstGeom>
+          <a:ln>
+            <a:tailEnd type="triangle"/>
+          </a:ln>
+        </p:spPr>
+        <p:style>
+          <a:lnRef idx="1">
+            <a:schemeClr val="accent1"/>
+          </a:lnRef>
+          <a:fillRef idx="0">
+            <a:schemeClr val="accent1"/>
+          </a:fillRef>
+          <a:effectRef idx="0">
+            <a:schemeClr val="accent1"/>
+          </a:effectRef>
+          <a:fontRef idx="minor">
+            <a:schemeClr val="tx1"/>
+          </a:fontRef>
+        </p:style>
+      </p:cxnSp>
+      <p:sp>
+        <p:nvSpPr>
+          <p:cNvPr id="34" name="직사각형 33">
+            <a:extLst>
+              <a:ext uri="{FF2B5EF4-FFF2-40B4-BE49-F238E27FC236}">
+                <a16:creationId xmlns:a16="http://schemas.microsoft.com/office/drawing/2014/main" id="{ED5A98A7-C86E-3D41-319D-BA1E4ECEC36E}"/>
+              </a:ext>
+            </a:extLst>
+          </p:cNvPr>
+          <p:cNvSpPr/>
+          <p:nvPr/>
+        </p:nvSpPr>
+        <p:spPr>
+          <a:xfrm>
+            <a:off x="4894706" y="2420887"/>
+            <a:ext cx="1944216" cy="504056"/>
+          </a:xfrm>
+          <a:prstGeom prst="rect">
+            <a:avLst/>
+          </a:prstGeom>
+          <a:solidFill>
+            <a:srgbClr val="C00000"/>
+          </a:solidFill>
+        </p:spPr>
+        <p:style>
+          <a:lnRef idx="2">
+            <a:schemeClr val="accent1">
+              <a:shade val="15000"/>
+            </a:schemeClr>
+          </a:lnRef>
+          <a:fillRef idx="1">
+            <a:schemeClr val="accent1"/>
+          </a:fillRef>
+          <a:effectRef idx="0">
+            <a:schemeClr val="accent1"/>
+          </a:effectRef>
+          <a:fontRef idx="minor">
+            <a:schemeClr val="lt1"/>
+          </a:fontRef>
+        </p:style>
+        <p:txBody>
+          <a:bodyPr rtlCol="0" anchor="ctr"/>
+          <a:lstStyle/>
+          <a:p>
+            <a:pPr algn="ctr"/>
+            <a:r>
+              <a:rPr lang="ko-KR" altLang="en-US" sz="2400" dirty="0">
+                <a:latin typeface="한컴 말랑말랑 Bold" panose="020F0803000000000000" pitchFamily="50" charset="-127"/>
+                <a:ea typeface="한컴 말랑말랑 Bold" panose="020F0803000000000000" pitchFamily="50" charset="-127"/>
+              </a:rPr>
+              <a:t>확률론</a:t>
+            </a:r>
+            <a:endParaRPr lang="ko-KR" altLang="en-US" sz="3200" dirty="0">
+              <a:latin typeface="한컴 말랑말랑 Bold" panose="020F0803000000000000" pitchFamily="50" charset="-127"/>
+              <a:ea typeface="한컴 말랑말랑 Bold" panose="020F0803000000000000" pitchFamily="50" charset="-127"/>
+            </a:endParaRPr>
+          </a:p>
+        </p:txBody>
+      </p:sp>
+      <p:sp>
+        <p:nvSpPr>
+          <p:cNvPr id="38" name="TextBox 37">
+            <a:extLst>
+              <a:ext uri="{FF2B5EF4-FFF2-40B4-BE49-F238E27FC236}">
+                <a16:creationId xmlns:a16="http://schemas.microsoft.com/office/drawing/2014/main" id="{0899A9F2-C66D-BE34-1C34-A3E25F200FBA}"/>
+              </a:ext>
+            </a:extLst>
+          </p:cNvPr>
+          <p:cNvSpPr txBox="1"/>
+          <p:nvPr/>
+        </p:nvSpPr>
+        <p:spPr>
+          <a:xfrm>
+            <a:off x="4849771" y="3376616"/>
+            <a:ext cx="1191352" cy="523220"/>
+          </a:xfrm>
+          <a:prstGeom prst="rect">
+            <a:avLst/>
+          </a:prstGeom>
+          <a:noFill/>
+        </p:spPr>
+        <p:txBody>
+          <a:bodyPr wrap="none" rtlCol="0">
+            <a:spAutoFit/>
+          </a:bodyPr>
+          <a:lstStyle/>
+          <a:p>
+            <a:pPr marL="285750" indent="-285750">
+              <a:buFont typeface="Wingdings" panose="05000000000000000000" pitchFamily="2" charset="2"/>
+              <a:buChar char="§"/>
+            </a:pPr>
+            <a:r>
+              <a:rPr lang="ko-KR" altLang="en-US" sz="1400" dirty="0"/>
+              <a:t>확률변수</a:t>
+            </a:r>
+            <a:endParaRPr lang="en-US" altLang="ko-KR" sz="1400" dirty="0"/>
+          </a:p>
+          <a:p>
+            <a:pPr marL="285750" indent="-285750">
+              <a:buFont typeface="Wingdings" panose="05000000000000000000" pitchFamily="2" charset="2"/>
+              <a:buChar char="§"/>
+            </a:pPr>
+            <a:r>
+              <a:rPr lang="ko-KR" altLang="en-US" sz="1400" dirty="0"/>
+              <a:t>확률분포</a:t>
+            </a:r>
+          </a:p>
+        </p:txBody>
+      </p:sp>
+    </p:spTree>
+    <p:extLst>
+      <p:ext uri="{BB962C8B-B14F-4D97-AF65-F5344CB8AC3E}">
+        <p14:creationId xmlns:p14="http://schemas.microsoft.com/office/powerpoint/2010/main" val="3357988805"/>
+      </p:ext>
+    </p:extLst>
+  </p:cSld>
+  <p:clrMapOvr>
+    <a:masterClrMapping/>
+  </p:clrMapOvr>
+  <mc:AlternateContent xmlns:mc="http://schemas.openxmlformats.org/markup-compatibility/2006" xmlns:p14="http://schemas.microsoft.com/office/powerpoint/2010/main">
+    <mc:Choice Requires="p14">
+      <p:transition spd="med" p14:dur="700">
+        <p:fade/>
+      </p:transition>
+    </mc:Choice>
+    <mc:Fallback xmlns="">
+      <p:transition spd="med">
+        <p:fade/>
+      </p:transition>
+    </mc:Fallback>
+  </mc:AlternateContent>
+</p:sld>
+</file>
+
+<file path=ppt/slides/slide20.xml><?xml version="1.0" encoding="utf-8"?>
 <p:sld xmlns:a="http://schemas.openxmlformats.org/drawingml/2006/main" xmlns:r="http://schemas.openxmlformats.org/officeDocument/2006/relationships" xmlns:p="http://schemas.openxmlformats.org/presentationml/2006/main">
   <p:cSld>
     <p:spTree>
@@ -13084,7 +11935,7 @@
             <a:pPr rtl="0"/>
             <a:fld id="{A3F31473-23EB-4724-8B59-FE6D21D89FA4}" type="slidenum">
               <a:rPr lang="en-US" altLang="ko-KR" noProof="0" smtClean="0"/>
-              <a:t>23</a:t>
+              <a:t>20</a:t>
             </a:fld>
             <a:endParaRPr lang="en-US" altLang="ko-KR" noProof="0" dirty="0"/>
           </a:p>
@@ -13863,7 +12714,7 @@
 </p:sld>
 </file>
 
-<file path=ppt/slides/slide24.xml><?xml version="1.0" encoding="utf-8"?>
+<file path=ppt/slides/slide21.xml><?xml version="1.0" encoding="utf-8"?>
 <p:sld xmlns:a="http://schemas.openxmlformats.org/drawingml/2006/main" xmlns:r="http://schemas.openxmlformats.org/officeDocument/2006/relationships" xmlns:p="http://schemas.openxmlformats.org/presentationml/2006/main">
   <p:cSld>
     <p:spTree>
@@ -13898,7 +12749,7 @@
             <a:pPr rtl="0"/>
             <a:fld id="{A3F31473-23EB-4724-8B59-FE6D21D89FA4}" type="slidenum">
               <a:rPr lang="en-US" altLang="ko-KR" noProof="0" smtClean="0"/>
-              <a:t>24</a:t>
+              <a:t>21</a:t>
             </a:fld>
             <a:endParaRPr lang="en-US" altLang="ko-KR" noProof="0" dirty="0"/>
           </a:p>
@@ -14629,7 +13480,7 @@
 </p:sld>
 </file>
 
-<file path=ppt/slides/slide25.xml><?xml version="1.0" encoding="utf-8"?>
+<file path=ppt/slides/slide22.xml><?xml version="1.0" encoding="utf-8"?>
 <p:sld xmlns:a="http://schemas.openxmlformats.org/drawingml/2006/main" xmlns:r="http://schemas.openxmlformats.org/officeDocument/2006/relationships" xmlns:p="http://schemas.openxmlformats.org/presentationml/2006/main">
   <p:cSld>
     <p:spTree>
@@ -14676,7 +13527,7 @@
             <a:pPr rtl="0"/>
             <a:fld id="{A3F31473-23EB-4724-8B59-FE6D21D89FA4}" type="slidenum">
               <a:rPr lang="en-US" altLang="ko-KR" noProof="0" smtClean="0"/>
-              <a:t>25</a:t>
+              <a:t>22</a:t>
             </a:fld>
             <a:endParaRPr lang="en-US" altLang="ko-KR" noProof="0" dirty="0"/>
           </a:p>
@@ -16281,7 +15132,55 @@
                 <a:ea typeface="맑은 고딕 Semilight" panose="020B0502040204020203" pitchFamily="50" charset="-127"/>
                 <a:cs typeface="맑은 고딕 Semilight" panose="020B0502040204020203" pitchFamily="50" charset="-127"/>
               </a:rPr>
-              <a:t>하는 과정</a:t>
+              <a:t>하는 과정으로</a:t>
+            </a:r>
+            <a:r>
+              <a:rPr lang="en-US" altLang="ko-KR" sz="1600" dirty="0">
+                <a:latin typeface="맑은 고딕 Semilight" panose="020B0502040204020203" pitchFamily="50" charset="-127"/>
+                <a:ea typeface="맑은 고딕 Semilight" panose="020B0502040204020203" pitchFamily="50" charset="-127"/>
+                <a:cs typeface="맑은 고딕 Semilight" panose="020B0502040204020203" pitchFamily="50" charset="-127"/>
+              </a:rPr>
+              <a:t> </a:t>
+            </a:r>
+            <a:r>
+              <a:rPr lang="ko-KR" altLang="en-US" sz="1600" dirty="0">
+                <a:latin typeface="맑은 고딕 Semilight" panose="020B0502040204020203" pitchFamily="50" charset="-127"/>
+                <a:ea typeface="맑은 고딕 Semilight" panose="020B0502040204020203" pitchFamily="50" charset="-127"/>
+                <a:cs typeface="맑은 고딕 Semilight" panose="020B0502040204020203" pitchFamily="50" charset="-127"/>
+              </a:rPr>
+              <a:t>점추정과</a:t>
+            </a:r>
+            <a:r>
+              <a:rPr lang="en-US" altLang="ko-KR" sz="1600" dirty="0">
+                <a:latin typeface="맑은 고딕 Semilight" panose="020B0502040204020203" pitchFamily="50" charset="-127"/>
+                <a:ea typeface="맑은 고딕 Semilight" panose="020B0502040204020203" pitchFamily="50" charset="-127"/>
+                <a:cs typeface="맑은 고딕 Semilight" panose="020B0502040204020203" pitchFamily="50" charset="-127"/>
+              </a:rPr>
+              <a:t> </a:t>
+            </a:r>
+            <a:r>
+              <a:rPr lang="ko-KR" altLang="en-US" sz="1600" dirty="0">
+                <a:latin typeface="맑은 고딕 Semilight" panose="020B0502040204020203" pitchFamily="50" charset="-127"/>
+                <a:ea typeface="맑은 고딕 Semilight" panose="020B0502040204020203" pitchFamily="50" charset="-127"/>
+                <a:cs typeface="맑은 고딕 Semilight" panose="020B0502040204020203" pitchFamily="50" charset="-127"/>
+              </a:rPr>
+              <a:t>구간추정이</a:t>
+            </a:r>
+            <a:r>
+              <a:rPr lang="en-US" altLang="ko-KR" sz="1600" dirty="0">
+                <a:latin typeface="맑은 고딕 Semilight" panose="020B0502040204020203" pitchFamily="50" charset="-127"/>
+                <a:ea typeface="맑은 고딕 Semilight" panose="020B0502040204020203" pitchFamily="50" charset="-127"/>
+                <a:cs typeface="맑은 고딕 Semilight" panose="020B0502040204020203" pitchFamily="50" charset="-127"/>
+              </a:rPr>
+              <a:t> </a:t>
+            </a:r>
+            <a:r>
+              <a:rPr lang="ko-KR" altLang="en-US" sz="1600" dirty="0">
+                <a:latin typeface="맑은 고딕 Semilight" panose="020B0502040204020203" pitchFamily="50" charset="-127"/>
+                <a:ea typeface="맑은 고딕 Semilight" panose="020B0502040204020203" pitchFamily="50" charset="-127"/>
+                <a:cs typeface="맑은 고딕 Semilight" panose="020B0502040204020203" pitchFamily="50" charset="-127"/>
+              </a:rPr>
+              <a:t>있음</a:t>
             </a:r>
             <a:endParaRPr lang="en-US" altLang="ko-KR" sz="1600" dirty="0">
               <a:latin typeface="맑은 고딕 Semilight" panose="020B0502040204020203" pitchFamily="50" charset="-127"/>
@@ -16608,12 +15507,20 @@
           <a:p>
             <a:pPr algn="ctr"/>
             <a:r>
+              <a:rPr lang="ko-KR" altLang="en-US" sz="3200" b="1" dirty="0" err="1">
+                <a:latin typeface="맑은 고딕 Semilight" panose="020B0502040204020203" pitchFamily="50" charset="-127"/>
+                <a:ea typeface="맑은 고딕 Semilight" panose="020B0502040204020203" pitchFamily="50" charset="-127"/>
+                <a:cs typeface="맑은 고딕 Semilight" panose="020B0502040204020203" pitchFamily="50" charset="-127"/>
+              </a:rPr>
+              <a:t>모수</a:t>
+            </a:r>
+            <a:r>
               <a:rPr lang="ko-KR" altLang="en-US" sz="3200" b="1" dirty="0">
                 <a:latin typeface="맑은 고딕 Semilight" panose="020B0502040204020203" pitchFamily="50" charset="-127"/>
                 <a:ea typeface="맑은 고딕 Semilight" panose="020B0502040204020203" pitchFamily="50" charset="-127"/>
                 <a:cs typeface="맑은 고딕 Semilight" panose="020B0502040204020203" pitchFamily="50" charset="-127"/>
               </a:rPr>
-              <a:t>추정</a:t>
+              <a:t> 추정</a:t>
             </a:r>
             <a:r>
               <a:rPr lang="en-US" altLang="ko-KR" sz="3200" b="1" dirty="0">
@@ -16621,7 +15528,7 @@
                 <a:ea typeface="맑은 고딕 Semilight" panose="020B0502040204020203" pitchFamily="50" charset="-127"/>
                 <a:cs typeface="맑은 고딕 Semilight" panose="020B0502040204020203" pitchFamily="50" charset="-127"/>
               </a:rPr>
-              <a:t>(Estimation)</a:t>
+              <a:t>(Parameter</a:t>
             </a:r>
             <a:r>
               <a:rPr lang="ko-KR" altLang="en-US" sz="3200" b="1" dirty="0">
@@ -16629,8 +15536,21 @@
                 <a:ea typeface="맑은 고딕 Semilight" panose="020B0502040204020203" pitchFamily="50" charset="-127"/>
                 <a:cs typeface="맑은 고딕 Semilight" panose="020B0502040204020203" pitchFamily="50" charset="-127"/>
               </a:rPr>
-              <a:t>이란</a:t>
-            </a:r>
+              <a:t> </a:t>
+            </a:r>
+            <a:r>
+              <a:rPr lang="en-US" altLang="ko-KR" sz="3200" b="1" dirty="0">
+                <a:latin typeface="맑은 고딕 Semilight" panose="020B0502040204020203" pitchFamily="50" charset="-127"/>
+                <a:ea typeface="맑은 고딕 Semilight" panose="020B0502040204020203" pitchFamily="50" charset="-127"/>
+                <a:cs typeface="맑은 고딕 Semilight" panose="020B0502040204020203" pitchFamily="50" charset="-127"/>
+              </a:rPr>
+              <a:t>Estimation)</a:t>
+            </a:r>
+            <a:endParaRPr lang="ko-KR" altLang="en-US" sz="3200" b="1" dirty="0">
+              <a:latin typeface="맑은 고딕 Semilight" panose="020B0502040204020203" pitchFamily="50" charset="-127"/>
+              <a:ea typeface="맑은 고딕 Semilight" panose="020B0502040204020203" pitchFamily="50" charset="-127"/>
+              <a:cs typeface="맑은 고딕 Semilight" panose="020B0502040204020203" pitchFamily="50" charset="-127"/>
+            </a:endParaRPr>
           </a:p>
         </p:txBody>
       </p:sp>
@@ -16841,191 +15761,6 @@
   <p:cSld>
     <p:spTree>
       <p:nvGrpSpPr>
-        <p:cNvPr id="1" name=""/>
-        <p:cNvGrpSpPr/>
-        <p:nvPr/>
-      </p:nvGrpSpPr>
-      <p:grpSpPr>
-        <a:xfrm>
-          <a:off x="0" y="0"/>
-          <a:ext cx="0" cy="0"/>
-          <a:chOff x="0" y="0"/>
-          <a:chExt cx="0" cy="0"/>
-        </a:xfrm>
-      </p:grpSpPr>
-      <p:sp>
-        <p:nvSpPr>
-          <p:cNvPr id="8" name="슬라이드 번호 개체 틀 7"/>
-          <p:cNvSpPr>
-            <a:spLocks noGrp="1"/>
-          </p:cNvSpPr>
-          <p:nvPr>
-            <p:ph type="sldNum" sz="quarter" idx="12"/>
-          </p:nvPr>
-        </p:nvSpPr>
-        <p:spPr/>
-        <p:txBody>
-          <a:bodyPr/>
-          <a:lstStyle/>
-          <a:p>
-            <a:pPr rtl="0"/>
-            <a:fld id="{A3F31473-23EB-4724-8B59-FE6D21D89FA4}" type="slidenum">
-              <a:rPr lang="en-US" altLang="ko-KR" noProof="0" smtClean="0"/>
-              <a:t>6</a:t>
-            </a:fld>
-            <a:endParaRPr lang="en-US" altLang="ko-KR" noProof="0" dirty="0"/>
-          </a:p>
-        </p:txBody>
-      </p:sp>
-      <p:pic>
-        <p:nvPicPr>
-          <p:cNvPr id="4" name="그림 3">
-            <a:extLst>
-              <a:ext uri="{FF2B5EF4-FFF2-40B4-BE49-F238E27FC236}">
-                <a16:creationId xmlns:a16="http://schemas.microsoft.com/office/drawing/2014/main" id="{5D7582D2-ECD3-3451-AFFD-C9FDC9C3D0C1}"/>
-              </a:ext>
-            </a:extLst>
-          </p:cNvPr>
-          <p:cNvPicPr>
-            <a:picLocks noChangeAspect="1"/>
-          </p:cNvPicPr>
-          <p:nvPr/>
-        </p:nvPicPr>
-        <p:blipFill>
-          <a:blip r:embed="rId3">
-            <a:extLst>
-              <a:ext uri="{BEBA8EAE-BF5A-486C-A8C5-ECC9F3942E4B}">
-                <a14:imgProps xmlns:a14="http://schemas.microsoft.com/office/drawing/2010/main">
-                  <a14:imgLayer r:embed="rId4">
-                    <a14:imgEffect>
-                      <a14:colorTemperature colorTemp="4700"/>
-                    </a14:imgEffect>
-                  </a14:imgLayer>
-                </a14:imgProps>
-              </a:ext>
-            </a:extLst>
-          </a:blip>
-          <a:stretch>
-            <a:fillRect/>
-          </a:stretch>
-        </p:blipFill>
-        <p:spPr>
-          <a:xfrm>
-            <a:off x="1971954" y="1417945"/>
-            <a:ext cx="8226914" cy="4701094"/>
-          </a:xfrm>
-          <a:prstGeom prst="rect">
-            <a:avLst/>
-          </a:prstGeom>
-        </p:spPr>
-      </p:pic>
-      <p:sp>
-        <p:nvSpPr>
-          <p:cNvPr id="5" name="TextBox 4">
-            <a:extLst>
-              <a:ext uri="{FF2B5EF4-FFF2-40B4-BE49-F238E27FC236}">
-                <a16:creationId xmlns:a16="http://schemas.microsoft.com/office/drawing/2014/main" id="{194C9269-781B-D026-2369-5F02FF39A74A}"/>
-              </a:ext>
-            </a:extLst>
-          </p:cNvPr>
-          <p:cNvSpPr txBox="1"/>
-          <p:nvPr/>
-        </p:nvSpPr>
-        <p:spPr>
-          <a:xfrm>
-            <a:off x="117748" y="260648"/>
-            <a:ext cx="11521280" cy="584775"/>
-          </a:xfrm>
-          <a:prstGeom prst="rect">
-            <a:avLst/>
-          </a:prstGeom>
-          <a:noFill/>
-        </p:spPr>
-        <p:txBody>
-          <a:bodyPr wrap="square" rtlCol="0">
-            <a:spAutoFit/>
-          </a:bodyPr>
-          <a:lstStyle/>
-          <a:p>
-            <a:pPr algn="ctr"/>
-            <a:r>
-              <a:rPr lang="ko-KR" altLang="en-US" sz="3200" b="1" dirty="0" err="1">
-                <a:latin typeface="맑은 고딕 Semilight" panose="020B0502040204020203" pitchFamily="50" charset="-127"/>
-                <a:ea typeface="맑은 고딕 Semilight" panose="020B0502040204020203" pitchFamily="50" charset="-127"/>
-                <a:cs typeface="맑은 고딕 Semilight" panose="020B0502040204020203" pitchFamily="50" charset="-127"/>
-              </a:rPr>
-              <a:t>모수</a:t>
-            </a:r>
-            <a:r>
-              <a:rPr lang="ko-KR" altLang="en-US" sz="3200" b="1" dirty="0">
-                <a:latin typeface="맑은 고딕 Semilight" panose="020B0502040204020203" pitchFamily="50" charset="-127"/>
-                <a:ea typeface="맑은 고딕 Semilight" panose="020B0502040204020203" pitchFamily="50" charset="-127"/>
-                <a:cs typeface="맑은 고딕 Semilight" panose="020B0502040204020203" pitchFamily="50" charset="-127"/>
-              </a:rPr>
-              <a:t> 추정</a:t>
-            </a:r>
-            <a:r>
-              <a:rPr lang="en-US" altLang="ko-KR" sz="3200" b="1" dirty="0">
-                <a:latin typeface="맑은 고딕 Semilight" panose="020B0502040204020203" pitchFamily="50" charset="-127"/>
-                <a:ea typeface="맑은 고딕 Semilight" panose="020B0502040204020203" pitchFamily="50" charset="-127"/>
-                <a:cs typeface="맑은 고딕 Semilight" panose="020B0502040204020203" pitchFamily="50" charset="-127"/>
-              </a:rPr>
-              <a:t>(Parameter</a:t>
-            </a:r>
-            <a:r>
-              <a:rPr lang="ko-KR" altLang="en-US" sz="3200" b="1" dirty="0">
-                <a:latin typeface="맑은 고딕 Semilight" panose="020B0502040204020203" pitchFamily="50" charset="-127"/>
-                <a:ea typeface="맑은 고딕 Semilight" panose="020B0502040204020203" pitchFamily="50" charset="-127"/>
-                <a:cs typeface="맑은 고딕 Semilight" panose="020B0502040204020203" pitchFamily="50" charset="-127"/>
-              </a:rPr>
-              <a:t> </a:t>
-            </a:r>
-            <a:r>
-              <a:rPr lang="en-US" altLang="ko-KR" sz="3200" b="1" dirty="0">
-                <a:latin typeface="맑은 고딕 Semilight" panose="020B0502040204020203" pitchFamily="50" charset="-127"/>
-                <a:ea typeface="맑은 고딕 Semilight" panose="020B0502040204020203" pitchFamily="50" charset="-127"/>
-                <a:cs typeface="맑은 고딕 Semilight" panose="020B0502040204020203" pitchFamily="50" charset="-127"/>
-              </a:rPr>
-              <a:t>Estimation)</a:t>
-            </a:r>
-            <a:endParaRPr lang="ko-KR" altLang="en-US" sz="3200" b="1" dirty="0">
-              <a:latin typeface="맑은 고딕 Semilight" panose="020B0502040204020203" pitchFamily="50" charset="-127"/>
-              <a:ea typeface="맑은 고딕 Semilight" panose="020B0502040204020203" pitchFamily="50" charset="-127"/>
-              <a:cs typeface="맑은 고딕 Semilight" panose="020B0502040204020203" pitchFamily="50" charset="-127"/>
-            </a:endParaRPr>
-          </a:p>
-        </p:txBody>
-      </p:sp>
-    </p:spTree>
-    <p:extLst>
-      <p:ext uri="{BB962C8B-B14F-4D97-AF65-F5344CB8AC3E}">
-        <p14:creationId xmlns:p14="http://schemas.microsoft.com/office/powerpoint/2010/main" val="1523515332"/>
-      </p:ext>
-    </p:extLst>
-  </p:cSld>
-  <p:clrMapOvr>
-    <a:masterClrMapping/>
-  </p:clrMapOvr>
-  <mc:AlternateContent xmlns:mc="http://schemas.openxmlformats.org/markup-compatibility/2006" xmlns:p14="http://schemas.microsoft.com/office/powerpoint/2010/main">
-    <mc:Choice Requires="p14">
-      <p:transition spd="med" p14:dur="700">
-        <p:fade/>
-      </p:transition>
-    </mc:Choice>
-    <mc:Fallback xmlns="">
-      <p:transition spd="med">
-        <p:fade/>
-      </p:transition>
-    </mc:Fallback>
-  </mc:AlternateContent>
-</p:sld>
-</file>
-
-<file path=ppt/slides/slide7.xml><?xml version="1.0" encoding="utf-8"?>
-<p:sld xmlns:a="http://schemas.openxmlformats.org/drawingml/2006/main" xmlns:r="http://schemas.openxmlformats.org/officeDocument/2006/relationships" xmlns:p="http://schemas.openxmlformats.org/presentationml/2006/main">
-  <p:cSld>
-    <p:spTree>
-      <p:nvGrpSpPr>
         <p:cNvPr id="1" name="">
           <a:extLst>
             <a:ext uri="{FF2B5EF4-FFF2-40B4-BE49-F238E27FC236}">
@@ -17124,7 +15859,7 @@
             <a:pPr rtl="0"/>
             <a:fld id="{A3F31473-23EB-4724-8B59-FE6D21D89FA4}" type="slidenum">
               <a:rPr lang="en-US" altLang="ko-KR" noProof="0" smtClean="0"/>
-              <a:t>7</a:t>
+              <a:t>6</a:t>
             </a:fld>
             <a:endParaRPr lang="en-US" altLang="ko-KR" noProof="0" dirty="0"/>
           </a:p>
@@ -17389,7 +16124,7 @@
 </p:sld>
 </file>
 
-<file path=ppt/slides/slide8.xml><?xml version="1.0" encoding="utf-8"?>
+<file path=ppt/slides/slide7.xml><?xml version="1.0" encoding="utf-8"?>
 <p:sld xmlns:a="http://schemas.openxmlformats.org/drawingml/2006/main" xmlns:r="http://schemas.openxmlformats.org/officeDocument/2006/relationships" xmlns:p="http://schemas.openxmlformats.org/presentationml/2006/main">
   <p:cSld>
     <p:spTree>
@@ -17424,7 +16159,7 @@
             <a:pPr rtl="0"/>
             <a:fld id="{A3F31473-23EB-4724-8B59-FE6D21D89FA4}" type="slidenum">
               <a:rPr lang="en-US" altLang="ko-KR" noProof="0" smtClean="0"/>
-              <a:t>8</a:t>
+              <a:t>7</a:t>
             </a:fld>
             <a:endParaRPr lang="en-US" altLang="ko-KR" noProof="0" dirty="0"/>
           </a:p>
@@ -17479,7 +16214,7 @@
 </p:sld>
 </file>
 
-<file path=ppt/slides/slide9.xml><?xml version="1.0" encoding="utf-8"?>
+<file path=ppt/slides/slide8.xml><?xml version="1.0" encoding="utf-8"?>
 <p:sld xmlns:a="http://schemas.openxmlformats.org/drawingml/2006/main" xmlns:r="http://schemas.openxmlformats.org/officeDocument/2006/relationships" xmlns:p="http://schemas.openxmlformats.org/presentationml/2006/main">
   <p:cSld>
     <p:spTree>
@@ -17514,7 +16249,7 @@
             <a:pPr rtl="0"/>
             <a:fld id="{A3F31473-23EB-4724-8B59-FE6D21D89FA4}" type="slidenum">
               <a:rPr lang="en-US" altLang="ko-KR" noProof="0" smtClean="0"/>
-              <a:t>9</a:t>
+              <a:t>8</a:t>
             </a:fld>
             <a:endParaRPr lang="en-US" altLang="ko-KR" noProof="0" dirty="0"/>
           </a:p>
@@ -17754,6 +16489,344 @@
       <p:bldP spid="4" grpId="0" animBg="1"/>
     </p:bldLst>
   </p:timing>
+</p:sld>
+</file>
+
+<file path=ppt/slides/slide9.xml><?xml version="1.0" encoding="utf-8"?>
+<p:sld xmlns:a="http://schemas.openxmlformats.org/drawingml/2006/main" xmlns:r="http://schemas.openxmlformats.org/officeDocument/2006/relationships" xmlns:p="http://schemas.openxmlformats.org/presentationml/2006/main">
+  <p:cSld>
+    <p:spTree>
+      <p:nvGrpSpPr>
+        <p:cNvPr id="1" name=""/>
+        <p:cNvGrpSpPr/>
+        <p:nvPr/>
+      </p:nvGrpSpPr>
+      <p:grpSpPr>
+        <a:xfrm>
+          <a:off x="0" y="0"/>
+          <a:ext cx="0" cy="0"/>
+          <a:chOff x="0" y="0"/>
+          <a:chExt cx="0" cy="0"/>
+        </a:xfrm>
+      </p:grpSpPr>
+      <p:sp>
+        <p:nvSpPr>
+          <p:cNvPr id="8" name="슬라이드 번호 개체 틀 7"/>
+          <p:cNvSpPr>
+            <a:spLocks noGrp="1"/>
+          </p:cNvSpPr>
+          <p:nvPr>
+            <p:ph type="sldNum" sz="quarter" idx="12"/>
+          </p:nvPr>
+        </p:nvSpPr>
+        <p:spPr/>
+        <p:txBody>
+          <a:bodyPr/>
+          <a:lstStyle/>
+          <a:p>
+            <a:pPr rtl="0"/>
+            <a:fld id="{A3F31473-23EB-4724-8B59-FE6D21D89FA4}" type="slidenum">
+              <a:rPr lang="en-US" altLang="ko-KR" noProof="0" smtClean="0"/>
+              <a:t>9</a:t>
+            </a:fld>
+            <a:endParaRPr lang="en-US" altLang="ko-KR" noProof="0" dirty="0"/>
+          </a:p>
+        </p:txBody>
+      </p:sp>
+      <p:pic>
+        <p:nvPicPr>
+          <p:cNvPr id="4" name="그림 3"/>
+          <p:cNvPicPr>
+            <a:picLocks noChangeAspect="1"/>
+          </p:cNvPicPr>
+          <p:nvPr/>
+        </p:nvPicPr>
+        <p:blipFill>
+          <a:blip r:embed="rId3"/>
+          <a:stretch>
+            <a:fillRect/>
+          </a:stretch>
+        </p:blipFill>
+        <p:spPr>
+          <a:xfrm>
+            <a:off x="943780" y="1601264"/>
+            <a:ext cx="7559835" cy="1258912"/>
+          </a:xfrm>
+          <a:prstGeom prst="rect">
+            <a:avLst/>
+          </a:prstGeom>
+        </p:spPr>
+      </p:pic>
+      <p:pic>
+        <p:nvPicPr>
+          <p:cNvPr id="3" name="그림 2"/>
+          <p:cNvPicPr>
+            <a:picLocks noChangeAspect="1"/>
+          </p:cNvPicPr>
+          <p:nvPr/>
+        </p:nvPicPr>
+        <p:blipFill>
+          <a:blip r:embed="rId4"/>
+          <a:stretch>
+            <a:fillRect/>
+          </a:stretch>
+        </p:blipFill>
+        <p:spPr>
+          <a:xfrm>
+            <a:off x="4654253" y="4293096"/>
+            <a:ext cx="2664296" cy="867445"/>
+          </a:xfrm>
+          <a:prstGeom prst="rect">
+            <a:avLst/>
+          </a:prstGeom>
+        </p:spPr>
+      </p:pic>
+      <mc:AlternateContent xmlns:mc="http://schemas.openxmlformats.org/markup-compatibility/2006">
+        <mc:Choice xmlns:a14="http://schemas.microsoft.com/office/drawing/2010/main" Requires="a14">
+          <p:sp>
+            <p:nvSpPr>
+              <p:cNvPr id="5" name="TextBox 4"/>
+              <p:cNvSpPr txBox="1"/>
+              <p:nvPr/>
+            </p:nvSpPr>
+            <p:spPr>
+              <a:xfrm>
+                <a:off x="909836" y="3573016"/>
+                <a:ext cx="11161240" cy="400110"/>
+              </a:xfrm>
+              <a:prstGeom prst="rect">
+                <a:avLst/>
+              </a:prstGeom>
+              <a:noFill/>
+            </p:spPr>
+            <p:txBody>
+              <a:bodyPr wrap="square" rtlCol="0">
+                <a:spAutoFit/>
+              </a:bodyPr>
+              <a:lstStyle/>
+              <a:p>
+                <a:pPr marL="342900" indent="-342900">
+                  <a:buFont typeface="Wingdings" panose="05000000000000000000" pitchFamily="2" charset="2"/>
+                  <a:buChar char="v"/>
+                </a:pPr>
+                <a:r>
+                  <a:rPr lang="ko-KR" altLang="en-US" sz="2000" dirty="0">
+                    <a:latin typeface="맑은 고딕 Semilight" panose="020B0502040204020203" pitchFamily="50" charset="-127"/>
+                    <a:ea typeface="맑은 고딕 Semilight" panose="020B0502040204020203" pitchFamily="50" charset="-127"/>
+                    <a:cs typeface="맑은 고딕 Semilight" panose="020B0502040204020203" pitchFamily="50" charset="-127"/>
+                  </a:rPr>
+                  <a:t>모집단 평균에 대한 </a:t>
+                </a:r>
+                <a:r>
+                  <a:rPr lang="ko-KR" altLang="en-US" sz="2000" dirty="0" err="1">
+                    <a:latin typeface="맑은 고딕 Semilight" panose="020B0502040204020203" pitchFamily="50" charset="-127"/>
+                    <a:ea typeface="맑은 고딕 Semilight" panose="020B0502040204020203" pitchFamily="50" charset="-127"/>
+                    <a:cs typeface="맑은 고딕 Semilight" panose="020B0502040204020203" pitchFamily="50" charset="-127"/>
+                  </a:rPr>
+                  <a:t>불편추정량</a:t>
+                </a:r>
+                <a:r>
+                  <a:rPr lang="en-US" altLang="ko-KR" sz="2000" dirty="0">
+                    <a:latin typeface="맑은 고딕 Semilight" panose="020B0502040204020203" pitchFamily="50" charset="-127"/>
+                    <a:ea typeface="맑은 고딕 Semilight" panose="020B0502040204020203" pitchFamily="50" charset="-127"/>
+                    <a:cs typeface="맑은 고딕 Semilight" panose="020B0502040204020203" pitchFamily="50" charset="-127"/>
+                  </a:rPr>
+                  <a:t>(Unbiased Estimator of</a:t>
+                </a:r>
+                <a:r>
+                  <a:rPr lang="ko-KR" altLang="en-US" sz="2000" dirty="0">
+                    <a:latin typeface="맑은 고딕 Semilight" panose="020B0502040204020203" pitchFamily="50" charset="-127"/>
+                    <a:ea typeface="맑은 고딕 Semilight" panose="020B0502040204020203" pitchFamily="50" charset="-127"/>
+                    <a:cs typeface="맑은 고딕 Semilight" panose="020B0502040204020203" pitchFamily="50" charset="-127"/>
+                  </a:rPr>
+                  <a:t> </a:t>
+                </a:r>
+                <a14:m>
+                  <m:oMath xmlns:m="http://schemas.openxmlformats.org/officeDocument/2006/math">
+                    <m:r>
+                      <a:rPr lang="ko-KR" altLang="en-US" sz="2000" i="1" smtClean="0">
+                        <a:latin typeface="Cambria Math" panose="02040503050406030204" pitchFamily="18" charset="0"/>
+                      </a:rPr>
+                      <m:t>𝜃</m:t>
+                    </m:r>
+                  </m:oMath>
+                </a14:m>
+                <a:r>
+                  <a:rPr lang="en-US" altLang="ko-KR" sz="2000" dirty="0">
+                    <a:latin typeface="맑은 고딕 Semilight" panose="020B0502040204020203" pitchFamily="50" charset="-127"/>
+                    <a:ea typeface="맑은 고딕 Semilight" panose="020B0502040204020203" pitchFamily="50" charset="-127"/>
+                    <a:cs typeface="맑은 고딕 Semilight" panose="020B0502040204020203" pitchFamily="50" charset="-127"/>
+                  </a:rPr>
+                  <a:t>)</a:t>
+                </a:r>
+                <a:r>
+                  <a:rPr lang="ko-KR" altLang="en-US" sz="2000" dirty="0">
+                    <a:latin typeface="맑은 고딕 Semilight" panose="020B0502040204020203" pitchFamily="50" charset="-127"/>
+                    <a:ea typeface="맑은 고딕 Semilight" panose="020B0502040204020203" pitchFamily="50" charset="-127"/>
+                    <a:cs typeface="맑은 고딕 Semilight" panose="020B0502040204020203" pitchFamily="50" charset="-127"/>
+                  </a:rPr>
+                  <a:t>은 </a:t>
+                </a:r>
+                <a:r>
+                  <a:rPr lang="ko-KR" altLang="en-US" sz="2000" dirty="0" err="1">
+                    <a:latin typeface="맑은 고딕 Semilight" panose="020B0502040204020203" pitchFamily="50" charset="-127"/>
+                    <a:ea typeface="맑은 고딕 Semilight" panose="020B0502040204020203" pitchFamily="50" charset="-127"/>
+                    <a:cs typeface="맑은 고딕 Semilight" panose="020B0502040204020203" pitchFamily="50" charset="-127"/>
+                  </a:rPr>
+                  <a:t>표본평균</a:t>
+                </a:r>
+                <a:endParaRPr lang="ko-KR" altLang="en-US" sz="2000" dirty="0">
+                  <a:latin typeface="맑은 고딕 Semilight" panose="020B0502040204020203" pitchFamily="50" charset="-127"/>
+                  <a:ea typeface="맑은 고딕 Semilight" panose="020B0502040204020203" pitchFamily="50" charset="-127"/>
+                  <a:cs typeface="맑은 고딕 Semilight" panose="020B0502040204020203" pitchFamily="50" charset="-127"/>
+                </a:endParaRPr>
+              </a:p>
+            </p:txBody>
+          </p:sp>
+        </mc:Choice>
+        <mc:Fallback>
+          <p:sp>
+            <p:nvSpPr>
+              <p:cNvPr id="5" name="TextBox 4"/>
+              <p:cNvSpPr txBox="1">
+                <a:spLocks noRot="1" noChangeAspect="1" noMove="1" noResize="1" noEditPoints="1" noAdjustHandles="1" noChangeArrowheads="1" noChangeShapeType="1" noTextEdit="1"/>
+              </p:cNvSpPr>
+              <p:nvPr/>
+            </p:nvSpPr>
+            <p:spPr>
+              <a:xfrm>
+                <a:off x="909836" y="3573016"/>
+                <a:ext cx="11161240" cy="400110"/>
+              </a:xfrm>
+              <a:prstGeom prst="rect">
+                <a:avLst/>
+              </a:prstGeom>
+              <a:blipFill>
+                <a:blip r:embed="rId5"/>
+                <a:stretch>
+                  <a:fillRect l="-492" t="-7576" b="-25758"/>
+                </a:stretch>
+              </a:blipFill>
+            </p:spPr>
+            <p:txBody>
+              <a:bodyPr/>
+              <a:lstStyle/>
+              <a:p>
+                <a:r>
+                  <a:rPr lang="ko-KR" altLang="en-US">
+                    <a:noFill/>
+                  </a:rPr>
+                  <a:t> </a:t>
+                </a:r>
+              </a:p>
+            </p:txBody>
+          </p:sp>
+        </mc:Fallback>
+      </mc:AlternateContent>
+      <p:sp>
+        <p:nvSpPr>
+          <p:cNvPr id="2" name="TextBox 1">
+            <a:extLst>
+              <a:ext uri="{FF2B5EF4-FFF2-40B4-BE49-F238E27FC236}">
+                <a16:creationId xmlns:a16="http://schemas.microsoft.com/office/drawing/2014/main" id="{6B261840-E42D-89D5-94C4-189F0954CD4F}"/>
+              </a:ext>
+            </a:extLst>
+          </p:cNvPr>
+          <p:cNvSpPr txBox="1"/>
+          <p:nvPr/>
+        </p:nvSpPr>
+        <p:spPr>
+          <a:xfrm>
+            <a:off x="117748" y="260648"/>
+            <a:ext cx="2592288" cy="584775"/>
+          </a:xfrm>
+          <a:prstGeom prst="rect">
+            <a:avLst/>
+          </a:prstGeom>
+          <a:noFill/>
+        </p:spPr>
+        <p:txBody>
+          <a:bodyPr wrap="square" rtlCol="0">
+            <a:spAutoFit/>
+          </a:bodyPr>
+          <a:lstStyle/>
+          <a:p>
+            <a:r>
+              <a:rPr lang="ko-KR" altLang="en-US" sz="3200" b="1" dirty="0"/>
+              <a:t>실습하기</a:t>
+            </a:r>
+          </a:p>
+        </p:txBody>
+      </p:sp>
+      <p:pic>
+        <p:nvPicPr>
+          <p:cNvPr id="6" name="Picture 2" descr="한 여자가 노트북 컴퓨터에 타이핑을 하고 있다">
+            <a:extLst>
+              <a:ext uri="{FF2B5EF4-FFF2-40B4-BE49-F238E27FC236}">
+                <a16:creationId xmlns:a16="http://schemas.microsoft.com/office/drawing/2014/main" id="{BAE13FD5-E6E3-B98A-63C3-AD0C55C58B00}"/>
+              </a:ext>
+            </a:extLst>
+          </p:cNvPr>
+          <p:cNvPicPr>
+            <a:picLocks noChangeAspect="1" noChangeArrowheads="1"/>
+          </p:cNvPicPr>
+          <p:nvPr/>
+        </p:nvPicPr>
+        <p:blipFill>
+          <a:blip r:embed="rId6" cstate="print">
+            <a:extLst>
+              <a:ext uri="{28A0092B-C50C-407E-A947-70E740481C1C}">
+                <a14:useLocalDpi xmlns:a14="http://schemas.microsoft.com/office/drawing/2010/main" val="0"/>
+              </a:ext>
+            </a:extLst>
+          </a:blip>
+          <a:srcRect/>
+          <a:stretch>
+            <a:fillRect/>
+          </a:stretch>
+        </p:blipFill>
+        <p:spPr bwMode="auto">
+          <a:xfrm>
+            <a:off x="9918426" y="260648"/>
+            <a:ext cx="2152650" cy="1424329"/>
+          </a:xfrm>
+          <a:prstGeom prst="rect">
+            <a:avLst/>
+          </a:prstGeom>
+          <a:noFill/>
+          <a:extLst>
+            <a:ext uri="{909E8E84-426E-40DD-AFC4-6F175D3DCCD1}">
+              <a14:hiddenFill xmlns:a14="http://schemas.microsoft.com/office/drawing/2010/main">
+                <a:solidFill>
+                  <a:srgbClr val="FFFFFF"/>
+                </a:solidFill>
+              </a14:hiddenFill>
+            </a:ext>
+          </a:extLst>
+        </p:spPr>
+      </p:pic>
+    </p:spTree>
+    <p:extLst>
+      <p:ext uri="{BB962C8B-B14F-4D97-AF65-F5344CB8AC3E}">
+        <p14:creationId xmlns:p14="http://schemas.microsoft.com/office/powerpoint/2010/main" val="2648513285"/>
+      </p:ext>
+    </p:extLst>
+  </p:cSld>
+  <p:clrMapOvr>
+    <a:masterClrMapping/>
+  </p:clrMapOvr>
+  <mc:AlternateContent xmlns:mc="http://schemas.openxmlformats.org/markup-compatibility/2006" xmlns:p14="http://schemas.microsoft.com/office/powerpoint/2010/main">
+    <mc:Choice Requires="p14">
+      <p:transition spd="med" p14:dur="700">
+        <p:fade/>
+      </p:transition>
+    </mc:Choice>
+    <mc:Fallback xmlns="">
+      <p:transition spd="med">
+        <p:fade/>
+      </p:transition>
+    </mc:Fallback>
+  </mc:AlternateContent>
 </p:sld>
 </file>
 

--- a/4_Estimation.pptx
+++ b/4_Estimation.pptx
@@ -5,34 +5,35 @@
     <p:sldMasterId id="2147483648" r:id="rId4"/>
   </p:sldMasterIdLst>
   <p:notesMasterIdLst>
-    <p:notesMasterId r:id="rId27"/>
+    <p:notesMasterId r:id="rId28"/>
   </p:notesMasterIdLst>
   <p:handoutMasterIdLst>
-    <p:handoutMasterId r:id="rId28"/>
+    <p:handoutMasterId r:id="rId29"/>
   </p:handoutMasterIdLst>
   <p:sldIdLst>
     <p:sldId id="256" r:id="rId5"/>
     <p:sldId id="367" r:id="rId6"/>
-    <p:sldId id="361" r:id="rId7"/>
-    <p:sldId id="368" r:id="rId8"/>
-    <p:sldId id="314" r:id="rId9"/>
-    <p:sldId id="366" r:id="rId10"/>
-    <p:sldId id="272" r:id="rId11"/>
-    <p:sldId id="273" r:id="rId12"/>
-    <p:sldId id="274" r:id="rId13"/>
-    <p:sldId id="275" r:id="rId14"/>
-    <p:sldId id="277" r:id="rId15"/>
-    <p:sldId id="362" r:id="rId16"/>
-    <p:sldId id="369" r:id="rId17"/>
-    <p:sldId id="278" r:id="rId18"/>
-    <p:sldId id="370" r:id="rId19"/>
-    <p:sldId id="371" r:id="rId20"/>
-    <p:sldId id="372" r:id="rId21"/>
-    <p:sldId id="363" r:id="rId22"/>
-    <p:sldId id="279" r:id="rId23"/>
-    <p:sldId id="364" r:id="rId24"/>
-    <p:sldId id="281" r:id="rId25"/>
-    <p:sldId id="365" r:id="rId26"/>
+    <p:sldId id="414" r:id="rId7"/>
+    <p:sldId id="361" r:id="rId8"/>
+    <p:sldId id="368" r:id="rId9"/>
+    <p:sldId id="314" r:id="rId10"/>
+    <p:sldId id="366" r:id="rId11"/>
+    <p:sldId id="272" r:id="rId12"/>
+    <p:sldId id="273" r:id="rId13"/>
+    <p:sldId id="274" r:id="rId14"/>
+    <p:sldId id="275" r:id="rId15"/>
+    <p:sldId id="277" r:id="rId16"/>
+    <p:sldId id="362" r:id="rId17"/>
+    <p:sldId id="369" r:id="rId18"/>
+    <p:sldId id="278" r:id="rId19"/>
+    <p:sldId id="370" r:id="rId20"/>
+    <p:sldId id="371" r:id="rId21"/>
+    <p:sldId id="372" r:id="rId22"/>
+    <p:sldId id="363" r:id="rId23"/>
+    <p:sldId id="279" r:id="rId24"/>
+    <p:sldId id="364" r:id="rId25"/>
+    <p:sldId id="281" r:id="rId26"/>
+    <p:sldId id="365" r:id="rId27"/>
   </p:sldIdLst>
   <p:sldSz cx="12188825" cy="6858000"/>
   <p:notesSz cx="6858000" cy="9144000"/>
@@ -254,7 +255,7 @@
                 <a:latin typeface="맑은 고딕" panose="020B0503020000020004" pitchFamily="50" charset="-127"/>
                 <a:ea typeface="맑은 고딕" panose="020B0503020000020004" pitchFamily="50" charset="-127"/>
               </a:rPr>
-              <a:t>2026-04-08</a:t>
+              <a:t>2026-04-09</a:t>
             </a:fld>
             <a:endParaRPr lang="ko-KR" altLang="en-US" dirty="0">
               <a:latin typeface="맑은 고딕" panose="020B0503020000020004" pitchFamily="50" charset="-127"/>
@@ -441,7 +442,7 @@
             <a:fld id="{39DBE7D5-AA2D-4B26-8C69-8B60D39FD5EE}" type="datetime1">
               <a:rPr lang="ko-KR" altLang="en-US" smtClean="0"/>
               <a:pPr/>
-              <a:t>2026-04-08</a:t>
+              <a:t>2026-04-09</a:t>
             </a:fld>
             <a:endParaRPr lang="ko-KR" altLang="en-US" dirty="0"/>
           </a:p>
@@ -877,7 +878,7 @@
     </p:spTree>
     <p:extLst>
       <p:ext uri="{BB962C8B-B14F-4D97-AF65-F5344CB8AC3E}">
-        <p14:creationId xmlns:p14="http://schemas.microsoft.com/office/powerpoint/2010/main" val="3628120198"/>
+        <p14:creationId xmlns:p14="http://schemas.microsoft.com/office/powerpoint/2010/main" val="3259237565"/>
       </p:ext>
     </p:extLst>
   </p:cSld>
@@ -962,6 +963,91 @@
     </p:spTree>
     <p:extLst>
       <p:ext uri="{BB962C8B-B14F-4D97-AF65-F5344CB8AC3E}">
+        <p14:creationId xmlns:p14="http://schemas.microsoft.com/office/powerpoint/2010/main" val="3628120198"/>
+      </p:ext>
+    </p:extLst>
+  </p:cSld>
+  <p:clrMapOvr>
+    <a:masterClrMapping/>
+  </p:clrMapOvr>
+</p:notes>
+</file>
+
+<file path=ppt/notesSlides/notesSlide12.xml><?xml version="1.0" encoding="utf-8"?>
+<p:notes xmlns:a="http://schemas.openxmlformats.org/drawingml/2006/main" xmlns:r="http://schemas.openxmlformats.org/officeDocument/2006/relationships" xmlns:p="http://schemas.openxmlformats.org/presentationml/2006/main">
+  <p:cSld>
+    <p:spTree>
+      <p:nvGrpSpPr>
+        <p:cNvPr id="1" name=""/>
+        <p:cNvGrpSpPr/>
+        <p:nvPr/>
+      </p:nvGrpSpPr>
+      <p:grpSpPr>
+        <a:xfrm>
+          <a:off x="0" y="0"/>
+          <a:ext cx="0" cy="0"/>
+          <a:chOff x="0" y="0"/>
+          <a:chExt cx="0" cy="0"/>
+        </a:xfrm>
+      </p:grpSpPr>
+      <p:sp>
+        <p:nvSpPr>
+          <p:cNvPr id="2" name="슬라이드 이미지 개체 틀 1"/>
+          <p:cNvSpPr>
+            <a:spLocks noGrp="1" noRot="1" noChangeAspect="1"/>
+          </p:cNvSpPr>
+          <p:nvPr>
+            <p:ph type="sldImg"/>
+          </p:nvPr>
+        </p:nvSpPr>
+        <p:spPr/>
+      </p:sp>
+      <p:sp>
+        <p:nvSpPr>
+          <p:cNvPr id="3" name="슬라이드 노트 개체 틀 2"/>
+          <p:cNvSpPr>
+            <a:spLocks noGrp="1"/>
+          </p:cNvSpPr>
+          <p:nvPr>
+            <p:ph type="body" idx="1"/>
+          </p:nvPr>
+        </p:nvSpPr>
+        <p:spPr/>
+        <p:txBody>
+          <a:bodyPr/>
+          <a:lstStyle/>
+          <a:p>
+            <a:endParaRPr lang="ko-KR" altLang="en-US" dirty="0"/>
+          </a:p>
+        </p:txBody>
+      </p:sp>
+      <p:sp>
+        <p:nvSpPr>
+          <p:cNvPr id="4" name="슬라이드 번호 개체 틀 3"/>
+          <p:cNvSpPr>
+            <a:spLocks noGrp="1"/>
+          </p:cNvSpPr>
+          <p:nvPr>
+            <p:ph type="sldNum" sz="quarter" idx="10"/>
+          </p:nvPr>
+        </p:nvSpPr>
+        <p:spPr/>
+        <p:txBody>
+          <a:bodyPr/>
+          <a:lstStyle/>
+          <a:p>
+            <a:pPr rtl="0"/>
+            <a:fld id="{5FB91549-43BF-425A-AF25-75262019208C}" type="slidenum">
+              <a:rPr lang="en-US" altLang="ko-KR" smtClean="0"/>
+              <a:t>12</a:t>
+            </a:fld>
+            <a:endParaRPr lang="ko-KR" altLang="en-US" dirty="0"/>
+          </a:p>
+        </p:txBody>
+      </p:sp>
+    </p:spTree>
+    <p:extLst>
+      <p:ext uri="{BB962C8B-B14F-4D97-AF65-F5344CB8AC3E}">
         <p14:creationId xmlns:p14="http://schemas.microsoft.com/office/powerpoint/2010/main" val="1329391888"/>
       </p:ext>
     </p:extLst>
@@ -972,7 +1058,7 @@
 </p:notes>
 </file>
 
-<file path=ppt/notesSlides/notesSlide12.xml><?xml version="1.0" encoding="utf-8"?>
+<file path=ppt/notesSlides/notesSlide13.xml><?xml version="1.0" encoding="utf-8"?>
 <p:notes xmlns:a="http://schemas.openxmlformats.org/drawingml/2006/main" xmlns:r="http://schemas.openxmlformats.org/officeDocument/2006/relationships" xmlns:p="http://schemas.openxmlformats.org/presentationml/2006/main">
   <p:cSld>
     <p:spTree>
@@ -1062,7 +1148,7 @@
             <a:pPr rtl="0"/>
             <a:fld id="{5FB91549-43BF-425A-AF25-75262019208C}" type="slidenum">
               <a:rPr lang="en-US" altLang="ko-KR" smtClean="0"/>
-              <a:t>12</a:t>
+              <a:t>13</a:t>
             </a:fld>
             <a:endParaRPr lang="ko-KR" altLang="en-US" dirty="0"/>
           </a:p>
@@ -1072,91 +1158,6 @@
     <p:extLst>
       <p:ext uri="{BB962C8B-B14F-4D97-AF65-F5344CB8AC3E}">
         <p14:creationId xmlns:p14="http://schemas.microsoft.com/office/powerpoint/2010/main" val="2399581243"/>
-      </p:ext>
-    </p:extLst>
-  </p:cSld>
-  <p:clrMapOvr>
-    <a:masterClrMapping/>
-  </p:clrMapOvr>
-</p:notes>
-</file>
-
-<file path=ppt/notesSlides/notesSlide13.xml><?xml version="1.0" encoding="utf-8"?>
-<p:notes xmlns:a="http://schemas.openxmlformats.org/drawingml/2006/main" xmlns:r="http://schemas.openxmlformats.org/officeDocument/2006/relationships" xmlns:p="http://schemas.openxmlformats.org/presentationml/2006/main">
-  <p:cSld>
-    <p:spTree>
-      <p:nvGrpSpPr>
-        <p:cNvPr id="1" name=""/>
-        <p:cNvGrpSpPr/>
-        <p:nvPr/>
-      </p:nvGrpSpPr>
-      <p:grpSpPr>
-        <a:xfrm>
-          <a:off x="0" y="0"/>
-          <a:ext cx="0" cy="0"/>
-          <a:chOff x="0" y="0"/>
-          <a:chExt cx="0" cy="0"/>
-        </a:xfrm>
-      </p:grpSpPr>
-      <p:sp>
-        <p:nvSpPr>
-          <p:cNvPr id="2" name="슬라이드 이미지 개체 틀 1"/>
-          <p:cNvSpPr>
-            <a:spLocks noGrp="1" noRot="1" noChangeAspect="1"/>
-          </p:cNvSpPr>
-          <p:nvPr>
-            <p:ph type="sldImg"/>
-          </p:nvPr>
-        </p:nvSpPr>
-        <p:spPr/>
-      </p:sp>
-      <p:sp>
-        <p:nvSpPr>
-          <p:cNvPr id="3" name="슬라이드 노트 개체 틀 2"/>
-          <p:cNvSpPr>
-            <a:spLocks noGrp="1"/>
-          </p:cNvSpPr>
-          <p:nvPr>
-            <p:ph type="body" idx="1"/>
-          </p:nvPr>
-        </p:nvSpPr>
-        <p:spPr/>
-        <p:txBody>
-          <a:bodyPr/>
-          <a:lstStyle/>
-          <a:p>
-            <a:endParaRPr lang="ko-KR" altLang="en-US" dirty="0"/>
-          </a:p>
-        </p:txBody>
-      </p:sp>
-      <p:sp>
-        <p:nvSpPr>
-          <p:cNvPr id="4" name="슬라이드 번호 개체 틀 3"/>
-          <p:cNvSpPr>
-            <a:spLocks noGrp="1"/>
-          </p:cNvSpPr>
-          <p:nvPr>
-            <p:ph type="sldNum" sz="quarter" idx="10"/>
-          </p:nvPr>
-        </p:nvSpPr>
-        <p:spPr/>
-        <p:txBody>
-          <a:bodyPr/>
-          <a:lstStyle/>
-          <a:p>
-            <a:pPr rtl="0"/>
-            <a:fld id="{5FB91549-43BF-425A-AF25-75262019208C}" type="slidenum">
-              <a:rPr lang="en-US" altLang="ko-KR" smtClean="0"/>
-              <a:t>13</a:t>
-            </a:fld>
-            <a:endParaRPr lang="ko-KR" altLang="en-US" dirty="0"/>
-          </a:p>
-        </p:txBody>
-      </p:sp>
-    </p:spTree>
-    <p:extLst>
-      <p:ext uri="{BB962C8B-B14F-4D97-AF65-F5344CB8AC3E}">
-        <p14:creationId xmlns:p14="http://schemas.microsoft.com/office/powerpoint/2010/main" val="390987337"/>
       </p:ext>
     </p:extLst>
   </p:cSld>
@@ -1241,6 +1242,91 @@
     </p:spTree>
     <p:extLst>
       <p:ext uri="{BB962C8B-B14F-4D97-AF65-F5344CB8AC3E}">
+        <p14:creationId xmlns:p14="http://schemas.microsoft.com/office/powerpoint/2010/main" val="390987337"/>
+      </p:ext>
+    </p:extLst>
+  </p:cSld>
+  <p:clrMapOvr>
+    <a:masterClrMapping/>
+  </p:clrMapOvr>
+</p:notes>
+</file>
+
+<file path=ppt/notesSlides/notesSlide15.xml><?xml version="1.0" encoding="utf-8"?>
+<p:notes xmlns:a="http://schemas.openxmlformats.org/drawingml/2006/main" xmlns:r="http://schemas.openxmlformats.org/officeDocument/2006/relationships" xmlns:p="http://schemas.openxmlformats.org/presentationml/2006/main">
+  <p:cSld>
+    <p:spTree>
+      <p:nvGrpSpPr>
+        <p:cNvPr id="1" name=""/>
+        <p:cNvGrpSpPr/>
+        <p:nvPr/>
+      </p:nvGrpSpPr>
+      <p:grpSpPr>
+        <a:xfrm>
+          <a:off x="0" y="0"/>
+          <a:ext cx="0" cy="0"/>
+          <a:chOff x="0" y="0"/>
+          <a:chExt cx="0" cy="0"/>
+        </a:xfrm>
+      </p:grpSpPr>
+      <p:sp>
+        <p:nvSpPr>
+          <p:cNvPr id="2" name="슬라이드 이미지 개체 틀 1"/>
+          <p:cNvSpPr>
+            <a:spLocks noGrp="1" noRot="1" noChangeAspect="1"/>
+          </p:cNvSpPr>
+          <p:nvPr>
+            <p:ph type="sldImg"/>
+          </p:nvPr>
+        </p:nvSpPr>
+        <p:spPr/>
+      </p:sp>
+      <p:sp>
+        <p:nvSpPr>
+          <p:cNvPr id="3" name="슬라이드 노트 개체 틀 2"/>
+          <p:cNvSpPr>
+            <a:spLocks noGrp="1"/>
+          </p:cNvSpPr>
+          <p:nvPr>
+            <p:ph type="body" idx="1"/>
+          </p:nvPr>
+        </p:nvSpPr>
+        <p:spPr/>
+        <p:txBody>
+          <a:bodyPr/>
+          <a:lstStyle/>
+          <a:p>
+            <a:endParaRPr lang="ko-KR" altLang="en-US" dirty="0"/>
+          </a:p>
+        </p:txBody>
+      </p:sp>
+      <p:sp>
+        <p:nvSpPr>
+          <p:cNvPr id="4" name="슬라이드 번호 개체 틀 3"/>
+          <p:cNvSpPr>
+            <a:spLocks noGrp="1"/>
+          </p:cNvSpPr>
+          <p:nvPr>
+            <p:ph type="sldNum" sz="quarter" idx="10"/>
+          </p:nvPr>
+        </p:nvSpPr>
+        <p:spPr/>
+        <p:txBody>
+          <a:bodyPr/>
+          <a:lstStyle/>
+          <a:p>
+            <a:pPr rtl="0"/>
+            <a:fld id="{5FB91549-43BF-425A-AF25-75262019208C}" type="slidenum">
+              <a:rPr lang="en-US" altLang="ko-KR" smtClean="0"/>
+              <a:t>15</a:t>
+            </a:fld>
+            <a:endParaRPr lang="ko-KR" altLang="en-US" dirty="0"/>
+          </a:p>
+        </p:txBody>
+      </p:sp>
+    </p:spTree>
+    <p:extLst>
+      <p:ext uri="{BB962C8B-B14F-4D97-AF65-F5344CB8AC3E}">
         <p14:creationId xmlns:p14="http://schemas.microsoft.com/office/powerpoint/2010/main" val="114399789"/>
       </p:ext>
     </p:extLst>
@@ -1251,7 +1337,7 @@
 </p:notes>
 </file>
 
-<file path=ppt/notesSlides/notesSlide15.xml><?xml version="1.0" encoding="utf-8"?>
+<file path=ppt/notesSlides/notesSlide16.xml><?xml version="1.0" encoding="utf-8"?>
 <p:notes xmlns:a="http://schemas.openxmlformats.org/drawingml/2006/main" xmlns:r="http://schemas.openxmlformats.org/officeDocument/2006/relationships" xmlns:p="http://schemas.openxmlformats.org/presentationml/2006/main">
   <p:cSld>
     <p:spTree>
@@ -1341,7 +1427,7 @@
             <a:pPr rtl="0"/>
             <a:fld id="{5FB91549-43BF-425A-AF25-75262019208C}" type="slidenum">
               <a:rPr lang="en-US" altLang="ko-KR" smtClean="0"/>
-              <a:t>15</a:t>
+              <a:t>16</a:t>
             </a:fld>
             <a:endParaRPr lang="ko-KR" altLang="en-US" dirty="0"/>
           </a:p>
@@ -1360,7 +1446,7 @@
 </p:notes>
 </file>
 
-<file path=ppt/notesSlides/notesSlide16.xml><?xml version="1.0" encoding="utf-8"?>
+<file path=ppt/notesSlides/notesSlide17.xml><?xml version="1.0" encoding="utf-8"?>
 <p:notes xmlns:a="http://schemas.openxmlformats.org/drawingml/2006/main" xmlns:r="http://schemas.openxmlformats.org/officeDocument/2006/relationships" xmlns:p="http://schemas.openxmlformats.org/presentationml/2006/main">
   <p:cSld>
     <p:spTree>
@@ -1450,7 +1536,7 @@
             <a:pPr rtl="0"/>
             <a:fld id="{5FB91549-43BF-425A-AF25-75262019208C}" type="slidenum">
               <a:rPr lang="en-US" altLang="ko-KR" smtClean="0"/>
-              <a:t>16</a:t>
+              <a:t>17</a:t>
             </a:fld>
             <a:endParaRPr lang="ko-KR" altLang="en-US" dirty="0"/>
           </a:p>
@@ -1469,7 +1555,7 @@
 </p:notes>
 </file>
 
-<file path=ppt/notesSlides/notesSlide17.xml><?xml version="1.0" encoding="utf-8"?>
+<file path=ppt/notesSlides/notesSlide18.xml><?xml version="1.0" encoding="utf-8"?>
 <p:notes xmlns:a="http://schemas.openxmlformats.org/drawingml/2006/main" xmlns:r="http://schemas.openxmlformats.org/officeDocument/2006/relationships" xmlns:p="http://schemas.openxmlformats.org/presentationml/2006/main">
   <p:cSld>
     <p:spTree>
@@ -1559,7 +1645,7 @@
             <a:pPr rtl="0"/>
             <a:fld id="{5FB91549-43BF-425A-AF25-75262019208C}" type="slidenum">
               <a:rPr lang="en-US" altLang="ko-KR" smtClean="0"/>
-              <a:t>17</a:t>
+              <a:t>18</a:t>
             </a:fld>
             <a:endParaRPr lang="ko-KR" altLang="en-US" dirty="0"/>
           </a:p>
@@ -1578,7 +1664,7 @@
 </p:notes>
 </file>
 
-<file path=ppt/notesSlides/notesSlide18.xml><?xml version="1.0" encoding="utf-8"?>
+<file path=ppt/notesSlides/notesSlide19.xml><?xml version="1.0" encoding="utf-8"?>
 <p:notes xmlns:a="http://schemas.openxmlformats.org/drawingml/2006/main" xmlns:r="http://schemas.openxmlformats.org/officeDocument/2006/relationships" xmlns:p="http://schemas.openxmlformats.org/presentationml/2006/main">
   <p:cSld>
     <p:spTree>
@@ -1668,7 +1754,7 @@
             <a:pPr rtl="0"/>
             <a:fld id="{5FB91549-43BF-425A-AF25-75262019208C}" type="slidenum">
               <a:rPr lang="en-US" altLang="ko-KR" smtClean="0"/>
-              <a:t>18</a:t>
+              <a:t>19</a:t>
             </a:fld>
             <a:endParaRPr lang="ko-KR" altLang="en-US" dirty="0"/>
           </a:p>
@@ -1678,91 +1764,6 @@
     <p:extLst>
       <p:ext uri="{BB962C8B-B14F-4D97-AF65-F5344CB8AC3E}">
         <p14:creationId xmlns:p14="http://schemas.microsoft.com/office/powerpoint/2010/main" val="1252142345"/>
-      </p:ext>
-    </p:extLst>
-  </p:cSld>
-  <p:clrMapOvr>
-    <a:masterClrMapping/>
-  </p:clrMapOvr>
-</p:notes>
-</file>
-
-<file path=ppt/notesSlides/notesSlide19.xml><?xml version="1.0" encoding="utf-8"?>
-<p:notes xmlns:a="http://schemas.openxmlformats.org/drawingml/2006/main" xmlns:r="http://schemas.openxmlformats.org/officeDocument/2006/relationships" xmlns:p="http://schemas.openxmlformats.org/presentationml/2006/main">
-  <p:cSld>
-    <p:spTree>
-      <p:nvGrpSpPr>
-        <p:cNvPr id="1" name=""/>
-        <p:cNvGrpSpPr/>
-        <p:nvPr/>
-      </p:nvGrpSpPr>
-      <p:grpSpPr>
-        <a:xfrm>
-          <a:off x="0" y="0"/>
-          <a:ext cx="0" cy="0"/>
-          <a:chOff x="0" y="0"/>
-          <a:chExt cx="0" cy="0"/>
-        </a:xfrm>
-      </p:grpSpPr>
-      <p:sp>
-        <p:nvSpPr>
-          <p:cNvPr id="2" name="슬라이드 이미지 개체 틀 1"/>
-          <p:cNvSpPr>
-            <a:spLocks noGrp="1" noRot="1" noChangeAspect="1"/>
-          </p:cNvSpPr>
-          <p:nvPr>
-            <p:ph type="sldImg"/>
-          </p:nvPr>
-        </p:nvSpPr>
-        <p:spPr/>
-      </p:sp>
-      <p:sp>
-        <p:nvSpPr>
-          <p:cNvPr id="3" name="슬라이드 노트 개체 틀 2"/>
-          <p:cNvSpPr>
-            <a:spLocks noGrp="1"/>
-          </p:cNvSpPr>
-          <p:nvPr>
-            <p:ph type="body" idx="1"/>
-          </p:nvPr>
-        </p:nvSpPr>
-        <p:spPr/>
-        <p:txBody>
-          <a:bodyPr/>
-          <a:lstStyle/>
-          <a:p>
-            <a:endParaRPr lang="ko-KR" altLang="en-US" dirty="0"/>
-          </a:p>
-        </p:txBody>
-      </p:sp>
-      <p:sp>
-        <p:nvSpPr>
-          <p:cNvPr id="4" name="슬라이드 번호 개체 틀 3"/>
-          <p:cNvSpPr>
-            <a:spLocks noGrp="1"/>
-          </p:cNvSpPr>
-          <p:nvPr>
-            <p:ph type="sldNum" sz="quarter" idx="10"/>
-          </p:nvPr>
-        </p:nvSpPr>
-        <p:spPr/>
-        <p:txBody>
-          <a:bodyPr/>
-          <a:lstStyle/>
-          <a:p>
-            <a:pPr rtl="0"/>
-            <a:fld id="{5FB91549-43BF-425A-AF25-75262019208C}" type="slidenum">
-              <a:rPr lang="en-US" altLang="ko-KR" smtClean="0"/>
-              <a:t>19</a:t>
-            </a:fld>
-            <a:endParaRPr lang="ko-KR" altLang="en-US" dirty="0"/>
-          </a:p>
-        </p:txBody>
-      </p:sp>
-    </p:spTree>
-    <p:extLst>
-      <p:ext uri="{BB962C8B-B14F-4D97-AF65-F5344CB8AC3E}">
-        <p14:creationId xmlns:p14="http://schemas.microsoft.com/office/powerpoint/2010/main" val="945868928"/>
       </p:ext>
     </p:extLst>
   </p:cSld>
@@ -1886,6 +1887,91 @@
   <p:cSld>
     <p:spTree>
       <p:nvGrpSpPr>
+        <p:cNvPr id="1" name=""/>
+        <p:cNvGrpSpPr/>
+        <p:nvPr/>
+      </p:nvGrpSpPr>
+      <p:grpSpPr>
+        <a:xfrm>
+          <a:off x="0" y="0"/>
+          <a:ext cx="0" cy="0"/>
+          <a:chOff x="0" y="0"/>
+          <a:chExt cx="0" cy="0"/>
+        </a:xfrm>
+      </p:grpSpPr>
+      <p:sp>
+        <p:nvSpPr>
+          <p:cNvPr id="2" name="슬라이드 이미지 개체 틀 1"/>
+          <p:cNvSpPr>
+            <a:spLocks noGrp="1" noRot="1" noChangeAspect="1"/>
+          </p:cNvSpPr>
+          <p:nvPr>
+            <p:ph type="sldImg"/>
+          </p:nvPr>
+        </p:nvSpPr>
+        <p:spPr/>
+      </p:sp>
+      <p:sp>
+        <p:nvSpPr>
+          <p:cNvPr id="3" name="슬라이드 노트 개체 틀 2"/>
+          <p:cNvSpPr>
+            <a:spLocks noGrp="1"/>
+          </p:cNvSpPr>
+          <p:nvPr>
+            <p:ph type="body" idx="1"/>
+          </p:nvPr>
+        </p:nvSpPr>
+        <p:spPr/>
+        <p:txBody>
+          <a:bodyPr/>
+          <a:lstStyle/>
+          <a:p>
+            <a:endParaRPr lang="ko-KR" altLang="en-US" dirty="0"/>
+          </a:p>
+        </p:txBody>
+      </p:sp>
+      <p:sp>
+        <p:nvSpPr>
+          <p:cNvPr id="4" name="슬라이드 번호 개체 틀 3"/>
+          <p:cNvSpPr>
+            <a:spLocks noGrp="1"/>
+          </p:cNvSpPr>
+          <p:nvPr>
+            <p:ph type="sldNum" sz="quarter" idx="10"/>
+          </p:nvPr>
+        </p:nvSpPr>
+        <p:spPr/>
+        <p:txBody>
+          <a:bodyPr/>
+          <a:lstStyle/>
+          <a:p>
+            <a:pPr rtl="0"/>
+            <a:fld id="{5FB91549-43BF-425A-AF25-75262019208C}" type="slidenum">
+              <a:rPr lang="en-US" altLang="ko-KR" smtClean="0"/>
+              <a:t>20</a:t>
+            </a:fld>
+            <a:endParaRPr lang="ko-KR" altLang="en-US" dirty="0"/>
+          </a:p>
+        </p:txBody>
+      </p:sp>
+    </p:spTree>
+    <p:extLst>
+      <p:ext uri="{BB962C8B-B14F-4D97-AF65-F5344CB8AC3E}">
+        <p14:creationId xmlns:p14="http://schemas.microsoft.com/office/powerpoint/2010/main" val="945868928"/>
+      </p:ext>
+    </p:extLst>
+  </p:cSld>
+  <p:clrMapOvr>
+    <a:masterClrMapping/>
+  </p:clrMapOvr>
+</p:notes>
+</file>
+
+<file path=ppt/notesSlides/notesSlide21.xml><?xml version="1.0" encoding="utf-8"?>
+<p:notes xmlns:a="http://schemas.openxmlformats.org/drawingml/2006/main" xmlns:r="http://schemas.openxmlformats.org/officeDocument/2006/relationships" xmlns:p="http://schemas.openxmlformats.org/presentationml/2006/main">
+  <p:cSld>
+    <p:spTree>
+      <p:nvGrpSpPr>
         <p:cNvPr id="1" name="">
           <a:extLst>
             <a:ext uri="{FF2B5EF4-FFF2-40B4-BE49-F238E27FC236}">
@@ -1971,7 +2057,7 @@
             <a:pPr rtl="0"/>
             <a:fld id="{5FB91549-43BF-425A-AF25-75262019208C}" type="slidenum">
               <a:rPr lang="en-US" altLang="ko-KR" smtClean="0"/>
-              <a:t>20</a:t>
+              <a:t>21</a:t>
             </a:fld>
             <a:endParaRPr lang="ko-KR" altLang="en-US" dirty="0"/>
           </a:p>
@@ -1990,7 +2076,7 @@
 </p:notes>
 </file>
 
-<file path=ppt/notesSlides/notesSlide21.xml><?xml version="1.0" encoding="utf-8"?>
+<file path=ppt/notesSlides/notesSlide22.xml><?xml version="1.0" encoding="utf-8"?>
 <p:notes xmlns:a="http://schemas.openxmlformats.org/drawingml/2006/main" xmlns:r="http://schemas.openxmlformats.org/officeDocument/2006/relationships" xmlns:p="http://schemas.openxmlformats.org/presentationml/2006/main">
   <p:cSld>
     <p:spTree>
@@ -2056,7 +2142,7 @@
             <a:pPr rtl="0"/>
             <a:fld id="{5FB91549-43BF-425A-AF25-75262019208C}" type="slidenum">
               <a:rPr lang="en-US" altLang="ko-KR" smtClean="0"/>
-              <a:t>21</a:t>
+              <a:t>22</a:t>
             </a:fld>
             <a:endParaRPr lang="ko-KR" altLang="en-US" dirty="0"/>
           </a:p>
@@ -2075,7 +2161,7 @@
 </p:notes>
 </file>
 
-<file path=ppt/notesSlides/notesSlide22.xml><?xml version="1.0" encoding="utf-8"?>
+<file path=ppt/notesSlides/notesSlide23.xml><?xml version="1.0" encoding="utf-8"?>
 <p:notes xmlns:a="http://schemas.openxmlformats.org/drawingml/2006/main" xmlns:r="http://schemas.openxmlformats.org/officeDocument/2006/relationships" xmlns:p="http://schemas.openxmlformats.org/presentationml/2006/main">
   <p:cSld>
     <p:spTree>
@@ -2165,7 +2251,7 @@
             <a:pPr rtl="0"/>
             <a:fld id="{5FB91549-43BF-425A-AF25-75262019208C}" type="slidenum">
               <a:rPr lang="en-US" altLang="ko-KR" smtClean="0"/>
-              <a:t>22</a:t>
+              <a:t>23</a:t>
             </a:fld>
             <a:endParaRPr lang="ko-KR" altLang="en-US" dirty="0"/>
           </a:p>
@@ -2185,6 +2271,115 @@
 </file>
 
 <file path=ppt/notesSlides/notesSlide3.xml><?xml version="1.0" encoding="utf-8"?>
+<p:notes xmlns:a="http://schemas.openxmlformats.org/drawingml/2006/main" xmlns:r="http://schemas.openxmlformats.org/officeDocument/2006/relationships" xmlns:p="http://schemas.openxmlformats.org/presentationml/2006/main">
+  <p:cSld>
+    <p:spTree>
+      <p:nvGrpSpPr>
+        <p:cNvPr id="1" name="">
+          <a:extLst>
+            <a:ext uri="{FF2B5EF4-FFF2-40B4-BE49-F238E27FC236}">
+              <a16:creationId xmlns:a16="http://schemas.microsoft.com/office/drawing/2014/main" id="{D6680C74-2F56-0776-FB63-885E262ECEA2}"/>
+            </a:ext>
+          </a:extLst>
+        </p:cNvPr>
+        <p:cNvGrpSpPr/>
+        <p:nvPr/>
+      </p:nvGrpSpPr>
+      <p:grpSpPr>
+        <a:xfrm>
+          <a:off x="0" y="0"/>
+          <a:ext cx="0" cy="0"/>
+          <a:chOff x="0" y="0"/>
+          <a:chExt cx="0" cy="0"/>
+        </a:xfrm>
+      </p:grpSpPr>
+      <p:sp>
+        <p:nvSpPr>
+          <p:cNvPr id="2" name="슬라이드 이미지 개체 틀 1">
+            <a:extLst>
+              <a:ext uri="{FF2B5EF4-FFF2-40B4-BE49-F238E27FC236}">
+                <a16:creationId xmlns:a16="http://schemas.microsoft.com/office/drawing/2014/main" id="{B03FB491-D5C3-B125-D3A5-20D93BA213B4}"/>
+              </a:ext>
+            </a:extLst>
+          </p:cNvPr>
+          <p:cNvSpPr>
+            <a:spLocks noGrp="1" noRot="1" noChangeAspect="1"/>
+          </p:cNvSpPr>
+          <p:nvPr>
+            <p:ph type="sldImg"/>
+          </p:nvPr>
+        </p:nvSpPr>
+        <p:spPr/>
+      </p:sp>
+      <p:sp>
+        <p:nvSpPr>
+          <p:cNvPr id="3" name="슬라이드 노트 개체 틀 2">
+            <a:extLst>
+              <a:ext uri="{FF2B5EF4-FFF2-40B4-BE49-F238E27FC236}">
+                <a16:creationId xmlns:a16="http://schemas.microsoft.com/office/drawing/2014/main" id="{1ED0D449-C2FB-4671-E754-A2794CA3BE6E}"/>
+              </a:ext>
+            </a:extLst>
+          </p:cNvPr>
+          <p:cNvSpPr>
+            <a:spLocks noGrp="1"/>
+          </p:cNvSpPr>
+          <p:nvPr>
+            <p:ph type="body" idx="1"/>
+          </p:nvPr>
+        </p:nvSpPr>
+        <p:spPr/>
+        <p:txBody>
+          <a:bodyPr/>
+          <a:lstStyle/>
+          <a:p>
+            <a:endParaRPr lang="ko-KR" altLang="en-US" dirty="0"/>
+          </a:p>
+        </p:txBody>
+      </p:sp>
+      <p:sp>
+        <p:nvSpPr>
+          <p:cNvPr id="4" name="슬라이드 번호 개체 틀 3">
+            <a:extLst>
+              <a:ext uri="{FF2B5EF4-FFF2-40B4-BE49-F238E27FC236}">
+                <a16:creationId xmlns:a16="http://schemas.microsoft.com/office/drawing/2014/main" id="{00854A31-D57F-3BA8-8830-B7867C5DD3AA}"/>
+              </a:ext>
+            </a:extLst>
+          </p:cNvPr>
+          <p:cNvSpPr>
+            <a:spLocks noGrp="1"/>
+          </p:cNvSpPr>
+          <p:nvPr>
+            <p:ph type="sldNum" sz="quarter" idx="10"/>
+          </p:nvPr>
+        </p:nvSpPr>
+        <p:spPr/>
+        <p:txBody>
+          <a:bodyPr/>
+          <a:lstStyle/>
+          <a:p>
+            <a:pPr rtl="0"/>
+            <a:fld id="{5FB91549-43BF-425A-AF25-75262019208C}" type="slidenum">
+              <a:rPr lang="en-US" altLang="ko-KR" smtClean="0"/>
+              <a:t>3</a:t>
+            </a:fld>
+            <a:endParaRPr lang="ko-KR" altLang="en-US" dirty="0"/>
+          </a:p>
+        </p:txBody>
+      </p:sp>
+    </p:spTree>
+    <p:extLst>
+      <p:ext uri="{BB962C8B-B14F-4D97-AF65-F5344CB8AC3E}">
+        <p14:creationId xmlns:p14="http://schemas.microsoft.com/office/powerpoint/2010/main" val="3582574110"/>
+      </p:ext>
+    </p:extLst>
+  </p:cSld>
+  <p:clrMapOvr>
+    <a:masterClrMapping/>
+  </p:clrMapOvr>
+</p:notes>
+</file>
+
+<file path=ppt/notesSlides/notesSlide4.xml><?xml version="1.0" encoding="utf-8"?>
 <p:notes xmlns:a="http://schemas.openxmlformats.org/drawingml/2006/main" xmlns:r="http://schemas.openxmlformats.org/officeDocument/2006/relationships" xmlns:p="http://schemas.openxmlformats.org/presentationml/2006/main">
   <p:cSld>
     <p:spTree>
@@ -2274,7 +2469,7 @@
             <a:pPr rtl="0"/>
             <a:fld id="{5FB91549-43BF-425A-AF25-75262019208C}" type="slidenum">
               <a:rPr lang="en-US" altLang="ko-KR" smtClean="0"/>
-              <a:t>3</a:t>
+              <a:t>4</a:t>
             </a:fld>
             <a:endParaRPr lang="ko-KR" altLang="en-US" dirty="0"/>
           </a:p>
@@ -2293,7 +2488,7 @@
 </p:notes>
 </file>
 
-<file path=ppt/notesSlides/notesSlide4.xml><?xml version="1.0" encoding="utf-8"?>
+<file path=ppt/notesSlides/notesSlide5.xml><?xml version="1.0" encoding="utf-8"?>
 <p:notes xmlns:a="http://schemas.openxmlformats.org/drawingml/2006/main" xmlns:r="http://schemas.openxmlformats.org/officeDocument/2006/relationships" xmlns:p="http://schemas.openxmlformats.org/presentationml/2006/main">
   <p:cSld>
     <p:spTree>
@@ -2383,7 +2578,7 @@
             <a:pPr rtl="0"/>
             <a:fld id="{5FB91549-43BF-425A-AF25-75262019208C}" type="slidenum">
               <a:rPr lang="en-US" altLang="ko-KR" smtClean="0"/>
-              <a:t>4</a:t>
+              <a:t>5</a:t>
             </a:fld>
             <a:endParaRPr lang="ko-KR" altLang="en-US" dirty="0"/>
           </a:p>
@@ -2402,7 +2597,7 @@
 </p:notes>
 </file>
 
-<file path=ppt/notesSlides/notesSlide5.xml><?xml version="1.0" encoding="utf-8"?>
+<file path=ppt/notesSlides/notesSlide6.xml><?xml version="1.0" encoding="utf-8"?>
 <p:notes xmlns:a="http://schemas.openxmlformats.org/drawingml/2006/main" xmlns:r="http://schemas.openxmlformats.org/officeDocument/2006/relationships" xmlns:p="http://schemas.openxmlformats.org/presentationml/2006/main">
   <p:cSld>
     <p:spTree>
@@ -2492,7 +2687,7 @@
             <a:pPr rtl="0"/>
             <a:fld id="{5FB91549-43BF-425A-AF25-75262019208C}" type="slidenum">
               <a:rPr lang="en-US" altLang="ko-KR" smtClean="0"/>
-              <a:t>5</a:t>
+              <a:t>6</a:t>
             </a:fld>
             <a:endParaRPr lang="ko-KR" altLang="en-US" dirty="0"/>
           </a:p>
@@ -2511,7 +2706,7 @@
 </p:notes>
 </file>
 
-<file path=ppt/notesSlides/notesSlide6.xml><?xml version="1.0" encoding="utf-8"?>
+<file path=ppt/notesSlides/notesSlide7.xml><?xml version="1.0" encoding="utf-8"?>
 <p:notes xmlns:a="http://schemas.openxmlformats.org/drawingml/2006/main" xmlns:r="http://schemas.openxmlformats.org/officeDocument/2006/relationships" xmlns:p="http://schemas.openxmlformats.org/presentationml/2006/main">
   <p:cSld>
     <p:spTree>
@@ -2601,7 +2796,7 @@
             <a:pPr rtl="0"/>
             <a:fld id="{5FB91549-43BF-425A-AF25-75262019208C}" type="slidenum">
               <a:rPr lang="en-US" altLang="ko-KR" smtClean="0"/>
-              <a:t>6</a:t>
+              <a:t>7</a:t>
             </a:fld>
             <a:endParaRPr lang="ko-KR" altLang="en-US" dirty="0"/>
           </a:p>
@@ -2611,91 +2806,6 @@
     <p:extLst>
       <p:ext uri="{BB962C8B-B14F-4D97-AF65-F5344CB8AC3E}">
         <p14:creationId xmlns:p14="http://schemas.microsoft.com/office/powerpoint/2010/main" val="3893473488"/>
-      </p:ext>
-    </p:extLst>
-  </p:cSld>
-  <p:clrMapOvr>
-    <a:masterClrMapping/>
-  </p:clrMapOvr>
-</p:notes>
-</file>
-
-<file path=ppt/notesSlides/notesSlide7.xml><?xml version="1.0" encoding="utf-8"?>
-<p:notes xmlns:a="http://schemas.openxmlformats.org/drawingml/2006/main" xmlns:r="http://schemas.openxmlformats.org/officeDocument/2006/relationships" xmlns:p="http://schemas.openxmlformats.org/presentationml/2006/main">
-  <p:cSld>
-    <p:spTree>
-      <p:nvGrpSpPr>
-        <p:cNvPr id="1" name=""/>
-        <p:cNvGrpSpPr/>
-        <p:nvPr/>
-      </p:nvGrpSpPr>
-      <p:grpSpPr>
-        <a:xfrm>
-          <a:off x="0" y="0"/>
-          <a:ext cx="0" cy="0"/>
-          <a:chOff x="0" y="0"/>
-          <a:chExt cx="0" cy="0"/>
-        </a:xfrm>
-      </p:grpSpPr>
-      <p:sp>
-        <p:nvSpPr>
-          <p:cNvPr id="2" name="슬라이드 이미지 개체 틀 1"/>
-          <p:cNvSpPr>
-            <a:spLocks noGrp="1" noRot="1" noChangeAspect="1"/>
-          </p:cNvSpPr>
-          <p:nvPr>
-            <p:ph type="sldImg"/>
-          </p:nvPr>
-        </p:nvSpPr>
-        <p:spPr/>
-      </p:sp>
-      <p:sp>
-        <p:nvSpPr>
-          <p:cNvPr id="3" name="슬라이드 노트 개체 틀 2"/>
-          <p:cNvSpPr>
-            <a:spLocks noGrp="1"/>
-          </p:cNvSpPr>
-          <p:nvPr>
-            <p:ph type="body" idx="1"/>
-          </p:nvPr>
-        </p:nvSpPr>
-        <p:spPr/>
-        <p:txBody>
-          <a:bodyPr/>
-          <a:lstStyle/>
-          <a:p>
-            <a:endParaRPr lang="ko-KR" altLang="en-US" dirty="0"/>
-          </a:p>
-        </p:txBody>
-      </p:sp>
-      <p:sp>
-        <p:nvSpPr>
-          <p:cNvPr id="4" name="슬라이드 번호 개체 틀 3"/>
-          <p:cNvSpPr>
-            <a:spLocks noGrp="1"/>
-          </p:cNvSpPr>
-          <p:nvPr>
-            <p:ph type="sldNum" sz="quarter" idx="10"/>
-          </p:nvPr>
-        </p:nvSpPr>
-        <p:spPr/>
-        <p:txBody>
-          <a:bodyPr/>
-          <a:lstStyle/>
-          <a:p>
-            <a:pPr rtl="0"/>
-            <a:fld id="{5FB91549-43BF-425A-AF25-75262019208C}" type="slidenum">
-              <a:rPr lang="en-US" altLang="ko-KR" smtClean="0"/>
-              <a:t>7</a:t>
-            </a:fld>
-            <a:endParaRPr lang="ko-KR" altLang="en-US" dirty="0"/>
-          </a:p>
-        </p:txBody>
-      </p:sp>
-    </p:spTree>
-    <p:extLst>
-      <p:ext uri="{BB962C8B-B14F-4D97-AF65-F5344CB8AC3E}">
-        <p14:creationId xmlns:p14="http://schemas.microsoft.com/office/powerpoint/2010/main" val="962635640"/>
       </p:ext>
     </p:extLst>
   </p:cSld>
@@ -2780,7 +2890,7 @@
     </p:spTree>
     <p:extLst>
       <p:ext uri="{BB962C8B-B14F-4D97-AF65-F5344CB8AC3E}">
-        <p14:creationId xmlns:p14="http://schemas.microsoft.com/office/powerpoint/2010/main" val="3912811316"/>
+        <p14:creationId xmlns:p14="http://schemas.microsoft.com/office/powerpoint/2010/main" val="962635640"/>
       </p:ext>
     </p:extLst>
   </p:cSld>
@@ -2865,7 +2975,7 @@
     </p:spTree>
     <p:extLst>
       <p:ext uri="{BB962C8B-B14F-4D97-AF65-F5344CB8AC3E}">
-        <p14:creationId xmlns:p14="http://schemas.microsoft.com/office/powerpoint/2010/main" val="3259237565"/>
+        <p14:creationId xmlns:p14="http://schemas.microsoft.com/office/powerpoint/2010/main" val="3912811316"/>
       </p:ext>
     </p:extLst>
   </p:cSld>
@@ -3113,7 +3223,7 @@
           <a:p>
             <a:fld id="{4B229CEB-779D-4AB3-81CB-8FCEEAE03F61}" type="datetime1">
               <a:rPr lang="ko-KR" altLang="en-US" smtClean="0"/>
-              <a:t>2026-04-08</a:t>
+              <a:t>2026-04-09</a:t>
             </a:fld>
             <a:endParaRPr lang="ko-KR" altLang="en-US" dirty="0"/>
           </a:p>
@@ -3351,7 +3461,7 @@
             <a:pPr rtl="0"/>
             <a:fld id="{C3B7A883-0BF0-4B4B-84D5-D747A0111A56}" type="datetime1">
               <a:rPr lang="ko-KR" altLang="en-US" noProof="0" smtClean="0"/>
-              <a:t>2026-04-08</a:t>
+              <a:t>2026-04-09</a:t>
             </a:fld>
             <a:endParaRPr lang="ko-KR" altLang="en-US" noProof="0" dirty="0"/>
           </a:p>
@@ -3569,7 +3679,7 @@
             <a:pPr rtl="0"/>
             <a:fld id="{3DA7EA29-F2BB-4FB1-BB4B-C55A7FA3FC5C}" type="datetime1">
               <a:rPr lang="ko-KR" altLang="en-US" noProof="0" smtClean="0"/>
-              <a:t>2026-04-08</a:t>
+              <a:t>2026-04-09</a:t>
             </a:fld>
             <a:endParaRPr lang="ko-KR" altLang="en-US" noProof="0" dirty="0"/>
           </a:p>
@@ -3778,7 +3888,7 @@
             <a:pPr rtl="0"/>
             <a:fld id="{D76306AB-75A0-421C-B431-0E4E30A5C28E}" type="datetime1">
               <a:rPr lang="ko-KR" altLang="en-US" noProof="0" smtClean="0"/>
-              <a:t>2026-04-08</a:t>
+              <a:t>2026-04-09</a:t>
             </a:fld>
             <a:endParaRPr lang="ko-KR" altLang="en-US" noProof="0" dirty="0"/>
           </a:p>
@@ -4048,7 +4158,7 @@
             <a:pPr rtl="0"/>
             <a:fld id="{E1D969EE-F1EB-462E-B70D-5B36B3806A4E}" type="datetime1">
               <a:rPr lang="ko-KR" altLang="en-US" noProof="0" smtClean="0"/>
-              <a:t>2026-04-08</a:t>
+              <a:t>2026-04-09</a:t>
             </a:fld>
             <a:endParaRPr lang="ko-KR" altLang="en-US" noProof="0" dirty="0"/>
           </a:p>
@@ -4356,7 +4466,7 @@
             <a:pPr rtl="0"/>
             <a:fld id="{E8CBB1B7-E0A1-46A3-B5B5-C69931095FF6}" type="datetime1">
               <a:rPr lang="ko-KR" altLang="en-US" noProof="0" smtClean="0"/>
-              <a:t>2026-04-08</a:t>
+              <a:t>2026-04-09</a:t>
             </a:fld>
             <a:endParaRPr lang="ko-KR" altLang="en-US" noProof="0" dirty="0"/>
           </a:p>
@@ -4807,7 +4917,7 @@
             <a:pPr rtl="0"/>
             <a:fld id="{DAFC0E65-06AB-44D7-AAEE-8F4C7ED84A0C}" type="datetime1">
               <a:rPr lang="ko-KR" altLang="en-US" noProof="0" smtClean="0"/>
-              <a:t>2026-04-08</a:t>
+              <a:t>2026-04-09</a:t>
             </a:fld>
             <a:endParaRPr lang="ko-KR" altLang="en-US" noProof="0" dirty="0"/>
           </a:p>
@@ -4944,7 +5054,7 @@
             <a:pPr rtl="0"/>
             <a:fld id="{30189E66-D439-4767-B911-EB49CB20E313}" type="datetime1">
               <a:rPr lang="ko-KR" altLang="en-US" noProof="0" smtClean="0"/>
-              <a:t>2026-04-08</a:t>
+              <a:t>2026-04-09</a:t>
             </a:fld>
             <a:endParaRPr lang="ko-KR" altLang="en-US" noProof="0" dirty="0"/>
           </a:p>
@@ -5057,7 +5167,7 @@
             <a:pPr rtl="0"/>
             <a:fld id="{D4E4FFC0-DB28-4291-80A0-63DBF8428320}" type="datetime1">
               <a:rPr lang="ko-KR" altLang="en-US" noProof="0" smtClean="0"/>
-              <a:t>2026-04-08</a:t>
+              <a:t>2026-04-09</a:t>
             </a:fld>
             <a:endParaRPr lang="ko-KR" altLang="en-US" noProof="0" dirty="0"/>
           </a:p>
@@ -5362,7 +5472,7 @@
             <a:pPr rtl="0"/>
             <a:fld id="{3AB5804B-C38E-4214-93DF-3E6DA00134E8}" type="datetime1">
               <a:rPr lang="ko-KR" altLang="en-US" noProof="0" smtClean="0"/>
-              <a:t>2026-04-08</a:t>
+              <a:t>2026-04-09</a:t>
             </a:fld>
             <a:endParaRPr lang="ko-KR" altLang="en-US" noProof="0" dirty="0"/>
           </a:p>
@@ -5656,7 +5766,7 @@
             <a:pPr rtl="0"/>
             <a:fld id="{CABEE384-F18F-4153-AC21-608599869F84}" type="datetime1">
               <a:rPr lang="ko-KR" altLang="en-US" noProof="0" smtClean="0"/>
-              <a:t>2026-04-08</a:t>
+              <a:t>2026-04-09</a:t>
             </a:fld>
             <a:endParaRPr lang="ko-KR" altLang="en-US" noProof="0" dirty="0"/>
           </a:p>
@@ -5888,7 +5998,7 @@
           <a:p>
             <a:fld id="{667A4C69-65FB-481C-AC2A-84D254D33675}" type="datetime1">
               <a:rPr lang="ko-KR" altLang="en-US" smtClean="0"/>
-              <a:t>2026-04-08</a:t>
+              <a:t>2026-04-09</a:t>
             </a:fld>
             <a:endParaRPr lang="ko-KR" altLang="en-US" dirty="0"/>
           </a:p>
@@ -6532,6 +6642,344 @@
       </p:sp>
       <p:pic>
         <p:nvPicPr>
+          <p:cNvPr id="4" name="그림 3"/>
+          <p:cNvPicPr>
+            <a:picLocks noChangeAspect="1"/>
+          </p:cNvPicPr>
+          <p:nvPr/>
+        </p:nvPicPr>
+        <p:blipFill>
+          <a:blip r:embed="rId3"/>
+          <a:stretch>
+            <a:fillRect/>
+          </a:stretch>
+        </p:blipFill>
+        <p:spPr>
+          <a:xfrm>
+            <a:off x="943780" y="1601264"/>
+            <a:ext cx="7559835" cy="1258912"/>
+          </a:xfrm>
+          <a:prstGeom prst="rect">
+            <a:avLst/>
+          </a:prstGeom>
+        </p:spPr>
+      </p:pic>
+      <p:pic>
+        <p:nvPicPr>
+          <p:cNvPr id="3" name="그림 2"/>
+          <p:cNvPicPr>
+            <a:picLocks noChangeAspect="1"/>
+          </p:cNvPicPr>
+          <p:nvPr/>
+        </p:nvPicPr>
+        <p:blipFill>
+          <a:blip r:embed="rId4"/>
+          <a:stretch>
+            <a:fillRect/>
+          </a:stretch>
+        </p:blipFill>
+        <p:spPr>
+          <a:xfrm>
+            <a:off x="4654253" y="4293096"/>
+            <a:ext cx="2664296" cy="867445"/>
+          </a:xfrm>
+          <a:prstGeom prst="rect">
+            <a:avLst/>
+          </a:prstGeom>
+        </p:spPr>
+      </p:pic>
+      <mc:AlternateContent xmlns:mc="http://schemas.openxmlformats.org/markup-compatibility/2006" xmlns:a14="http://schemas.microsoft.com/office/drawing/2010/main">
+        <mc:Choice Requires="a14">
+          <p:sp>
+            <p:nvSpPr>
+              <p:cNvPr id="5" name="TextBox 4"/>
+              <p:cNvSpPr txBox="1"/>
+              <p:nvPr/>
+            </p:nvSpPr>
+            <p:spPr>
+              <a:xfrm>
+                <a:off x="909836" y="3573016"/>
+                <a:ext cx="11161240" cy="400110"/>
+              </a:xfrm>
+              <a:prstGeom prst="rect">
+                <a:avLst/>
+              </a:prstGeom>
+              <a:noFill/>
+            </p:spPr>
+            <p:txBody>
+              <a:bodyPr wrap="square" rtlCol="0">
+                <a:spAutoFit/>
+              </a:bodyPr>
+              <a:lstStyle/>
+              <a:p>
+                <a:pPr marL="342900" indent="-342900">
+                  <a:buFont typeface="Wingdings" panose="05000000000000000000" pitchFamily="2" charset="2"/>
+                  <a:buChar char="v"/>
+                </a:pPr>
+                <a:r>
+                  <a:rPr lang="ko-KR" altLang="en-US" sz="2000" dirty="0">
+                    <a:latin typeface="맑은 고딕 Semilight" panose="020B0502040204020203" pitchFamily="50" charset="-127"/>
+                    <a:ea typeface="맑은 고딕 Semilight" panose="020B0502040204020203" pitchFamily="50" charset="-127"/>
+                    <a:cs typeface="맑은 고딕 Semilight" panose="020B0502040204020203" pitchFamily="50" charset="-127"/>
+                  </a:rPr>
+                  <a:t>모집단 평균에 대한 </a:t>
+                </a:r>
+                <a:r>
+                  <a:rPr lang="ko-KR" altLang="en-US" sz="2000" dirty="0" err="1">
+                    <a:latin typeface="맑은 고딕 Semilight" panose="020B0502040204020203" pitchFamily="50" charset="-127"/>
+                    <a:ea typeface="맑은 고딕 Semilight" panose="020B0502040204020203" pitchFamily="50" charset="-127"/>
+                    <a:cs typeface="맑은 고딕 Semilight" panose="020B0502040204020203" pitchFamily="50" charset="-127"/>
+                  </a:rPr>
+                  <a:t>불편추정량</a:t>
+                </a:r>
+                <a:r>
+                  <a:rPr lang="en-US" altLang="ko-KR" sz="2000" dirty="0">
+                    <a:latin typeface="맑은 고딕 Semilight" panose="020B0502040204020203" pitchFamily="50" charset="-127"/>
+                    <a:ea typeface="맑은 고딕 Semilight" panose="020B0502040204020203" pitchFamily="50" charset="-127"/>
+                    <a:cs typeface="맑은 고딕 Semilight" panose="020B0502040204020203" pitchFamily="50" charset="-127"/>
+                  </a:rPr>
+                  <a:t>(Unbiased Estimator of</a:t>
+                </a:r>
+                <a:r>
+                  <a:rPr lang="ko-KR" altLang="en-US" sz="2000" dirty="0">
+                    <a:latin typeface="맑은 고딕 Semilight" panose="020B0502040204020203" pitchFamily="50" charset="-127"/>
+                    <a:ea typeface="맑은 고딕 Semilight" panose="020B0502040204020203" pitchFamily="50" charset="-127"/>
+                    <a:cs typeface="맑은 고딕 Semilight" panose="020B0502040204020203" pitchFamily="50" charset="-127"/>
+                  </a:rPr>
+                  <a:t> </a:t>
+                </a:r>
+                <a14:m>
+                  <m:oMath xmlns:m="http://schemas.openxmlformats.org/officeDocument/2006/math">
+                    <m:r>
+                      <a:rPr lang="ko-KR" altLang="en-US" sz="2000" i="1" smtClean="0">
+                        <a:latin typeface="Cambria Math" panose="02040503050406030204" pitchFamily="18" charset="0"/>
+                      </a:rPr>
+                      <m:t>𝜃</m:t>
+                    </m:r>
+                  </m:oMath>
+                </a14:m>
+                <a:r>
+                  <a:rPr lang="en-US" altLang="ko-KR" sz="2000" dirty="0">
+                    <a:latin typeface="맑은 고딕 Semilight" panose="020B0502040204020203" pitchFamily="50" charset="-127"/>
+                    <a:ea typeface="맑은 고딕 Semilight" panose="020B0502040204020203" pitchFamily="50" charset="-127"/>
+                    <a:cs typeface="맑은 고딕 Semilight" panose="020B0502040204020203" pitchFamily="50" charset="-127"/>
+                  </a:rPr>
+                  <a:t>)</a:t>
+                </a:r>
+                <a:r>
+                  <a:rPr lang="ko-KR" altLang="en-US" sz="2000" dirty="0">
+                    <a:latin typeface="맑은 고딕 Semilight" panose="020B0502040204020203" pitchFamily="50" charset="-127"/>
+                    <a:ea typeface="맑은 고딕 Semilight" panose="020B0502040204020203" pitchFamily="50" charset="-127"/>
+                    <a:cs typeface="맑은 고딕 Semilight" panose="020B0502040204020203" pitchFamily="50" charset="-127"/>
+                  </a:rPr>
+                  <a:t>은 </a:t>
+                </a:r>
+                <a:r>
+                  <a:rPr lang="ko-KR" altLang="en-US" sz="2000" dirty="0" err="1">
+                    <a:latin typeface="맑은 고딕 Semilight" panose="020B0502040204020203" pitchFamily="50" charset="-127"/>
+                    <a:ea typeface="맑은 고딕 Semilight" panose="020B0502040204020203" pitchFamily="50" charset="-127"/>
+                    <a:cs typeface="맑은 고딕 Semilight" panose="020B0502040204020203" pitchFamily="50" charset="-127"/>
+                  </a:rPr>
+                  <a:t>표본평균</a:t>
+                </a:r>
+                <a:endParaRPr lang="ko-KR" altLang="en-US" sz="2000" dirty="0">
+                  <a:latin typeface="맑은 고딕 Semilight" panose="020B0502040204020203" pitchFamily="50" charset="-127"/>
+                  <a:ea typeface="맑은 고딕 Semilight" panose="020B0502040204020203" pitchFamily="50" charset="-127"/>
+                  <a:cs typeface="맑은 고딕 Semilight" panose="020B0502040204020203" pitchFamily="50" charset="-127"/>
+                </a:endParaRPr>
+              </a:p>
+            </p:txBody>
+          </p:sp>
+        </mc:Choice>
+        <mc:Fallback xmlns="">
+          <p:sp>
+            <p:nvSpPr>
+              <p:cNvPr id="5" name="TextBox 4"/>
+              <p:cNvSpPr txBox="1">
+                <a:spLocks noRot="1" noChangeAspect="1" noMove="1" noResize="1" noEditPoints="1" noAdjustHandles="1" noChangeArrowheads="1" noChangeShapeType="1" noTextEdit="1"/>
+              </p:cNvSpPr>
+              <p:nvPr/>
+            </p:nvSpPr>
+            <p:spPr>
+              <a:xfrm>
+                <a:off x="909836" y="3573016"/>
+                <a:ext cx="11161240" cy="400110"/>
+              </a:xfrm>
+              <a:prstGeom prst="rect">
+                <a:avLst/>
+              </a:prstGeom>
+              <a:blipFill>
+                <a:blip r:embed="rId5"/>
+                <a:stretch>
+                  <a:fillRect l="-492" t="-7576" b="-25758"/>
+                </a:stretch>
+              </a:blipFill>
+            </p:spPr>
+            <p:txBody>
+              <a:bodyPr/>
+              <a:lstStyle/>
+              <a:p>
+                <a:r>
+                  <a:rPr lang="ko-KR" altLang="en-US">
+                    <a:noFill/>
+                  </a:rPr>
+                  <a:t> </a:t>
+                </a:r>
+              </a:p>
+            </p:txBody>
+          </p:sp>
+        </mc:Fallback>
+      </mc:AlternateContent>
+      <p:sp>
+        <p:nvSpPr>
+          <p:cNvPr id="2" name="TextBox 1">
+            <a:extLst>
+              <a:ext uri="{FF2B5EF4-FFF2-40B4-BE49-F238E27FC236}">
+                <a16:creationId xmlns:a16="http://schemas.microsoft.com/office/drawing/2014/main" id="{6B261840-E42D-89D5-94C4-189F0954CD4F}"/>
+              </a:ext>
+            </a:extLst>
+          </p:cNvPr>
+          <p:cNvSpPr txBox="1"/>
+          <p:nvPr/>
+        </p:nvSpPr>
+        <p:spPr>
+          <a:xfrm>
+            <a:off x="117748" y="260648"/>
+            <a:ext cx="2592288" cy="584775"/>
+          </a:xfrm>
+          <a:prstGeom prst="rect">
+            <a:avLst/>
+          </a:prstGeom>
+          <a:noFill/>
+        </p:spPr>
+        <p:txBody>
+          <a:bodyPr wrap="square" rtlCol="0">
+            <a:spAutoFit/>
+          </a:bodyPr>
+          <a:lstStyle/>
+          <a:p>
+            <a:r>
+              <a:rPr lang="ko-KR" altLang="en-US" sz="3200" b="1" dirty="0"/>
+              <a:t>실습하기</a:t>
+            </a:r>
+          </a:p>
+        </p:txBody>
+      </p:sp>
+      <p:pic>
+        <p:nvPicPr>
+          <p:cNvPr id="6" name="Picture 2" descr="한 여자가 노트북 컴퓨터에 타이핑을 하고 있다">
+            <a:extLst>
+              <a:ext uri="{FF2B5EF4-FFF2-40B4-BE49-F238E27FC236}">
+                <a16:creationId xmlns:a16="http://schemas.microsoft.com/office/drawing/2014/main" id="{BAE13FD5-E6E3-B98A-63C3-AD0C55C58B00}"/>
+              </a:ext>
+            </a:extLst>
+          </p:cNvPr>
+          <p:cNvPicPr>
+            <a:picLocks noChangeAspect="1" noChangeArrowheads="1"/>
+          </p:cNvPicPr>
+          <p:nvPr/>
+        </p:nvPicPr>
+        <p:blipFill>
+          <a:blip r:embed="rId6" cstate="print">
+            <a:extLst>
+              <a:ext uri="{28A0092B-C50C-407E-A947-70E740481C1C}">
+                <a14:useLocalDpi xmlns:a14="http://schemas.microsoft.com/office/drawing/2010/main" val="0"/>
+              </a:ext>
+            </a:extLst>
+          </a:blip>
+          <a:srcRect/>
+          <a:stretch>
+            <a:fillRect/>
+          </a:stretch>
+        </p:blipFill>
+        <p:spPr bwMode="auto">
+          <a:xfrm>
+            <a:off x="9918426" y="260648"/>
+            <a:ext cx="2152650" cy="1424329"/>
+          </a:xfrm>
+          <a:prstGeom prst="rect">
+            <a:avLst/>
+          </a:prstGeom>
+          <a:noFill/>
+          <a:extLst>
+            <a:ext uri="{909E8E84-426E-40DD-AFC4-6F175D3DCCD1}">
+              <a14:hiddenFill xmlns:a14="http://schemas.microsoft.com/office/drawing/2010/main">
+                <a:solidFill>
+                  <a:srgbClr val="FFFFFF"/>
+                </a:solidFill>
+              </a14:hiddenFill>
+            </a:ext>
+          </a:extLst>
+        </p:spPr>
+      </p:pic>
+    </p:spTree>
+    <p:extLst>
+      <p:ext uri="{BB962C8B-B14F-4D97-AF65-F5344CB8AC3E}">
+        <p14:creationId xmlns:p14="http://schemas.microsoft.com/office/powerpoint/2010/main" val="2648513285"/>
+      </p:ext>
+    </p:extLst>
+  </p:cSld>
+  <p:clrMapOvr>
+    <a:masterClrMapping/>
+  </p:clrMapOvr>
+  <mc:AlternateContent xmlns:mc="http://schemas.openxmlformats.org/markup-compatibility/2006" xmlns:p14="http://schemas.microsoft.com/office/powerpoint/2010/main">
+    <mc:Choice Requires="p14">
+      <p:transition spd="med" p14:dur="700">
+        <p:fade/>
+      </p:transition>
+    </mc:Choice>
+    <mc:Fallback xmlns="">
+      <p:transition spd="med">
+        <p:fade/>
+      </p:transition>
+    </mc:Fallback>
+  </mc:AlternateContent>
+</p:sld>
+</file>
+
+<file path=ppt/slides/slide11.xml><?xml version="1.0" encoding="utf-8"?>
+<p:sld xmlns:a="http://schemas.openxmlformats.org/drawingml/2006/main" xmlns:r="http://schemas.openxmlformats.org/officeDocument/2006/relationships" xmlns:p="http://schemas.openxmlformats.org/presentationml/2006/main">
+  <p:cSld>
+    <p:spTree>
+      <p:nvGrpSpPr>
+        <p:cNvPr id="1" name=""/>
+        <p:cNvGrpSpPr/>
+        <p:nvPr/>
+      </p:nvGrpSpPr>
+      <p:grpSpPr>
+        <a:xfrm>
+          <a:off x="0" y="0"/>
+          <a:ext cx="0" cy="0"/>
+          <a:chOff x="0" y="0"/>
+          <a:chExt cx="0" cy="0"/>
+        </a:xfrm>
+      </p:grpSpPr>
+      <p:sp>
+        <p:nvSpPr>
+          <p:cNvPr id="8" name="슬라이드 번호 개체 틀 7"/>
+          <p:cNvSpPr>
+            <a:spLocks noGrp="1"/>
+          </p:cNvSpPr>
+          <p:nvPr>
+            <p:ph type="sldNum" sz="quarter" idx="12"/>
+          </p:nvPr>
+        </p:nvSpPr>
+        <p:spPr/>
+        <p:txBody>
+          <a:bodyPr/>
+          <a:lstStyle/>
+          <a:p>
+            <a:pPr rtl="0"/>
+            <a:fld id="{A3F31473-23EB-4724-8B59-FE6D21D89FA4}" type="slidenum">
+              <a:rPr lang="en-US" altLang="ko-KR" noProof="0" smtClean="0"/>
+              <a:t>11</a:t>
+            </a:fld>
+            <a:endParaRPr lang="en-US" altLang="ko-KR" noProof="0" dirty="0"/>
+          </a:p>
+        </p:txBody>
+      </p:sp>
+      <p:pic>
+        <p:nvPicPr>
           <p:cNvPr id="4" name="그림 3">
             <a:extLst>
               <a:ext uri="{FF2B5EF4-FFF2-40B4-BE49-F238E27FC236}">
@@ -6701,7 +7149,7 @@
 </p:sld>
 </file>
 
-<file path=ppt/slides/slide11.xml><?xml version="1.0" encoding="utf-8"?>
+<file path=ppt/slides/slide12.xml><?xml version="1.0" encoding="utf-8"?>
 <p:sld xmlns:a="http://schemas.openxmlformats.org/drawingml/2006/main" xmlns:r="http://schemas.openxmlformats.org/officeDocument/2006/relationships" xmlns:p="http://schemas.openxmlformats.org/presentationml/2006/main">
   <p:cSld>
     <p:spTree>
@@ -6736,7 +7184,7 @@
             <a:pPr rtl="0"/>
             <a:fld id="{A3F31473-23EB-4724-8B59-FE6D21D89FA4}" type="slidenum">
               <a:rPr lang="en-US" altLang="ko-KR" noProof="0" smtClean="0"/>
-              <a:t>11</a:t>
+              <a:t>12</a:t>
             </a:fld>
             <a:endParaRPr lang="en-US" altLang="ko-KR" noProof="0" dirty="0"/>
           </a:p>
@@ -6806,12 +7254,369 @@
           </a:prstGeom>
         </p:spPr>
       </p:pic>
+      <p:sp>
+        <p:nvSpPr>
+          <p:cNvPr id="6" name="TextBox 5">
+            <a:extLst>
+              <a:ext uri="{FF2B5EF4-FFF2-40B4-BE49-F238E27FC236}">
+                <a16:creationId xmlns:a16="http://schemas.microsoft.com/office/drawing/2014/main" id="{2E74A933-AC54-79CE-7472-7CEB25D5DD76}"/>
+              </a:ext>
+            </a:extLst>
+          </p:cNvPr>
+          <p:cNvSpPr txBox="1"/>
+          <p:nvPr/>
+        </p:nvSpPr>
+        <p:spPr>
+          <a:xfrm>
+            <a:off x="477788" y="1105678"/>
+            <a:ext cx="11233248" cy="1142877"/>
+          </a:xfrm>
+          <a:prstGeom prst="rect">
+            <a:avLst/>
+          </a:prstGeom>
+          <a:noFill/>
+        </p:spPr>
+        <p:txBody>
+          <a:bodyPr wrap="square">
+            <a:spAutoFit/>
+          </a:bodyPr>
+          <a:lstStyle/>
+          <a:p>
+            <a:pPr marL="285750" marR="0" lvl="0" indent="-285750" algn="l" defTabSz="914400" rtl="0" eaLnBrk="0" fontAlgn="base" latinLnBrk="0" hangingPunct="0">
+              <a:lnSpc>
+                <a:spcPct val="150000"/>
+              </a:lnSpc>
+              <a:spcBef>
+                <a:spcPct val="0"/>
+              </a:spcBef>
+              <a:spcAft>
+                <a:spcPct val="0"/>
+              </a:spcAft>
+              <a:buClrTx/>
+              <a:buSzTx/>
+              <a:buFont typeface="Wingdings" panose="05000000000000000000" pitchFamily="2" charset="2"/>
+              <a:buChar char="v"/>
+              <a:tabLst/>
+            </a:pPr>
+            <a:r>
+              <a:rPr lang="ko-KR" altLang="en-US" sz="1600" dirty="0">
+                <a:latin typeface="+mn-ea"/>
+              </a:rPr>
+              <a:t>구간추정은</a:t>
+            </a:r>
+            <a:r>
+              <a:rPr lang="en-US" altLang="ko-KR" sz="1600" dirty="0">
+                <a:latin typeface="+mn-ea"/>
+              </a:rPr>
+              <a:t> </a:t>
+            </a:r>
+            <a:r>
+              <a:rPr kumimoji="0" lang="ko-KR" altLang="ko-KR" sz="1600" b="0" i="0" u="none" strike="noStrike" cap="none" normalizeH="0" baseline="0" dirty="0">
+                <a:ln>
+                  <a:noFill/>
+                </a:ln>
+                <a:solidFill>
+                  <a:schemeClr val="tx1"/>
+                </a:solidFill>
+                <a:effectLst/>
+                <a:latin typeface="+mn-ea"/>
+              </a:rPr>
+              <a:t>말편자(</a:t>
+            </a:r>
+            <a:r>
+              <a:rPr kumimoji="0" lang="ko-KR" altLang="ko-KR" sz="1600" b="0" i="0" u="none" strike="noStrike" cap="none" normalizeH="0" baseline="0" dirty="0" err="1">
+                <a:ln>
+                  <a:noFill/>
+                </a:ln>
+                <a:solidFill>
+                  <a:schemeClr val="tx1"/>
+                </a:solidFill>
+                <a:effectLst/>
+                <a:latin typeface="+mn-ea"/>
+              </a:rPr>
+              <a:t>Horseshoe</a:t>
+            </a:r>
+            <a:r>
+              <a:rPr kumimoji="0" lang="ko-KR" altLang="ko-KR" sz="1600" b="0" i="0" u="none" strike="noStrike" cap="none" normalizeH="0" baseline="0" dirty="0">
+                <a:ln>
+                  <a:noFill/>
+                </a:ln>
+                <a:solidFill>
+                  <a:schemeClr val="tx1"/>
+                </a:solidFill>
+                <a:effectLst/>
+                <a:latin typeface="+mn-ea"/>
+              </a:rPr>
+              <a:t>)를 던져서 막대에 끼우는 게임</a:t>
+            </a:r>
+            <a:r>
+              <a:rPr lang="ko-KR" altLang="en-US" sz="1600" dirty="0">
+                <a:latin typeface="+mn-ea"/>
+              </a:rPr>
+              <a:t>으로</a:t>
+            </a:r>
+            <a:r>
+              <a:rPr lang="en-US" altLang="ko-KR" sz="1600" dirty="0">
+                <a:latin typeface="+mn-ea"/>
+              </a:rPr>
+              <a:t> </a:t>
+            </a:r>
+            <a:r>
+              <a:rPr kumimoji="0" lang="ko-KR" altLang="ko-KR" sz="1600" b="0" i="0" u="none" strike="noStrike" cap="none" normalizeH="0" baseline="0" dirty="0" err="1">
+                <a:ln>
+                  <a:noFill/>
+                </a:ln>
+                <a:solidFill>
+                  <a:schemeClr val="tx1"/>
+                </a:solidFill>
+                <a:effectLst/>
+                <a:latin typeface="+mn-ea"/>
+              </a:rPr>
+              <a:t>막대'는</a:t>
+            </a:r>
+            <a:r>
+              <a:rPr kumimoji="0" lang="ko-KR" altLang="ko-KR" sz="1600" b="0" i="0" u="none" strike="noStrike" cap="none" normalizeH="0" baseline="0" dirty="0">
+                <a:ln>
+                  <a:noFill/>
+                </a:ln>
+                <a:solidFill>
+                  <a:schemeClr val="tx1"/>
+                </a:solidFill>
+                <a:effectLst/>
+                <a:latin typeface="+mn-ea"/>
+              </a:rPr>
+              <a:t> 우리가 알고 싶은 진짜 값(</a:t>
+            </a:r>
+            <a:r>
+              <a:rPr kumimoji="0" lang="ko-KR" altLang="ko-KR" sz="1600" b="0" i="0" u="none" strike="noStrike" cap="none" normalizeH="0" baseline="0" dirty="0" err="1">
+                <a:ln>
+                  <a:noFill/>
+                </a:ln>
+                <a:solidFill>
+                  <a:schemeClr val="tx1"/>
+                </a:solidFill>
+                <a:effectLst/>
+                <a:latin typeface="+mn-ea"/>
+              </a:rPr>
+              <a:t>모수</a:t>
+            </a:r>
+            <a:r>
+              <a:rPr kumimoji="0" lang="ko-KR" altLang="ko-KR" sz="1600" b="0" i="0" u="none" strike="noStrike" cap="none" normalizeH="0" baseline="0" dirty="0">
+                <a:ln>
+                  <a:noFill/>
+                </a:ln>
+                <a:solidFill>
+                  <a:schemeClr val="tx1"/>
+                </a:solidFill>
+                <a:effectLst/>
+                <a:latin typeface="+mn-ea"/>
+              </a:rPr>
+              <a:t>)이고, 말편자는 우리가 데이터를 통해 추정한 </a:t>
+            </a:r>
+            <a:r>
+              <a:rPr kumimoji="0" lang="ko-KR" altLang="ko-KR" sz="1600" b="1" i="0" u="none" strike="noStrike" cap="none" normalizeH="0" baseline="0" dirty="0">
+                <a:ln>
+                  <a:noFill/>
+                </a:ln>
+                <a:solidFill>
+                  <a:schemeClr val="tx1"/>
+                </a:solidFill>
+                <a:effectLst/>
+                <a:latin typeface="+mn-ea"/>
+              </a:rPr>
+              <a:t>신뢰구간</a:t>
+            </a:r>
+            <a:r>
+              <a:rPr lang="ko-KR" altLang="en-US" sz="1600" dirty="0">
+                <a:latin typeface="+mn-ea"/>
+              </a:rPr>
+              <a:t>으로</a:t>
+            </a:r>
+            <a:r>
+              <a:rPr lang="en-US" altLang="ko-KR" sz="1600" dirty="0">
+                <a:latin typeface="+mn-ea"/>
+              </a:rPr>
+              <a:t> </a:t>
+            </a:r>
+            <a:r>
+              <a:rPr kumimoji="0" lang="ko-KR" altLang="ko-KR" sz="1600" b="0" i="0" u="none" strike="noStrike" cap="none" normalizeH="0" baseline="0" dirty="0">
+                <a:ln>
+                  <a:noFill/>
+                </a:ln>
+                <a:solidFill>
+                  <a:schemeClr val="tx1"/>
+                </a:solidFill>
+                <a:effectLst/>
+                <a:latin typeface="+mn-ea"/>
+              </a:rPr>
+              <a:t>말편자가 막대를 포함하면(끼워지면) 예측이 성공한 것</a:t>
+            </a:r>
+            <a:r>
+              <a:rPr kumimoji="0" lang="ko-KR" altLang="en-US" sz="1600" b="0" i="0" u="none" strike="noStrike" cap="none" normalizeH="0" baseline="0" dirty="0">
+                <a:ln>
+                  <a:noFill/>
+                </a:ln>
+                <a:solidFill>
+                  <a:schemeClr val="tx1"/>
+                </a:solidFill>
+                <a:effectLst/>
+                <a:latin typeface="+mn-ea"/>
+              </a:rPr>
+              <a:t>이</a:t>
+            </a:r>
+            <a:r>
+              <a:rPr kumimoji="0" lang="en-US" altLang="ko-KR" sz="1600" b="0" i="0" u="none" strike="noStrike" cap="none" normalizeH="0" baseline="0" dirty="0">
+                <a:ln>
+                  <a:noFill/>
+                </a:ln>
+                <a:solidFill>
+                  <a:schemeClr val="tx1"/>
+                </a:solidFill>
+                <a:effectLst/>
+                <a:latin typeface="+mn-ea"/>
+              </a:rPr>
+              <a:t> </a:t>
+            </a:r>
+            <a:r>
+              <a:rPr kumimoji="0" lang="ko-KR" altLang="en-US" sz="1600" b="0" i="0" u="none" strike="noStrike" cap="none" normalizeH="0" baseline="0" dirty="0">
+                <a:ln>
+                  <a:noFill/>
+                </a:ln>
+                <a:solidFill>
+                  <a:schemeClr val="tx1"/>
+                </a:solidFill>
+                <a:effectLst/>
+                <a:latin typeface="+mn-ea"/>
+              </a:rPr>
+              <a:t>신뢰구간임 </a:t>
+            </a:r>
+            <a:r>
+              <a:rPr kumimoji="0" lang="en-US" altLang="ko-KR" sz="1600" b="0" i="0" u="none" strike="noStrike" cap="none" normalizeH="0" baseline="0" dirty="0">
+                <a:ln>
+                  <a:noFill/>
+                </a:ln>
+                <a:solidFill>
+                  <a:schemeClr val="tx1"/>
+                </a:solidFill>
+                <a:effectLst/>
+                <a:latin typeface="+mn-ea"/>
+              </a:rPr>
+              <a:t>(90%, 95%, 99% </a:t>
+            </a:r>
+            <a:r>
+              <a:rPr kumimoji="0" lang="ko-KR" altLang="en-US" sz="1600" b="0" i="0" u="none" strike="noStrike" cap="none" normalizeH="0" baseline="0" dirty="0">
+                <a:ln>
+                  <a:noFill/>
+                </a:ln>
+                <a:solidFill>
+                  <a:schemeClr val="tx1"/>
+                </a:solidFill>
+                <a:effectLst/>
+                <a:latin typeface="+mn-ea"/>
+              </a:rPr>
+              <a:t>등</a:t>
+            </a:r>
+            <a:r>
+              <a:rPr kumimoji="0" lang="en-US" altLang="ko-KR" sz="1600" b="0" i="0" u="none" strike="noStrike" cap="none" normalizeH="0" baseline="0" dirty="0">
+                <a:ln>
+                  <a:noFill/>
+                </a:ln>
+                <a:solidFill>
+                  <a:schemeClr val="tx1"/>
+                </a:solidFill>
+                <a:effectLst/>
+                <a:latin typeface="+mn-ea"/>
+              </a:rPr>
+              <a:t>)</a:t>
+            </a:r>
+            <a:endParaRPr kumimoji="0" lang="ko-KR" altLang="ko-KR" sz="1600" b="0" i="0" u="none" strike="noStrike" cap="none" normalizeH="0" baseline="0" dirty="0">
+              <a:ln>
+                <a:noFill/>
+              </a:ln>
+              <a:solidFill>
+                <a:schemeClr val="tx1"/>
+              </a:solidFill>
+              <a:effectLst/>
+              <a:latin typeface="+mn-ea"/>
+            </a:endParaRPr>
+          </a:p>
+        </p:txBody>
+      </p:sp>
+      <p:sp>
+        <p:nvSpPr>
+          <p:cNvPr id="3" name="TextBox 2">
+            <a:extLst>
+              <a:ext uri="{FF2B5EF4-FFF2-40B4-BE49-F238E27FC236}">
+                <a16:creationId xmlns:a16="http://schemas.microsoft.com/office/drawing/2014/main" id="{BBAE4996-11B8-D682-0EF3-84AD784BACC7}"/>
+              </a:ext>
+            </a:extLst>
+          </p:cNvPr>
+          <p:cNvSpPr txBox="1"/>
+          <p:nvPr/>
+        </p:nvSpPr>
+        <p:spPr>
+          <a:xfrm>
+            <a:off x="117748" y="260648"/>
+            <a:ext cx="11521280" cy="584775"/>
+          </a:xfrm>
+          <a:prstGeom prst="rect">
+            <a:avLst/>
+          </a:prstGeom>
+          <a:noFill/>
+        </p:spPr>
+        <p:txBody>
+          <a:bodyPr wrap="square" rtlCol="0">
+            <a:spAutoFit/>
+          </a:bodyPr>
+          <a:lstStyle/>
+          <a:p>
+            <a:pPr algn="ctr"/>
+            <a:r>
+              <a:rPr lang="ko-KR" altLang="en-US" sz="3200" b="1" dirty="0">
+                <a:latin typeface="맑은 고딕 Semilight" panose="020B0502040204020203" pitchFamily="50" charset="-127"/>
+                <a:ea typeface="맑은 고딕 Semilight" panose="020B0502040204020203" pitchFamily="50" charset="-127"/>
+                <a:cs typeface="맑은 고딕 Semilight" panose="020B0502040204020203" pitchFamily="50" charset="-127"/>
+              </a:rPr>
+              <a:t>구간 추정</a:t>
+            </a:r>
+            <a:r>
+              <a:rPr lang="en-US" altLang="ko-KR" sz="3200" b="1" dirty="0">
+                <a:latin typeface="맑은 고딕 Semilight" panose="020B0502040204020203" pitchFamily="50" charset="-127"/>
+                <a:ea typeface="맑은 고딕 Semilight" panose="020B0502040204020203" pitchFamily="50" charset="-127"/>
+                <a:cs typeface="맑은 고딕 Semilight" panose="020B0502040204020203" pitchFamily="50" charset="-127"/>
+              </a:rPr>
+              <a:t>(Interval</a:t>
+            </a:r>
+            <a:r>
+              <a:rPr lang="ko-KR" altLang="en-US" sz="3200" b="1" dirty="0">
+                <a:latin typeface="맑은 고딕 Semilight" panose="020B0502040204020203" pitchFamily="50" charset="-127"/>
+                <a:ea typeface="맑은 고딕 Semilight" panose="020B0502040204020203" pitchFamily="50" charset="-127"/>
+                <a:cs typeface="맑은 고딕 Semilight" panose="020B0502040204020203" pitchFamily="50" charset="-127"/>
+              </a:rPr>
+              <a:t> </a:t>
+            </a:r>
+            <a:r>
+              <a:rPr lang="en-US" altLang="ko-KR" sz="3200" b="1" dirty="0">
+                <a:latin typeface="맑은 고딕 Semilight" panose="020B0502040204020203" pitchFamily="50" charset="-127"/>
+                <a:ea typeface="맑은 고딕 Semilight" panose="020B0502040204020203" pitchFamily="50" charset="-127"/>
+                <a:cs typeface="맑은 고딕 Semilight" panose="020B0502040204020203" pitchFamily="50" charset="-127"/>
+              </a:rPr>
+              <a:t>Estimation)</a:t>
+            </a:r>
+            <a:endParaRPr lang="ko-KR" altLang="en-US" sz="3200" b="1" dirty="0">
+              <a:latin typeface="맑은 고딕 Semilight" panose="020B0502040204020203" pitchFamily="50" charset="-127"/>
+              <a:ea typeface="맑은 고딕 Semilight" panose="020B0502040204020203" pitchFamily="50" charset="-127"/>
+              <a:cs typeface="맑은 고딕 Semilight" panose="020B0502040204020203" pitchFamily="50" charset="-127"/>
+            </a:endParaRPr>
+          </a:p>
+        </p:txBody>
+      </p:sp>
       <p:pic>
         <p:nvPicPr>
-          <p:cNvPr id="1026" name="Picture 2" descr="Improving Data Estimation Skills">
+          <p:cNvPr id="5" name="Picture 2" descr="N(0,1) 95% cutoff values">
             <a:extLst>
               <a:ext uri="{FF2B5EF4-FFF2-40B4-BE49-F238E27FC236}">
-                <a16:creationId xmlns:a16="http://schemas.microsoft.com/office/drawing/2014/main" id="{ECF4E215-2C7F-CB7F-E11A-15ACF8AF05F1}"/>
+                <a16:creationId xmlns:a16="http://schemas.microsoft.com/office/drawing/2014/main" id="{216F16E8-0614-6960-E8E5-F6395EAAE318}"/>
               </a:ext>
             </a:extLst>
           </p:cNvPr>
@@ -6821,7 +7626,7 @@
           <p:nvPr/>
         </p:nvPicPr>
         <p:blipFill>
-          <a:blip r:embed="rId5">
+          <a:blip r:embed="rId5" cstate="print">
             <a:extLst>
               <a:ext uri="{28A0092B-C50C-407E-A947-70E740481C1C}">
                 <a14:useLocalDpi xmlns:a14="http://schemas.microsoft.com/office/drawing/2010/main" val="0"/>
@@ -6834,9 +7639,9 @@
           </a:stretch>
         </p:blipFill>
         <p:spPr bwMode="auto">
-          <a:xfrm rot="2293590">
-            <a:off x="8179180" y="2623184"/>
-            <a:ext cx="3027025" cy="3132497"/>
+          <a:xfrm rot="5400000">
+            <a:off x="7102524" y="3112652"/>
+            <a:ext cx="4032447" cy="2304256"/>
           </a:xfrm>
           <a:prstGeom prst="rect">
             <a:avLst/>
@@ -6853,363 +7658,6 @@
           </a:extLst>
         </p:spPr>
       </p:pic>
-      <p:sp>
-        <p:nvSpPr>
-          <p:cNvPr id="6" name="TextBox 5">
-            <a:extLst>
-              <a:ext uri="{FF2B5EF4-FFF2-40B4-BE49-F238E27FC236}">
-                <a16:creationId xmlns:a16="http://schemas.microsoft.com/office/drawing/2014/main" id="{2E74A933-AC54-79CE-7472-7CEB25D5DD76}"/>
-              </a:ext>
-            </a:extLst>
-          </p:cNvPr>
-          <p:cNvSpPr txBox="1"/>
-          <p:nvPr/>
-        </p:nvSpPr>
-        <p:spPr>
-          <a:xfrm>
-            <a:off x="477788" y="1105678"/>
-            <a:ext cx="11233248" cy="1142877"/>
-          </a:xfrm>
-          <a:prstGeom prst="rect">
-            <a:avLst/>
-          </a:prstGeom>
-          <a:noFill/>
-        </p:spPr>
-        <p:txBody>
-          <a:bodyPr wrap="square">
-            <a:spAutoFit/>
-          </a:bodyPr>
-          <a:lstStyle/>
-          <a:p>
-            <a:pPr marL="285750" marR="0" lvl="0" indent="-285750" algn="l" defTabSz="914400" rtl="0" eaLnBrk="0" fontAlgn="base" latinLnBrk="0" hangingPunct="0">
-              <a:lnSpc>
-                <a:spcPct val="150000"/>
-              </a:lnSpc>
-              <a:spcBef>
-                <a:spcPct val="0"/>
-              </a:spcBef>
-              <a:spcAft>
-                <a:spcPct val="0"/>
-              </a:spcAft>
-              <a:buClrTx/>
-              <a:buSzTx/>
-              <a:buFont typeface="Wingdings" panose="05000000000000000000" pitchFamily="2" charset="2"/>
-              <a:buChar char="v"/>
-              <a:tabLst/>
-            </a:pPr>
-            <a:r>
-              <a:rPr lang="ko-KR" altLang="en-US" sz="1600" dirty="0">
-                <a:latin typeface="+mn-ea"/>
-              </a:rPr>
-              <a:t>구간추정은</a:t>
-            </a:r>
-            <a:r>
-              <a:rPr lang="en-US" altLang="ko-KR" sz="1600" dirty="0">
-                <a:latin typeface="+mn-ea"/>
-              </a:rPr>
-              <a:t> </a:t>
-            </a:r>
-            <a:r>
-              <a:rPr kumimoji="0" lang="ko-KR" altLang="ko-KR" sz="1600" b="0" i="0" u="none" strike="noStrike" cap="none" normalizeH="0" baseline="0" dirty="0">
-                <a:ln>
-                  <a:noFill/>
-                </a:ln>
-                <a:solidFill>
-                  <a:schemeClr val="tx1"/>
-                </a:solidFill>
-                <a:effectLst/>
-                <a:latin typeface="+mn-ea"/>
-              </a:rPr>
-              <a:t>말편자(</a:t>
-            </a:r>
-            <a:r>
-              <a:rPr kumimoji="0" lang="ko-KR" altLang="ko-KR" sz="1600" b="0" i="0" u="none" strike="noStrike" cap="none" normalizeH="0" baseline="0" dirty="0" err="1">
-                <a:ln>
-                  <a:noFill/>
-                </a:ln>
-                <a:solidFill>
-                  <a:schemeClr val="tx1"/>
-                </a:solidFill>
-                <a:effectLst/>
-                <a:latin typeface="+mn-ea"/>
-              </a:rPr>
-              <a:t>Horseshoe</a:t>
-            </a:r>
-            <a:r>
-              <a:rPr kumimoji="0" lang="ko-KR" altLang="ko-KR" sz="1600" b="0" i="0" u="none" strike="noStrike" cap="none" normalizeH="0" baseline="0" dirty="0">
-                <a:ln>
-                  <a:noFill/>
-                </a:ln>
-                <a:solidFill>
-                  <a:schemeClr val="tx1"/>
-                </a:solidFill>
-                <a:effectLst/>
-                <a:latin typeface="+mn-ea"/>
-              </a:rPr>
-              <a:t>)를 던져서 막대에 끼우는 게임</a:t>
-            </a:r>
-            <a:r>
-              <a:rPr lang="ko-KR" altLang="en-US" sz="1600" dirty="0">
-                <a:latin typeface="+mn-ea"/>
-              </a:rPr>
-              <a:t>으로</a:t>
-            </a:r>
-            <a:r>
-              <a:rPr lang="en-US" altLang="ko-KR" sz="1600" dirty="0">
-                <a:latin typeface="+mn-ea"/>
-              </a:rPr>
-              <a:t> </a:t>
-            </a:r>
-            <a:r>
-              <a:rPr kumimoji="0" lang="ko-KR" altLang="ko-KR" sz="1600" b="0" i="0" u="none" strike="noStrike" cap="none" normalizeH="0" baseline="0" dirty="0" err="1">
-                <a:ln>
-                  <a:noFill/>
-                </a:ln>
-                <a:solidFill>
-                  <a:schemeClr val="tx1"/>
-                </a:solidFill>
-                <a:effectLst/>
-                <a:latin typeface="+mn-ea"/>
-              </a:rPr>
-              <a:t>막대'는</a:t>
-            </a:r>
-            <a:r>
-              <a:rPr kumimoji="0" lang="ko-KR" altLang="ko-KR" sz="1600" b="0" i="0" u="none" strike="noStrike" cap="none" normalizeH="0" baseline="0" dirty="0">
-                <a:ln>
-                  <a:noFill/>
-                </a:ln>
-                <a:solidFill>
-                  <a:schemeClr val="tx1"/>
-                </a:solidFill>
-                <a:effectLst/>
-                <a:latin typeface="+mn-ea"/>
-              </a:rPr>
-              <a:t> 우리가 알고 싶은 진짜 값(</a:t>
-            </a:r>
-            <a:r>
-              <a:rPr kumimoji="0" lang="ko-KR" altLang="ko-KR" sz="1600" b="0" i="0" u="none" strike="noStrike" cap="none" normalizeH="0" baseline="0" dirty="0" err="1">
-                <a:ln>
-                  <a:noFill/>
-                </a:ln>
-                <a:solidFill>
-                  <a:schemeClr val="tx1"/>
-                </a:solidFill>
-                <a:effectLst/>
-                <a:latin typeface="+mn-ea"/>
-              </a:rPr>
-              <a:t>모수</a:t>
-            </a:r>
-            <a:r>
-              <a:rPr kumimoji="0" lang="ko-KR" altLang="ko-KR" sz="1600" b="0" i="0" u="none" strike="noStrike" cap="none" normalizeH="0" baseline="0" dirty="0">
-                <a:ln>
-                  <a:noFill/>
-                </a:ln>
-                <a:solidFill>
-                  <a:schemeClr val="tx1"/>
-                </a:solidFill>
-                <a:effectLst/>
-                <a:latin typeface="+mn-ea"/>
-              </a:rPr>
-              <a:t>)이고, 말편자는 우리가 데이터를 통해 추정한 </a:t>
-            </a:r>
-            <a:r>
-              <a:rPr kumimoji="0" lang="ko-KR" altLang="ko-KR" sz="1600" b="1" i="0" u="none" strike="noStrike" cap="none" normalizeH="0" baseline="0" dirty="0">
-                <a:ln>
-                  <a:noFill/>
-                </a:ln>
-                <a:solidFill>
-                  <a:schemeClr val="tx1"/>
-                </a:solidFill>
-                <a:effectLst/>
-                <a:latin typeface="+mn-ea"/>
-              </a:rPr>
-              <a:t>신뢰구간</a:t>
-            </a:r>
-            <a:r>
-              <a:rPr lang="ko-KR" altLang="en-US" sz="1600" dirty="0">
-                <a:latin typeface="+mn-ea"/>
-              </a:rPr>
-              <a:t>으로</a:t>
-            </a:r>
-            <a:r>
-              <a:rPr lang="en-US" altLang="ko-KR" sz="1600" dirty="0">
-                <a:latin typeface="+mn-ea"/>
-              </a:rPr>
-              <a:t> </a:t>
-            </a:r>
-            <a:r>
-              <a:rPr kumimoji="0" lang="ko-KR" altLang="ko-KR" sz="1600" b="0" i="0" u="none" strike="noStrike" cap="none" normalizeH="0" baseline="0" dirty="0">
-                <a:ln>
-                  <a:noFill/>
-                </a:ln>
-                <a:solidFill>
-                  <a:schemeClr val="tx1"/>
-                </a:solidFill>
-                <a:effectLst/>
-                <a:latin typeface="+mn-ea"/>
-              </a:rPr>
-              <a:t>말편자가 막대를 포함하면(끼워지면) 예측이 성공한 것</a:t>
-            </a:r>
-            <a:r>
-              <a:rPr kumimoji="0" lang="ko-KR" altLang="en-US" sz="1600" b="0" i="0" u="none" strike="noStrike" cap="none" normalizeH="0" baseline="0" dirty="0">
-                <a:ln>
-                  <a:noFill/>
-                </a:ln>
-                <a:solidFill>
-                  <a:schemeClr val="tx1"/>
-                </a:solidFill>
-                <a:effectLst/>
-                <a:latin typeface="+mn-ea"/>
-              </a:rPr>
-              <a:t>이</a:t>
-            </a:r>
-            <a:r>
-              <a:rPr kumimoji="0" lang="en-US" altLang="ko-KR" sz="1600" b="0" i="0" u="none" strike="noStrike" cap="none" normalizeH="0" baseline="0" dirty="0">
-                <a:ln>
-                  <a:noFill/>
-                </a:ln>
-                <a:solidFill>
-                  <a:schemeClr val="tx1"/>
-                </a:solidFill>
-                <a:effectLst/>
-                <a:latin typeface="+mn-ea"/>
-              </a:rPr>
-              <a:t> </a:t>
-            </a:r>
-            <a:r>
-              <a:rPr kumimoji="0" lang="ko-KR" altLang="en-US" sz="1600" b="0" i="0" u="none" strike="noStrike" cap="none" normalizeH="0" baseline="0" dirty="0">
-                <a:ln>
-                  <a:noFill/>
-                </a:ln>
-                <a:solidFill>
-                  <a:schemeClr val="tx1"/>
-                </a:solidFill>
-                <a:effectLst/>
-                <a:latin typeface="+mn-ea"/>
-              </a:rPr>
-              <a:t>신뢰구간임 </a:t>
-            </a:r>
-            <a:r>
-              <a:rPr kumimoji="0" lang="en-US" altLang="ko-KR" sz="1600" b="0" i="0" u="none" strike="noStrike" cap="none" normalizeH="0" baseline="0" dirty="0">
-                <a:ln>
-                  <a:noFill/>
-                </a:ln>
-                <a:solidFill>
-                  <a:schemeClr val="tx1"/>
-                </a:solidFill>
-                <a:effectLst/>
-                <a:latin typeface="+mn-ea"/>
-              </a:rPr>
-              <a:t>(90%, 95%, 99% </a:t>
-            </a:r>
-            <a:r>
-              <a:rPr kumimoji="0" lang="ko-KR" altLang="en-US" sz="1600" b="0" i="0" u="none" strike="noStrike" cap="none" normalizeH="0" baseline="0" dirty="0">
-                <a:ln>
-                  <a:noFill/>
-                </a:ln>
-                <a:solidFill>
-                  <a:schemeClr val="tx1"/>
-                </a:solidFill>
-                <a:effectLst/>
-                <a:latin typeface="+mn-ea"/>
-              </a:rPr>
-              <a:t>등</a:t>
-            </a:r>
-            <a:r>
-              <a:rPr kumimoji="0" lang="en-US" altLang="ko-KR" sz="1600" b="0" i="0" u="none" strike="noStrike" cap="none" normalizeH="0" baseline="0" dirty="0">
-                <a:ln>
-                  <a:noFill/>
-                </a:ln>
-                <a:solidFill>
-                  <a:schemeClr val="tx1"/>
-                </a:solidFill>
-                <a:effectLst/>
-                <a:latin typeface="+mn-ea"/>
-              </a:rPr>
-              <a:t>)</a:t>
-            </a:r>
-            <a:endParaRPr kumimoji="0" lang="ko-KR" altLang="ko-KR" sz="1600" b="0" i="0" u="none" strike="noStrike" cap="none" normalizeH="0" baseline="0" dirty="0">
-              <a:ln>
-                <a:noFill/>
-              </a:ln>
-              <a:solidFill>
-                <a:schemeClr val="tx1"/>
-              </a:solidFill>
-              <a:effectLst/>
-              <a:latin typeface="+mn-ea"/>
-            </a:endParaRPr>
-          </a:p>
-        </p:txBody>
-      </p:sp>
-      <p:sp>
-        <p:nvSpPr>
-          <p:cNvPr id="3" name="TextBox 2">
-            <a:extLst>
-              <a:ext uri="{FF2B5EF4-FFF2-40B4-BE49-F238E27FC236}">
-                <a16:creationId xmlns:a16="http://schemas.microsoft.com/office/drawing/2014/main" id="{BBAE4996-11B8-D682-0EF3-84AD784BACC7}"/>
-              </a:ext>
-            </a:extLst>
-          </p:cNvPr>
-          <p:cNvSpPr txBox="1"/>
-          <p:nvPr/>
-        </p:nvSpPr>
-        <p:spPr>
-          <a:xfrm>
-            <a:off x="117748" y="260648"/>
-            <a:ext cx="11521280" cy="584775"/>
-          </a:xfrm>
-          <a:prstGeom prst="rect">
-            <a:avLst/>
-          </a:prstGeom>
-          <a:noFill/>
-        </p:spPr>
-        <p:txBody>
-          <a:bodyPr wrap="square" rtlCol="0">
-            <a:spAutoFit/>
-          </a:bodyPr>
-          <a:lstStyle/>
-          <a:p>
-            <a:pPr algn="ctr"/>
-            <a:r>
-              <a:rPr lang="ko-KR" altLang="en-US" sz="3200" b="1" dirty="0">
-                <a:latin typeface="맑은 고딕 Semilight" panose="020B0502040204020203" pitchFamily="50" charset="-127"/>
-                <a:ea typeface="맑은 고딕 Semilight" panose="020B0502040204020203" pitchFamily="50" charset="-127"/>
-                <a:cs typeface="맑은 고딕 Semilight" panose="020B0502040204020203" pitchFamily="50" charset="-127"/>
-              </a:rPr>
-              <a:t>구간 추정</a:t>
-            </a:r>
-            <a:r>
-              <a:rPr lang="en-US" altLang="ko-KR" sz="3200" b="1" dirty="0">
-                <a:latin typeface="맑은 고딕 Semilight" panose="020B0502040204020203" pitchFamily="50" charset="-127"/>
-                <a:ea typeface="맑은 고딕 Semilight" panose="020B0502040204020203" pitchFamily="50" charset="-127"/>
-                <a:cs typeface="맑은 고딕 Semilight" panose="020B0502040204020203" pitchFamily="50" charset="-127"/>
-              </a:rPr>
-              <a:t>(Interval</a:t>
-            </a:r>
-            <a:r>
-              <a:rPr lang="ko-KR" altLang="en-US" sz="3200" b="1" dirty="0">
-                <a:latin typeface="맑은 고딕 Semilight" panose="020B0502040204020203" pitchFamily="50" charset="-127"/>
-                <a:ea typeface="맑은 고딕 Semilight" panose="020B0502040204020203" pitchFamily="50" charset="-127"/>
-                <a:cs typeface="맑은 고딕 Semilight" panose="020B0502040204020203" pitchFamily="50" charset="-127"/>
-              </a:rPr>
-              <a:t> </a:t>
-            </a:r>
-            <a:r>
-              <a:rPr lang="en-US" altLang="ko-KR" sz="3200" b="1" dirty="0">
-                <a:latin typeface="맑은 고딕 Semilight" panose="020B0502040204020203" pitchFamily="50" charset="-127"/>
-                <a:ea typeface="맑은 고딕 Semilight" panose="020B0502040204020203" pitchFamily="50" charset="-127"/>
-                <a:cs typeface="맑은 고딕 Semilight" panose="020B0502040204020203" pitchFamily="50" charset="-127"/>
-              </a:rPr>
-              <a:t>Estimation)</a:t>
-            </a:r>
-            <a:endParaRPr lang="ko-KR" altLang="en-US" sz="3200" b="1" dirty="0">
-              <a:latin typeface="맑은 고딕 Semilight" panose="020B0502040204020203" pitchFamily="50" charset="-127"/>
-              <a:ea typeface="맑은 고딕 Semilight" panose="020B0502040204020203" pitchFamily="50" charset="-127"/>
-              <a:cs typeface="맑은 고딕 Semilight" panose="020B0502040204020203" pitchFamily="50" charset="-127"/>
-            </a:endParaRPr>
-          </a:p>
-        </p:txBody>
-      </p:sp>
     </p:spTree>
     <p:extLst>
       <p:ext uri="{BB962C8B-B14F-4D97-AF65-F5344CB8AC3E}">
@@ -7235,7 +7683,7 @@
 </p:sld>
 </file>
 
-<file path=ppt/slides/slide12.xml><?xml version="1.0" encoding="utf-8"?>
+<file path=ppt/slides/slide13.xml><?xml version="1.0" encoding="utf-8"?>
 <p:sld xmlns:a="http://schemas.openxmlformats.org/drawingml/2006/main" xmlns:r="http://schemas.openxmlformats.org/officeDocument/2006/relationships" xmlns:p="http://schemas.openxmlformats.org/presentationml/2006/main">
   <p:cSld>
     <p:spTree>
@@ -7312,7 +7760,7 @@
             <a:pPr rtl="0"/>
             <a:fld id="{A3F31473-23EB-4724-8B59-FE6D21D89FA4}" type="slidenum">
               <a:rPr lang="en-US" altLang="ko-KR" noProof="0" smtClean="0"/>
-              <a:t>12</a:t>
+              <a:t>13</a:t>
             </a:fld>
             <a:endParaRPr lang="en-US" altLang="ko-KR" noProof="0" dirty="0"/>
           </a:p>
@@ -7652,7 +8100,7 @@
 </p:sld>
 </file>
 
-<file path=ppt/slides/slide13.xml><?xml version="1.0" encoding="utf-8"?>
+<file path=ppt/slides/slide14.xml><?xml version="1.0" encoding="utf-8"?>
 <p:sld xmlns:a="http://schemas.openxmlformats.org/drawingml/2006/main" xmlns:r="http://schemas.openxmlformats.org/officeDocument/2006/relationships" xmlns:p="http://schemas.openxmlformats.org/presentationml/2006/main">
   <p:cSld>
     <p:spTree>
@@ -7687,7 +8135,7 @@
             <a:pPr rtl="0"/>
             <a:fld id="{A3F31473-23EB-4724-8B59-FE6D21D89FA4}" type="slidenum">
               <a:rPr lang="en-US" altLang="ko-KR" noProof="0" smtClean="0"/>
-              <a:t>13</a:t>
+              <a:t>14</a:t>
             </a:fld>
             <a:endParaRPr lang="en-US" altLang="ko-KR" noProof="0" dirty="0"/>
           </a:p>
@@ -8156,7 +8604,7 @@
 </p:sld>
 </file>
 
-<file path=ppt/slides/slide14.xml><?xml version="1.0" encoding="utf-8"?>
+<file path=ppt/slides/slide15.xml><?xml version="1.0" encoding="utf-8"?>
 <p:sld xmlns:a="http://schemas.openxmlformats.org/drawingml/2006/main" xmlns:r="http://schemas.openxmlformats.org/officeDocument/2006/relationships" xmlns:p="http://schemas.openxmlformats.org/presentationml/2006/main">
   <p:cSld>
     <p:spTree>
@@ -8191,7 +8639,7 @@
             <a:pPr rtl="0"/>
             <a:fld id="{A3F31473-23EB-4724-8B59-FE6D21D89FA4}" type="slidenum">
               <a:rPr lang="en-US" altLang="ko-KR" noProof="0" smtClean="0"/>
-              <a:t>14</a:t>
+              <a:t>15</a:t>
             </a:fld>
             <a:endParaRPr lang="en-US" altLang="ko-KR" noProof="0" dirty="0"/>
           </a:p>
@@ -8392,7 +8840,7 @@
 </p:sld>
 </file>
 
-<file path=ppt/slides/slide15.xml><?xml version="1.0" encoding="utf-8"?>
+<file path=ppt/slides/slide16.xml><?xml version="1.0" encoding="utf-8"?>
 <p:sld xmlns:a="http://schemas.openxmlformats.org/drawingml/2006/main" xmlns:r="http://schemas.openxmlformats.org/officeDocument/2006/relationships" xmlns:p="http://schemas.openxmlformats.org/presentationml/2006/main">
   <p:cSld>
     <p:spTree>
@@ -8439,7 +8887,7 @@
             <a:pPr rtl="0"/>
             <a:fld id="{A3F31473-23EB-4724-8B59-FE6D21D89FA4}" type="slidenum">
               <a:rPr lang="en-US" altLang="ko-KR" noProof="0" smtClean="0"/>
-              <a:t>15</a:t>
+              <a:t>16</a:t>
             </a:fld>
             <a:endParaRPr lang="en-US" altLang="ko-KR" noProof="0" dirty="0"/>
           </a:p>
@@ -8813,7 +9261,7 @@
 </p:sld>
 </file>
 
-<file path=ppt/slides/slide16.xml><?xml version="1.0" encoding="utf-8"?>
+<file path=ppt/slides/slide17.xml><?xml version="1.0" encoding="utf-8"?>
 <p:sld xmlns:a="http://schemas.openxmlformats.org/drawingml/2006/main" xmlns:r="http://schemas.openxmlformats.org/officeDocument/2006/relationships" xmlns:p="http://schemas.openxmlformats.org/presentationml/2006/main">
   <p:cSld>
     <p:spTree>
@@ -8890,7 +9338,7 @@
             <a:pPr rtl="0"/>
             <a:fld id="{A3F31473-23EB-4724-8B59-FE6D21D89FA4}" type="slidenum">
               <a:rPr lang="en-US" altLang="ko-KR" noProof="0" smtClean="0"/>
-              <a:t>16</a:t>
+              <a:t>17</a:t>
             </a:fld>
             <a:endParaRPr lang="en-US" altLang="ko-KR" noProof="0" dirty="0"/>
           </a:p>
@@ -9245,7 +9693,7 @@
 </p:sld>
 </file>
 
-<file path=ppt/slides/slide17.xml><?xml version="1.0" encoding="utf-8"?>
+<file path=ppt/slides/slide18.xml><?xml version="1.0" encoding="utf-8"?>
 <p:sld xmlns:a="http://schemas.openxmlformats.org/drawingml/2006/main" xmlns:r="http://schemas.openxmlformats.org/officeDocument/2006/relationships" xmlns:p="http://schemas.openxmlformats.org/presentationml/2006/main">
   <p:cSld>
     <p:spTree>
@@ -9384,7 +9832,7 @@
             <a:pPr rtl="0"/>
             <a:fld id="{A3F31473-23EB-4724-8B59-FE6D21D89FA4}" type="slidenum">
               <a:rPr lang="en-US" altLang="ko-KR" noProof="0" smtClean="0"/>
-              <a:t>17</a:t>
+              <a:t>18</a:t>
             </a:fld>
             <a:endParaRPr lang="en-US" altLang="ko-KR" noProof="0" dirty="0"/>
           </a:p>
@@ -9917,7 +10365,7 @@
 </p:sld>
 </file>
 
-<file path=ppt/slides/slide18.xml><?xml version="1.0" encoding="utf-8"?>
+<file path=ppt/slides/slide19.xml><?xml version="1.0" encoding="utf-8"?>
 <p:sld xmlns:a="http://schemas.openxmlformats.org/drawingml/2006/main" xmlns:r="http://schemas.openxmlformats.org/officeDocument/2006/relationships" xmlns:p="http://schemas.openxmlformats.org/presentationml/2006/main">
   <p:cSld>
     <p:spTree>
@@ -9964,7 +10412,7 @@
             <a:pPr rtl="0"/>
             <a:fld id="{A3F31473-23EB-4724-8B59-FE6D21D89FA4}" type="slidenum">
               <a:rPr lang="en-US" altLang="ko-KR" noProof="0" smtClean="0"/>
-              <a:t>18</a:t>
+              <a:t>19</a:t>
             </a:fld>
             <a:endParaRPr lang="en-US" altLang="ko-KR" noProof="0" dirty="0"/>
           </a:p>
@@ -10591,242 +11039,6 @@
     <p:extLst>
       <p:ext uri="{BB962C8B-B14F-4D97-AF65-F5344CB8AC3E}">
         <p14:creationId xmlns:p14="http://schemas.microsoft.com/office/powerpoint/2010/main" val="1893394278"/>
-      </p:ext>
-    </p:extLst>
-  </p:cSld>
-  <p:clrMapOvr>
-    <a:masterClrMapping/>
-  </p:clrMapOvr>
-  <mc:AlternateContent xmlns:mc="http://schemas.openxmlformats.org/markup-compatibility/2006" xmlns:p14="http://schemas.microsoft.com/office/powerpoint/2010/main">
-    <mc:Choice Requires="p14">
-      <p:transition spd="med" p14:dur="700">
-        <p:fade/>
-      </p:transition>
-    </mc:Choice>
-    <mc:Fallback xmlns="">
-      <p:transition spd="med">
-        <p:fade/>
-      </p:transition>
-    </mc:Fallback>
-  </mc:AlternateContent>
-</p:sld>
-</file>
-
-<file path=ppt/slides/slide19.xml><?xml version="1.0" encoding="utf-8"?>
-<p:sld xmlns:a="http://schemas.openxmlformats.org/drawingml/2006/main" xmlns:r="http://schemas.openxmlformats.org/officeDocument/2006/relationships" xmlns:p="http://schemas.openxmlformats.org/presentationml/2006/main">
-  <p:cSld>
-    <p:spTree>
-      <p:nvGrpSpPr>
-        <p:cNvPr id="1" name=""/>
-        <p:cNvGrpSpPr/>
-        <p:nvPr/>
-      </p:nvGrpSpPr>
-      <p:grpSpPr>
-        <a:xfrm>
-          <a:off x="0" y="0"/>
-          <a:ext cx="0" cy="0"/>
-          <a:chOff x="0" y="0"/>
-          <a:chExt cx="0" cy="0"/>
-        </a:xfrm>
-      </p:grpSpPr>
-      <p:sp>
-        <p:nvSpPr>
-          <p:cNvPr id="8" name="슬라이드 번호 개체 틀 7"/>
-          <p:cNvSpPr>
-            <a:spLocks noGrp="1"/>
-          </p:cNvSpPr>
-          <p:nvPr>
-            <p:ph type="sldNum" sz="quarter" idx="12"/>
-          </p:nvPr>
-        </p:nvSpPr>
-        <p:spPr/>
-        <p:txBody>
-          <a:bodyPr/>
-          <a:lstStyle/>
-          <a:p>
-            <a:pPr rtl="0"/>
-            <a:fld id="{A3F31473-23EB-4724-8B59-FE6D21D89FA4}" type="slidenum">
-              <a:rPr lang="en-US" altLang="ko-KR" noProof="0" smtClean="0"/>
-              <a:t>19</a:t>
-            </a:fld>
-            <a:endParaRPr lang="en-US" altLang="ko-KR" noProof="0" dirty="0"/>
-          </a:p>
-        </p:txBody>
-      </p:sp>
-      <p:sp>
-        <p:nvSpPr>
-          <p:cNvPr id="2" name="TextBox 1">
-            <a:extLst>
-              <a:ext uri="{FF2B5EF4-FFF2-40B4-BE49-F238E27FC236}">
-                <a16:creationId xmlns:a16="http://schemas.microsoft.com/office/drawing/2014/main" id="{FBCB3059-A022-2D32-14B1-3AA231140C92}"/>
-              </a:ext>
-            </a:extLst>
-          </p:cNvPr>
-          <p:cNvSpPr txBox="1"/>
-          <p:nvPr/>
-        </p:nvSpPr>
-        <p:spPr>
-          <a:xfrm>
-            <a:off x="117748" y="260648"/>
-            <a:ext cx="11521280" cy="584775"/>
-          </a:xfrm>
-          <a:prstGeom prst="rect">
-            <a:avLst/>
-          </a:prstGeom>
-          <a:noFill/>
-        </p:spPr>
-        <p:txBody>
-          <a:bodyPr wrap="square" rtlCol="0">
-            <a:spAutoFit/>
-          </a:bodyPr>
-          <a:lstStyle/>
-          <a:p>
-            <a:pPr algn="ctr"/>
-            <a:r>
-              <a:rPr lang="ko-KR" altLang="en-US" sz="3200" b="1" dirty="0">
-                <a:latin typeface="맑은 고딕 Semilight" panose="020B0502040204020203" pitchFamily="50" charset="-127"/>
-                <a:ea typeface="맑은 고딕 Semilight" panose="020B0502040204020203" pitchFamily="50" charset="-127"/>
-                <a:cs typeface="맑은 고딕 Semilight" panose="020B0502040204020203" pitchFamily="50" charset="-127"/>
-              </a:rPr>
-              <a:t>모평균의 구간추정 </a:t>
-            </a:r>
-            <a:r>
-              <a:rPr lang="en-US" altLang="ko-KR" sz="3200" b="1" dirty="0">
-                <a:latin typeface="맑은 고딕 Semilight" panose="020B0502040204020203" pitchFamily="50" charset="-127"/>
-                <a:ea typeface="맑은 고딕 Semilight" panose="020B0502040204020203" pitchFamily="50" charset="-127"/>
-                <a:cs typeface="맑은 고딕 Semilight" panose="020B0502040204020203" pitchFamily="50" charset="-127"/>
-              </a:rPr>
-              <a:t>: </a:t>
-            </a:r>
-            <a:r>
-              <a:rPr lang="ko-KR" altLang="en-US" sz="3200" b="1" dirty="0">
-                <a:latin typeface="맑은 고딕 Semilight" panose="020B0502040204020203" pitchFamily="50" charset="-127"/>
-                <a:ea typeface="맑은 고딕 Semilight" panose="020B0502040204020203" pitchFamily="50" charset="-127"/>
-                <a:cs typeface="맑은 고딕 Semilight" panose="020B0502040204020203" pitchFamily="50" charset="-127"/>
-              </a:rPr>
-              <a:t>모분산을 </a:t>
-            </a:r>
-            <a:r>
-              <a:rPr lang="ko-KR" altLang="en-US" sz="3200" b="1" dirty="0">
-                <a:solidFill>
-                  <a:srgbClr val="FF0000"/>
-                </a:solidFill>
-                <a:latin typeface="맑은 고딕 Semilight" panose="020B0502040204020203" pitchFamily="50" charset="-127"/>
-                <a:ea typeface="맑은 고딕 Semilight" panose="020B0502040204020203" pitchFamily="50" charset="-127"/>
-                <a:cs typeface="맑은 고딕 Semilight" panose="020B0502040204020203" pitchFamily="50" charset="-127"/>
-              </a:rPr>
-              <a:t>모르는</a:t>
-            </a:r>
-            <a:r>
-              <a:rPr lang="ko-KR" altLang="en-US" sz="3200" b="1" dirty="0">
-                <a:latin typeface="맑은 고딕 Semilight" panose="020B0502040204020203" pitchFamily="50" charset="-127"/>
-                <a:ea typeface="맑은 고딕 Semilight" panose="020B0502040204020203" pitchFamily="50" charset="-127"/>
-                <a:cs typeface="맑은 고딕 Semilight" panose="020B0502040204020203" pitchFamily="50" charset="-127"/>
-              </a:rPr>
-              <a:t> 경우</a:t>
-            </a:r>
-            <a:r>
-              <a:rPr lang="en-US" altLang="ko-KR" sz="3200" b="1" dirty="0">
-                <a:latin typeface="맑은 고딕 Semilight" panose="020B0502040204020203" pitchFamily="50" charset="-127"/>
-                <a:ea typeface="맑은 고딕 Semilight" panose="020B0502040204020203" pitchFamily="50" charset="-127"/>
-                <a:cs typeface="맑은 고딕 Semilight" panose="020B0502040204020203" pitchFamily="50" charset="-127"/>
-              </a:rPr>
-              <a:t>(1/2)</a:t>
-            </a:r>
-            <a:endParaRPr lang="ko-KR" altLang="en-US" sz="3200" b="1" dirty="0">
-              <a:latin typeface="맑은 고딕 Semilight" panose="020B0502040204020203" pitchFamily="50" charset="-127"/>
-              <a:ea typeface="맑은 고딕 Semilight" panose="020B0502040204020203" pitchFamily="50" charset="-127"/>
-              <a:cs typeface="맑은 고딕 Semilight" panose="020B0502040204020203" pitchFamily="50" charset="-127"/>
-            </a:endParaRPr>
-          </a:p>
-        </p:txBody>
-      </p:sp>
-      <p:pic>
-        <p:nvPicPr>
-          <p:cNvPr id="4" name="그림 3">
-            <a:extLst>
-              <a:ext uri="{FF2B5EF4-FFF2-40B4-BE49-F238E27FC236}">
-                <a16:creationId xmlns:a16="http://schemas.microsoft.com/office/drawing/2014/main" id="{D549F7EC-0571-71A7-1435-F3AA96FF7798}"/>
-              </a:ext>
-            </a:extLst>
-          </p:cNvPr>
-          <p:cNvPicPr>
-            <a:picLocks noChangeAspect="1"/>
-          </p:cNvPicPr>
-          <p:nvPr/>
-        </p:nvPicPr>
-        <p:blipFill>
-          <a:blip r:embed="rId3"/>
-          <a:stretch>
-            <a:fillRect/>
-          </a:stretch>
-        </p:blipFill>
-        <p:spPr>
-          <a:xfrm>
-            <a:off x="693812" y="1268760"/>
-            <a:ext cx="6834969" cy="4862857"/>
-          </a:xfrm>
-          <a:prstGeom prst="rect">
-            <a:avLst/>
-          </a:prstGeom>
-        </p:spPr>
-      </p:pic>
-      <p:sp>
-        <p:nvSpPr>
-          <p:cNvPr id="5" name="직사각형 4">
-            <a:extLst>
-              <a:ext uri="{FF2B5EF4-FFF2-40B4-BE49-F238E27FC236}">
-                <a16:creationId xmlns:a16="http://schemas.microsoft.com/office/drawing/2014/main" id="{9E05CCBC-2ED7-7D24-7448-0A549E48D9FE}"/>
-              </a:ext>
-            </a:extLst>
-          </p:cNvPr>
-          <p:cNvSpPr/>
-          <p:nvPr/>
-        </p:nvSpPr>
-        <p:spPr>
-          <a:xfrm>
-            <a:off x="2854052" y="5454012"/>
-            <a:ext cx="3600400" cy="677605"/>
-          </a:xfrm>
-          <a:prstGeom prst="rect">
-            <a:avLst/>
-          </a:prstGeom>
-          <a:noFill/>
-          <a:ln w="38100">
-            <a:solidFill>
-              <a:srgbClr val="00B0F0"/>
-            </a:solidFill>
-          </a:ln>
-        </p:spPr>
-        <p:style>
-          <a:lnRef idx="2">
-            <a:schemeClr val="accent1">
-              <a:shade val="15000"/>
-            </a:schemeClr>
-          </a:lnRef>
-          <a:fillRef idx="1">
-            <a:schemeClr val="accent1"/>
-          </a:fillRef>
-          <a:effectRef idx="0">
-            <a:schemeClr val="accent1"/>
-          </a:effectRef>
-          <a:fontRef idx="minor">
-            <a:schemeClr val="lt1"/>
-          </a:fontRef>
-        </p:style>
-        <p:txBody>
-          <a:bodyPr rtlCol="0" anchor="ctr"/>
-          <a:lstStyle/>
-          <a:p>
-            <a:pPr algn="ctr"/>
-            <a:endParaRPr lang="ko-KR" altLang="en-US"/>
-          </a:p>
-        </p:txBody>
-      </p:sp>
-    </p:spTree>
-    <p:extLst>
-      <p:ext uri="{BB962C8B-B14F-4D97-AF65-F5344CB8AC3E}">
-        <p14:creationId xmlns:p14="http://schemas.microsoft.com/office/powerpoint/2010/main" val="581370758"/>
       </p:ext>
     </p:extLst>
   </p:cSld>
@@ -11863,6 +12075,41 @@
           </a:p>
         </p:txBody>
       </p:sp>
+      <p:sp>
+        <p:nvSpPr>
+          <p:cNvPr id="2" name="TextBox 1">
+            <a:extLst>
+              <a:ext uri="{FF2B5EF4-FFF2-40B4-BE49-F238E27FC236}">
+                <a16:creationId xmlns:a16="http://schemas.microsoft.com/office/drawing/2014/main" id="{6F884A9C-176F-954C-B293-76195920609C}"/>
+              </a:ext>
+            </a:extLst>
+          </p:cNvPr>
+          <p:cNvSpPr txBox="1"/>
+          <p:nvPr/>
+        </p:nvSpPr>
+        <p:spPr>
+          <a:xfrm>
+            <a:off x="7047646" y="2224651"/>
+            <a:ext cx="1261884" cy="307777"/>
+          </a:xfrm>
+          <a:prstGeom prst="rect">
+            <a:avLst/>
+          </a:prstGeom>
+          <a:noFill/>
+        </p:spPr>
+        <p:txBody>
+          <a:bodyPr wrap="none" rtlCol="0">
+            <a:spAutoFit/>
+          </a:bodyPr>
+          <a:lstStyle/>
+          <a:p>
+            <a:r>
+              <a:rPr lang="ko-KR" altLang="en-US" sz="1400" dirty="0"/>
+              <a:t>중심극한정리</a:t>
+            </a:r>
+          </a:p>
+        </p:txBody>
+      </p:sp>
     </p:spTree>
     <p:extLst>
       <p:ext uri="{BB962C8B-B14F-4D97-AF65-F5344CB8AC3E}">
@@ -11893,13 +12140,7 @@
   <p:cSld>
     <p:spTree>
       <p:nvGrpSpPr>
-        <p:cNvPr id="1" name="">
-          <a:extLst>
-            <a:ext uri="{FF2B5EF4-FFF2-40B4-BE49-F238E27FC236}">
-              <a16:creationId xmlns:a16="http://schemas.microsoft.com/office/drawing/2014/main" id="{144CFA6D-7BDE-F4CB-ECB4-44A7CEB8F142}"/>
-            </a:ext>
-          </a:extLst>
-        </p:cNvPr>
+        <p:cNvPr id="1" name=""/>
         <p:cNvGrpSpPr/>
         <p:nvPr/>
       </p:nvGrpSpPr>
@@ -11913,13 +12154,7 @@
       </p:grpSpPr>
       <p:sp>
         <p:nvSpPr>
-          <p:cNvPr id="8" name="슬라이드 번호 개체 틀 7">
-            <a:extLst>
-              <a:ext uri="{FF2B5EF4-FFF2-40B4-BE49-F238E27FC236}">
-                <a16:creationId xmlns:a16="http://schemas.microsoft.com/office/drawing/2014/main" id="{9613359B-04AB-2B7A-0694-56AD7107F85E}"/>
-              </a:ext>
-            </a:extLst>
-          </p:cNvPr>
+          <p:cNvPr id="8" name="슬라이드 번호 개체 틀 7"/>
           <p:cNvSpPr>
             <a:spLocks noGrp="1"/>
           </p:cNvSpPr>
@@ -11943,10 +12178,10 @@
       </p:sp>
       <p:sp>
         <p:nvSpPr>
-          <p:cNvPr id="5" name="TextBox 4">
+          <p:cNvPr id="2" name="TextBox 1">
             <a:extLst>
               <a:ext uri="{FF2B5EF4-FFF2-40B4-BE49-F238E27FC236}">
-                <a16:creationId xmlns:a16="http://schemas.microsoft.com/office/drawing/2014/main" id="{293136A9-4ED2-A9C4-59EA-DC5ABFD71B4B}"/>
+                <a16:creationId xmlns:a16="http://schemas.microsoft.com/office/drawing/2014/main" id="{FBCB3059-A022-2D32-14B1-3AA231140C92}"/>
               </a:ext>
             </a:extLst>
           </p:cNvPr>
@@ -11956,7 +12191,7 @@
         <p:spPr>
           <a:xfrm>
             <a:off x="117748" y="260648"/>
-            <a:ext cx="2592288" cy="584775"/>
+            <a:ext cx="11521280" cy="584775"/>
           </a:xfrm>
           <a:prstGeom prst="rect">
             <a:avLst/>
@@ -11969,730 +12204,152 @@
           </a:bodyPr>
           <a:lstStyle/>
           <a:p>
-            <a:r>
-              <a:rPr lang="ko-KR" altLang="en-US" sz="3200" b="1"/>
-              <a:t>문제 풀이</a:t>
-            </a:r>
-          </a:p>
-        </p:txBody>
-      </p:sp>
-      <p:sp>
-        <p:nvSpPr>
-          <p:cNvPr id="2" name="Rectangle 1">
+            <a:pPr algn="ctr"/>
+            <a:r>
+              <a:rPr lang="ko-KR" altLang="en-US" sz="3200" b="1" dirty="0">
+                <a:latin typeface="맑은 고딕 Semilight" panose="020B0502040204020203" pitchFamily="50" charset="-127"/>
+                <a:ea typeface="맑은 고딕 Semilight" panose="020B0502040204020203" pitchFamily="50" charset="-127"/>
+                <a:cs typeface="맑은 고딕 Semilight" panose="020B0502040204020203" pitchFamily="50" charset="-127"/>
+              </a:rPr>
+              <a:t>모평균의 구간추정 </a:t>
+            </a:r>
+            <a:r>
+              <a:rPr lang="en-US" altLang="ko-KR" sz="3200" b="1" dirty="0">
+                <a:latin typeface="맑은 고딕 Semilight" panose="020B0502040204020203" pitchFamily="50" charset="-127"/>
+                <a:ea typeface="맑은 고딕 Semilight" panose="020B0502040204020203" pitchFamily="50" charset="-127"/>
+                <a:cs typeface="맑은 고딕 Semilight" panose="020B0502040204020203" pitchFamily="50" charset="-127"/>
+              </a:rPr>
+              <a:t>: </a:t>
+            </a:r>
+            <a:r>
+              <a:rPr lang="ko-KR" altLang="en-US" sz="3200" b="1" dirty="0">
+                <a:latin typeface="맑은 고딕 Semilight" panose="020B0502040204020203" pitchFamily="50" charset="-127"/>
+                <a:ea typeface="맑은 고딕 Semilight" panose="020B0502040204020203" pitchFamily="50" charset="-127"/>
+                <a:cs typeface="맑은 고딕 Semilight" panose="020B0502040204020203" pitchFamily="50" charset="-127"/>
+              </a:rPr>
+              <a:t>모분산을 </a:t>
+            </a:r>
+            <a:r>
+              <a:rPr lang="ko-KR" altLang="en-US" sz="3200" b="1" dirty="0">
+                <a:solidFill>
+                  <a:srgbClr val="FF0000"/>
+                </a:solidFill>
+                <a:latin typeface="맑은 고딕 Semilight" panose="020B0502040204020203" pitchFamily="50" charset="-127"/>
+                <a:ea typeface="맑은 고딕 Semilight" panose="020B0502040204020203" pitchFamily="50" charset="-127"/>
+                <a:cs typeface="맑은 고딕 Semilight" panose="020B0502040204020203" pitchFamily="50" charset="-127"/>
+              </a:rPr>
+              <a:t>모르는</a:t>
+            </a:r>
+            <a:r>
+              <a:rPr lang="ko-KR" altLang="en-US" sz="3200" b="1" dirty="0">
+                <a:latin typeface="맑은 고딕 Semilight" panose="020B0502040204020203" pitchFamily="50" charset="-127"/>
+                <a:ea typeface="맑은 고딕 Semilight" panose="020B0502040204020203" pitchFamily="50" charset="-127"/>
+                <a:cs typeface="맑은 고딕 Semilight" panose="020B0502040204020203" pitchFamily="50" charset="-127"/>
+              </a:rPr>
+              <a:t> 경우</a:t>
+            </a:r>
+            <a:r>
+              <a:rPr lang="en-US" altLang="ko-KR" sz="3200" b="1" dirty="0">
+                <a:latin typeface="맑은 고딕 Semilight" panose="020B0502040204020203" pitchFamily="50" charset="-127"/>
+                <a:ea typeface="맑은 고딕 Semilight" panose="020B0502040204020203" pitchFamily="50" charset="-127"/>
+                <a:cs typeface="맑은 고딕 Semilight" panose="020B0502040204020203" pitchFamily="50" charset="-127"/>
+              </a:rPr>
+              <a:t>(1/2)</a:t>
+            </a:r>
+            <a:endParaRPr lang="ko-KR" altLang="en-US" sz="3200" b="1" dirty="0">
+              <a:latin typeface="맑은 고딕 Semilight" panose="020B0502040204020203" pitchFamily="50" charset="-127"/>
+              <a:ea typeface="맑은 고딕 Semilight" panose="020B0502040204020203" pitchFamily="50" charset="-127"/>
+              <a:cs typeface="맑은 고딕 Semilight" panose="020B0502040204020203" pitchFamily="50" charset="-127"/>
+            </a:endParaRPr>
+          </a:p>
+        </p:txBody>
+      </p:sp>
+      <p:pic>
+        <p:nvPicPr>
+          <p:cNvPr id="4" name="그림 3">
             <a:extLst>
               <a:ext uri="{FF2B5EF4-FFF2-40B4-BE49-F238E27FC236}">
-                <a16:creationId xmlns:a16="http://schemas.microsoft.com/office/drawing/2014/main" id="{E47FC9AE-9BFA-3C11-A9C0-7DCCB2B04601}"/>
+                <a16:creationId xmlns:a16="http://schemas.microsoft.com/office/drawing/2014/main" id="{D549F7EC-0571-71A7-1435-F3AA96FF7798}"/>
               </a:ext>
             </a:extLst>
           </p:cNvPr>
-          <p:cNvSpPr>
-            <a:spLocks noChangeArrowheads="1"/>
-          </p:cNvSpPr>
+          <p:cNvPicPr>
+            <a:picLocks noChangeAspect="1"/>
+          </p:cNvPicPr>
           <p:nvPr/>
-        </p:nvSpPr>
-        <p:spPr bwMode="auto">
+        </p:nvPicPr>
+        <p:blipFill>
+          <a:blip r:embed="rId3"/>
+          <a:stretch>
+            <a:fillRect/>
+          </a:stretch>
+        </p:blipFill>
+        <p:spPr>
           <a:xfrm>
-            <a:off x="693812" y="1124744"/>
-            <a:ext cx="10972380" cy="2461636"/>
+            <a:off x="693812" y="1268760"/>
+            <a:ext cx="6834969" cy="4862857"/>
           </a:xfrm>
           <a:prstGeom prst="rect">
             <a:avLst/>
           </a:prstGeom>
-          <a:solidFill>
-            <a:schemeClr val="bg1">
-              <a:lumMod val="85000"/>
-            </a:schemeClr>
-          </a:solidFill>
-          <a:ln>
-            <a:noFill/>
-          </a:ln>
-          <a:effectLst/>
         </p:spPr>
-        <p:txBody>
-          <a:bodyPr vert="horz" wrap="square" lIns="91440" tIns="0" rIns="91440" bIns="45720" numCol="1" anchor="ctr" anchorCtr="0" compatLnSpc="1">
-            <a:prstTxWarp prst="textNoShape">
-              <a:avLst/>
-            </a:prstTxWarp>
-            <a:spAutoFit/>
-          </a:bodyPr>
-          <a:lstStyle/>
-          <a:p>
-            <a:pPr marL="0" marR="0" lvl="0" indent="0" algn="l" defTabSz="914400" rtl="0" eaLnBrk="0" fontAlgn="base" latinLnBrk="0" hangingPunct="0">
-              <a:lnSpc>
-                <a:spcPct val="150000"/>
-              </a:lnSpc>
-              <a:spcBef>
-                <a:spcPct val="0"/>
-              </a:spcBef>
-              <a:spcAft>
-                <a:spcPct val="0"/>
-              </a:spcAft>
-              <a:buClrTx/>
-              <a:buSzTx/>
-              <a:buFontTx/>
-              <a:buNone/>
-              <a:tabLst/>
-            </a:pPr>
-            <a:r>
-              <a:rPr lang="ko-KR" altLang="ko-KR" sz="1600" dirty="0">
-                <a:latin typeface="맑은 고딕 Semilight" panose="020B0502040204020203" pitchFamily="50" charset="-127"/>
-                <a:ea typeface="맑은 고딕 Semilight" panose="020B0502040204020203" pitchFamily="50" charset="-127"/>
-                <a:cs typeface="맑은 고딕 Semilight" panose="020B0502040204020203" pitchFamily="50" charset="-127"/>
-              </a:rPr>
-              <a:t>문제 3. </a:t>
-            </a:r>
-            <a:r>
-              <a:rPr lang="ko-KR" altLang="ko-KR" sz="1600" b="1" dirty="0" err="1">
-                <a:latin typeface="맑은 고딕 Semilight" panose="020B0502040204020203" pitchFamily="50" charset="-127"/>
-                <a:ea typeface="맑은 고딕 Semilight" panose="020B0502040204020203" pitchFamily="50" charset="-127"/>
-                <a:cs typeface="맑은 고딕 Semilight" panose="020B0502040204020203" pitchFamily="50" charset="-127"/>
-              </a:rPr>
-              <a:t>t</a:t>
-            </a:r>
-            <a:r>
-              <a:rPr lang="ko-KR" altLang="ko-KR" sz="1600" b="1" dirty="0">
-                <a:latin typeface="맑은 고딕 Semilight" panose="020B0502040204020203" pitchFamily="50" charset="-127"/>
-                <a:ea typeface="맑은 고딕 Semilight" panose="020B0502040204020203" pitchFamily="50" charset="-127"/>
-                <a:cs typeface="맑은 고딕 Semilight" panose="020B0502040204020203" pitchFamily="50" charset="-127"/>
-              </a:rPr>
-              <a:t>-분포</a:t>
-            </a:r>
-            <a:r>
-              <a:rPr lang="ko-KR" altLang="ko-KR" sz="1600" dirty="0">
-                <a:latin typeface="맑은 고딕 Semilight" panose="020B0502040204020203" pitchFamily="50" charset="-127"/>
-                <a:ea typeface="맑은 고딕 Semilight" panose="020B0502040204020203" pitchFamily="50" charset="-127"/>
-                <a:cs typeface="맑은 고딕 Semilight" panose="020B0502040204020203" pitchFamily="50" charset="-127"/>
-              </a:rPr>
-              <a:t>를 이용한 신뢰구간 계산 (40점)</a:t>
-            </a:r>
-            <a:endParaRPr lang="en-US" altLang="ko-KR" sz="1600" dirty="0">
-              <a:latin typeface="맑은 고딕 Semilight" panose="020B0502040204020203" pitchFamily="50" charset="-127"/>
-              <a:ea typeface="맑은 고딕 Semilight" panose="020B0502040204020203" pitchFamily="50" charset="-127"/>
-              <a:cs typeface="맑은 고딕 Semilight" panose="020B0502040204020203" pitchFamily="50" charset="-127"/>
-            </a:endParaRPr>
-          </a:p>
-          <a:p>
-            <a:pPr marL="0" marR="0" lvl="0" indent="0" algn="l" defTabSz="914400" rtl="0" eaLnBrk="0" fontAlgn="base" latinLnBrk="0" hangingPunct="0">
-              <a:lnSpc>
-                <a:spcPct val="150000"/>
-              </a:lnSpc>
-              <a:spcBef>
-                <a:spcPct val="0"/>
-              </a:spcBef>
-              <a:spcAft>
-                <a:spcPct val="0"/>
-              </a:spcAft>
-              <a:buClrTx/>
-              <a:buSzTx/>
-              <a:buFontTx/>
-              <a:buNone/>
-              <a:tabLst/>
-            </a:pPr>
-            <a:endParaRPr lang="ko-KR" altLang="ko-KR" sz="1600" dirty="0">
-              <a:latin typeface="맑은 고딕 Semilight" panose="020B0502040204020203" pitchFamily="50" charset="-127"/>
-              <a:ea typeface="맑은 고딕 Semilight" panose="020B0502040204020203" pitchFamily="50" charset="-127"/>
-              <a:cs typeface="맑은 고딕 Semilight" panose="020B0502040204020203" pitchFamily="50" charset="-127"/>
-            </a:endParaRPr>
-          </a:p>
-          <a:p>
-            <a:pPr marL="0" marR="0" lvl="0" indent="0" algn="l" defTabSz="914400" rtl="0" eaLnBrk="0" fontAlgn="base" latinLnBrk="0" hangingPunct="0">
-              <a:lnSpc>
-                <a:spcPct val="150000"/>
-              </a:lnSpc>
-              <a:spcBef>
-                <a:spcPct val="0"/>
-              </a:spcBef>
-              <a:spcAft>
-                <a:spcPct val="0"/>
-              </a:spcAft>
-              <a:buClrTx/>
-              <a:buSzTx/>
-              <a:buFontTx/>
-              <a:buNone/>
-              <a:tabLst/>
-            </a:pPr>
-            <a:r>
-              <a:rPr lang="ko-KR" altLang="ko-KR" sz="1600" dirty="0">
-                <a:latin typeface="맑은 고딕 Semilight" panose="020B0502040204020203" pitchFamily="50" charset="-127"/>
-                <a:ea typeface="맑은 고딕 Semilight" panose="020B0502040204020203" pitchFamily="50" charset="-127"/>
-                <a:cs typeface="맑은 고딕 Semilight" panose="020B0502040204020203" pitchFamily="50" charset="-127"/>
-              </a:rPr>
-              <a:t>'</a:t>
-            </a:r>
-            <a:r>
-              <a:rPr lang="ko-KR" altLang="ko-KR" sz="1600" dirty="0" err="1">
-                <a:latin typeface="맑은 고딕 Semilight" panose="020B0502040204020203" pitchFamily="50" charset="-127"/>
-                <a:ea typeface="맑은 고딕 Semilight" panose="020B0502040204020203" pitchFamily="50" charset="-127"/>
-                <a:cs typeface="맑은 고딕 Semilight" panose="020B0502040204020203" pitchFamily="50" charset="-127"/>
-              </a:rPr>
-              <a:t>Gentoo</a:t>
-            </a:r>
-            <a:r>
-              <a:rPr lang="ko-KR" altLang="ko-KR" sz="1600" dirty="0">
-                <a:latin typeface="맑은 고딕 Semilight" panose="020B0502040204020203" pitchFamily="50" charset="-127"/>
-                <a:ea typeface="맑은 고딕 Semilight" panose="020B0502040204020203" pitchFamily="50" charset="-127"/>
-                <a:cs typeface="맑은 고딕 Semilight" panose="020B0502040204020203" pitchFamily="50" charset="-127"/>
-              </a:rPr>
-              <a:t>' 펭귄 중 무작위로 추출된 15마리의 지느러미 길이 데이터</a:t>
-            </a:r>
-            <a:r>
-              <a:rPr lang="ko-KR" altLang="en-US" sz="1600" dirty="0">
-                <a:latin typeface="맑은 고딕 Semilight" panose="020B0502040204020203" pitchFamily="50" charset="-127"/>
-                <a:ea typeface="맑은 고딕 Semilight" panose="020B0502040204020203" pitchFamily="50" charset="-127"/>
-                <a:cs typeface="맑은 고딕 Semilight" panose="020B0502040204020203" pitchFamily="50" charset="-127"/>
-              </a:rPr>
-              <a:t>를</a:t>
-            </a:r>
-            <a:r>
-              <a:rPr lang="en-US" altLang="ko-KR" sz="1600" dirty="0">
-                <a:latin typeface="맑은 고딕 Semilight" panose="020B0502040204020203" pitchFamily="50" charset="-127"/>
-                <a:ea typeface="맑은 고딕 Semilight" panose="020B0502040204020203" pitchFamily="50" charset="-127"/>
-                <a:cs typeface="맑은 고딕 Semilight" panose="020B0502040204020203" pitchFamily="50" charset="-127"/>
-              </a:rPr>
-              <a:t> </a:t>
-            </a:r>
-            <a:r>
-              <a:rPr lang="en-US" altLang="ko-KR" sz="1600" dirty="0" err="1">
-                <a:latin typeface="맑은 고딕 Semilight" panose="020B0502040204020203" pitchFamily="50" charset="-127"/>
-                <a:ea typeface="맑은 고딕 Semilight" panose="020B0502040204020203" pitchFamily="50" charset="-127"/>
-                <a:cs typeface="맑은 고딕 Semilight" panose="020B0502040204020203" pitchFamily="50" charset="-127"/>
-              </a:rPr>
-              <a:t>random_state</a:t>
-            </a:r>
-            <a:r>
-              <a:rPr lang="en-US" altLang="ko-KR" sz="1600" dirty="0">
-                <a:latin typeface="맑은 고딕 Semilight" panose="020B0502040204020203" pitchFamily="50" charset="-127"/>
-                <a:ea typeface="맑은 고딕 Semilight" panose="020B0502040204020203" pitchFamily="50" charset="-127"/>
-                <a:cs typeface="맑은 고딕 Semilight" panose="020B0502040204020203" pitchFamily="50" charset="-127"/>
-              </a:rPr>
-              <a:t> =11</a:t>
-            </a:r>
-            <a:r>
-              <a:rPr lang="ko-KR" altLang="en-US" sz="1600" dirty="0">
-                <a:latin typeface="맑은 고딕 Semilight" panose="020B0502040204020203" pitchFamily="50" charset="-127"/>
-                <a:ea typeface="맑은 고딕 Semilight" panose="020B0502040204020203" pitchFamily="50" charset="-127"/>
-                <a:cs typeface="맑은 고딕 Semilight" panose="020B0502040204020203" pitchFamily="50" charset="-127"/>
-              </a:rPr>
-              <a:t>로</a:t>
-            </a:r>
-            <a:r>
-              <a:rPr lang="en-US" altLang="ko-KR" sz="1600" dirty="0">
-                <a:latin typeface="맑은 고딕 Semilight" panose="020B0502040204020203" pitchFamily="50" charset="-127"/>
-                <a:ea typeface="맑은 고딕 Semilight" panose="020B0502040204020203" pitchFamily="50" charset="-127"/>
-                <a:cs typeface="맑은 고딕 Semilight" panose="020B0502040204020203" pitchFamily="50" charset="-127"/>
-              </a:rPr>
-              <a:t> </a:t>
-            </a:r>
-            <a:r>
-              <a:rPr lang="ko-KR" altLang="en-US" sz="1600" dirty="0">
-                <a:latin typeface="맑은 고딕 Semilight" panose="020B0502040204020203" pitchFamily="50" charset="-127"/>
-                <a:ea typeface="맑은 고딕 Semilight" panose="020B0502040204020203" pitchFamily="50" charset="-127"/>
-                <a:cs typeface="맑은 고딕 Semilight" panose="020B0502040204020203" pitchFamily="50" charset="-127"/>
-              </a:rPr>
-              <a:t>추출한 </a:t>
-            </a:r>
-            <a:r>
-              <a:rPr lang="ko-KR" altLang="ko-KR" sz="1600" dirty="0">
-                <a:latin typeface="맑은 고딕 Semilight" panose="020B0502040204020203" pitchFamily="50" charset="-127"/>
-                <a:ea typeface="맑은 고딕 Semilight" panose="020B0502040204020203" pitchFamily="50" charset="-127"/>
-                <a:cs typeface="맑은 고딕 Semilight" panose="020B0502040204020203" pitchFamily="50" charset="-127"/>
-              </a:rPr>
-              <a:t>데이터를 바탕으로 다음을 </a:t>
-            </a:r>
-            <a:r>
-              <a:rPr lang="ko-KR" altLang="ko-KR" sz="1600" dirty="0" err="1">
-                <a:latin typeface="맑은 고딕 Semilight" panose="020B0502040204020203" pitchFamily="50" charset="-127"/>
-                <a:ea typeface="맑은 고딕 Semilight" panose="020B0502040204020203" pitchFamily="50" charset="-127"/>
-                <a:cs typeface="맑은 고딕 Semilight" panose="020B0502040204020203" pitchFamily="50" charset="-127"/>
-              </a:rPr>
-              <a:t>계산하시오</a:t>
-            </a:r>
-            <a:r>
-              <a:rPr lang="ko-KR" altLang="ko-KR" sz="1600" dirty="0">
-                <a:latin typeface="맑은 고딕 Semilight" panose="020B0502040204020203" pitchFamily="50" charset="-127"/>
-                <a:ea typeface="맑은 고딕 Semilight" panose="020B0502040204020203" pitchFamily="50" charset="-127"/>
-                <a:cs typeface="맑은 고딕 Semilight" panose="020B0502040204020203" pitchFamily="50" charset="-127"/>
-              </a:rPr>
-              <a:t>. (소수점 둘째 자리까지 표기)</a:t>
-            </a:r>
-          </a:p>
-          <a:p>
-            <a:pPr marL="800100" lvl="1" indent="-342900" eaLnBrk="0" fontAlgn="base" hangingPunct="0">
-              <a:lnSpc>
-                <a:spcPct val="150000"/>
-              </a:lnSpc>
-              <a:spcBef>
-                <a:spcPct val="0"/>
-              </a:spcBef>
-              <a:spcAft>
-                <a:spcPct val="0"/>
-              </a:spcAft>
-              <a:buFont typeface="+mj-lt"/>
-              <a:buAutoNum type="arabicPeriod"/>
-            </a:pPr>
-            <a:r>
-              <a:rPr lang="ko-KR" altLang="ko-KR" sz="1400" dirty="0">
-                <a:latin typeface="맑은 고딕 Semilight" panose="020B0502040204020203" pitchFamily="50" charset="-127"/>
-                <a:ea typeface="맑은 고딕 Semilight" panose="020B0502040204020203" pitchFamily="50" charset="-127"/>
-                <a:cs typeface="맑은 고딕 Semilight" panose="020B0502040204020203" pitchFamily="50" charset="-127"/>
-              </a:rPr>
-              <a:t>표본평균과 표본</a:t>
-            </a:r>
-            <a:r>
-              <a:rPr lang="en-US" altLang="ko-KR" sz="1400" dirty="0">
-                <a:latin typeface="맑은 고딕 Semilight" panose="020B0502040204020203" pitchFamily="50" charset="-127"/>
-                <a:ea typeface="맑은 고딕 Semilight" panose="020B0502040204020203" pitchFamily="50" charset="-127"/>
-                <a:cs typeface="맑은 고딕 Semilight" panose="020B0502040204020203" pitchFamily="50" charset="-127"/>
-              </a:rPr>
-              <a:t> </a:t>
-            </a:r>
-            <a:r>
-              <a:rPr lang="ko-KR" altLang="ko-KR" sz="1400" dirty="0">
-                <a:latin typeface="맑은 고딕 Semilight" panose="020B0502040204020203" pitchFamily="50" charset="-127"/>
-                <a:ea typeface="맑은 고딕 Semilight" panose="020B0502040204020203" pitchFamily="50" charset="-127"/>
-                <a:cs typeface="맑은 고딕 Semilight" panose="020B0502040204020203" pitchFamily="50" charset="-127"/>
-              </a:rPr>
-              <a:t>표준편차</a:t>
-            </a:r>
-          </a:p>
-          <a:p>
-            <a:pPr marL="800100" lvl="1" indent="-342900" eaLnBrk="0" fontAlgn="base" hangingPunct="0">
-              <a:lnSpc>
-                <a:spcPct val="150000"/>
-              </a:lnSpc>
-              <a:spcBef>
-                <a:spcPct val="0"/>
-              </a:spcBef>
-              <a:spcAft>
-                <a:spcPct val="0"/>
-              </a:spcAft>
-              <a:buFont typeface="+mj-lt"/>
-              <a:buAutoNum type="arabicPeriod"/>
-            </a:pPr>
-            <a:r>
-              <a:rPr lang="ko-KR" altLang="ko-KR" sz="1400" dirty="0">
-                <a:latin typeface="맑은 고딕 Semilight" panose="020B0502040204020203" pitchFamily="50" charset="-127"/>
-                <a:ea typeface="맑은 고딕 Semilight" panose="020B0502040204020203" pitchFamily="50" charset="-127"/>
-                <a:cs typeface="맑은 고딕 Semilight" panose="020B0502040204020203" pitchFamily="50" charset="-127"/>
-              </a:rPr>
-              <a:t>95% 신뢰수준에서의 신뢰구간 (단, </a:t>
-            </a:r>
-            <a:r>
-              <a:rPr lang="ko-KR" altLang="ko-KR" sz="1400" dirty="0" err="1">
-                <a:latin typeface="맑은 고딕 Semilight" panose="020B0502040204020203" pitchFamily="50" charset="-127"/>
-                <a:ea typeface="맑은 고딕 Semilight" panose="020B0502040204020203" pitchFamily="50" charset="-127"/>
-                <a:cs typeface="맑은 고딕 Semilight" panose="020B0502040204020203" pitchFamily="50" charset="-127"/>
-              </a:rPr>
-              <a:t>scipy.stats를</a:t>
-            </a:r>
-            <a:r>
-              <a:rPr lang="ko-KR" altLang="ko-KR" sz="1400" dirty="0">
-                <a:latin typeface="맑은 고딕 Semilight" panose="020B0502040204020203" pitchFamily="50" charset="-127"/>
-                <a:ea typeface="맑은 고딕 Semilight" panose="020B0502040204020203" pitchFamily="50" charset="-127"/>
-                <a:cs typeface="맑은 고딕 Semilight" panose="020B0502040204020203" pitchFamily="50" charset="-127"/>
-              </a:rPr>
-              <a:t> 활용할 것)</a:t>
-            </a:r>
-            <a:endParaRPr lang="en-US" altLang="ko-KR" sz="1400" dirty="0">
-              <a:latin typeface="맑은 고딕 Semilight" panose="020B0502040204020203" pitchFamily="50" charset="-127"/>
-              <a:ea typeface="맑은 고딕 Semilight" panose="020B0502040204020203" pitchFamily="50" charset="-127"/>
-              <a:cs typeface="맑은 고딕 Semilight" panose="020B0502040204020203" pitchFamily="50" charset="-127"/>
-            </a:endParaRPr>
-          </a:p>
-          <a:p>
-            <a:pPr marL="800100" lvl="1" indent="-342900" eaLnBrk="0" fontAlgn="base" hangingPunct="0">
-              <a:lnSpc>
-                <a:spcPct val="150000"/>
-              </a:lnSpc>
-              <a:spcBef>
-                <a:spcPct val="0"/>
-              </a:spcBef>
-              <a:spcAft>
-                <a:spcPct val="0"/>
-              </a:spcAft>
-              <a:buFont typeface="+mj-lt"/>
-              <a:buAutoNum type="arabicPeriod"/>
-            </a:pPr>
-            <a:r>
-              <a:rPr lang="ko-KR" altLang="ko-KR" sz="1400" dirty="0">
-                <a:latin typeface="맑은 고딕 Semilight" panose="020B0502040204020203" pitchFamily="50" charset="-127"/>
-                <a:ea typeface="맑은 고딕 Semilight" panose="020B0502040204020203" pitchFamily="50" charset="-127"/>
-                <a:cs typeface="맑은 고딕 Semilight" panose="020B0502040204020203" pitchFamily="50" charset="-127"/>
-              </a:rPr>
-              <a:t>만약 동일한 데이터로 99% 신뢰구간을 구한다면, 95% 때보다 구간의 너비(</a:t>
-            </a:r>
-            <a:r>
-              <a:rPr lang="ko-KR" altLang="ko-KR" sz="1400" dirty="0" err="1">
-                <a:latin typeface="맑은 고딕 Semilight" panose="020B0502040204020203" pitchFamily="50" charset="-127"/>
-                <a:ea typeface="맑은 고딕 Semilight" panose="020B0502040204020203" pitchFamily="50" charset="-127"/>
-                <a:cs typeface="맑은 고딕 Semilight" panose="020B0502040204020203" pitchFamily="50" charset="-127"/>
-              </a:rPr>
-              <a:t>Width</a:t>
-            </a:r>
-            <a:r>
-              <a:rPr lang="ko-KR" altLang="ko-KR" sz="1400" dirty="0">
-                <a:latin typeface="맑은 고딕 Semilight" panose="020B0502040204020203" pitchFamily="50" charset="-127"/>
-                <a:ea typeface="맑은 고딕 Semilight" panose="020B0502040204020203" pitchFamily="50" charset="-127"/>
-                <a:cs typeface="맑은 고딕 Semilight" panose="020B0502040204020203" pitchFamily="50" charset="-127"/>
-              </a:rPr>
-              <a:t>)는 어떻게 변하겠는가?</a:t>
-            </a:r>
-          </a:p>
-        </p:txBody>
-      </p:sp>
-      <p:sp>
-        <p:nvSpPr>
-          <p:cNvPr id="4" name="TextBox 3">
+      </p:pic>
+      <p:sp>
+        <p:nvSpPr>
+          <p:cNvPr id="5" name="직사각형 4">
             <a:extLst>
               <a:ext uri="{FF2B5EF4-FFF2-40B4-BE49-F238E27FC236}">
-                <a16:creationId xmlns:a16="http://schemas.microsoft.com/office/drawing/2014/main" id="{AFB9812D-4BDB-71D7-0078-C7761D0F87A7}"/>
+                <a16:creationId xmlns:a16="http://schemas.microsoft.com/office/drawing/2014/main" id="{9E05CCBC-2ED7-7D24-7448-0A549E48D9FE}"/>
               </a:ext>
             </a:extLst>
           </p:cNvPr>
-          <p:cNvSpPr txBox="1"/>
+          <p:cNvSpPr/>
           <p:nvPr/>
         </p:nvSpPr>
         <p:spPr>
           <a:xfrm>
-            <a:off x="693813" y="3990985"/>
-            <a:ext cx="10972380" cy="2184637"/>
+            <a:off x="2854052" y="5454012"/>
+            <a:ext cx="3600400" cy="677605"/>
           </a:xfrm>
           <a:prstGeom prst="rect">
             <a:avLst/>
           </a:prstGeom>
-          <a:solidFill>
-            <a:schemeClr val="bg1">
-              <a:lumMod val="85000"/>
+          <a:noFill/>
+          <a:ln w="38100">
+            <a:solidFill>
+              <a:srgbClr val="00B0F0"/>
+            </a:solidFill>
+          </a:ln>
+        </p:spPr>
+        <p:style>
+          <a:lnRef idx="2">
+            <a:schemeClr val="accent1">
+              <a:shade val="15000"/>
             </a:schemeClr>
-          </a:solidFill>
-        </p:spPr>
-        <p:txBody>
-          <a:bodyPr wrap="square">
-            <a:spAutoFit/>
-          </a:bodyPr>
+          </a:lnRef>
+          <a:fillRef idx="1">
+            <a:schemeClr val="accent1"/>
+          </a:fillRef>
+          <a:effectRef idx="0">
+            <a:schemeClr val="accent1"/>
+          </a:effectRef>
+          <a:fontRef idx="minor">
+            <a:schemeClr val="lt1"/>
+          </a:fontRef>
+        </p:style>
+        <p:txBody>
+          <a:bodyPr rtlCol="0" anchor="ctr"/>
           <a:lstStyle/>
           <a:p>
-            <a:pPr lvl="0" eaLnBrk="0" fontAlgn="base" hangingPunct="0">
-              <a:lnSpc>
-                <a:spcPct val="150000"/>
-              </a:lnSpc>
-              <a:spcBef>
-                <a:spcPct val="0"/>
-              </a:spcBef>
-              <a:spcAft>
-                <a:spcPct val="0"/>
-              </a:spcAft>
-            </a:pPr>
-            <a:r>
-              <a:rPr lang="ko-KR" altLang="ko-KR" sz="1600" dirty="0">
-                <a:latin typeface="맑은 고딕 Semilight" panose="020B0502040204020203" pitchFamily="50" charset="-127"/>
-                <a:ea typeface="맑은 고딕 Semilight" panose="020B0502040204020203" pitchFamily="50" charset="-127"/>
-                <a:cs typeface="맑은 고딕 Semilight" panose="020B0502040204020203" pitchFamily="50" charset="-127"/>
-              </a:rPr>
-              <a:t>문제 </a:t>
-            </a:r>
-            <a:r>
-              <a:rPr lang="en-US" altLang="ko-KR" sz="1600" dirty="0">
-                <a:latin typeface="맑은 고딕 Semilight" panose="020B0502040204020203" pitchFamily="50" charset="-127"/>
-                <a:ea typeface="맑은 고딕 Semilight" panose="020B0502040204020203" pitchFamily="50" charset="-127"/>
-                <a:cs typeface="맑은 고딕 Semilight" panose="020B0502040204020203" pitchFamily="50" charset="-127"/>
-              </a:rPr>
-              <a:t>4</a:t>
-            </a:r>
-            <a:r>
-              <a:rPr lang="ko-KR" altLang="ko-KR" sz="1600" dirty="0">
-                <a:latin typeface="맑은 고딕 Semilight" panose="020B0502040204020203" pitchFamily="50" charset="-127"/>
-                <a:ea typeface="맑은 고딕 Semilight" panose="020B0502040204020203" pitchFamily="50" charset="-127"/>
-                <a:cs typeface="맑은 고딕 Semilight" panose="020B0502040204020203" pitchFamily="50" charset="-127"/>
-              </a:rPr>
-              <a:t>. </a:t>
-            </a:r>
-            <a:r>
-              <a:rPr lang="en-US" altLang="ko-KR" sz="1600" b="1" dirty="0">
-                <a:latin typeface="맑은 고딕 Semilight" panose="020B0502040204020203" pitchFamily="50" charset="-127"/>
-                <a:ea typeface="맑은 고딕 Semilight" panose="020B0502040204020203" pitchFamily="50" charset="-127"/>
-                <a:cs typeface="맑은 고딕 Semilight" panose="020B0502040204020203" pitchFamily="50" charset="-127"/>
-              </a:rPr>
-              <a:t>Z</a:t>
-            </a:r>
-            <a:r>
-              <a:rPr lang="ko-KR" altLang="ko-KR" sz="1600" b="1" dirty="0">
-                <a:latin typeface="맑은 고딕 Semilight" panose="020B0502040204020203" pitchFamily="50" charset="-127"/>
-                <a:ea typeface="맑은 고딕 Semilight" panose="020B0502040204020203" pitchFamily="50" charset="-127"/>
-                <a:cs typeface="맑은 고딕 Semilight" panose="020B0502040204020203" pitchFamily="50" charset="-127"/>
-              </a:rPr>
-              <a:t>-분포</a:t>
-            </a:r>
-            <a:r>
-              <a:rPr lang="ko-KR" altLang="ko-KR" sz="1600" dirty="0">
-                <a:latin typeface="맑은 고딕 Semilight" panose="020B0502040204020203" pitchFamily="50" charset="-127"/>
-                <a:ea typeface="맑은 고딕 Semilight" panose="020B0502040204020203" pitchFamily="50" charset="-127"/>
-                <a:cs typeface="맑은 고딕 Semilight" panose="020B0502040204020203" pitchFamily="50" charset="-127"/>
-              </a:rPr>
-              <a:t>를 이용한 신뢰구간 계산 (</a:t>
-            </a:r>
-            <a:r>
-              <a:rPr lang="en-US" altLang="ko-KR" sz="1600" dirty="0">
-                <a:latin typeface="맑은 고딕 Semilight" panose="020B0502040204020203" pitchFamily="50" charset="-127"/>
-                <a:ea typeface="맑은 고딕 Semilight" panose="020B0502040204020203" pitchFamily="50" charset="-127"/>
-                <a:cs typeface="맑은 고딕 Semilight" panose="020B0502040204020203" pitchFamily="50" charset="-127"/>
-              </a:rPr>
-              <a:t>3</a:t>
-            </a:r>
-            <a:r>
-              <a:rPr lang="ko-KR" altLang="ko-KR" sz="1600" dirty="0">
-                <a:latin typeface="맑은 고딕 Semilight" panose="020B0502040204020203" pitchFamily="50" charset="-127"/>
-                <a:ea typeface="맑은 고딕 Semilight" panose="020B0502040204020203" pitchFamily="50" charset="-127"/>
-                <a:cs typeface="맑은 고딕 Semilight" panose="020B0502040204020203" pitchFamily="50" charset="-127"/>
-              </a:rPr>
-              <a:t>0점)</a:t>
-            </a:r>
-            <a:endParaRPr lang="en-US" altLang="ko-KR" sz="1600" dirty="0">
-              <a:latin typeface="맑은 고딕 Semilight" panose="020B0502040204020203" pitchFamily="50" charset="-127"/>
-              <a:ea typeface="맑은 고딕 Semilight" panose="020B0502040204020203" pitchFamily="50" charset="-127"/>
-              <a:cs typeface="맑은 고딕 Semilight" panose="020B0502040204020203" pitchFamily="50" charset="-127"/>
-            </a:endParaRPr>
-          </a:p>
-          <a:p>
-            <a:pPr lvl="0" eaLnBrk="0" fontAlgn="base" hangingPunct="0">
-              <a:lnSpc>
-                <a:spcPct val="150000"/>
-              </a:lnSpc>
-              <a:spcBef>
-                <a:spcPct val="0"/>
-              </a:spcBef>
-              <a:spcAft>
-                <a:spcPct val="0"/>
-              </a:spcAft>
-            </a:pPr>
-            <a:endParaRPr lang="ko-KR" altLang="ko-KR" sz="1600" dirty="0">
-              <a:latin typeface="맑은 고딕 Semilight" panose="020B0502040204020203" pitchFamily="50" charset="-127"/>
-              <a:ea typeface="맑은 고딕 Semilight" panose="020B0502040204020203" pitchFamily="50" charset="-127"/>
-              <a:cs typeface="맑은 고딕 Semilight" panose="020B0502040204020203" pitchFamily="50" charset="-127"/>
-            </a:endParaRPr>
-          </a:p>
-          <a:p>
-            <a:pPr lvl="0" eaLnBrk="0" fontAlgn="base" hangingPunct="0">
-              <a:lnSpc>
-                <a:spcPct val="150000"/>
-              </a:lnSpc>
-              <a:spcBef>
-                <a:spcPct val="0"/>
-              </a:spcBef>
-              <a:spcAft>
-                <a:spcPct val="0"/>
-              </a:spcAft>
-            </a:pPr>
-            <a:r>
-              <a:rPr lang="ko-KR" altLang="ko-KR" sz="1600" dirty="0">
-                <a:latin typeface="맑은 고딕 Semilight" panose="020B0502040204020203" pitchFamily="50" charset="-127"/>
-                <a:ea typeface="맑은 고딕 Semilight" panose="020B0502040204020203" pitchFamily="50" charset="-127"/>
-                <a:cs typeface="맑은 고딕 Semilight" panose="020B0502040204020203" pitchFamily="50" charset="-127"/>
-              </a:rPr>
-              <a:t>'</a:t>
-            </a:r>
-            <a:r>
-              <a:rPr lang="ko-KR" altLang="ko-KR" sz="1600" dirty="0" err="1">
-                <a:latin typeface="맑은 고딕 Semilight" panose="020B0502040204020203" pitchFamily="50" charset="-127"/>
-                <a:ea typeface="맑은 고딕 Semilight" panose="020B0502040204020203" pitchFamily="50" charset="-127"/>
-                <a:cs typeface="맑은 고딕 Semilight" panose="020B0502040204020203" pitchFamily="50" charset="-127"/>
-              </a:rPr>
-              <a:t>Gentoo</a:t>
-            </a:r>
-            <a:r>
-              <a:rPr lang="ko-KR" altLang="ko-KR" sz="1600" dirty="0">
-                <a:latin typeface="맑은 고딕 Semilight" panose="020B0502040204020203" pitchFamily="50" charset="-127"/>
-                <a:ea typeface="맑은 고딕 Semilight" panose="020B0502040204020203" pitchFamily="50" charset="-127"/>
-                <a:cs typeface="맑은 고딕 Semilight" panose="020B0502040204020203" pitchFamily="50" charset="-127"/>
-              </a:rPr>
-              <a:t>' 펭귄 중 무작위로 추출된 15마리의 지느러미 길이 데이터</a:t>
-            </a:r>
-            <a:r>
-              <a:rPr lang="ko-KR" altLang="en-US" sz="1600" dirty="0">
-                <a:latin typeface="맑은 고딕 Semilight" panose="020B0502040204020203" pitchFamily="50" charset="-127"/>
-                <a:ea typeface="맑은 고딕 Semilight" panose="020B0502040204020203" pitchFamily="50" charset="-127"/>
-                <a:cs typeface="맑은 고딕 Semilight" panose="020B0502040204020203" pitchFamily="50" charset="-127"/>
-              </a:rPr>
-              <a:t>를</a:t>
-            </a:r>
-            <a:r>
-              <a:rPr lang="en-US" altLang="ko-KR" sz="1600" dirty="0">
-                <a:latin typeface="맑은 고딕 Semilight" panose="020B0502040204020203" pitchFamily="50" charset="-127"/>
-                <a:ea typeface="맑은 고딕 Semilight" panose="020B0502040204020203" pitchFamily="50" charset="-127"/>
-                <a:cs typeface="맑은 고딕 Semilight" panose="020B0502040204020203" pitchFamily="50" charset="-127"/>
-              </a:rPr>
-              <a:t> </a:t>
-            </a:r>
-            <a:r>
-              <a:rPr lang="en-US" altLang="ko-KR" sz="1600" dirty="0" err="1">
-                <a:latin typeface="맑은 고딕 Semilight" panose="020B0502040204020203" pitchFamily="50" charset="-127"/>
-                <a:ea typeface="맑은 고딕 Semilight" panose="020B0502040204020203" pitchFamily="50" charset="-127"/>
-                <a:cs typeface="맑은 고딕 Semilight" panose="020B0502040204020203" pitchFamily="50" charset="-127"/>
-              </a:rPr>
-              <a:t>random_state</a:t>
-            </a:r>
-            <a:r>
-              <a:rPr lang="en-US" altLang="ko-KR" sz="1600" dirty="0">
-                <a:latin typeface="맑은 고딕 Semilight" panose="020B0502040204020203" pitchFamily="50" charset="-127"/>
-                <a:ea typeface="맑은 고딕 Semilight" panose="020B0502040204020203" pitchFamily="50" charset="-127"/>
-                <a:cs typeface="맑은 고딕 Semilight" panose="020B0502040204020203" pitchFamily="50" charset="-127"/>
-              </a:rPr>
-              <a:t> =11</a:t>
-            </a:r>
-            <a:r>
-              <a:rPr lang="ko-KR" altLang="en-US" sz="1600" dirty="0">
-                <a:latin typeface="맑은 고딕 Semilight" panose="020B0502040204020203" pitchFamily="50" charset="-127"/>
-                <a:ea typeface="맑은 고딕 Semilight" panose="020B0502040204020203" pitchFamily="50" charset="-127"/>
-                <a:cs typeface="맑은 고딕 Semilight" panose="020B0502040204020203" pitchFamily="50" charset="-127"/>
-              </a:rPr>
-              <a:t>로</a:t>
-            </a:r>
-            <a:r>
-              <a:rPr lang="en-US" altLang="ko-KR" sz="1600" dirty="0">
-                <a:latin typeface="맑은 고딕 Semilight" panose="020B0502040204020203" pitchFamily="50" charset="-127"/>
-                <a:ea typeface="맑은 고딕 Semilight" panose="020B0502040204020203" pitchFamily="50" charset="-127"/>
-                <a:cs typeface="맑은 고딕 Semilight" panose="020B0502040204020203" pitchFamily="50" charset="-127"/>
-              </a:rPr>
-              <a:t> </a:t>
-            </a:r>
-            <a:r>
-              <a:rPr lang="ko-KR" altLang="en-US" sz="1600" dirty="0">
-                <a:latin typeface="맑은 고딕 Semilight" panose="020B0502040204020203" pitchFamily="50" charset="-127"/>
-                <a:ea typeface="맑은 고딕 Semilight" panose="020B0502040204020203" pitchFamily="50" charset="-127"/>
-                <a:cs typeface="맑은 고딕 Semilight" panose="020B0502040204020203" pitchFamily="50" charset="-127"/>
-              </a:rPr>
-              <a:t>추출한 </a:t>
-            </a:r>
-            <a:r>
-              <a:rPr lang="ko-KR" altLang="ko-KR" sz="1600" dirty="0">
-                <a:latin typeface="맑은 고딕 Semilight" panose="020B0502040204020203" pitchFamily="50" charset="-127"/>
-                <a:ea typeface="맑은 고딕 Semilight" panose="020B0502040204020203" pitchFamily="50" charset="-127"/>
-                <a:cs typeface="맑은 고딕 Semilight" panose="020B0502040204020203" pitchFamily="50" charset="-127"/>
-              </a:rPr>
-              <a:t>데이터를 바탕으로 다음을 </a:t>
-            </a:r>
-            <a:r>
-              <a:rPr lang="ko-KR" altLang="ko-KR" sz="1600" dirty="0" err="1">
-                <a:latin typeface="맑은 고딕 Semilight" panose="020B0502040204020203" pitchFamily="50" charset="-127"/>
-                <a:ea typeface="맑은 고딕 Semilight" panose="020B0502040204020203" pitchFamily="50" charset="-127"/>
-                <a:cs typeface="맑은 고딕 Semilight" panose="020B0502040204020203" pitchFamily="50" charset="-127"/>
-              </a:rPr>
-              <a:t>계산하시오</a:t>
-            </a:r>
-            <a:r>
-              <a:rPr lang="ko-KR" altLang="ko-KR" sz="1600" dirty="0">
-                <a:latin typeface="맑은 고딕 Semilight" panose="020B0502040204020203" pitchFamily="50" charset="-127"/>
-                <a:ea typeface="맑은 고딕 Semilight" panose="020B0502040204020203" pitchFamily="50" charset="-127"/>
-                <a:cs typeface="맑은 고딕 Semilight" panose="020B0502040204020203" pitchFamily="50" charset="-127"/>
-              </a:rPr>
-              <a:t>. (소수점 둘째 자리까지 표기)</a:t>
-            </a:r>
-          </a:p>
-          <a:p>
-            <a:pPr marL="800100" lvl="1" indent="-342900" eaLnBrk="0" fontAlgn="base" hangingPunct="0">
-              <a:lnSpc>
-                <a:spcPct val="150000"/>
-              </a:lnSpc>
-              <a:spcBef>
-                <a:spcPct val="0"/>
-              </a:spcBef>
-              <a:spcAft>
-                <a:spcPct val="0"/>
-              </a:spcAft>
-              <a:buFont typeface="+mj-lt"/>
-              <a:buAutoNum type="arabicPeriod"/>
-            </a:pPr>
-            <a:r>
-              <a:rPr lang="ko-KR" altLang="ko-KR" sz="1400" dirty="0">
-                <a:latin typeface="맑은 고딕 Semilight" panose="020B0502040204020203" pitchFamily="50" charset="-127"/>
-                <a:ea typeface="맑은 고딕 Semilight" panose="020B0502040204020203" pitchFamily="50" charset="-127"/>
-                <a:cs typeface="맑은 고딕 Semilight" panose="020B0502040204020203" pitchFamily="50" charset="-127"/>
-              </a:rPr>
-              <a:t>9</a:t>
-            </a:r>
-            <a:r>
-              <a:rPr lang="en-US" altLang="ko-KR" sz="1400" dirty="0">
-                <a:latin typeface="맑은 고딕 Semilight" panose="020B0502040204020203" pitchFamily="50" charset="-127"/>
-                <a:ea typeface="맑은 고딕 Semilight" panose="020B0502040204020203" pitchFamily="50" charset="-127"/>
-                <a:cs typeface="맑은 고딕 Semilight" panose="020B0502040204020203" pitchFamily="50" charset="-127"/>
-              </a:rPr>
-              <a:t>5</a:t>
-            </a:r>
-            <a:r>
-              <a:rPr lang="ko-KR" altLang="ko-KR" sz="1400" dirty="0">
-                <a:latin typeface="맑은 고딕 Semilight" panose="020B0502040204020203" pitchFamily="50" charset="-127"/>
-                <a:ea typeface="맑은 고딕 Semilight" panose="020B0502040204020203" pitchFamily="50" charset="-127"/>
-                <a:cs typeface="맑은 고딕 Semilight" panose="020B0502040204020203" pitchFamily="50" charset="-127"/>
-              </a:rPr>
-              <a:t>% 신뢰수준에서의 신뢰구간 (단, </a:t>
-            </a:r>
-            <a:r>
-              <a:rPr lang="ko-KR" altLang="ko-KR" sz="1400" dirty="0" err="1">
-                <a:latin typeface="맑은 고딕 Semilight" panose="020B0502040204020203" pitchFamily="50" charset="-127"/>
-                <a:ea typeface="맑은 고딕 Semilight" panose="020B0502040204020203" pitchFamily="50" charset="-127"/>
-                <a:cs typeface="맑은 고딕 Semilight" panose="020B0502040204020203" pitchFamily="50" charset="-127"/>
-              </a:rPr>
-              <a:t>scipy.stats를</a:t>
-            </a:r>
-            <a:r>
-              <a:rPr lang="ko-KR" altLang="ko-KR" sz="1400" dirty="0">
-                <a:latin typeface="맑은 고딕 Semilight" panose="020B0502040204020203" pitchFamily="50" charset="-127"/>
-                <a:ea typeface="맑은 고딕 Semilight" panose="020B0502040204020203" pitchFamily="50" charset="-127"/>
-                <a:cs typeface="맑은 고딕 Semilight" panose="020B0502040204020203" pitchFamily="50" charset="-127"/>
-              </a:rPr>
-              <a:t> 활용할 것)</a:t>
-            </a:r>
-            <a:endParaRPr lang="en-US" altLang="ko-KR" sz="1400" dirty="0">
-              <a:latin typeface="맑은 고딕 Semilight" panose="020B0502040204020203" pitchFamily="50" charset="-127"/>
-              <a:ea typeface="맑은 고딕 Semilight" panose="020B0502040204020203" pitchFamily="50" charset="-127"/>
-              <a:cs typeface="맑은 고딕 Semilight" panose="020B0502040204020203" pitchFamily="50" charset="-127"/>
-            </a:endParaRPr>
-          </a:p>
-          <a:p>
-            <a:pPr marL="800100" lvl="1" indent="-342900" eaLnBrk="0" fontAlgn="base" hangingPunct="0">
-              <a:lnSpc>
-                <a:spcPct val="150000"/>
-              </a:lnSpc>
-              <a:spcBef>
-                <a:spcPct val="0"/>
-              </a:spcBef>
-              <a:spcAft>
-                <a:spcPct val="0"/>
-              </a:spcAft>
-              <a:buFont typeface="+mj-lt"/>
-              <a:buAutoNum type="arabicPeriod"/>
-            </a:pPr>
-            <a:r>
-              <a:rPr lang="ko-KR" altLang="ko-KR" sz="1400" dirty="0">
-                <a:latin typeface="맑은 고딕 Semilight" panose="020B0502040204020203" pitchFamily="50" charset="-127"/>
-                <a:ea typeface="맑은 고딕 Semilight" panose="020B0502040204020203" pitchFamily="50" charset="-127"/>
-                <a:cs typeface="맑은 고딕 Semilight" panose="020B0502040204020203" pitchFamily="50" charset="-127"/>
-              </a:rPr>
-              <a:t>만약 동일한 데이터로 99% 신뢰구간을 구한다면, 95% 때보다 구간의 너비(</a:t>
-            </a:r>
-            <a:r>
-              <a:rPr lang="ko-KR" altLang="ko-KR" sz="1400" dirty="0" err="1">
-                <a:latin typeface="맑은 고딕 Semilight" panose="020B0502040204020203" pitchFamily="50" charset="-127"/>
-                <a:ea typeface="맑은 고딕 Semilight" panose="020B0502040204020203" pitchFamily="50" charset="-127"/>
-                <a:cs typeface="맑은 고딕 Semilight" panose="020B0502040204020203" pitchFamily="50" charset="-127"/>
-              </a:rPr>
-              <a:t>Width</a:t>
-            </a:r>
-            <a:r>
-              <a:rPr lang="ko-KR" altLang="ko-KR" sz="1400" dirty="0">
-                <a:latin typeface="맑은 고딕 Semilight" panose="020B0502040204020203" pitchFamily="50" charset="-127"/>
-                <a:ea typeface="맑은 고딕 Semilight" panose="020B0502040204020203" pitchFamily="50" charset="-127"/>
-                <a:cs typeface="맑은 고딕 Semilight" panose="020B0502040204020203" pitchFamily="50" charset="-127"/>
-              </a:rPr>
-              <a:t>)는 어떻게 변하겠는가?</a:t>
-            </a:r>
+            <a:pPr algn="ctr"/>
+            <a:endParaRPr lang="ko-KR" altLang="en-US"/>
           </a:p>
         </p:txBody>
       </p:sp>
     </p:spTree>
     <p:extLst>
       <p:ext uri="{BB962C8B-B14F-4D97-AF65-F5344CB8AC3E}">
-        <p14:creationId xmlns:p14="http://schemas.microsoft.com/office/powerpoint/2010/main" val="2915621413"/>
+        <p14:creationId xmlns:p14="http://schemas.microsoft.com/office/powerpoint/2010/main" val="581370758"/>
       </p:ext>
     </p:extLst>
   </p:cSld>
@@ -12719,6 +12376,832 @@
   <p:cSld>
     <p:spTree>
       <p:nvGrpSpPr>
+        <p:cNvPr id="1" name="">
+          <a:extLst>
+            <a:ext uri="{FF2B5EF4-FFF2-40B4-BE49-F238E27FC236}">
+              <a16:creationId xmlns:a16="http://schemas.microsoft.com/office/drawing/2014/main" id="{144CFA6D-7BDE-F4CB-ECB4-44A7CEB8F142}"/>
+            </a:ext>
+          </a:extLst>
+        </p:cNvPr>
+        <p:cNvGrpSpPr/>
+        <p:nvPr/>
+      </p:nvGrpSpPr>
+      <p:grpSpPr>
+        <a:xfrm>
+          <a:off x="0" y="0"/>
+          <a:ext cx="0" cy="0"/>
+          <a:chOff x="0" y="0"/>
+          <a:chExt cx="0" cy="0"/>
+        </a:xfrm>
+      </p:grpSpPr>
+      <p:sp>
+        <p:nvSpPr>
+          <p:cNvPr id="8" name="슬라이드 번호 개체 틀 7">
+            <a:extLst>
+              <a:ext uri="{FF2B5EF4-FFF2-40B4-BE49-F238E27FC236}">
+                <a16:creationId xmlns:a16="http://schemas.microsoft.com/office/drawing/2014/main" id="{9613359B-04AB-2B7A-0694-56AD7107F85E}"/>
+              </a:ext>
+            </a:extLst>
+          </p:cNvPr>
+          <p:cNvSpPr>
+            <a:spLocks noGrp="1"/>
+          </p:cNvSpPr>
+          <p:nvPr>
+            <p:ph type="sldNum" sz="quarter" idx="12"/>
+          </p:nvPr>
+        </p:nvSpPr>
+        <p:spPr/>
+        <p:txBody>
+          <a:bodyPr/>
+          <a:lstStyle/>
+          <a:p>
+            <a:pPr rtl="0"/>
+            <a:fld id="{A3F31473-23EB-4724-8B59-FE6D21D89FA4}" type="slidenum">
+              <a:rPr lang="en-US" altLang="ko-KR" noProof="0" smtClean="0"/>
+              <a:t>21</a:t>
+            </a:fld>
+            <a:endParaRPr lang="en-US" altLang="ko-KR" noProof="0" dirty="0"/>
+          </a:p>
+        </p:txBody>
+      </p:sp>
+      <p:sp>
+        <p:nvSpPr>
+          <p:cNvPr id="5" name="TextBox 4">
+            <a:extLst>
+              <a:ext uri="{FF2B5EF4-FFF2-40B4-BE49-F238E27FC236}">
+                <a16:creationId xmlns:a16="http://schemas.microsoft.com/office/drawing/2014/main" id="{293136A9-4ED2-A9C4-59EA-DC5ABFD71B4B}"/>
+              </a:ext>
+            </a:extLst>
+          </p:cNvPr>
+          <p:cNvSpPr txBox="1"/>
+          <p:nvPr/>
+        </p:nvSpPr>
+        <p:spPr>
+          <a:xfrm>
+            <a:off x="117748" y="260648"/>
+            <a:ext cx="2592288" cy="584775"/>
+          </a:xfrm>
+          <a:prstGeom prst="rect">
+            <a:avLst/>
+          </a:prstGeom>
+          <a:noFill/>
+        </p:spPr>
+        <p:txBody>
+          <a:bodyPr wrap="square" rtlCol="0">
+            <a:spAutoFit/>
+          </a:bodyPr>
+          <a:lstStyle/>
+          <a:p>
+            <a:r>
+              <a:rPr lang="ko-KR" altLang="en-US" sz="3200" b="1"/>
+              <a:t>문제 풀이</a:t>
+            </a:r>
+          </a:p>
+        </p:txBody>
+      </p:sp>
+      <p:sp>
+        <p:nvSpPr>
+          <p:cNvPr id="2" name="Rectangle 1">
+            <a:extLst>
+              <a:ext uri="{FF2B5EF4-FFF2-40B4-BE49-F238E27FC236}">
+                <a16:creationId xmlns:a16="http://schemas.microsoft.com/office/drawing/2014/main" id="{E47FC9AE-9BFA-3C11-A9C0-7DCCB2B04601}"/>
+              </a:ext>
+            </a:extLst>
+          </p:cNvPr>
+          <p:cNvSpPr>
+            <a:spLocks noChangeArrowheads="1"/>
+          </p:cNvSpPr>
+          <p:nvPr/>
+        </p:nvSpPr>
+        <p:spPr bwMode="auto">
+          <a:xfrm>
+            <a:off x="693812" y="1124744"/>
+            <a:ext cx="10972380" cy="2461636"/>
+          </a:xfrm>
+          <a:prstGeom prst="rect">
+            <a:avLst/>
+          </a:prstGeom>
+          <a:solidFill>
+            <a:schemeClr val="bg1">
+              <a:lumMod val="85000"/>
+            </a:schemeClr>
+          </a:solidFill>
+          <a:ln>
+            <a:noFill/>
+          </a:ln>
+          <a:effectLst/>
+        </p:spPr>
+        <p:txBody>
+          <a:bodyPr vert="horz" wrap="square" lIns="91440" tIns="0" rIns="91440" bIns="45720" numCol="1" anchor="ctr" anchorCtr="0" compatLnSpc="1">
+            <a:prstTxWarp prst="textNoShape">
+              <a:avLst/>
+            </a:prstTxWarp>
+            <a:spAutoFit/>
+          </a:bodyPr>
+          <a:lstStyle/>
+          <a:p>
+            <a:pPr marL="0" marR="0" lvl="0" indent="0" algn="l" defTabSz="914400" rtl="0" eaLnBrk="0" fontAlgn="base" latinLnBrk="0" hangingPunct="0">
+              <a:lnSpc>
+                <a:spcPct val="150000"/>
+              </a:lnSpc>
+              <a:spcBef>
+                <a:spcPct val="0"/>
+              </a:spcBef>
+              <a:spcAft>
+                <a:spcPct val="0"/>
+              </a:spcAft>
+              <a:buClrTx/>
+              <a:buSzTx/>
+              <a:buFontTx/>
+              <a:buNone/>
+              <a:tabLst/>
+            </a:pPr>
+            <a:r>
+              <a:rPr lang="ko-KR" altLang="ko-KR" sz="1600" dirty="0">
+                <a:latin typeface="맑은 고딕 Semilight" panose="020B0502040204020203" pitchFamily="50" charset="-127"/>
+                <a:ea typeface="맑은 고딕 Semilight" panose="020B0502040204020203" pitchFamily="50" charset="-127"/>
+                <a:cs typeface="맑은 고딕 Semilight" panose="020B0502040204020203" pitchFamily="50" charset="-127"/>
+              </a:rPr>
+              <a:t>문제 3. </a:t>
+            </a:r>
+            <a:r>
+              <a:rPr lang="ko-KR" altLang="ko-KR" sz="1600" b="1" dirty="0" err="1">
+                <a:latin typeface="맑은 고딕 Semilight" panose="020B0502040204020203" pitchFamily="50" charset="-127"/>
+                <a:ea typeface="맑은 고딕 Semilight" panose="020B0502040204020203" pitchFamily="50" charset="-127"/>
+                <a:cs typeface="맑은 고딕 Semilight" panose="020B0502040204020203" pitchFamily="50" charset="-127"/>
+              </a:rPr>
+              <a:t>t</a:t>
+            </a:r>
+            <a:r>
+              <a:rPr lang="ko-KR" altLang="ko-KR" sz="1600" b="1" dirty="0">
+                <a:latin typeface="맑은 고딕 Semilight" panose="020B0502040204020203" pitchFamily="50" charset="-127"/>
+                <a:ea typeface="맑은 고딕 Semilight" panose="020B0502040204020203" pitchFamily="50" charset="-127"/>
+                <a:cs typeface="맑은 고딕 Semilight" panose="020B0502040204020203" pitchFamily="50" charset="-127"/>
+              </a:rPr>
+              <a:t>-분포</a:t>
+            </a:r>
+            <a:r>
+              <a:rPr lang="ko-KR" altLang="ko-KR" sz="1600" dirty="0">
+                <a:latin typeface="맑은 고딕 Semilight" panose="020B0502040204020203" pitchFamily="50" charset="-127"/>
+                <a:ea typeface="맑은 고딕 Semilight" panose="020B0502040204020203" pitchFamily="50" charset="-127"/>
+                <a:cs typeface="맑은 고딕 Semilight" panose="020B0502040204020203" pitchFamily="50" charset="-127"/>
+              </a:rPr>
+              <a:t>를 이용한 신뢰구간 계산 (40점)</a:t>
+            </a:r>
+            <a:endParaRPr lang="en-US" altLang="ko-KR" sz="1600" dirty="0">
+              <a:latin typeface="맑은 고딕 Semilight" panose="020B0502040204020203" pitchFamily="50" charset="-127"/>
+              <a:ea typeface="맑은 고딕 Semilight" panose="020B0502040204020203" pitchFamily="50" charset="-127"/>
+              <a:cs typeface="맑은 고딕 Semilight" panose="020B0502040204020203" pitchFamily="50" charset="-127"/>
+            </a:endParaRPr>
+          </a:p>
+          <a:p>
+            <a:pPr marL="0" marR="0" lvl="0" indent="0" algn="l" defTabSz="914400" rtl="0" eaLnBrk="0" fontAlgn="base" latinLnBrk="0" hangingPunct="0">
+              <a:lnSpc>
+                <a:spcPct val="150000"/>
+              </a:lnSpc>
+              <a:spcBef>
+                <a:spcPct val="0"/>
+              </a:spcBef>
+              <a:spcAft>
+                <a:spcPct val="0"/>
+              </a:spcAft>
+              <a:buClrTx/>
+              <a:buSzTx/>
+              <a:buFontTx/>
+              <a:buNone/>
+              <a:tabLst/>
+            </a:pPr>
+            <a:endParaRPr lang="ko-KR" altLang="ko-KR" sz="1600" dirty="0">
+              <a:latin typeface="맑은 고딕 Semilight" panose="020B0502040204020203" pitchFamily="50" charset="-127"/>
+              <a:ea typeface="맑은 고딕 Semilight" panose="020B0502040204020203" pitchFamily="50" charset="-127"/>
+              <a:cs typeface="맑은 고딕 Semilight" panose="020B0502040204020203" pitchFamily="50" charset="-127"/>
+            </a:endParaRPr>
+          </a:p>
+          <a:p>
+            <a:pPr marL="0" marR="0" lvl="0" indent="0" algn="l" defTabSz="914400" rtl="0" eaLnBrk="0" fontAlgn="base" latinLnBrk="0" hangingPunct="0">
+              <a:lnSpc>
+                <a:spcPct val="150000"/>
+              </a:lnSpc>
+              <a:spcBef>
+                <a:spcPct val="0"/>
+              </a:spcBef>
+              <a:spcAft>
+                <a:spcPct val="0"/>
+              </a:spcAft>
+              <a:buClrTx/>
+              <a:buSzTx/>
+              <a:buFontTx/>
+              <a:buNone/>
+              <a:tabLst/>
+            </a:pPr>
+            <a:r>
+              <a:rPr lang="ko-KR" altLang="ko-KR" sz="1600" dirty="0">
+                <a:latin typeface="맑은 고딕 Semilight" panose="020B0502040204020203" pitchFamily="50" charset="-127"/>
+                <a:ea typeface="맑은 고딕 Semilight" panose="020B0502040204020203" pitchFamily="50" charset="-127"/>
+                <a:cs typeface="맑은 고딕 Semilight" panose="020B0502040204020203" pitchFamily="50" charset="-127"/>
+              </a:rPr>
+              <a:t>'</a:t>
+            </a:r>
+            <a:r>
+              <a:rPr lang="ko-KR" altLang="ko-KR" sz="1600" dirty="0" err="1">
+                <a:latin typeface="맑은 고딕 Semilight" panose="020B0502040204020203" pitchFamily="50" charset="-127"/>
+                <a:ea typeface="맑은 고딕 Semilight" panose="020B0502040204020203" pitchFamily="50" charset="-127"/>
+                <a:cs typeface="맑은 고딕 Semilight" panose="020B0502040204020203" pitchFamily="50" charset="-127"/>
+              </a:rPr>
+              <a:t>Gentoo</a:t>
+            </a:r>
+            <a:r>
+              <a:rPr lang="ko-KR" altLang="ko-KR" sz="1600" dirty="0">
+                <a:latin typeface="맑은 고딕 Semilight" panose="020B0502040204020203" pitchFamily="50" charset="-127"/>
+                <a:ea typeface="맑은 고딕 Semilight" panose="020B0502040204020203" pitchFamily="50" charset="-127"/>
+                <a:cs typeface="맑은 고딕 Semilight" panose="020B0502040204020203" pitchFamily="50" charset="-127"/>
+              </a:rPr>
+              <a:t>' 펭귄 중 무작위로 추출된 15마리의 지느러미 길이 데이터</a:t>
+            </a:r>
+            <a:r>
+              <a:rPr lang="ko-KR" altLang="en-US" sz="1600" dirty="0">
+                <a:latin typeface="맑은 고딕 Semilight" panose="020B0502040204020203" pitchFamily="50" charset="-127"/>
+                <a:ea typeface="맑은 고딕 Semilight" panose="020B0502040204020203" pitchFamily="50" charset="-127"/>
+                <a:cs typeface="맑은 고딕 Semilight" panose="020B0502040204020203" pitchFamily="50" charset="-127"/>
+              </a:rPr>
+              <a:t>를</a:t>
+            </a:r>
+            <a:r>
+              <a:rPr lang="en-US" altLang="ko-KR" sz="1600" dirty="0">
+                <a:latin typeface="맑은 고딕 Semilight" panose="020B0502040204020203" pitchFamily="50" charset="-127"/>
+                <a:ea typeface="맑은 고딕 Semilight" panose="020B0502040204020203" pitchFamily="50" charset="-127"/>
+                <a:cs typeface="맑은 고딕 Semilight" panose="020B0502040204020203" pitchFamily="50" charset="-127"/>
+              </a:rPr>
+              <a:t> </a:t>
+            </a:r>
+            <a:r>
+              <a:rPr lang="en-US" altLang="ko-KR" sz="1600" dirty="0" err="1">
+                <a:latin typeface="맑은 고딕 Semilight" panose="020B0502040204020203" pitchFamily="50" charset="-127"/>
+                <a:ea typeface="맑은 고딕 Semilight" panose="020B0502040204020203" pitchFamily="50" charset="-127"/>
+                <a:cs typeface="맑은 고딕 Semilight" panose="020B0502040204020203" pitchFamily="50" charset="-127"/>
+              </a:rPr>
+              <a:t>random_state</a:t>
+            </a:r>
+            <a:r>
+              <a:rPr lang="en-US" altLang="ko-KR" sz="1600" dirty="0">
+                <a:latin typeface="맑은 고딕 Semilight" panose="020B0502040204020203" pitchFamily="50" charset="-127"/>
+                <a:ea typeface="맑은 고딕 Semilight" panose="020B0502040204020203" pitchFamily="50" charset="-127"/>
+                <a:cs typeface="맑은 고딕 Semilight" panose="020B0502040204020203" pitchFamily="50" charset="-127"/>
+              </a:rPr>
+              <a:t> =11</a:t>
+            </a:r>
+            <a:r>
+              <a:rPr lang="ko-KR" altLang="en-US" sz="1600" dirty="0">
+                <a:latin typeface="맑은 고딕 Semilight" panose="020B0502040204020203" pitchFamily="50" charset="-127"/>
+                <a:ea typeface="맑은 고딕 Semilight" panose="020B0502040204020203" pitchFamily="50" charset="-127"/>
+                <a:cs typeface="맑은 고딕 Semilight" panose="020B0502040204020203" pitchFamily="50" charset="-127"/>
+              </a:rPr>
+              <a:t>로</a:t>
+            </a:r>
+            <a:r>
+              <a:rPr lang="en-US" altLang="ko-KR" sz="1600" dirty="0">
+                <a:latin typeface="맑은 고딕 Semilight" panose="020B0502040204020203" pitchFamily="50" charset="-127"/>
+                <a:ea typeface="맑은 고딕 Semilight" panose="020B0502040204020203" pitchFamily="50" charset="-127"/>
+                <a:cs typeface="맑은 고딕 Semilight" panose="020B0502040204020203" pitchFamily="50" charset="-127"/>
+              </a:rPr>
+              <a:t> </a:t>
+            </a:r>
+            <a:r>
+              <a:rPr lang="ko-KR" altLang="en-US" sz="1600" dirty="0">
+                <a:latin typeface="맑은 고딕 Semilight" panose="020B0502040204020203" pitchFamily="50" charset="-127"/>
+                <a:ea typeface="맑은 고딕 Semilight" panose="020B0502040204020203" pitchFamily="50" charset="-127"/>
+                <a:cs typeface="맑은 고딕 Semilight" panose="020B0502040204020203" pitchFamily="50" charset="-127"/>
+              </a:rPr>
+              <a:t>추출한 </a:t>
+            </a:r>
+            <a:r>
+              <a:rPr lang="ko-KR" altLang="ko-KR" sz="1600" dirty="0">
+                <a:latin typeface="맑은 고딕 Semilight" panose="020B0502040204020203" pitchFamily="50" charset="-127"/>
+                <a:ea typeface="맑은 고딕 Semilight" panose="020B0502040204020203" pitchFamily="50" charset="-127"/>
+                <a:cs typeface="맑은 고딕 Semilight" panose="020B0502040204020203" pitchFamily="50" charset="-127"/>
+              </a:rPr>
+              <a:t>데이터를 바탕으로 다음을 </a:t>
+            </a:r>
+            <a:r>
+              <a:rPr lang="ko-KR" altLang="ko-KR" sz="1600" dirty="0" err="1">
+                <a:latin typeface="맑은 고딕 Semilight" panose="020B0502040204020203" pitchFamily="50" charset="-127"/>
+                <a:ea typeface="맑은 고딕 Semilight" panose="020B0502040204020203" pitchFamily="50" charset="-127"/>
+                <a:cs typeface="맑은 고딕 Semilight" panose="020B0502040204020203" pitchFamily="50" charset="-127"/>
+              </a:rPr>
+              <a:t>계산하시오</a:t>
+            </a:r>
+            <a:r>
+              <a:rPr lang="ko-KR" altLang="ko-KR" sz="1600" dirty="0">
+                <a:latin typeface="맑은 고딕 Semilight" panose="020B0502040204020203" pitchFamily="50" charset="-127"/>
+                <a:ea typeface="맑은 고딕 Semilight" panose="020B0502040204020203" pitchFamily="50" charset="-127"/>
+                <a:cs typeface="맑은 고딕 Semilight" panose="020B0502040204020203" pitchFamily="50" charset="-127"/>
+              </a:rPr>
+              <a:t>. (소수점 둘째 자리까지 표기)</a:t>
+            </a:r>
+          </a:p>
+          <a:p>
+            <a:pPr marL="800100" lvl="1" indent="-342900" eaLnBrk="0" fontAlgn="base" hangingPunct="0">
+              <a:lnSpc>
+                <a:spcPct val="150000"/>
+              </a:lnSpc>
+              <a:spcBef>
+                <a:spcPct val="0"/>
+              </a:spcBef>
+              <a:spcAft>
+                <a:spcPct val="0"/>
+              </a:spcAft>
+              <a:buFont typeface="+mj-lt"/>
+              <a:buAutoNum type="arabicPeriod"/>
+            </a:pPr>
+            <a:r>
+              <a:rPr lang="ko-KR" altLang="ko-KR" sz="1400" dirty="0">
+                <a:latin typeface="맑은 고딕 Semilight" panose="020B0502040204020203" pitchFamily="50" charset="-127"/>
+                <a:ea typeface="맑은 고딕 Semilight" panose="020B0502040204020203" pitchFamily="50" charset="-127"/>
+                <a:cs typeface="맑은 고딕 Semilight" panose="020B0502040204020203" pitchFamily="50" charset="-127"/>
+              </a:rPr>
+              <a:t>표본평균과 표본</a:t>
+            </a:r>
+            <a:r>
+              <a:rPr lang="en-US" altLang="ko-KR" sz="1400" dirty="0">
+                <a:latin typeface="맑은 고딕 Semilight" panose="020B0502040204020203" pitchFamily="50" charset="-127"/>
+                <a:ea typeface="맑은 고딕 Semilight" panose="020B0502040204020203" pitchFamily="50" charset="-127"/>
+                <a:cs typeface="맑은 고딕 Semilight" panose="020B0502040204020203" pitchFamily="50" charset="-127"/>
+              </a:rPr>
+              <a:t> </a:t>
+            </a:r>
+            <a:r>
+              <a:rPr lang="ko-KR" altLang="ko-KR" sz="1400" dirty="0">
+                <a:latin typeface="맑은 고딕 Semilight" panose="020B0502040204020203" pitchFamily="50" charset="-127"/>
+                <a:ea typeface="맑은 고딕 Semilight" panose="020B0502040204020203" pitchFamily="50" charset="-127"/>
+                <a:cs typeface="맑은 고딕 Semilight" panose="020B0502040204020203" pitchFamily="50" charset="-127"/>
+              </a:rPr>
+              <a:t>표준편차</a:t>
+            </a:r>
+          </a:p>
+          <a:p>
+            <a:pPr marL="800100" lvl="1" indent="-342900" eaLnBrk="0" fontAlgn="base" hangingPunct="0">
+              <a:lnSpc>
+                <a:spcPct val="150000"/>
+              </a:lnSpc>
+              <a:spcBef>
+                <a:spcPct val="0"/>
+              </a:spcBef>
+              <a:spcAft>
+                <a:spcPct val="0"/>
+              </a:spcAft>
+              <a:buFont typeface="+mj-lt"/>
+              <a:buAutoNum type="arabicPeriod"/>
+            </a:pPr>
+            <a:r>
+              <a:rPr lang="ko-KR" altLang="ko-KR" sz="1400" dirty="0">
+                <a:latin typeface="맑은 고딕 Semilight" panose="020B0502040204020203" pitchFamily="50" charset="-127"/>
+                <a:ea typeface="맑은 고딕 Semilight" panose="020B0502040204020203" pitchFamily="50" charset="-127"/>
+                <a:cs typeface="맑은 고딕 Semilight" panose="020B0502040204020203" pitchFamily="50" charset="-127"/>
+              </a:rPr>
+              <a:t>95% 신뢰수준에서의 신뢰구간 (단, </a:t>
+            </a:r>
+            <a:r>
+              <a:rPr lang="ko-KR" altLang="ko-KR" sz="1400" dirty="0" err="1">
+                <a:latin typeface="맑은 고딕 Semilight" panose="020B0502040204020203" pitchFamily="50" charset="-127"/>
+                <a:ea typeface="맑은 고딕 Semilight" panose="020B0502040204020203" pitchFamily="50" charset="-127"/>
+                <a:cs typeface="맑은 고딕 Semilight" panose="020B0502040204020203" pitchFamily="50" charset="-127"/>
+              </a:rPr>
+              <a:t>scipy.stats를</a:t>
+            </a:r>
+            <a:r>
+              <a:rPr lang="ko-KR" altLang="ko-KR" sz="1400" dirty="0">
+                <a:latin typeface="맑은 고딕 Semilight" panose="020B0502040204020203" pitchFamily="50" charset="-127"/>
+                <a:ea typeface="맑은 고딕 Semilight" panose="020B0502040204020203" pitchFamily="50" charset="-127"/>
+                <a:cs typeface="맑은 고딕 Semilight" panose="020B0502040204020203" pitchFamily="50" charset="-127"/>
+              </a:rPr>
+              <a:t> 활용할 것)</a:t>
+            </a:r>
+            <a:endParaRPr lang="en-US" altLang="ko-KR" sz="1400" dirty="0">
+              <a:latin typeface="맑은 고딕 Semilight" panose="020B0502040204020203" pitchFamily="50" charset="-127"/>
+              <a:ea typeface="맑은 고딕 Semilight" panose="020B0502040204020203" pitchFamily="50" charset="-127"/>
+              <a:cs typeface="맑은 고딕 Semilight" panose="020B0502040204020203" pitchFamily="50" charset="-127"/>
+            </a:endParaRPr>
+          </a:p>
+          <a:p>
+            <a:pPr marL="800100" lvl="1" indent="-342900" eaLnBrk="0" fontAlgn="base" hangingPunct="0">
+              <a:lnSpc>
+                <a:spcPct val="150000"/>
+              </a:lnSpc>
+              <a:spcBef>
+                <a:spcPct val="0"/>
+              </a:spcBef>
+              <a:spcAft>
+                <a:spcPct val="0"/>
+              </a:spcAft>
+              <a:buFont typeface="+mj-lt"/>
+              <a:buAutoNum type="arabicPeriod"/>
+            </a:pPr>
+            <a:r>
+              <a:rPr lang="ko-KR" altLang="ko-KR" sz="1400" dirty="0">
+                <a:latin typeface="맑은 고딕 Semilight" panose="020B0502040204020203" pitchFamily="50" charset="-127"/>
+                <a:ea typeface="맑은 고딕 Semilight" panose="020B0502040204020203" pitchFamily="50" charset="-127"/>
+                <a:cs typeface="맑은 고딕 Semilight" panose="020B0502040204020203" pitchFamily="50" charset="-127"/>
+              </a:rPr>
+              <a:t>만약 동일한 데이터로 99% 신뢰구간을 구한다면, 95% 때보다 구간의 너비(</a:t>
+            </a:r>
+            <a:r>
+              <a:rPr lang="ko-KR" altLang="ko-KR" sz="1400" dirty="0" err="1">
+                <a:latin typeface="맑은 고딕 Semilight" panose="020B0502040204020203" pitchFamily="50" charset="-127"/>
+                <a:ea typeface="맑은 고딕 Semilight" panose="020B0502040204020203" pitchFamily="50" charset="-127"/>
+                <a:cs typeface="맑은 고딕 Semilight" panose="020B0502040204020203" pitchFamily="50" charset="-127"/>
+              </a:rPr>
+              <a:t>Width</a:t>
+            </a:r>
+            <a:r>
+              <a:rPr lang="ko-KR" altLang="ko-KR" sz="1400" dirty="0">
+                <a:latin typeface="맑은 고딕 Semilight" panose="020B0502040204020203" pitchFamily="50" charset="-127"/>
+                <a:ea typeface="맑은 고딕 Semilight" panose="020B0502040204020203" pitchFamily="50" charset="-127"/>
+                <a:cs typeface="맑은 고딕 Semilight" panose="020B0502040204020203" pitchFamily="50" charset="-127"/>
+              </a:rPr>
+              <a:t>)는 어떻게 변하겠는가?</a:t>
+            </a:r>
+          </a:p>
+        </p:txBody>
+      </p:sp>
+      <p:sp>
+        <p:nvSpPr>
+          <p:cNvPr id="4" name="TextBox 3">
+            <a:extLst>
+              <a:ext uri="{FF2B5EF4-FFF2-40B4-BE49-F238E27FC236}">
+                <a16:creationId xmlns:a16="http://schemas.microsoft.com/office/drawing/2014/main" id="{AFB9812D-4BDB-71D7-0078-C7761D0F87A7}"/>
+              </a:ext>
+            </a:extLst>
+          </p:cNvPr>
+          <p:cNvSpPr txBox="1"/>
+          <p:nvPr/>
+        </p:nvSpPr>
+        <p:spPr>
+          <a:xfrm>
+            <a:off x="693813" y="3990985"/>
+            <a:ext cx="10972380" cy="2184637"/>
+          </a:xfrm>
+          <a:prstGeom prst="rect">
+            <a:avLst/>
+          </a:prstGeom>
+          <a:solidFill>
+            <a:schemeClr val="bg1">
+              <a:lumMod val="85000"/>
+            </a:schemeClr>
+          </a:solidFill>
+        </p:spPr>
+        <p:txBody>
+          <a:bodyPr wrap="square">
+            <a:spAutoFit/>
+          </a:bodyPr>
+          <a:lstStyle/>
+          <a:p>
+            <a:pPr lvl="0" eaLnBrk="0" fontAlgn="base" hangingPunct="0">
+              <a:lnSpc>
+                <a:spcPct val="150000"/>
+              </a:lnSpc>
+              <a:spcBef>
+                <a:spcPct val="0"/>
+              </a:spcBef>
+              <a:spcAft>
+                <a:spcPct val="0"/>
+              </a:spcAft>
+            </a:pPr>
+            <a:r>
+              <a:rPr lang="ko-KR" altLang="ko-KR" sz="1600" dirty="0">
+                <a:latin typeface="맑은 고딕 Semilight" panose="020B0502040204020203" pitchFamily="50" charset="-127"/>
+                <a:ea typeface="맑은 고딕 Semilight" panose="020B0502040204020203" pitchFamily="50" charset="-127"/>
+                <a:cs typeface="맑은 고딕 Semilight" panose="020B0502040204020203" pitchFamily="50" charset="-127"/>
+              </a:rPr>
+              <a:t>문제 </a:t>
+            </a:r>
+            <a:r>
+              <a:rPr lang="en-US" altLang="ko-KR" sz="1600" dirty="0">
+                <a:latin typeface="맑은 고딕 Semilight" panose="020B0502040204020203" pitchFamily="50" charset="-127"/>
+                <a:ea typeface="맑은 고딕 Semilight" panose="020B0502040204020203" pitchFamily="50" charset="-127"/>
+                <a:cs typeface="맑은 고딕 Semilight" panose="020B0502040204020203" pitchFamily="50" charset="-127"/>
+              </a:rPr>
+              <a:t>4</a:t>
+            </a:r>
+            <a:r>
+              <a:rPr lang="ko-KR" altLang="ko-KR" sz="1600" dirty="0">
+                <a:latin typeface="맑은 고딕 Semilight" panose="020B0502040204020203" pitchFamily="50" charset="-127"/>
+                <a:ea typeface="맑은 고딕 Semilight" panose="020B0502040204020203" pitchFamily="50" charset="-127"/>
+                <a:cs typeface="맑은 고딕 Semilight" panose="020B0502040204020203" pitchFamily="50" charset="-127"/>
+              </a:rPr>
+              <a:t>. </a:t>
+            </a:r>
+            <a:r>
+              <a:rPr lang="en-US" altLang="ko-KR" sz="1600" b="1" dirty="0">
+                <a:latin typeface="맑은 고딕 Semilight" panose="020B0502040204020203" pitchFamily="50" charset="-127"/>
+                <a:ea typeface="맑은 고딕 Semilight" panose="020B0502040204020203" pitchFamily="50" charset="-127"/>
+                <a:cs typeface="맑은 고딕 Semilight" panose="020B0502040204020203" pitchFamily="50" charset="-127"/>
+              </a:rPr>
+              <a:t>Z</a:t>
+            </a:r>
+            <a:r>
+              <a:rPr lang="ko-KR" altLang="ko-KR" sz="1600" b="1" dirty="0">
+                <a:latin typeface="맑은 고딕 Semilight" panose="020B0502040204020203" pitchFamily="50" charset="-127"/>
+                <a:ea typeface="맑은 고딕 Semilight" panose="020B0502040204020203" pitchFamily="50" charset="-127"/>
+                <a:cs typeface="맑은 고딕 Semilight" panose="020B0502040204020203" pitchFamily="50" charset="-127"/>
+              </a:rPr>
+              <a:t>-분포</a:t>
+            </a:r>
+            <a:r>
+              <a:rPr lang="ko-KR" altLang="ko-KR" sz="1600" dirty="0">
+                <a:latin typeface="맑은 고딕 Semilight" panose="020B0502040204020203" pitchFamily="50" charset="-127"/>
+                <a:ea typeface="맑은 고딕 Semilight" panose="020B0502040204020203" pitchFamily="50" charset="-127"/>
+                <a:cs typeface="맑은 고딕 Semilight" panose="020B0502040204020203" pitchFamily="50" charset="-127"/>
+              </a:rPr>
+              <a:t>를 이용한 신뢰구간 계산 (</a:t>
+            </a:r>
+            <a:r>
+              <a:rPr lang="en-US" altLang="ko-KR" sz="1600" dirty="0">
+                <a:latin typeface="맑은 고딕 Semilight" panose="020B0502040204020203" pitchFamily="50" charset="-127"/>
+                <a:ea typeface="맑은 고딕 Semilight" panose="020B0502040204020203" pitchFamily="50" charset="-127"/>
+                <a:cs typeface="맑은 고딕 Semilight" panose="020B0502040204020203" pitchFamily="50" charset="-127"/>
+              </a:rPr>
+              <a:t>3</a:t>
+            </a:r>
+            <a:r>
+              <a:rPr lang="ko-KR" altLang="ko-KR" sz="1600" dirty="0">
+                <a:latin typeface="맑은 고딕 Semilight" panose="020B0502040204020203" pitchFamily="50" charset="-127"/>
+                <a:ea typeface="맑은 고딕 Semilight" panose="020B0502040204020203" pitchFamily="50" charset="-127"/>
+                <a:cs typeface="맑은 고딕 Semilight" panose="020B0502040204020203" pitchFamily="50" charset="-127"/>
+              </a:rPr>
+              <a:t>0점)</a:t>
+            </a:r>
+            <a:endParaRPr lang="en-US" altLang="ko-KR" sz="1600" dirty="0">
+              <a:latin typeface="맑은 고딕 Semilight" panose="020B0502040204020203" pitchFamily="50" charset="-127"/>
+              <a:ea typeface="맑은 고딕 Semilight" panose="020B0502040204020203" pitchFamily="50" charset="-127"/>
+              <a:cs typeface="맑은 고딕 Semilight" panose="020B0502040204020203" pitchFamily="50" charset="-127"/>
+            </a:endParaRPr>
+          </a:p>
+          <a:p>
+            <a:pPr lvl="0" eaLnBrk="0" fontAlgn="base" hangingPunct="0">
+              <a:lnSpc>
+                <a:spcPct val="150000"/>
+              </a:lnSpc>
+              <a:spcBef>
+                <a:spcPct val="0"/>
+              </a:spcBef>
+              <a:spcAft>
+                <a:spcPct val="0"/>
+              </a:spcAft>
+            </a:pPr>
+            <a:endParaRPr lang="ko-KR" altLang="ko-KR" sz="1600" dirty="0">
+              <a:latin typeface="맑은 고딕 Semilight" panose="020B0502040204020203" pitchFamily="50" charset="-127"/>
+              <a:ea typeface="맑은 고딕 Semilight" panose="020B0502040204020203" pitchFamily="50" charset="-127"/>
+              <a:cs typeface="맑은 고딕 Semilight" panose="020B0502040204020203" pitchFamily="50" charset="-127"/>
+            </a:endParaRPr>
+          </a:p>
+          <a:p>
+            <a:pPr lvl="0" eaLnBrk="0" fontAlgn="base" hangingPunct="0">
+              <a:lnSpc>
+                <a:spcPct val="150000"/>
+              </a:lnSpc>
+              <a:spcBef>
+                <a:spcPct val="0"/>
+              </a:spcBef>
+              <a:spcAft>
+                <a:spcPct val="0"/>
+              </a:spcAft>
+            </a:pPr>
+            <a:r>
+              <a:rPr lang="ko-KR" altLang="ko-KR" sz="1600" dirty="0">
+                <a:latin typeface="맑은 고딕 Semilight" panose="020B0502040204020203" pitchFamily="50" charset="-127"/>
+                <a:ea typeface="맑은 고딕 Semilight" panose="020B0502040204020203" pitchFamily="50" charset="-127"/>
+                <a:cs typeface="맑은 고딕 Semilight" panose="020B0502040204020203" pitchFamily="50" charset="-127"/>
+              </a:rPr>
+              <a:t>'</a:t>
+            </a:r>
+            <a:r>
+              <a:rPr lang="ko-KR" altLang="ko-KR" sz="1600" dirty="0" err="1">
+                <a:latin typeface="맑은 고딕 Semilight" panose="020B0502040204020203" pitchFamily="50" charset="-127"/>
+                <a:ea typeface="맑은 고딕 Semilight" panose="020B0502040204020203" pitchFamily="50" charset="-127"/>
+                <a:cs typeface="맑은 고딕 Semilight" panose="020B0502040204020203" pitchFamily="50" charset="-127"/>
+              </a:rPr>
+              <a:t>Gentoo</a:t>
+            </a:r>
+            <a:r>
+              <a:rPr lang="ko-KR" altLang="ko-KR" sz="1600" dirty="0">
+                <a:latin typeface="맑은 고딕 Semilight" panose="020B0502040204020203" pitchFamily="50" charset="-127"/>
+                <a:ea typeface="맑은 고딕 Semilight" panose="020B0502040204020203" pitchFamily="50" charset="-127"/>
+                <a:cs typeface="맑은 고딕 Semilight" panose="020B0502040204020203" pitchFamily="50" charset="-127"/>
+              </a:rPr>
+              <a:t>' 펭귄 중 무작위로 추출된 15마리의 지느러미 길이 데이터</a:t>
+            </a:r>
+            <a:r>
+              <a:rPr lang="ko-KR" altLang="en-US" sz="1600" dirty="0">
+                <a:latin typeface="맑은 고딕 Semilight" panose="020B0502040204020203" pitchFamily="50" charset="-127"/>
+                <a:ea typeface="맑은 고딕 Semilight" panose="020B0502040204020203" pitchFamily="50" charset="-127"/>
+                <a:cs typeface="맑은 고딕 Semilight" panose="020B0502040204020203" pitchFamily="50" charset="-127"/>
+              </a:rPr>
+              <a:t>를</a:t>
+            </a:r>
+            <a:r>
+              <a:rPr lang="en-US" altLang="ko-KR" sz="1600" dirty="0">
+                <a:latin typeface="맑은 고딕 Semilight" panose="020B0502040204020203" pitchFamily="50" charset="-127"/>
+                <a:ea typeface="맑은 고딕 Semilight" panose="020B0502040204020203" pitchFamily="50" charset="-127"/>
+                <a:cs typeface="맑은 고딕 Semilight" panose="020B0502040204020203" pitchFamily="50" charset="-127"/>
+              </a:rPr>
+              <a:t> </a:t>
+            </a:r>
+            <a:r>
+              <a:rPr lang="en-US" altLang="ko-KR" sz="1600" dirty="0" err="1">
+                <a:latin typeface="맑은 고딕 Semilight" panose="020B0502040204020203" pitchFamily="50" charset="-127"/>
+                <a:ea typeface="맑은 고딕 Semilight" panose="020B0502040204020203" pitchFamily="50" charset="-127"/>
+                <a:cs typeface="맑은 고딕 Semilight" panose="020B0502040204020203" pitchFamily="50" charset="-127"/>
+              </a:rPr>
+              <a:t>random_state</a:t>
+            </a:r>
+            <a:r>
+              <a:rPr lang="en-US" altLang="ko-KR" sz="1600" dirty="0">
+                <a:latin typeface="맑은 고딕 Semilight" panose="020B0502040204020203" pitchFamily="50" charset="-127"/>
+                <a:ea typeface="맑은 고딕 Semilight" panose="020B0502040204020203" pitchFamily="50" charset="-127"/>
+                <a:cs typeface="맑은 고딕 Semilight" panose="020B0502040204020203" pitchFamily="50" charset="-127"/>
+              </a:rPr>
+              <a:t> =11</a:t>
+            </a:r>
+            <a:r>
+              <a:rPr lang="ko-KR" altLang="en-US" sz="1600" dirty="0">
+                <a:latin typeface="맑은 고딕 Semilight" panose="020B0502040204020203" pitchFamily="50" charset="-127"/>
+                <a:ea typeface="맑은 고딕 Semilight" panose="020B0502040204020203" pitchFamily="50" charset="-127"/>
+                <a:cs typeface="맑은 고딕 Semilight" panose="020B0502040204020203" pitchFamily="50" charset="-127"/>
+              </a:rPr>
+              <a:t>로</a:t>
+            </a:r>
+            <a:r>
+              <a:rPr lang="en-US" altLang="ko-KR" sz="1600" dirty="0">
+                <a:latin typeface="맑은 고딕 Semilight" panose="020B0502040204020203" pitchFamily="50" charset="-127"/>
+                <a:ea typeface="맑은 고딕 Semilight" panose="020B0502040204020203" pitchFamily="50" charset="-127"/>
+                <a:cs typeface="맑은 고딕 Semilight" panose="020B0502040204020203" pitchFamily="50" charset="-127"/>
+              </a:rPr>
+              <a:t> </a:t>
+            </a:r>
+            <a:r>
+              <a:rPr lang="ko-KR" altLang="en-US" sz="1600" dirty="0">
+                <a:latin typeface="맑은 고딕 Semilight" panose="020B0502040204020203" pitchFamily="50" charset="-127"/>
+                <a:ea typeface="맑은 고딕 Semilight" panose="020B0502040204020203" pitchFamily="50" charset="-127"/>
+                <a:cs typeface="맑은 고딕 Semilight" panose="020B0502040204020203" pitchFamily="50" charset="-127"/>
+              </a:rPr>
+              <a:t>추출한 </a:t>
+            </a:r>
+            <a:r>
+              <a:rPr lang="ko-KR" altLang="ko-KR" sz="1600" dirty="0">
+                <a:latin typeface="맑은 고딕 Semilight" panose="020B0502040204020203" pitchFamily="50" charset="-127"/>
+                <a:ea typeface="맑은 고딕 Semilight" panose="020B0502040204020203" pitchFamily="50" charset="-127"/>
+                <a:cs typeface="맑은 고딕 Semilight" panose="020B0502040204020203" pitchFamily="50" charset="-127"/>
+              </a:rPr>
+              <a:t>데이터를 바탕으로 다음을 </a:t>
+            </a:r>
+            <a:r>
+              <a:rPr lang="ko-KR" altLang="ko-KR" sz="1600" dirty="0" err="1">
+                <a:latin typeface="맑은 고딕 Semilight" panose="020B0502040204020203" pitchFamily="50" charset="-127"/>
+                <a:ea typeface="맑은 고딕 Semilight" panose="020B0502040204020203" pitchFamily="50" charset="-127"/>
+                <a:cs typeface="맑은 고딕 Semilight" panose="020B0502040204020203" pitchFamily="50" charset="-127"/>
+              </a:rPr>
+              <a:t>계산하시오</a:t>
+            </a:r>
+            <a:r>
+              <a:rPr lang="ko-KR" altLang="ko-KR" sz="1600" dirty="0">
+                <a:latin typeface="맑은 고딕 Semilight" panose="020B0502040204020203" pitchFamily="50" charset="-127"/>
+                <a:ea typeface="맑은 고딕 Semilight" panose="020B0502040204020203" pitchFamily="50" charset="-127"/>
+                <a:cs typeface="맑은 고딕 Semilight" panose="020B0502040204020203" pitchFamily="50" charset="-127"/>
+              </a:rPr>
+              <a:t>. (소수점 둘째 자리까지 표기)</a:t>
+            </a:r>
+          </a:p>
+          <a:p>
+            <a:pPr marL="800100" lvl="1" indent="-342900" eaLnBrk="0" fontAlgn="base" hangingPunct="0">
+              <a:lnSpc>
+                <a:spcPct val="150000"/>
+              </a:lnSpc>
+              <a:spcBef>
+                <a:spcPct val="0"/>
+              </a:spcBef>
+              <a:spcAft>
+                <a:spcPct val="0"/>
+              </a:spcAft>
+              <a:buFont typeface="+mj-lt"/>
+              <a:buAutoNum type="arabicPeriod"/>
+            </a:pPr>
+            <a:r>
+              <a:rPr lang="ko-KR" altLang="ko-KR" sz="1400" dirty="0">
+                <a:latin typeface="맑은 고딕 Semilight" panose="020B0502040204020203" pitchFamily="50" charset="-127"/>
+                <a:ea typeface="맑은 고딕 Semilight" panose="020B0502040204020203" pitchFamily="50" charset="-127"/>
+                <a:cs typeface="맑은 고딕 Semilight" panose="020B0502040204020203" pitchFamily="50" charset="-127"/>
+              </a:rPr>
+              <a:t>9</a:t>
+            </a:r>
+            <a:r>
+              <a:rPr lang="en-US" altLang="ko-KR" sz="1400" dirty="0">
+                <a:latin typeface="맑은 고딕 Semilight" panose="020B0502040204020203" pitchFamily="50" charset="-127"/>
+                <a:ea typeface="맑은 고딕 Semilight" panose="020B0502040204020203" pitchFamily="50" charset="-127"/>
+                <a:cs typeface="맑은 고딕 Semilight" panose="020B0502040204020203" pitchFamily="50" charset="-127"/>
+              </a:rPr>
+              <a:t>5</a:t>
+            </a:r>
+            <a:r>
+              <a:rPr lang="ko-KR" altLang="ko-KR" sz="1400" dirty="0">
+                <a:latin typeface="맑은 고딕 Semilight" panose="020B0502040204020203" pitchFamily="50" charset="-127"/>
+                <a:ea typeface="맑은 고딕 Semilight" panose="020B0502040204020203" pitchFamily="50" charset="-127"/>
+                <a:cs typeface="맑은 고딕 Semilight" panose="020B0502040204020203" pitchFamily="50" charset="-127"/>
+              </a:rPr>
+              <a:t>% 신뢰수준에서의 신뢰구간 (단, </a:t>
+            </a:r>
+            <a:r>
+              <a:rPr lang="ko-KR" altLang="ko-KR" sz="1400" dirty="0" err="1">
+                <a:latin typeface="맑은 고딕 Semilight" panose="020B0502040204020203" pitchFamily="50" charset="-127"/>
+                <a:ea typeface="맑은 고딕 Semilight" panose="020B0502040204020203" pitchFamily="50" charset="-127"/>
+                <a:cs typeface="맑은 고딕 Semilight" panose="020B0502040204020203" pitchFamily="50" charset="-127"/>
+              </a:rPr>
+              <a:t>scipy.stats를</a:t>
+            </a:r>
+            <a:r>
+              <a:rPr lang="ko-KR" altLang="ko-KR" sz="1400" dirty="0">
+                <a:latin typeface="맑은 고딕 Semilight" panose="020B0502040204020203" pitchFamily="50" charset="-127"/>
+                <a:ea typeface="맑은 고딕 Semilight" panose="020B0502040204020203" pitchFamily="50" charset="-127"/>
+                <a:cs typeface="맑은 고딕 Semilight" panose="020B0502040204020203" pitchFamily="50" charset="-127"/>
+              </a:rPr>
+              <a:t> 활용할 것)</a:t>
+            </a:r>
+            <a:endParaRPr lang="en-US" altLang="ko-KR" sz="1400" dirty="0">
+              <a:latin typeface="맑은 고딕 Semilight" panose="020B0502040204020203" pitchFamily="50" charset="-127"/>
+              <a:ea typeface="맑은 고딕 Semilight" panose="020B0502040204020203" pitchFamily="50" charset="-127"/>
+              <a:cs typeface="맑은 고딕 Semilight" panose="020B0502040204020203" pitchFamily="50" charset="-127"/>
+            </a:endParaRPr>
+          </a:p>
+          <a:p>
+            <a:pPr marL="800100" lvl="1" indent="-342900" eaLnBrk="0" fontAlgn="base" hangingPunct="0">
+              <a:lnSpc>
+                <a:spcPct val="150000"/>
+              </a:lnSpc>
+              <a:spcBef>
+                <a:spcPct val="0"/>
+              </a:spcBef>
+              <a:spcAft>
+                <a:spcPct val="0"/>
+              </a:spcAft>
+              <a:buFont typeface="+mj-lt"/>
+              <a:buAutoNum type="arabicPeriod"/>
+            </a:pPr>
+            <a:r>
+              <a:rPr lang="ko-KR" altLang="ko-KR" sz="1400" dirty="0">
+                <a:latin typeface="맑은 고딕 Semilight" panose="020B0502040204020203" pitchFamily="50" charset="-127"/>
+                <a:ea typeface="맑은 고딕 Semilight" panose="020B0502040204020203" pitchFamily="50" charset="-127"/>
+                <a:cs typeface="맑은 고딕 Semilight" panose="020B0502040204020203" pitchFamily="50" charset="-127"/>
+              </a:rPr>
+              <a:t>만약 동일한 데이터로 99% 신뢰구간을 구한다면, 95% 때보다 구간의 너비(</a:t>
+            </a:r>
+            <a:r>
+              <a:rPr lang="ko-KR" altLang="ko-KR" sz="1400" dirty="0" err="1">
+                <a:latin typeface="맑은 고딕 Semilight" panose="020B0502040204020203" pitchFamily="50" charset="-127"/>
+                <a:ea typeface="맑은 고딕 Semilight" panose="020B0502040204020203" pitchFamily="50" charset="-127"/>
+                <a:cs typeface="맑은 고딕 Semilight" panose="020B0502040204020203" pitchFamily="50" charset="-127"/>
+              </a:rPr>
+              <a:t>Width</a:t>
+            </a:r>
+            <a:r>
+              <a:rPr lang="ko-KR" altLang="ko-KR" sz="1400" dirty="0">
+                <a:latin typeface="맑은 고딕 Semilight" panose="020B0502040204020203" pitchFamily="50" charset="-127"/>
+                <a:ea typeface="맑은 고딕 Semilight" panose="020B0502040204020203" pitchFamily="50" charset="-127"/>
+                <a:cs typeface="맑은 고딕 Semilight" panose="020B0502040204020203" pitchFamily="50" charset="-127"/>
+              </a:rPr>
+              <a:t>)는 어떻게 변하겠는가?</a:t>
+            </a:r>
+          </a:p>
+        </p:txBody>
+      </p:sp>
+    </p:spTree>
+    <p:extLst>
+      <p:ext uri="{BB962C8B-B14F-4D97-AF65-F5344CB8AC3E}">
+        <p14:creationId xmlns:p14="http://schemas.microsoft.com/office/powerpoint/2010/main" val="2915621413"/>
+      </p:ext>
+    </p:extLst>
+  </p:cSld>
+  <p:clrMapOvr>
+    <a:masterClrMapping/>
+  </p:clrMapOvr>
+  <mc:AlternateContent xmlns:mc="http://schemas.openxmlformats.org/markup-compatibility/2006" xmlns:p14="http://schemas.microsoft.com/office/powerpoint/2010/main">
+    <mc:Choice Requires="p14">
+      <p:transition spd="med" p14:dur="700">
+        <p:fade/>
+      </p:transition>
+    </mc:Choice>
+    <mc:Fallback xmlns="">
+      <p:transition spd="med">
+        <p:fade/>
+      </p:transition>
+    </mc:Fallback>
+  </mc:AlternateContent>
+</p:sld>
+</file>
+
+<file path=ppt/slides/slide22.xml><?xml version="1.0" encoding="utf-8"?>
+<p:sld xmlns:a="http://schemas.openxmlformats.org/drawingml/2006/main" xmlns:r="http://schemas.openxmlformats.org/officeDocument/2006/relationships" xmlns:p="http://schemas.openxmlformats.org/presentationml/2006/main">
+  <p:cSld>
+    <p:spTree>
+      <p:nvGrpSpPr>
         <p:cNvPr id="1" name=""/>
         <p:cNvGrpSpPr/>
         <p:nvPr/>
@@ -12749,7 +13232,7 @@
             <a:pPr rtl="0"/>
             <a:fld id="{A3F31473-23EB-4724-8B59-FE6D21D89FA4}" type="slidenum">
               <a:rPr lang="en-US" altLang="ko-KR" noProof="0" smtClean="0"/>
-              <a:t>21</a:t>
+              <a:t>22</a:t>
             </a:fld>
             <a:endParaRPr lang="en-US" altLang="ko-KR" noProof="0" dirty="0"/>
           </a:p>
@@ -13480,7 +13963,7 @@
 </p:sld>
 </file>
 
-<file path=ppt/slides/slide22.xml><?xml version="1.0" encoding="utf-8"?>
+<file path=ppt/slides/slide23.xml><?xml version="1.0" encoding="utf-8"?>
 <p:sld xmlns:a="http://schemas.openxmlformats.org/drawingml/2006/main" xmlns:r="http://schemas.openxmlformats.org/officeDocument/2006/relationships" xmlns:p="http://schemas.openxmlformats.org/presentationml/2006/main">
   <p:cSld>
     <p:spTree>
@@ -13527,7 +14010,7 @@
             <a:pPr rtl="0"/>
             <a:fld id="{A3F31473-23EB-4724-8B59-FE6D21D89FA4}" type="slidenum">
               <a:rPr lang="en-US" altLang="ko-KR" noProof="0" smtClean="0"/>
-              <a:t>22</a:t>
+              <a:t>23</a:t>
             </a:fld>
             <a:endParaRPr lang="en-US" altLang="ko-KR" noProof="0" dirty="0"/>
           </a:p>
@@ -14090,6 +14573,1410 @@
         <p:cNvPr id="1" name="">
           <a:extLst>
             <a:ext uri="{FF2B5EF4-FFF2-40B4-BE49-F238E27FC236}">
+              <a16:creationId xmlns:a16="http://schemas.microsoft.com/office/drawing/2014/main" id="{C755A5E5-E5F1-56EF-A565-D0AEBA7FA030}"/>
+            </a:ext>
+          </a:extLst>
+        </p:cNvPr>
+        <p:cNvGrpSpPr/>
+        <p:nvPr/>
+      </p:nvGrpSpPr>
+      <p:grpSpPr>
+        <a:xfrm>
+          <a:off x="0" y="0"/>
+          <a:ext cx="0" cy="0"/>
+          <a:chOff x="0" y="0"/>
+          <a:chExt cx="0" cy="0"/>
+        </a:xfrm>
+      </p:grpSpPr>
+      <p:sp>
+        <p:nvSpPr>
+          <p:cNvPr id="8" name="슬라이드 번호 개체 틀 7">
+            <a:extLst>
+              <a:ext uri="{FF2B5EF4-FFF2-40B4-BE49-F238E27FC236}">
+                <a16:creationId xmlns:a16="http://schemas.microsoft.com/office/drawing/2014/main" id="{DEE190DF-0FB1-D5E9-A68E-4C10939CFBE1}"/>
+              </a:ext>
+            </a:extLst>
+          </p:cNvPr>
+          <p:cNvSpPr>
+            <a:spLocks noGrp="1"/>
+          </p:cNvSpPr>
+          <p:nvPr>
+            <p:ph type="sldNum" sz="quarter" idx="12"/>
+          </p:nvPr>
+        </p:nvSpPr>
+        <p:spPr/>
+        <p:txBody>
+          <a:bodyPr/>
+          <a:lstStyle/>
+          <a:p>
+            <a:pPr rtl="0"/>
+            <a:fld id="{A3F31473-23EB-4724-8B59-FE6D21D89FA4}" type="slidenum">
+              <a:rPr lang="en-US" altLang="ko-KR" noProof="0" smtClean="0"/>
+              <a:t>3</a:t>
+            </a:fld>
+            <a:endParaRPr lang="en-US" altLang="ko-KR" noProof="0" dirty="0"/>
+          </a:p>
+        </p:txBody>
+      </p:sp>
+      <p:sp>
+        <p:nvSpPr>
+          <p:cNvPr id="3" name="TextBox 2">
+            <a:extLst>
+              <a:ext uri="{FF2B5EF4-FFF2-40B4-BE49-F238E27FC236}">
+                <a16:creationId xmlns:a16="http://schemas.microsoft.com/office/drawing/2014/main" id="{B9E3F800-0205-80AA-9527-CED57CA8DCB9}"/>
+              </a:ext>
+            </a:extLst>
+          </p:cNvPr>
+          <p:cNvSpPr txBox="1"/>
+          <p:nvPr/>
+        </p:nvSpPr>
+        <p:spPr>
+          <a:xfrm>
+            <a:off x="117747" y="-27384"/>
+            <a:ext cx="12071077" cy="920508"/>
+          </a:xfrm>
+          <a:prstGeom prst="rect">
+            <a:avLst/>
+          </a:prstGeom>
+          <a:noFill/>
+        </p:spPr>
+        <p:txBody>
+          <a:bodyPr wrap="square">
+            <a:spAutoFit/>
+          </a:bodyPr>
+          <a:lstStyle/>
+          <a:p>
+            <a:pPr algn="ctr" eaLnBrk="0" fontAlgn="base" hangingPunct="0">
+              <a:lnSpc>
+                <a:spcPct val="200000"/>
+              </a:lnSpc>
+              <a:spcBef>
+                <a:spcPct val="0"/>
+              </a:spcBef>
+              <a:spcAft>
+                <a:spcPct val="0"/>
+              </a:spcAft>
+            </a:pPr>
+            <a:r>
+              <a:rPr lang="ko-KR" altLang="en-US" sz="3200" b="1" dirty="0" err="1">
+                <a:latin typeface="맑은 고딕 Semilight" panose="020B0502040204020203" pitchFamily="50" charset="-127"/>
+                <a:ea typeface="맑은 고딕 Semilight" panose="020B0502040204020203" pitchFamily="50" charset="-127"/>
+                <a:cs typeface="맑은 고딕 Semilight" panose="020B0502040204020203" pitchFamily="50" charset="-127"/>
+              </a:rPr>
+              <a:t>중심극한</a:t>
+            </a:r>
+            <a:r>
+              <a:rPr lang="ko-KR" altLang="en-US" sz="3200" b="1" dirty="0">
+                <a:latin typeface="맑은 고딕 Semilight" panose="020B0502040204020203" pitchFamily="50" charset="-127"/>
+                <a:ea typeface="맑은 고딕 Semilight" panose="020B0502040204020203" pitchFamily="50" charset="-127"/>
+                <a:cs typeface="맑은 고딕 Semilight" panose="020B0502040204020203" pitchFamily="50" charset="-127"/>
+              </a:rPr>
+              <a:t> 정리</a:t>
+            </a:r>
+            <a:r>
+              <a:rPr lang="en-US" altLang="ko-KR" sz="3200" b="1" dirty="0">
+                <a:latin typeface="맑은 고딕 Semilight" panose="020B0502040204020203" pitchFamily="50" charset="-127"/>
+                <a:ea typeface="맑은 고딕 Semilight" panose="020B0502040204020203" pitchFamily="50" charset="-127"/>
+                <a:cs typeface="맑은 고딕 Semilight" panose="020B0502040204020203" pitchFamily="50" charset="-127"/>
+              </a:rPr>
+              <a:t>(Central Limit </a:t>
+            </a:r>
+            <a:r>
+              <a:rPr lang="en-US" altLang="ko-KR" sz="3200" b="1" dirty="0" err="1">
+                <a:latin typeface="맑은 고딕 Semilight" panose="020B0502040204020203" pitchFamily="50" charset="-127"/>
+                <a:ea typeface="맑은 고딕 Semilight" panose="020B0502040204020203" pitchFamily="50" charset="-127"/>
+                <a:cs typeface="맑은 고딕 Semilight" panose="020B0502040204020203" pitchFamily="50" charset="-127"/>
+              </a:rPr>
+              <a:t>Theorm</a:t>
+            </a:r>
+            <a:r>
+              <a:rPr lang="en-US" altLang="ko-KR" sz="3200" b="1" dirty="0">
+                <a:latin typeface="맑은 고딕 Semilight" panose="020B0502040204020203" pitchFamily="50" charset="-127"/>
+                <a:ea typeface="맑은 고딕 Semilight" panose="020B0502040204020203" pitchFamily="50" charset="-127"/>
+                <a:cs typeface="맑은 고딕 Semilight" panose="020B0502040204020203" pitchFamily="50" charset="-127"/>
+              </a:rPr>
+              <a:t>)</a:t>
+            </a:r>
+            <a:endParaRPr lang="ko-KR" altLang="ko-KR" sz="3200" b="1" dirty="0">
+              <a:latin typeface="맑은 고딕 Semilight" panose="020B0502040204020203" pitchFamily="50" charset="-127"/>
+              <a:ea typeface="맑은 고딕 Semilight" panose="020B0502040204020203" pitchFamily="50" charset="-127"/>
+              <a:cs typeface="맑은 고딕 Semilight" panose="020B0502040204020203" pitchFamily="50" charset="-127"/>
+            </a:endParaRPr>
+          </a:p>
+        </p:txBody>
+      </p:sp>
+      <p:sp>
+        <p:nvSpPr>
+          <p:cNvPr id="4" name="TextBox 3">
+            <a:extLst>
+              <a:ext uri="{FF2B5EF4-FFF2-40B4-BE49-F238E27FC236}">
+                <a16:creationId xmlns:a16="http://schemas.microsoft.com/office/drawing/2014/main" id="{894A4D0C-AE04-33CD-48FA-AE76EC243CDD}"/>
+              </a:ext>
+            </a:extLst>
+          </p:cNvPr>
+          <p:cNvSpPr txBox="1"/>
+          <p:nvPr/>
+        </p:nvSpPr>
+        <p:spPr>
+          <a:xfrm>
+            <a:off x="346227" y="1018077"/>
+            <a:ext cx="11521280" cy="1285288"/>
+          </a:xfrm>
+          <a:prstGeom prst="rect">
+            <a:avLst/>
+          </a:prstGeom>
+          <a:noFill/>
+        </p:spPr>
+        <p:txBody>
+          <a:bodyPr wrap="square" rtlCol="0">
+            <a:spAutoFit/>
+          </a:bodyPr>
+          <a:lstStyle/>
+          <a:p>
+            <a:pPr marL="285750" indent="-285750">
+              <a:lnSpc>
+                <a:spcPct val="150000"/>
+              </a:lnSpc>
+              <a:buFont typeface="Wingdings" panose="05000000000000000000" pitchFamily="2" charset="2"/>
+              <a:buChar char="§"/>
+            </a:pPr>
+            <a:r>
+              <a:rPr lang="ko-KR" altLang="en-US" dirty="0">
+                <a:latin typeface="맑은 고딕 Semilight" panose="020B0502040204020203" pitchFamily="50" charset="-127"/>
+                <a:ea typeface="맑은 고딕 Semilight" panose="020B0502040204020203" pitchFamily="50" charset="-127"/>
+                <a:cs typeface="맑은 고딕 Semilight" panose="020B0502040204020203" pitchFamily="50" charset="-127"/>
+              </a:rPr>
+              <a:t>확률분포를</a:t>
+            </a:r>
+            <a:r>
+              <a:rPr lang="en-US" altLang="ko-KR" dirty="0">
+                <a:latin typeface="맑은 고딕 Semilight" panose="020B0502040204020203" pitchFamily="50" charset="-127"/>
+                <a:ea typeface="맑은 고딕 Semilight" panose="020B0502040204020203" pitchFamily="50" charset="-127"/>
+                <a:cs typeface="맑은 고딕 Semilight" panose="020B0502040204020203" pitchFamily="50" charset="-127"/>
+              </a:rPr>
+              <a:t> </a:t>
+            </a:r>
+            <a:r>
+              <a:rPr lang="ko-KR" altLang="en-US" dirty="0">
+                <a:latin typeface="맑은 고딕 Semilight" panose="020B0502040204020203" pitchFamily="50" charset="-127"/>
+                <a:ea typeface="맑은 고딕 Semilight" panose="020B0502040204020203" pitchFamily="50" charset="-127"/>
+                <a:cs typeface="맑은 고딕 Semilight" panose="020B0502040204020203" pitchFamily="50" charset="-127"/>
+              </a:rPr>
+              <a:t>모르는 모집단에서 </a:t>
+            </a:r>
+            <a:r>
+              <a:rPr lang="en-US" altLang="ko-KR" dirty="0">
+                <a:latin typeface="맑은 고딕 Semilight" panose="020B0502040204020203" pitchFamily="50" charset="-127"/>
+                <a:ea typeface="맑은 고딕 Semilight" panose="020B0502040204020203" pitchFamily="50" charset="-127"/>
+                <a:cs typeface="맑은 고딕 Semilight" panose="020B0502040204020203" pitchFamily="50" charset="-127"/>
+              </a:rPr>
+              <a:t>N</a:t>
+            </a:r>
+            <a:r>
+              <a:rPr lang="ko-KR" altLang="en-US" dirty="0">
+                <a:latin typeface="맑은 고딕 Semilight" panose="020B0502040204020203" pitchFamily="50" charset="-127"/>
+                <a:ea typeface="맑은 고딕 Semilight" panose="020B0502040204020203" pitchFamily="50" charset="-127"/>
+                <a:cs typeface="맑은 고딕 Semilight" panose="020B0502040204020203" pitchFamily="50" charset="-127"/>
+              </a:rPr>
+              <a:t>개의 표본을 추출한 표본의 평균</a:t>
+            </a:r>
+            <a:r>
+              <a:rPr lang="en-US" altLang="ko-KR" dirty="0">
+                <a:latin typeface="맑은 고딕 Semilight" panose="020B0502040204020203" pitchFamily="50" charset="-127"/>
+                <a:ea typeface="맑은 고딕 Semilight" panose="020B0502040204020203" pitchFamily="50" charset="-127"/>
+                <a:cs typeface="맑은 고딕 Semilight" panose="020B0502040204020203" pitchFamily="50" charset="-127"/>
+              </a:rPr>
+              <a:t>(</a:t>
+            </a:r>
+            <a:r>
+              <a:rPr lang="ko-KR" altLang="en-US" dirty="0">
+                <a:latin typeface="맑은 고딕 Semilight" panose="020B0502040204020203" pitchFamily="50" charset="-127"/>
+                <a:ea typeface="맑은 고딕 Semilight" panose="020B0502040204020203" pitchFamily="50" charset="-127"/>
+                <a:cs typeface="맑은 고딕 Semilight" panose="020B0502040204020203" pitchFamily="50" charset="-127"/>
+              </a:rPr>
+              <a:t>확률변수</a:t>
+            </a:r>
+            <a:r>
+              <a:rPr lang="en-US" altLang="ko-KR" dirty="0">
+                <a:latin typeface="맑은 고딕 Semilight" panose="020B0502040204020203" pitchFamily="50" charset="-127"/>
+                <a:ea typeface="맑은 고딕 Semilight" panose="020B0502040204020203" pitchFamily="50" charset="-127"/>
+                <a:cs typeface="맑은 고딕 Semilight" panose="020B0502040204020203" pitchFamily="50" charset="-127"/>
+              </a:rPr>
+              <a:t>)</a:t>
+            </a:r>
+            <a:r>
+              <a:rPr lang="ko-KR" altLang="en-US" dirty="0">
+                <a:latin typeface="맑은 고딕 Semilight" panose="020B0502040204020203" pitchFamily="50" charset="-127"/>
+                <a:ea typeface="맑은 고딕 Semilight" panose="020B0502040204020203" pitchFamily="50" charset="-127"/>
+                <a:cs typeface="맑은 고딕 Semilight" panose="020B0502040204020203" pitchFamily="50" charset="-127"/>
+              </a:rPr>
+              <a:t>은 모집단의 평균과 분산을 따르는 정규분포에 근접한다는 정리</a:t>
+            </a:r>
+            <a:r>
+              <a:rPr lang="en-US" altLang="ko-KR" dirty="0">
+                <a:latin typeface="맑은 고딕 Semilight" panose="020B0502040204020203" pitchFamily="50" charset="-127"/>
+                <a:ea typeface="맑은 고딕 Semilight" panose="020B0502040204020203" pitchFamily="50" charset="-127"/>
+                <a:cs typeface="맑은 고딕 Semilight" panose="020B0502040204020203" pitchFamily="50" charset="-127"/>
+              </a:rPr>
+              <a:t>(Axiom)</a:t>
+            </a:r>
+          </a:p>
+          <a:p>
+            <a:pPr marL="285750" indent="-285750">
+              <a:lnSpc>
+                <a:spcPct val="150000"/>
+              </a:lnSpc>
+              <a:buFont typeface="Wingdings" panose="05000000000000000000" pitchFamily="2" charset="2"/>
+              <a:buChar char="§"/>
+            </a:pPr>
+            <a:r>
+              <a:rPr lang="ko-KR" altLang="en-US" dirty="0">
+                <a:latin typeface="맑은 고딕 Semilight" panose="020B0502040204020203" pitchFamily="50" charset="-127"/>
+                <a:ea typeface="맑은 고딕 Semilight" panose="020B0502040204020203" pitchFamily="50" charset="-127"/>
+                <a:cs typeface="맑은 고딕 Semilight" panose="020B0502040204020203" pitchFamily="50" charset="-127"/>
+              </a:rPr>
+              <a:t>표본의 평균과 분산을 정규분포로 가정하는 근거로 통계 추정과 가설검정을 가능하게 함</a:t>
+            </a:r>
+            <a:r>
+              <a:rPr lang="en-US" altLang="ko-KR" dirty="0">
+                <a:latin typeface="맑은 고딕 Semilight" panose="020B0502040204020203" pitchFamily="50" charset="-127"/>
+                <a:ea typeface="맑은 고딕 Semilight" panose="020B0502040204020203" pitchFamily="50" charset="-127"/>
+                <a:cs typeface="맑은 고딕 Semilight" panose="020B0502040204020203" pitchFamily="50" charset="-127"/>
+              </a:rPr>
+              <a:t> </a:t>
+            </a:r>
+            <a:r>
+              <a:rPr lang="ko-KR" altLang="en-US" dirty="0">
+                <a:latin typeface="맑은 고딕 Semilight" panose="020B0502040204020203" pitchFamily="50" charset="-127"/>
+                <a:ea typeface="맑은 고딕 Semilight" panose="020B0502040204020203" pitchFamily="50" charset="-127"/>
+                <a:cs typeface="맑은 고딕 Semilight" panose="020B0502040204020203" pitchFamily="50" charset="-127"/>
+              </a:rPr>
+              <a:t> </a:t>
+            </a:r>
+          </a:p>
+        </p:txBody>
+      </p:sp>
+      <p:pic>
+        <p:nvPicPr>
+          <p:cNvPr id="39" name="그림 38">
+            <a:extLst>
+              <a:ext uri="{FF2B5EF4-FFF2-40B4-BE49-F238E27FC236}">
+                <a16:creationId xmlns:a16="http://schemas.microsoft.com/office/drawing/2014/main" id="{9C1B55FC-1A92-C807-D7D6-DC9C68CE5910}"/>
+              </a:ext>
+            </a:extLst>
+          </p:cNvPr>
+          <p:cNvPicPr>
+            <a:picLocks noChangeAspect="1"/>
+          </p:cNvPicPr>
+          <p:nvPr/>
+        </p:nvPicPr>
+        <p:blipFill>
+          <a:blip r:embed="rId3"/>
+          <a:stretch>
+            <a:fillRect/>
+          </a:stretch>
+        </p:blipFill>
+        <p:spPr>
+          <a:xfrm>
+            <a:off x="7957749" y="3484386"/>
+            <a:ext cx="3682528" cy="2646817"/>
+          </a:xfrm>
+          <a:prstGeom prst="rect">
+            <a:avLst/>
+          </a:prstGeom>
+        </p:spPr>
+      </p:pic>
+      <p:pic>
+        <p:nvPicPr>
+          <p:cNvPr id="6" name="그림 5">
+            <a:extLst>
+              <a:ext uri="{FF2B5EF4-FFF2-40B4-BE49-F238E27FC236}">
+                <a16:creationId xmlns:a16="http://schemas.microsoft.com/office/drawing/2014/main" id="{A1AE4D26-81E1-6DB5-8EDC-D70E2641FCEA}"/>
+              </a:ext>
+            </a:extLst>
+          </p:cNvPr>
+          <p:cNvPicPr>
+            <a:picLocks noChangeAspect="1"/>
+          </p:cNvPicPr>
+          <p:nvPr/>
+        </p:nvPicPr>
+        <p:blipFill>
+          <a:blip r:embed="rId4">
+            <a:extLst>
+              <a:ext uri="{BEBA8EAE-BF5A-486C-A8C5-ECC9F3942E4B}">
+                <a14:imgProps xmlns:a14="http://schemas.microsoft.com/office/drawing/2010/main">
+                  <a14:imgLayer r:embed="rId5">
+                    <a14:imgEffect>
+                      <a14:brightnessContrast contrast="-40000"/>
+                    </a14:imgEffect>
+                  </a14:imgLayer>
+                </a14:imgProps>
+              </a:ext>
+            </a:extLst>
+          </a:blip>
+          <a:stretch>
+            <a:fillRect/>
+          </a:stretch>
+        </p:blipFill>
+        <p:spPr>
+          <a:xfrm>
+            <a:off x="7966620" y="2748552"/>
+            <a:ext cx="1764415" cy="761297"/>
+          </a:xfrm>
+          <a:prstGeom prst="rect">
+            <a:avLst/>
+          </a:prstGeom>
+        </p:spPr>
+      </p:pic>
+      <p:pic>
+        <p:nvPicPr>
+          <p:cNvPr id="9" name="그림 8">
+            <a:extLst>
+              <a:ext uri="{FF2B5EF4-FFF2-40B4-BE49-F238E27FC236}">
+                <a16:creationId xmlns:a16="http://schemas.microsoft.com/office/drawing/2014/main" id="{DB8FD5A7-A3D1-A999-CB13-9EA1028EB460}"/>
+              </a:ext>
+            </a:extLst>
+          </p:cNvPr>
+          <p:cNvPicPr>
+            <a:picLocks noChangeAspect="1"/>
+          </p:cNvPicPr>
+          <p:nvPr/>
+        </p:nvPicPr>
+        <p:blipFill>
+          <a:blip r:embed="rId6">
+            <a:extLst>
+              <a:ext uri="{BEBA8EAE-BF5A-486C-A8C5-ECC9F3942E4B}">
+                <a14:imgProps xmlns:a14="http://schemas.microsoft.com/office/drawing/2010/main">
+                  <a14:imgLayer r:embed="rId7">
+                    <a14:imgEffect>
+                      <a14:brightnessContrast contrast="40000"/>
+                    </a14:imgEffect>
+                  </a14:imgLayer>
+                </a14:imgProps>
+              </a:ext>
+            </a:extLst>
+          </a:blip>
+          <a:stretch>
+            <a:fillRect/>
+          </a:stretch>
+        </p:blipFill>
+        <p:spPr>
+          <a:xfrm>
+            <a:off x="9557835" y="2755451"/>
+            <a:ext cx="2082442" cy="738932"/>
+          </a:xfrm>
+          <a:prstGeom prst="rect">
+            <a:avLst/>
+          </a:prstGeom>
+        </p:spPr>
+      </p:pic>
+      <p:pic>
+        <p:nvPicPr>
+          <p:cNvPr id="25" name="그래픽 24" descr="별과 행성이 있는 우주">
+            <a:extLst>
+              <a:ext uri="{FF2B5EF4-FFF2-40B4-BE49-F238E27FC236}">
+                <a16:creationId xmlns:a16="http://schemas.microsoft.com/office/drawing/2014/main" id="{F8DAC86F-90C8-00C9-903A-5C577B799797}"/>
+              </a:ext>
+            </a:extLst>
+          </p:cNvPr>
+          <p:cNvPicPr>
+            <a:picLocks noChangeAspect="1"/>
+          </p:cNvPicPr>
+          <p:nvPr/>
+        </p:nvPicPr>
+        <p:blipFill>
+          <a:blip>
+            <a:extLst>
+              <a:ext uri="{96DAC541-7B7A-43D3-8B79-37D633B846F1}">
+                <asvg:svgBlip xmlns:asvg="http://schemas.microsoft.com/office/drawing/2016/SVG/main" r:embed="rId8"/>
+              </a:ext>
+            </a:extLst>
+          </a:blip>
+          <a:stretch>
+            <a:fillRect/>
+          </a:stretch>
+        </p:blipFill>
+        <p:spPr>
+          <a:xfrm rot="19585776">
+            <a:off x="596334" y="3505009"/>
+            <a:ext cx="3467740" cy="1950604"/>
+          </a:xfrm>
+          <a:prstGeom prst="rect">
+            <a:avLst/>
+          </a:prstGeom>
+        </p:spPr>
+      </p:pic>
+      <p:grpSp>
+        <p:nvGrpSpPr>
+          <p:cNvPr id="5" name="그룹 4">
+            <a:extLst>
+              <a:ext uri="{FF2B5EF4-FFF2-40B4-BE49-F238E27FC236}">
+                <a16:creationId xmlns:a16="http://schemas.microsoft.com/office/drawing/2014/main" id="{5BBDB973-89E8-3462-44BE-8872FFFCD364}"/>
+              </a:ext>
+            </a:extLst>
+          </p:cNvPr>
+          <p:cNvGrpSpPr/>
+          <p:nvPr/>
+        </p:nvGrpSpPr>
+        <p:grpSpPr>
+          <a:xfrm>
+            <a:off x="3774877" y="2563820"/>
+            <a:ext cx="1383431" cy="957728"/>
+            <a:chOff x="3774877" y="2563820"/>
+            <a:chExt cx="1383431" cy="957728"/>
+          </a:xfrm>
+        </p:grpSpPr>
+        <p:pic>
+          <p:nvPicPr>
+            <p:cNvPr id="13" name="그래픽 12" descr="가로 막대형 차트 단색으로 채워진">
+              <a:extLst>
+                <a:ext uri="{FF2B5EF4-FFF2-40B4-BE49-F238E27FC236}">
+                  <a16:creationId xmlns:a16="http://schemas.microsoft.com/office/drawing/2014/main" id="{11BB02EC-B2F6-3AC7-AD51-E85829F895B7}"/>
+                </a:ext>
+              </a:extLst>
+            </p:cNvPr>
+            <p:cNvPicPr>
+              <a:picLocks noChangeAspect="1"/>
+            </p:cNvPicPr>
+            <p:nvPr/>
+          </p:nvPicPr>
+          <p:blipFill>
+            <a:blip>
+              <a:extLst>
+                <a:ext uri="{96DAC541-7B7A-43D3-8B79-37D633B846F1}">
+                  <asvg:svgBlip xmlns:asvg="http://schemas.microsoft.com/office/drawing/2016/SVG/main" r:embed="rId9"/>
+                </a:ext>
+              </a:extLst>
+            </a:blip>
+            <a:stretch>
+              <a:fillRect/>
+            </a:stretch>
+          </p:blipFill>
+          <p:spPr>
+            <a:xfrm>
+              <a:off x="4582244" y="2563820"/>
+              <a:ext cx="576064" cy="576064"/>
+            </a:xfrm>
+            <a:prstGeom prst="rect">
+              <a:avLst/>
+            </a:prstGeom>
+          </p:spPr>
+        </p:pic>
+        <p:cxnSp>
+          <p:nvCxnSpPr>
+            <p:cNvPr id="27" name="연결선: 구부러짐 26">
+              <a:extLst>
+                <a:ext uri="{FF2B5EF4-FFF2-40B4-BE49-F238E27FC236}">
+                  <a16:creationId xmlns:a16="http://schemas.microsoft.com/office/drawing/2014/main" id="{5FEC3A41-376D-269C-DBC3-449053C6537E}"/>
+                </a:ext>
+              </a:extLst>
+            </p:cNvPr>
+            <p:cNvCxnSpPr>
+              <a:stCxn id="25" idx="3"/>
+            </p:cNvCxnSpPr>
+            <p:nvPr/>
+          </p:nvCxnSpPr>
+          <p:spPr>
+            <a:xfrm flipV="1">
+              <a:off x="3774877" y="2996952"/>
+              <a:ext cx="735359" cy="524596"/>
+            </a:xfrm>
+            <a:prstGeom prst="curvedConnector3">
+              <a:avLst/>
+            </a:prstGeom>
+            <a:ln>
+              <a:tailEnd type="triangle"/>
+            </a:ln>
+          </p:spPr>
+          <p:style>
+            <a:lnRef idx="1">
+              <a:schemeClr val="accent1"/>
+            </a:lnRef>
+            <a:fillRef idx="0">
+              <a:schemeClr val="accent1"/>
+            </a:fillRef>
+            <a:effectRef idx="0">
+              <a:schemeClr val="accent1"/>
+            </a:effectRef>
+            <a:fontRef idx="minor">
+              <a:schemeClr val="tx1"/>
+            </a:fontRef>
+          </p:style>
+        </p:cxnSp>
+      </p:grpSp>
+      <p:grpSp>
+        <p:nvGrpSpPr>
+          <p:cNvPr id="11" name="그룹 10">
+            <a:extLst>
+              <a:ext uri="{FF2B5EF4-FFF2-40B4-BE49-F238E27FC236}">
+                <a16:creationId xmlns:a16="http://schemas.microsoft.com/office/drawing/2014/main" id="{716B71A9-BDCD-2979-B706-60837E2E54AA}"/>
+              </a:ext>
+            </a:extLst>
+          </p:cNvPr>
+          <p:cNvGrpSpPr/>
+          <p:nvPr/>
+        </p:nvGrpSpPr>
+        <p:grpSpPr>
+          <a:xfrm>
+            <a:off x="4257564" y="3534435"/>
+            <a:ext cx="1433963" cy="576064"/>
+            <a:chOff x="4257564" y="3534435"/>
+            <a:chExt cx="1433963" cy="576064"/>
+          </a:xfrm>
+        </p:grpSpPr>
+        <p:pic>
+          <p:nvPicPr>
+            <p:cNvPr id="15" name="그래픽 14" descr="가로 막대형 차트 윤곽선">
+              <a:extLst>
+                <a:ext uri="{FF2B5EF4-FFF2-40B4-BE49-F238E27FC236}">
+                  <a16:creationId xmlns:a16="http://schemas.microsoft.com/office/drawing/2014/main" id="{77747C22-1DC2-2FE1-B99E-3CF72F9DA3C0}"/>
+                </a:ext>
+              </a:extLst>
+            </p:cNvPr>
+            <p:cNvPicPr>
+              <a:picLocks noChangeAspect="1"/>
+            </p:cNvPicPr>
+            <p:nvPr/>
+          </p:nvPicPr>
+          <p:blipFill>
+            <a:blip>
+              <a:extLst>
+                <a:ext uri="{96DAC541-7B7A-43D3-8B79-37D633B846F1}">
+                  <asvg:svgBlip xmlns:asvg="http://schemas.microsoft.com/office/drawing/2016/SVG/main" r:embed="rId10"/>
+                </a:ext>
+              </a:extLst>
+            </a:blip>
+            <a:stretch>
+              <a:fillRect/>
+            </a:stretch>
+          </p:blipFill>
+          <p:spPr>
+            <a:xfrm>
+              <a:off x="5115463" y="3534435"/>
+              <a:ext cx="576064" cy="576064"/>
+            </a:xfrm>
+            <a:prstGeom prst="rect">
+              <a:avLst/>
+            </a:prstGeom>
+          </p:spPr>
+        </p:pic>
+        <p:cxnSp>
+          <p:nvCxnSpPr>
+            <p:cNvPr id="28" name="연결선: 구부러짐 27">
+              <a:extLst>
+                <a:ext uri="{FF2B5EF4-FFF2-40B4-BE49-F238E27FC236}">
+                  <a16:creationId xmlns:a16="http://schemas.microsoft.com/office/drawing/2014/main" id="{43B33A39-90D4-045E-B9D8-998FB4E1D9A3}"/>
+                </a:ext>
+              </a:extLst>
+            </p:cNvPr>
+            <p:cNvCxnSpPr>
+              <a:cxnSpLocks/>
+            </p:cNvCxnSpPr>
+            <p:nvPr/>
+          </p:nvCxnSpPr>
+          <p:spPr>
+            <a:xfrm flipV="1">
+              <a:off x="4257564" y="3748427"/>
+              <a:ext cx="794130" cy="231988"/>
+            </a:xfrm>
+            <a:prstGeom prst="curvedConnector3">
+              <a:avLst/>
+            </a:prstGeom>
+            <a:ln>
+              <a:tailEnd type="triangle"/>
+            </a:ln>
+          </p:spPr>
+          <p:style>
+            <a:lnRef idx="1">
+              <a:schemeClr val="accent1"/>
+            </a:lnRef>
+            <a:fillRef idx="0">
+              <a:schemeClr val="accent1"/>
+            </a:fillRef>
+            <a:effectRef idx="0">
+              <a:schemeClr val="accent1"/>
+            </a:effectRef>
+            <a:fontRef idx="minor">
+              <a:schemeClr val="tx1"/>
+            </a:fontRef>
+          </p:style>
+        </p:cxnSp>
+      </p:grpSp>
+      <p:grpSp>
+        <p:nvGrpSpPr>
+          <p:cNvPr id="2" name="그룹 1">
+            <a:extLst>
+              <a:ext uri="{FF2B5EF4-FFF2-40B4-BE49-F238E27FC236}">
+                <a16:creationId xmlns:a16="http://schemas.microsoft.com/office/drawing/2014/main" id="{BD8E72DC-3C16-313F-2ADE-2762532F5447}"/>
+              </a:ext>
+            </a:extLst>
+          </p:cNvPr>
+          <p:cNvGrpSpPr/>
+          <p:nvPr/>
+        </p:nvGrpSpPr>
+        <p:grpSpPr>
+          <a:xfrm>
+            <a:off x="2782044" y="5291520"/>
+            <a:ext cx="1587760" cy="729768"/>
+            <a:chOff x="2782044" y="5291520"/>
+            <a:chExt cx="1587760" cy="729768"/>
+          </a:xfrm>
+        </p:grpSpPr>
+        <p:pic>
+          <p:nvPicPr>
+            <p:cNvPr id="19" name="그래픽 18" descr="막대 그래프 하향 추세 윤곽선">
+              <a:extLst>
+                <a:ext uri="{FF2B5EF4-FFF2-40B4-BE49-F238E27FC236}">
+                  <a16:creationId xmlns:a16="http://schemas.microsoft.com/office/drawing/2014/main" id="{67E95CDF-10F3-0FCC-2F08-FE4EC5D4ABCE}"/>
+                </a:ext>
+              </a:extLst>
+            </p:cNvPr>
+            <p:cNvPicPr>
+              <a:picLocks noChangeAspect="1"/>
+            </p:cNvPicPr>
+            <p:nvPr/>
+          </p:nvPicPr>
+          <p:blipFill>
+            <a:blip>
+              <a:extLst>
+                <a:ext uri="{96DAC541-7B7A-43D3-8B79-37D633B846F1}">
+                  <asvg:svgBlip xmlns:asvg="http://schemas.microsoft.com/office/drawing/2016/SVG/main" r:embed="rId11"/>
+                </a:ext>
+              </a:extLst>
+            </a:blip>
+            <a:stretch>
+              <a:fillRect/>
+            </a:stretch>
+          </p:blipFill>
+          <p:spPr>
+            <a:xfrm>
+              <a:off x="3793740" y="5445224"/>
+              <a:ext cx="576064" cy="576064"/>
+            </a:xfrm>
+            <a:prstGeom prst="rect">
+              <a:avLst/>
+            </a:prstGeom>
+          </p:spPr>
+        </p:pic>
+        <p:cxnSp>
+          <p:nvCxnSpPr>
+            <p:cNvPr id="29" name="연결선: 구부러짐 28">
+              <a:extLst>
+                <a:ext uri="{FF2B5EF4-FFF2-40B4-BE49-F238E27FC236}">
+                  <a16:creationId xmlns:a16="http://schemas.microsoft.com/office/drawing/2014/main" id="{94F1F3E9-AEEC-4F34-20E8-645F0317FF01}"/>
+                </a:ext>
+              </a:extLst>
+            </p:cNvPr>
+            <p:cNvCxnSpPr>
+              <a:cxnSpLocks/>
+            </p:cNvCxnSpPr>
+            <p:nvPr/>
+          </p:nvCxnSpPr>
+          <p:spPr>
+            <a:xfrm>
+              <a:off x="2782044" y="5291520"/>
+              <a:ext cx="792998" cy="441736"/>
+            </a:xfrm>
+            <a:prstGeom prst="curvedConnector3">
+              <a:avLst/>
+            </a:prstGeom>
+            <a:ln>
+              <a:tailEnd type="triangle"/>
+            </a:ln>
+          </p:spPr>
+          <p:style>
+            <a:lnRef idx="1">
+              <a:schemeClr val="accent1"/>
+            </a:lnRef>
+            <a:fillRef idx="0">
+              <a:schemeClr val="accent1"/>
+            </a:fillRef>
+            <a:effectRef idx="0">
+              <a:schemeClr val="accent1"/>
+            </a:effectRef>
+            <a:fontRef idx="minor">
+              <a:schemeClr val="tx1"/>
+            </a:fontRef>
+          </p:style>
+        </p:cxnSp>
+      </p:grpSp>
+      <p:grpSp>
+        <p:nvGrpSpPr>
+          <p:cNvPr id="7" name="그룹 6">
+            <a:extLst>
+              <a:ext uri="{FF2B5EF4-FFF2-40B4-BE49-F238E27FC236}">
+                <a16:creationId xmlns:a16="http://schemas.microsoft.com/office/drawing/2014/main" id="{ED3635DD-513D-68F7-1CBF-B9373581E34B}"/>
+              </a:ext>
+            </a:extLst>
+          </p:cNvPr>
+          <p:cNvGrpSpPr/>
+          <p:nvPr/>
+        </p:nvGrpSpPr>
+        <p:grpSpPr>
+          <a:xfrm>
+            <a:off x="3533944" y="4873083"/>
+            <a:ext cx="1908211" cy="994501"/>
+            <a:chOff x="3533944" y="4873083"/>
+            <a:chExt cx="1908211" cy="994501"/>
+          </a:xfrm>
+        </p:grpSpPr>
+        <p:pic>
+          <p:nvPicPr>
+            <p:cNvPr id="23" name="그래픽 22" descr="막대 그래프 상향 추세 단색으로 채워진">
+              <a:extLst>
+                <a:ext uri="{FF2B5EF4-FFF2-40B4-BE49-F238E27FC236}">
+                  <a16:creationId xmlns:a16="http://schemas.microsoft.com/office/drawing/2014/main" id="{15F12ECC-1244-E705-4E99-BF4FB0811F13}"/>
+                </a:ext>
+              </a:extLst>
+            </p:cNvPr>
+            <p:cNvPicPr>
+              <a:picLocks noChangeAspect="1"/>
+            </p:cNvPicPr>
+            <p:nvPr/>
+          </p:nvPicPr>
+          <p:blipFill>
+            <a:blip>
+              <a:extLst>
+                <a:ext uri="{96DAC541-7B7A-43D3-8B79-37D633B846F1}">
+                  <asvg:svgBlip xmlns:asvg="http://schemas.microsoft.com/office/drawing/2016/SVG/main" r:embed="rId12"/>
+                </a:ext>
+              </a:extLst>
+            </a:blip>
+            <a:stretch>
+              <a:fillRect/>
+            </a:stretch>
+          </p:blipFill>
+          <p:spPr>
+            <a:xfrm>
+              <a:off x="4866091" y="5291520"/>
+              <a:ext cx="576064" cy="576064"/>
+            </a:xfrm>
+            <a:prstGeom prst="rect">
+              <a:avLst/>
+            </a:prstGeom>
+          </p:spPr>
+        </p:pic>
+        <p:cxnSp>
+          <p:nvCxnSpPr>
+            <p:cNvPr id="34" name="연결선: 구부러짐 33">
+              <a:extLst>
+                <a:ext uri="{FF2B5EF4-FFF2-40B4-BE49-F238E27FC236}">
+                  <a16:creationId xmlns:a16="http://schemas.microsoft.com/office/drawing/2014/main" id="{38DC9AA1-C87D-F7FE-810E-52FEE1C0614D}"/>
+                </a:ext>
+              </a:extLst>
+            </p:cNvPr>
+            <p:cNvCxnSpPr>
+              <a:cxnSpLocks/>
+            </p:cNvCxnSpPr>
+            <p:nvPr/>
+          </p:nvCxnSpPr>
+          <p:spPr>
+            <a:xfrm>
+              <a:off x="3533944" y="4873083"/>
+              <a:ext cx="976292" cy="418437"/>
+            </a:xfrm>
+            <a:prstGeom prst="curvedConnector3">
+              <a:avLst/>
+            </a:prstGeom>
+            <a:ln>
+              <a:tailEnd type="triangle"/>
+            </a:ln>
+          </p:spPr>
+          <p:style>
+            <a:lnRef idx="1">
+              <a:schemeClr val="accent1"/>
+            </a:lnRef>
+            <a:fillRef idx="0">
+              <a:schemeClr val="accent1"/>
+            </a:fillRef>
+            <a:effectRef idx="0">
+              <a:schemeClr val="accent1"/>
+            </a:effectRef>
+            <a:fontRef idx="minor">
+              <a:schemeClr val="tx1"/>
+            </a:fontRef>
+          </p:style>
+        </p:cxnSp>
+      </p:grpSp>
+      <p:grpSp>
+        <p:nvGrpSpPr>
+          <p:cNvPr id="10" name="그룹 9">
+            <a:extLst>
+              <a:ext uri="{FF2B5EF4-FFF2-40B4-BE49-F238E27FC236}">
+                <a16:creationId xmlns:a16="http://schemas.microsoft.com/office/drawing/2014/main" id="{AB66437F-FC77-D716-6CF6-12575356F594}"/>
+              </a:ext>
+            </a:extLst>
+          </p:cNvPr>
+          <p:cNvGrpSpPr/>
+          <p:nvPr/>
+        </p:nvGrpSpPr>
+        <p:grpSpPr>
+          <a:xfrm>
+            <a:off x="3916155" y="4480311"/>
+            <a:ext cx="2262060" cy="673608"/>
+            <a:chOff x="3916155" y="4480311"/>
+            <a:chExt cx="2262060" cy="673608"/>
+          </a:xfrm>
+        </p:grpSpPr>
+        <p:pic>
+          <p:nvPicPr>
+            <p:cNvPr id="21" name="그래픽 20" descr="막대 그래프 상향 추세 윤곽선">
+              <a:extLst>
+                <a:ext uri="{FF2B5EF4-FFF2-40B4-BE49-F238E27FC236}">
+                  <a16:creationId xmlns:a16="http://schemas.microsoft.com/office/drawing/2014/main" id="{D5D8F014-18CC-9817-4C9C-EBE5E5F6858A}"/>
+                </a:ext>
+              </a:extLst>
+            </p:cNvPr>
+            <p:cNvPicPr>
+              <a:picLocks noChangeAspect="1"/>
+            </p:cNvPicPr>
+            <p:nvPr/>
+          </p:nvPicPr>
+          <p:blipFill>
+            <a:blip>
+              <a:extLst>
+                <a:ext uri="{96DAC541-7B7A-43D3-8B79-37D633B846F1}">
+                  <asvg:svgBlip xmlns:asvg="http://schemas.microsoft.com/office/drawing/2016/SVG/main" r:embed="rId13"/>
+                </a:ext>
+              </a:extLst>
+            </a:blip>
+            <a:stretch>
+              <a:fillRect/>
+            </a:stretch>
+          </p:blipFill>
+          <p:spPr>
+            <a:xfrm>
+              <a:off x="5602151" y="4577855"/>
+              <a:ext cx="576064" cy="576064"/>
+            </a:xfrm>
+            <a:prstGeom prst="rect">
+              <a:avLst/>
+            </a:prstGeom>
+          </p:spPr>
+        </p:pic>
+        <p:cxnSp>
+          <p:nvCxnSpPr>
+            <p:cNvPr id="36" name="연결선: 구부러짐 35">
+              <a:extLst>
+                <a:ext uri="{FF2B5EF4-FFF2-40B4-BE49-F238E27FC236}">
+                  <a16:creationId xmlns:a16="http://schemas.microsoft.com/office/drawing/2014/main" id="{CC60EED6-C64C-8123-E405-5F0558AE618A}"/>
+                </a:ext>
+              </a:extLst>
+            </p:cNvPr>
+            <p:cNvCxnSpPr>
+              <a:cxnSpLocks/>
+            </p:cNvCxnSpPr>
+            <p:nvPr/>
+          </p:nvCxnSpPr>
+          <p:spPr>
+            <a:xfrm>
+              <a:off x="3916155" y="4480311"/>
+              <a:ext cx="1526000" cy="320822"/>
+            </a:xfrm>
+            <a:prstGeom prst="curvedConnector3">
+              <a:avLst/>
+            </a:prstGeom>
+            <a:ln>
+              <a:tailEnd type="triangle"/>
+            </a:ln>
+          </p:spPr>
+          <p:style>
+            <a:lnRef idx="1">
+              <a:schemeClr val="accent1"/>
+            </a:lnRef>
+            <a:fillRef idx="0">
+              <a:schemeClr val="accent1"/>
+            </a:fillRef>
+            <a:effectRef idx="0">
+              <a:schemeClr val="accent1"/>
+            </a:effectRef>
+            <a:fontRef idx="minor">
+              <a:schemeClr val="tx1"/>
+            </a:fontRef>
+          </p:style>
+        </p:cxnSp>
+      </p:grpSp>
+      <p:sp>
+        <p:nvSpPr>
+          <p:cNvPr id="41" name="화살표: 오른쪽 40">
+            <a:extLst>
+              <a:ext uri="{FF2B5EF4-FFF2-40B4-BE49-F238E27FC236}">
+                <a16:creationId xmlns:a16="http://schemas.microsoft.com/office/drawing/2014/main" id="{076A2818-CD9C-879D-4D68-404BDD248AC2}"/>
+              </a:ext>
+            </a:extLst>
+          </p:cNvPr>
+          <p:cNvSpPr/>
+          <p:nvPr/>
+        </p:nvSpPr>
+        <p:spPr>
+          <a:xfrm>
+            <a:off x="6526460" y="3864421"/>
+            <a:ext cx="688733" cy="713434"/>
+          </a:xfrm>
+          <a:prstGeom prst="rightArrow">
+            <a:avLst/>
+          </a:prstGeom>
+        </p:spPr>
+        <p:style>
+          <a:lnRef idx="2">
+            <a:schemeClr val="accent1">
+              <a:shade val="15000"/>
+            </a:schemeClr>
+          </a:lnRef>
+          <a:fillRef idx="1">
+            <a:schemeClr val="accent1"/>
+          </a:fillRef>
+          <a:effectRef idx="0">
+            <a:schemeClr val="accent1"/>
+          </a:effectRef>
+          <a:fontRef idx="minor">
+            <a:schemeClr val="lt1"/>
+          </a:fontRef>
+        </p:style>
+        <p:txBody>
+          <a:bodyPr rtlCol="0" anchor="ctr"/>
+          <a:lstStyle/>
+          <a:p>
+            <a:pPr algn="ctr"/>
+            <a:endParaRPr lang="ko-KR" altLang="en-US"/>
+          </a:p>
+        </p:txBody>
+      </p:sp>
+    </p:spTree>
+    <p:extLst>
+      <p:ext uri="{BB962C8B-B14F-4D97-AF65-F5344CB8AC3E}">
+        <p14:creationId xmlns:p14="http://schemas.microsoft.com/office/powerpoint/2010/main" val="2383448955"/>
+      </p:ext>
+    </p:extLst>
+  </p:cSld>
+  <p:clrMapOvr>
+    <a:masterClrMapping/>
+  </p:clrMapOvr>
+  <mc:AlternateContent xmlns:mc="http://schemas.openxmlformats.org/markup-compatibility/2006" xmlns:p14="http://schemas.microsoft.com/office/powerpoint/2010/main">
+    <mc:Choice Requires="p14">
+      <p:transition spd="med" p14:dur="700">
+        <p:fade/>
+      </p:transition>
+    </mc:Choice>
+    <mc:Fallback xmlns="">
+      <p:transition spd="med">
+        <p:fade/>
+      </p:transition>
+    </mc:Fallback>
+  </mc:AlternateContent>
+  <p:timing>
+    <p:tnLst>
+      <p:par>
+        <p:cTn id="1" dur="indefinite" restart="never" nodeType="tmRoot">
+          <p:childTnLst>
+            <p:seq concurrent="1" nextAc="seek">
+              <p:cTn id="2" dur="indefinite" nodeType="mainSeq">
+                <p:childTnLst>
+                  <p:par>
+                    <p:cTn id="3" fill="hold">
+                      <p:stCondLst>
+                        <p:cond delay="indefinite"/>
+                      </p:stCondLst>
+                      <p:childTnLst>
+                        <p:par>
+                          <p:cTn id="4" fill="hold">
+                            <p:stCondLst>
+                              <p:cond delay="0"/>
+                            </p:stCondLst>
+                            <p:childTnLst>
+                              <p:par>
+                                <p:cTn id="5" presetID="1" presetClass="entr" presetSubtype="0" fill="hold" nodeType="clickEffect">
+                                  <p:stCondLst>
+                                    <p:cond delay="0"/>
+                                  </p:stCondLst>
+                                  <p:childTnLst>
+                                    <p:set>
+                                      <p:cBhvr>
+                                        <p:cTn id="6" dur="1" fill="hold">
+                                          <p:stCondLst>
+                                            <p:cond delay="0"/>
+                                          </p:stCondLst>
+                                        </p:cTn>
+                                        <p:tgtEl>
+                                          <p:spTgt spid="5"/>
+                                        </p:tgtEl>
+                                        <p:attrNameLst>
+                                          <p:attrName>style.visibility</p:attrName>
+                                        </p:attrNameLst>
+                                      </p:cBhvr>
+                                      <p:to>
+                                        <p:strVal val="visible"/>
+                                      </p:to>
+                                    </p:set>
+                                  </p:childTnLst>
+                                </p:cTn>
+                              </p:par>
+                            </p:childTnLst>
+                          </p:cTn>
+                        </p:par>
+                      </p:childTnLst>
+                    </p:cTn>
+                  </p:par>
+                  <p:par>
+                    <p:cTn id="7" fill="hold">
+                      <p:stCondLst>
+                        <p:cond delay="indefinite"/>
+                      </p:stCondLst>
+                      <p:childTnLst>
+                        <p:par>
+                          <p:cTn id="8" fill="hold">
+                            <p:stCondLst>
+                              <p:cond delay="0"/>
+                            </p:stCondLst>
+                            <p:childTnLst>
+                              <p:par>
+                                <p:cTn id="9" presetID="1" presetClass="entr" presetSubtype="0" fill="hold" nodeType="clickEffect">
+                                  <p:stCondLst>
+                                    <p:cond delay="0"/>
+                                  </p:stCondLst>
+                                  <p:childTnLst>
+                                    <p:set>
+                                      <p:cBhvr>
+                                        <p:cTn id="10" dur="1" fill="hold">
+                                          <p:stCondLst>
+                                            <p:cond delay="0"/>
+                                          </p:stCondLst>
+                                        </p:cTn>
+                                        <p:tgtEl>
+                                          <p:spTgt spid="11"/>
+                                        </p:tgtEl>
+                                        <p:attrNameLst>
+                                          <p:attrName>style.visibility</p:attrName>
+                                        </p:attrNameLst>
+                                      </p:cBhvr>
+                                      <p:to>
+                                        <p:strVal val="visible"/>
+                                      </p:to>
+                                    </p:set>
+                                  </p:childTnLst>
+                                </p:cTn>
+                              </p:par>
+                            </p:childTnLst>
+                          </p:cTn>
+                        </p:par>
+                      </p:childTnLst>
+                    </p:cTn>
+                  </p:par>
+                  <p:par>
+                    <p:cTn id="11" fill="hold">
+                      <p:stCondLst>
+                        <p:cond delay="indefinite"/>
+                      </p:stCondLst>
+                      <p:childTnLst>
+                        <p:par>
+                          <p:cTn id="12" fill="hold">
+                            <p:stCondLst>
+                              <p:cond delay="0"/>
+                            </p:stCondLst>
+                            <p:childTnLst>
+                              <p:par>
+                                <p:cTn id="13" presetID="1" presetClass="entr" presetSubtype="0" fill="hold" nodeType="clickEffect">
+                                  <p:stCondLst>
+                                    <p:cond delay="0"/>
+                                  </p:stCondLst>
+                                  <p:childTnLst>
+                                    <p:set>
+                                      <p:cBhvr>
+                                        <p:cTn id="14" dur="1" fill="hold">
+                                          <p:stCondLst>
+                                            <p:cond delay="0"/>
+                                          </p:stCondLst>
+                                        </p:cTn>
+                                        <p:tgtEl>
+                                          <p:spTgt spid="10"/>
+                                        </p:tgtEl>
+                                        <p:attrNameLst>
+                                          <p:attrName>style.visibility</p:attrName>
+                                        </p:attrNameLst>
+                                      </p:cBhvr>
+                                      <p:to>
+                                        <p:strVal val="visible"/>
+                                      </p:to>
+                                    </p:set>
+                                  </p:childTnLst>
+                                </p:cTn>
+                              </p:par>
+                            </p:childTnLst>
+                          </p:cTn>
+                        </p:par>
+                      </p:childTnLst>
+                    </p:cTn>
+                  </p:par>
+                  <p:par>
+                    <p:cTn id="15" fill="hold">
+                      <p:stCondLst>
+                        <p:cond delay="indefinite"/>
+                      </p:stCondLst>
+                      <p:childTnLst>
+                        <p:par>
+                          <p:cTn id="16" fill="hold">
+                            <p:stCondLst>
+                              <p:cond delay="0"/>
+                            </p:stCondLst>
+                            <p:childTnLst>
+                              <p:par>
+                                <p:cTn id="17" presetID="1" presetClass="entr" presetSubtype="0" fill="hold" nodeType="clickEffect">
+                                  <p:stCondLst>
+                                    <p:cond delay="0"/>
+                                  </p:stCondLst>
+                                  <p:childTnLst>
+                                    <p:set>
+                                      <p:cBhvr>
+                                        <p:cTn id="18" dur="1" fill="hold">
+                                          <p:stCondLst>
+                                            <p:cond delay="0"/>
+                                          </p:stCondLst>
+                                        </p:cTn>
+                                        <p:tgtEl>
+                                          <p:spTgt spid="7"/>
+                                        </p:tgtEl>
+                                        <p:attrNameLst>
+                                          <p:attrName>style.visibility</p:attrName>
+                                        </p:attrNameLst>
+                                      </p:cBhvr>
+                                      <p:to>
+                                        <p:strVal val="visible"/>
+                                      </p:to>
+                                    </p:set>
+                                  </p:childTnLst>
+                                </p:cTn>
+                              </p:par>
+                            </p:childTnLst>
+                          </p:cTn>
+                        </p:par>
+                      </p:childTnLst>
+                    </p:cTn>
+                  </p:par>
+                  <p:par>
+                    <p:cTn id="19" fill="hold">
+                      <p:stCondLst>
+                        <p:cond delay="indefinite"/>
+                      </p:stCondLst>
+                      <p:childTnLst>
+                        <p:par>
+                          <p:cTn id="20" fill="hold">
+                            <p:stCondLst>
+                              <p:cond delay="0"/>
+                            </p:stCondLst>
+                            <p:childTnLst>
+                              <p:par>
+                                <p:cTn id="21" presetID="1" presetClass="entr" presetSubtype="0" fill="hold" nodeType="clickEffect">
+                                  <p:stCondLst>
+                                    <p:cond delay="0"/>
+                                  </p:stCondLst>
+                                  <p:childTnLst>
+                                    <p:set>
+                                      <p:cBhvr>
+                                        <p:cTn id="22" dur="1" fill="hold">
+                                          <p:stCondLst>
+                                            <p:cond delay="0"/>
+                                          </p:stCondLst>
+                                        </p:cTn>
+                                        <p:tgtEl>
+                                          <p:spTgt spid="2"/>
+                                        </p:tgtEl>
+                                        <p:attrNameLst>
+                                          <p:attrName>style.visibility</p:attrName>
+                                        </p:attrNameLst>
+                                      </p:cBhvr>
+                                      <p:to>
+                                        <p:strVal val="visible"/>
+                                      </p:to>
+                                    </p:set>
+                                  </p:childTnLst>
+                                </p:cTn>
+                              </p:par>
+                            </p:childTnLst>
+                          </p:cTn>
+                        </p:par>
+                      </p:childTnLst>
+                    </p:cTn>
+                  </p:par>
+                  <p:par>
+                    <p:cTn id="23" fill="hold">
+                      <p:stCondLst>
+                        <p:cond delay="indefinite"/>
+                      </p:stCondLst>
+                      <p:childTnLst>
+                        <p:par>
+                          <p:cTn id="24" fill="hold">
+                            <p:stCondLst>
+                              <p:cond delay="0"/>
+                            </p:stCondLst>
+                            <p:childTnLst>
+                              <p:par>
+                                <p:cTn id="25" presetID="1" presetClass="entr" presetSubtype="0" fill="hold" grpId="0" nodeType="clickEffect">
+                                  <p:stCondLst>
+                                    <p:cond delay="0"/>
+                                  </p:stCondLst>
+                                  <p:childTnLst>
+                                    <p:set>
+                                      <p:cBhvr>
+                                        <p:cTn id="26" dur="1" fill="hold">
+                                          <p:stCondLst>
+                                            <p:cond delay="0"/>
+                                          </p:stCondLst>
+                                        </p:cTn>
+                                        <p:tgtEl>
+                                          <p:spTgt spid="41"/>
+                                        </p:tgtEl>
+                                        <p:attrNameLst>
+                                          <p:attrName>style.visibility</p:attrName>
+                                        </p:attrNameLst>
+                                      </p:cBhvr>
+                                      <p:to>
+                                        <p:strVal val="visible"/>
+                                      </p:to>
+                                    </p:set>
+                                  </p:childTnLst>
+                                </p:cTn>
+                              </p:par>
+                              <p:par>
+                                <p:cTn id="27" presetID="1" presetClass="entr" presetSubtype="0" fill="hold" nodeType="withEffect">
+                                  <p:stCondLst>
+                                    <p:cond delay="0"/>
+                                  </p:stCondLst>
+                                  <p:childTnLst>
+                                    <p:set>
+                                      <p:cBhvr>
+                                        <p:cTn id="28" dur="1" fill="hold">
+                                          <p:stCondLst>
+                                            <p:cond delay="0"/>
+                                          </p:stCondLst>
+                                        </p:cTn>
+                                        <p:tgtEl>
+                                          <p:spTgt spid="6"/>
+                                        </p:tgtEl>
+                                        <p:attrNameLst>
+                                          <p:attrName>style.visibility</p:attrName>
+                                        </p:attrNameLst>
+                                      </p:cBhvr>
+                                      <p:to>
+                                        <p:strVal val="visible"/>
+                                      </p:to>
+                                    </p:set>
+                                  </p:childTnLst>
+                                </p:cTn>
+                              </p:par>
+                              <p:par>
+                                <p:cTn id="29" presetID="1" presetClass="entr" presetSubtype="0" fill="hold" nodeType="withEffect">
+                                  <p:stCondLst>
+                                    <p:cond delay="0"/>
+                                  </p:stCondLst>
+                                  <p:childTnLst>
+                                    <p:set>
+                                      <p:cBhvr>
+                                        <p:cTn id="30" dur="1" fill="hold">
+                                          <p:stCondLst>
+                                            <p:cond delay="0"/>
+                                          </p:stCondLst>
+                                        </p:cTn>
+                                        <p:tgtEl>
+                                          <p:spTgt spid="39"/>
+                                        </p:tgtEl>
+                                        <p:attrNameLst>
+                                          <p:attrName>style.visibility</p:attrName>
+                                        </p:attrNameLst>
+                                      </p:cBhvr>
+                                      <p:to>
+                                        <p:strVal val="visible"/>
+                                      </p:to>
+                                    </p:set>
+                                  </p:childTnLst>
+                                </p:cTn>
+                              </p:par>
+                            </p:childTnLst>
+                          </p:cTn>
+                        </p:par>
+                      </p:childTnLst>
+                    </p:cTn>
+                  </p:par>
+                  <p:par>
+                    <p:cTn id="31" fill="hold">
+                      <p:stCondLst>
+                        <p:cond delay="indefinite"/>
+                      </p:stCondLst>
+                      <p:childTnLst>
+                        <p:par>
+                          <p:cTn id="32" fill="hold">
+                            <p:stCondLst>
+                              <p:cond delay="0"/>
+                            </p:stCondLst>
+                            <p:childTnLst>
+                              <p:par>
+                                <p:cTn id="33" presetID="1" presetClass="entr" presetSubtype="0" fill="hold" nodeType="clickEffect">
+                                  <p:stCondLst>
+                                    <p:cond delay="0"/>
+                                  </p:stCondLst>
+                                  <p:childTnLst>
+                                    <p:set>
+                                      <p:cBhvr>
+                                        <p:cTn id="34" dur="1" fill="hold">
+                                          <p:stCondLst>
+                                            <p:cond delay="0"/>
+                                          </p:stCondLst>
+                                        </p:cTn>
+                                        <p:tgtEl>
+                                          <p:spTgt spid="9"/>
+                                        </p:tgtEl>
+                                        <p:attrNameLst>
+                                          <p:attrName>style.visibility</p:attrName>
+                                        </p:attrNameLst>
+                                      </p:cBhvr>
+                                      <p:to>
+                                        <p:strVal val="visible"/>
+                                      </p:to>
+                                    </p:set>
+                                  </p:childTnLst>
+                                </p:cTn>
+                              </p:par>
+                            </p:childTnLst>
+                          </p:cTn>
+                        </p:par>
+                      </p:childTnLst>
+                    </p:cTn>
+                  </p:par>
+                </p:childTnLst>
+              </p:cTn>
+              <p:prevCondLst>
+                <p:cond evt="onPrev" delay="0">
+                  <p:tgtEl>
+                    <p:sldTgt/>
+                  </p:tgtEl>
+                </p:cond>
+              </p:prevCondLst>
+              <p:nextCondLst>
+                <p:cond evt="onNext" delay="0">
+                  <p:tgtEl>
+                    <p:sldTgt/>
+                  </p:tgtEl>
+                </p:cond>
+              </p:nextCondLst>
+            </p:seq>
+          </p:childTnLst>
+        </p:cTn>
+      </p:par>
+    </p:tnLst>
+    <p:bldLst>
+      <p:bldP spid="41" grpId="0" animBg="1"/>
+    </p:bldLst>
+  </p:timing>
+</p:sld>
+</file>
+
+<file path=ppt/slides/slide4.xml><?xml version="1.0" encoding="utf-8"?>
+<p:sld xmlns:a="http://schemas.openxmlformats.org/drawingml/2006/main" xmlns:r="http://schemas.openxmlformats.org/officeDocument/2006/relationships" xmlns:p="http://schemas.openxmlformats.org/presentationml/2006/main">
+  <p:cSld>
+    <p:spTree>
+      <p:nvGrpSpPr>
+        <p:cNvPr id="1" name="">
+          <a:extLst>
+            <a:ext uri="{FF2B5EF4-FFF2-40B4-BE49-F238E27FC236}">
               <a16:creationId xmlns:a16="http://schemas.microsoft.com/office/drawing/2014/main" id="{C6226249-DF82-F305-751E-127F3A71C29B}"/>
             </a:ext>
           </a:extLst>
@@ -14183,7 +16070,7 @@
             <a:pPr rtl="0"/>
             <a:fld id="{A3F31473-23EB-4724-8B59-FE6D21D89FA4}" type="slidenum">
               <a:rPr lang="en-US" altLang="ko-KR" noProof="0" smtClean="0"/>
-              <a:t>3</a:t>
+              <a:t>4</a:t>
             </a:fld>
             <a:endParaRPr lang="en-US" altLang="ko-KR" noProof="0" dirty="0"/>
           </a:p>
@@ -14425,7 +16312,7 @@
 </p:sld>
 </file>
 
-<file path=ppt/slides/slide4.xml><?xml version="1.0" encoding="utf-8"?>
+<file path=ppt/slides/slide5.xml><?xml version="1.0" encoding="utf-8"?>
 <p:sld xmlns:a="http://schemas.openxmlformats.org/drawingml/2006/main" xmlns:r="http://schemas.openxmlformats.org/officeDocument/2006/relationships" xmlns:p="http://schemas.openxmlformats.org/presentationml/2006/main">
   <p:cSld>
     <p:spTree>
@@ -14472,7 +16359,7 @@
             <a:pPr rtl="0"/>
             <a:fld id="{A3F31473-23EB-4724-8B59-FE6D21D89FA4}" type="slidenum">
               <a:rPr lang="en-US" altLang="ko-KR" noProof="0" smtClean="0"/>
-              <a:t>4</a:t>
+              <a:t>5</a:t>
             </a:fld>
             <a:endParaRPr lang="en-US" altLang="ko-KR" noProof="0" dirty="0"/>
           </a:p>
@@ -14858,10 +16745,10 @@
           <p:nvPr/>
         </p:nvPicPr>
         <p:blipFill>
-          <a:blip r:embed="rId7">
+          <a:blip>
             <a:extLst>
               <a:ext uri="{96DAC541-7B7A-43D3-8B79-37D633B846F1}">
-                <asvg:svgBlip xmlns:asvg="http://schemas.microsoft.com/office/drawing/2016/SVG/main" r:embed="rId8"/>
+                <asvg:svgBlip xmlns:asvg="http://schemas.microsoft.com/office/drawing/2016/SVG/main" r:embed="rId7"/>
               </a:ext>
             </a:extLst>
           </a:blip>
@@ -14904,7 +16791,7 @@
 </p:sld>
 </file>
 
-<file path=ppt/slides/slide5.xml><?xml version="1.0" encoding="utf-8"?>
+<file path=ppt/slides/slide6.xml><?xml version="1.0" encoding="utf-8"?>
 <p:sld xmlns:a="http://schemas.openxmlformats.org/drawingml/2006/main" xmlns:r="http://schemas.openxmlformats.org/officeDocument/2006/relationships" xmlns:p="http://schemas.openxmlformats.org/presentationml/2006/main">
   <p:cSld>
     <p:spTree>
@@ -14981,7 +16868,7 @@
             <a:pPr rtl="0"/>
             <a:fld id="{A3F31473-23EB-4724-8B59-FE6D21D89FA4}" type="slidenum">
               <a:rPr lang="en-US" altLang="ko-KR" noProof="0" smtClean="0"/>
-              <a:t>5</a:t>
+              <a:t>6</a:t>
             </a:fld>
             <a:endParaRPr lang="en-US" altLang="ko-KR" noProof="0" dirty="0"/>
           </a:p>
@@ -15756,7 +17643,7 @@
 </p:sld>
 </file>
 
-<file path=ppt/slides/slide6.xml><?xml version="1.0" encoding="utf-8"?>
+<file path=ppt/slides/slide7.xml><?xml version="1.0" encoding="utf-8"?>
 <p:sld xmlns:a="http://schemas.openxmlformats.org/drawingml/2006/main" xmlns:r="http://schemas.openxmlformats.org/officeDocument/2006/relationships" xmlns:p="http://schemas.openxmlformats.org/presentationml/2006/main">
   <p:cSld>
     <p:spTree>
@@ -15859,7 +17746,7 @@
             <a:pPr rtl="0"/>
             <a:fld id="{A3F31473-23EB-4724-8B59-FE6D21D89FA4}" type="slidenum">
               <a:rPr lang="en-US" altLang="ko-KR" noProof="0" smtClean="0"/>
-              <a:t>6</a:t>
+              <a:t>7</a:t>
             </a:fld>
             <a:endParaRPr lang="en-US" altLang="ko-KR" noProof="0" dirty="0"/>
           </a:p>
@@ -16124,7 +18011,7 @@
 </p:sld>
 </file>
 
-<file path=ppt/slides/slide7.xml><?xml version="1.0" encoding="utf-8"?>
+<file path=ppt/slides/slide8.xml><?xml version="1.0" encoding="utf-8"?>
 <p:sld xmlns:a="http://schemas.openxmlformats.org/drawingml/2006/main" xmlns:r="http://schemas.openxmlformats.org/officeDocument/2006/relationships" xmlns:p="http://schemas.openxmlformats.org/presentationml/2006/main">
   <p:cSld>
     <p:spTree>
@@ -16159,7 +18046,7 @@
             <a:pPr rtl="0"/>
             <a:fld id="{A3F31473-23EB-4724-8B59-FE6D21D89FA4}" type="slidenum">
               <a:rPr lang="en-US" altLang="ko-KR" noProof="0" smtClean="0"/>
-              <a:t>7</a:t>
+              <a:t>8</a:t>
             </a:fld>
             <a:endParaRPr lang="en-US" altLang="ko-KR" noProof="0" dirty="0"/>
           </a:p>
@@ -16214,7 +18101,7 @@
 </p:sld>
 </file>
 
-<file path=ppt/slides/slide8.xml><?xml version="1.0" encoding="utf-8"?>
+<file path=ppt/slides/slide9.xml><?xml version="1.0" encoding="utf-8"?>
 <p:sld xmlns:a="http://schemas.openxmlformats.org/drawingml/2006/main" xmlns:r="http://schemas.openxmlformats.org/officeDocument/2006/relationships" xmlns:p="http://schemas.openxmlformats.org/presentationml/2006/main">
   <p:cSld>
     <p:spTree>
@@ -16249,7 +18136,7 @@
             <a:pPr rtl="0"/>
             <a:fld id="{A3F31473-23EB-4724-8B59-FE6D21D89FA4}" type="slidenum">
               <a:rPr lang="en-US" altLang="ko-KR" noProof="0" smtClean="0"/>
-              <a:t>8</a:t>
+              <a:t>9</a:t>
             </a:fld>
             <a:endParaRPr lang="en-US" altLang="ko-KR" noProof="0" dirty="0"/>
           </a:p>
@@ -16489,344 +18376,6 @@
       <p:bldP spid="4" grpId="0" animBg="1"/>
     </p:bldLst>
   </p:timing>
-</p:sld>
-</file>
-
-<file path=ppt/slides/slide9.xml><?xml version="1.0" encoding="utf-8"?>
-<p:sld xmlns:a="http://schemas.openxmlformats.org/drawingml/2006/main" xmlns:r="http://schemas.openxmlformats.org/officeDocument/2006/relationships" xmlns:p="http://schemas.openxmlformats.org/presentationml/2006/main">
-  <p:cSld>
-    <p:spTree>
-      <p:nvGrpSpPr>
-        <p:cNvPr id="1" name=""/>
-        <p:cNvGrpSpPr/>
-        <p:nvPr/>
-      </p:nvGrpSpPr>
-      <p:grpSpPr>
-        <a:xfrm>
-          <a:off x="0" y="0"/>
-          <a:ext cx="0" cy="0"/>
-          <a:chOff x="0" y="0"/>
-          <a:chExt cx="0" cy="0"/>
-        </a:xfrm>
-      </p:grpSpPr>
-      <p:sp>
-        <p:nvSpPr>
-          <p:cNvPr id="8" name="슬라이드 번호 개체 틀 7"/>
-          <p:cNvSpPr>
-            <a:spLocks noGrp="1"/>
-          </p:cNvSpPr>
-          <p:nvPr>
-            <p:ph type="sldNum" sz="quarter" idx="12"/>
-          </p:nvPr>
-        </p:nvSpPr>
-        <p:spPr/>
-        <p:txBody>
-          <a:bodyPr/>
-          <a:lstStyle/>
-          <a:p>
-            <a:pPr rtl="0"/>
-            <a:fld id="{A3F31473-23EB-4724-8B59-FE6D21D89FA4}" type="slidenum">
-              <a:rPr lang="en-US" altLang="ko-KR" noProof="0" smtClean="0"/>
-              <a:t>9</a:t>
-            </a:fld>
-            <a:endParaRPr lang="en-US" altLang="ko-KR" noProof="0" dirty="0"/>
-          </a:p>
-        </p:txBody>
-      </p:sp>
-      <p:pic>
-        <p:nvPicPr>
-          <p:cNvPr id="4" name="그림 3"/>
-          <p:cNvPicPr>
-            <a:picLocks noChangeAspect="1"/>
-          </p:cNvPicPr>
-          <p:nvPr/>
-        </p:nvPicPr>
-        <p:blipFill>
-          <a:blip r:embed="rId3"/>
-          <a:stretch>
-            <a:fillRect/>
-          </a:stretch>
-        </p:blipFill>
-        <p:spPr>
-          <a:xfrm>
-            <a:off x="943780" y="1601264"/>
-            <a:ext cx="7559835" cy="1258912"/>
-          </a:xfrm>
-          <a:prstGeom prst="rect">
-            <a:avLst/>
-          </a:prstGeom>
-        </p:spPr>
-      </p:pic>
-      <p:pic>
-        <p:nvPicPr>
-          <p:cNvPr id="3" name="그림 2"/>
-          <p:cNvPicPr>
-            <a:picLocks noChangeAspect="1"/>
-          </p:cNvPicPr>
-          <p:nvPr/>
-        </p:nvPicPr>
-        <p:blipFill>
-          <a:blip r:embed="rId4"/>
-          <a:stretch>
-            <a:fillRect/>
-          </a:stretch>
-        </p:blipFill>
-        <p:spPr>
-          <a:xfrm>
-            <a:off x="4654253" y="4293096"/>
-            <a:ext cx="2664296" cy="867445"/>
-          </a:xfrm>
-          <a:prstGeom prst="rect">
-            <a:avLst/>
-          </a:prstGeom>
-        </p:spPr>
-      </p:pic>
-      <mc:AlternateContent xmlns:mc="http://schemas.openxmlformats.org/markup-compatibility/2006">
-        <mc:Choice xmlns:a14="http://schemas.microsoft.com/office/drawing/2010/main" Requires="a14">
-          <p:sp>
-            <p:nvSpPr>
-              <p:cNvPr id="5" name="TextBox 4"/>
-              <p:cNvSpPr txBox="1"/>
-              <p:nvPr/>
-            </p:nvSpPr>
-            <p:spPr>
-              <a:xfrm>
-                <a:off x="909836" y="3573016"/>
-                <a:ext cx="11161240" cy="400110"/>
-              </a:xfrm>
-              <a:prstGeom prst="rect">
-                <a:avLst/>
-              </a:prstGeom>
-              <a:noFill/>
-            </p:spPr>
-            <p:txBody>
-              <a:bodyPr wrap="square" rtlCol="0">
-                <a:spAutoFit/>
-              </a:bodyPr>
-              <a:lstStyle/>
-              <a:p>
-                <a:pPr marL="342900" indent="-342900">
-                  <a:buFont typeface="Wingdings" panose="05000000000000000000" pitchFamily="2" charset="2"/>
-                  <a:buChar char="v"/>
-                </a:pPr>
-                <a:r>
-                  <a:rPr lang="ko-KR" altLang="en-US" sz="2000" dirty="0">
-                    <a:latin typeface="맑은 고딕 Semilight" panose="020B0502040204020203" pitchFamily="50" charset="-127"/>
-                    <a:ea typeface="맑은 고딕 Semilight" panose="020B0502040204020203" pitchFamily="50" charset="-127"/>
-                    <a:cs typeface="맑은 고딕 Semilight" panose="020B0502040204020203" pitchFamily="50" charset="-127"/>
-                  </a:rPr>
-                  <a:t>모집단 평균에 대한 </a:t>
-                </a:r>
-                <a:r>
-                  <a:rPr lang="ko-KR" altLang="en-US" sz="2000" dirty="0" err="1">
-                    <a:latin typeface="맑은 고딕 Semilight" panose="020B0502040204020203" pitchFamily="50" charset="-127"/>
-                    <a:ea typeface="맑은 고딕 Semilight" panose="020B0502040204020203" pitchFamily="50" charset="-127"/>
-                    <a:cs typeface="맑은 고딕 Semilight" panose="020B0502040204020203" pitchFamily="50" charset="-127"/>
-                  </a:rPr>
-                  <a:t>불편추정량</a:t>
-                </a:r>
-                <a:r>
-                  <a:rPr lang="en-US" altLang="ko-KR" sz="2000" dirty="0">
-                    <a:latin typeface="맑은 고딕 Semilight" panose="020B0502040204020203" pitchFamily="50" charset="-127"/>
-                    <a:ea typeface="맑은 고딕 Semilight" panose="020B0502040204020203" pitchFamily="50" charset="-127"/>
-                    <a:cs typeface="맑은 고딕 Semilight" panose="020B0502040204020203" pitchFamily="50" charset="-127"/>
-                  </a:rPr>
-                  <a:t>(Unbiased Estimator of</a:t>
-                </a:r>
-                <a:r>
-                  <a:rPr lang="ko-KR" altLang="en-US" sz="2000" dirty="0">
-                    <a:latin typeface="맑은 고딕 Semilight" panose="020B0502040204020203" pitchFamily="50" charset="-127"/>
-                    <a:ea typeface="맑은 고딕 Semilight" panose="020B0502040204020203" pitchFamily="50" charset="-127"/>
-                    <a:cs typeface="맑은 고딕 Semilight" panose="020B0502040204020203" pitchFamily="50" charset="-127"/>
-                  </a:rPr>
-                  <a:t> </a:t>
-                </a:r>
-                <a14:m>
-                  <m:oMath xmlns:m="http://schemas.openxmlformats.org/officeDocument/2006/math">
-                    <m:r>
-                      <a:rPr lang="ko-KR" altLang="en-US" sz="2000" i="1" smtClean="0">
-                        <a:latin typeface="Cambria Math" panose="02040503050406030204" pitchFamily="18" charset="0"/>
-                      </a:rPr>
-                      <m:t>𝜃</m:t>
-                    </m:r>
-                  </m:oMath>
-                </a14:m>
-                <a:r>
-                  <a:rPr lang="en-US" altLang="ko-KR" sz="2000" dirty="0">
-                    <a:latin typeface="맑은 고딕 Semilight" panose="020B0502040204020203" pitchFamily="50" charset="-127"/>
-                    <a:ea typeface="맑은 고딕 Semilight" panose="020B0502040204020203" pitchFamily="50" charset="-127"/>
-                    <a:cs typeface="맑은 고딕 Semilight" panose="020B0502040204020203" pitchFamily="50" charset="-127"/>
-                  </a:rPr>
-                  <a:t>)</a:t>
-                </a:r>
-                <a:r>
-                  <a:rPr lang="ko-KR" altLang="en-US" sz="2000" dirty="0">
-                    <a:latin typeface="맑은 고딕 Semilight" panose="020B0502040204020203" pitchFamily="50" charset="-127"/>
-                    <a:ea typeface="맑은 고딕 Semilight" panose="020B0502040204020203" pitchFamily="50" charset="-127"/>
-                    <a:cs typeface="맑은 고딕 Semilight" panose="020B0502040204020203" pitchFamily="50" charset="-127"/>
-                  </a:rPr>
-                  <a:t>은 </a:t>
-                </a:r>
-                <a:r>
-                  <a:rPr lang="ko-KR" altLang="en-US" sz="2000" dirty="0" err="1">
-                    <a:latin typeface="맑은 고딕 Semilight" panose="020B0502040204020203" pitchFamily="50" charset="-127"/>
-                    <a:ea typeface="맑은 고딕 Semilight" panose="020B0502040204020203" pitchFamily="50" charset="-127"/>
-                    <a:cs typeface="맑은 고딕 Semilight" panose="020B0502040204020203" pitchFamily="50" charset="-127"/>
-                  </a:rPr>
-                  <a:t>표본평균</a:t>
-                </a:r>
-                <a:endParaRPr lang="ko-KR" altLang="en-US" sz="2000" dirty="0">
-                  <a:latin typeface="맑은 고딕 Semilight" panose="020B0502040204020203" pitchFamily="50" charset="-127"/>
-                  <a:ea typeface="맑은 고딕 Semilight" panose="020B0502040204020203" pitchFamily="50" charset="-127"/>
-                  <a:cs typeface="맑은 고딕 Semilight" panose="020B0502040204020203" pitchFamily="50" charset="-127"/>
-                </a:endParaRPr>
-              </a:p>
-            </p:txBody>
-          </p:sp>
-        </mc:Choice>
-        <mc:Fallback>
-          <p:sp>
-            <p:nvSpPr>
-              <p:cNvPr id="5" name="TextBox 4"/>
-              <p:cNvSpPr txBox="1">
-                <a:spLocks noRot="1" noChangeAspect="1" noMove="1" noResize="1" noEditPoints="1" noAdjustHandles="1" noChangeArrowheads="1" noChangeShapeType="1" noTextEdit="1"/>
-              </p:cNvSpPr>
-              <p:nvPr/>
-            </p:nvSpPr>
-            <p:spPr>
-              <a:xfrm>
-                <a:off x="909836" y="3573016"/>
-                <a:ext cx="11161240" cy="400110"/>
-              </a:xfrm>
-              <a:prstGeom prst="rect">
-                <a:avLst/>
-              </a:prstGeom>
-              <a:blipFill>
-                <a:blip r:embed="rId5"/>
-                <a:stretch>
-                  <a:fillRect l="-492" t="-7576" b="-25758"/>
-                </a:stretch>
-              </a:blipFill>
-            </p:spPr>
-            <p:txBody>
-              <a:bodyPr/>
-              <a:lstStyle/>
-              <a:p>
-                <a:r>
-                  <a:rPr lang="ko-KR" altLang="en-US">
-                    <a:noFill/>
-                  </a:rPr>
-                  <a:t> </a:t>
-                </a:r>
-              </a:p>
-            </p:txBody>
-          </p:sp>
-        </mc:Fallback>
-      </mc:AlternateContent>
-      <p:sp>
-        <p:nvSpPr>
-          <p:cNvPr id="2" name="TextBox 1">
-            <a:extLst>
-              <a:ext uri="{FF2B5EF4-FFF2-40B4-BE49-F238E27FC236}">
-                <a16:creationId xmlns:a16="http://schemas.microsoft.com/office/drawing/2014/main" id="{6B261840-E42D-89D5-94C4-189F0954CD4F}"/>
-              </a:ext>
-            </a:extLst>
-          </p:cNvPr>
-          <p:cNvSpPr txBox="1"/>
-          <p:nvPr/>
-        </p:nvSpPr>
-        <p:spPr>
-          <a:xfrm>
-            <a:off x="117748" y="260648"/>
-            <a:ext cx="2592288" cy="584775"/>
-          </a:xfrm>
-          <a:prstGeom prst="rect">
-            <a:avLst/>
-          </a:prstGeom>
-          <a:noFill/>
-        </p:spPr>
-        <p:txBody>
-          <a:bodyPr wrap="square" rtlCol="0">
-            <a:spAutoFit/>
-          </a:bodyPr>
-          <a:lstStyle/>
-          <a:p>
-            <a:r>
-              <a:rPr lang="ko-KR" altLang="en-US" sz="3200" b="1" dirty="0"/>
-              <a:t>실습하기</a:t>
-            </a:r>
-          </a:p>
-        </p:txBody>
-      </p:sp>
-      <p:pic>
-        <p:nvPicPr>
-          <p:cNvPr id="6" name="Picture 2" descr="한 여자가 노트북 컴퓨터에 타이핑을 하고 있다">
-            <a:extLst>
-              <a:ext uri="{FF2B5EF4-FFF2-40B4-BE49-F238E27FC236}">
-                <a16:creationId xmlns:a16="http://schemas.microsoft.com/office/drawing/2014/main" id="{BAE13FD5-E6E3-B98A-63C3-AD0C55C58B00}"/>
-              </a:ext>
-            </a:extLst>
-          </p:cNvPr>
-          <p:cNvPicPr>
-            <a:picLocks noChangeAspect="1" noChangeArrowheads="1"/>
-          </p:cNvPicPr>
-          <p:nvPr/>
-        </p:nvPicPr>
-        <p:blipFill>
-          <a:blip r:embed="rId6" cstate="print">
-            <a:extLst>
-              <a:ext uri="{28A0092B-C50C-407E-A947-70E740481C1C}">
-                <a14:useLocalDpi xmlns:a14="http://schemas.microsoft.com/office/drawing/2010/main" val="0"/>
-              </a:ext>
-            </a:extLst>
-          </a:blip>
-          <a:srcRect/>
-          <a:stretch>
-            <a:fillRect/>
-          </a:stretch>
-        </p:blipFill>
-        <p:spPr bwMode="auto">
-          <a:xfrm>
-            <a:off x="9918426" y="260648"/>
-            <a:ext cx="2152650" cy="1424329"/>
-          </a:xfrm>
-          <a:prstGeom prst="rect">
-            <a:avLst/>
-          </a:prstGeom>
-          <a:noFill/>
-          <a:extLst>
-            <a:ext uri="{909E8E84-426E-40DD-AFC4-6F175D3DCCD1}">
-              <a14:hiddenFill xmlns:a14="http://schemas.microsoft.com/office/drawing/2010/main">
-                <a:solidFill>
-                  <a:srgbClr val="FFFFFF"/>
-                </a:solidFill>
-              </a14:hiddenFill>
-            </a:ext>
-          </a:extLst>
-        </p:spPr>
-      </p:pic>
-    </p:spTree>
-    <p:extLst>
-      <p:ext uri="{BB962C8B-B14F-4D97-AF65-F5344CB8AC3E}">
-        <p14:creationId xmlns:p14="http://schemas.microsoft.com/office/powerpoint/2010/main" val="2648513285"/>
-      </p:ext>
-    </p:extLst>
-  </p:cSld>
-  <p:clrMapOvr>
-    <a:masterClrMapping/>
-  </p:clrMapOvr>
-  <mc:AlternateContent xmlns:mc="http://schemas.openxmlformats.org/markup-compatibility/2006" xmlns:p14="http://schemas.microsoft.com/office/powerpoint/2010/main">
-    <mc:Choice Requires="p14">
-      <p:transition spd="med" p14:dur="700">
-        <p:fade/>
-      </p:transition>
-    </mc:Choice>
-    <mc:Fallback xmlns="">
-      <p:transition spd="med">
-        <p:fade/>
-      </p:transition>
-    </mc:Fallback>
-  </mc:AlternateContent>
 </p:sld>
 </file>
 
@@ -17640,6 +19189,17 @@
 </file>
 
 <file path=customXml/item2.xml><?xml version="1.0" encoding="utf-8"?>
+<p:properties xmlns:p="http://schemas.microsoft.com/office/2006/metadata/properties" xmlns:xsi="http://www.w3.org/2001/XMLSchema-instance" xmlns:pc="http://schemas.microsoft.com/office/infopath/2007/PartnerControls">
+  <documentManagement>
+    <VSO_x0020_item_x0020_id xmlns="40262f94-9f35-4ac3-9a90-690165a166b7" xsi:nil="true"/>
+    <Assetid_x0020_ xmlns="40262f94-9f35-4ac3-9a90-690165a166b7" xsi:nil="true"/>
+    <Item_x0020_Details xmlns="40262f94-9f35-4ac3-9a90-690165a166b7" xsi:nil="true"/>
+    <Template_x0020_details xmlns="40262f94-9f35-4ac3-9a90-690165a166b7" xsi:nil="true"/>
+  </documentManagement>
+</p:properties>
+</file>
+
+<file path=customXml/item3.xml><?xml version="1.0" encoding="utf-8"?>
 <ct:contentTypeSchema xmlns:ct="http://schemas.microsoft.com/office/2006/metadata/contentType" xmlns:ma="http://schemas.microsoft.com/office/2006/metadata/properties/metaAttributes" ct:_="" ma:_="" ma:contentTypeName="Document" ma:contentTypeID="0x010100AA3F7D94069FF64A86F7DFF56D60E3BE" ma:contentTypeVersion="6" ma:contentTypeDescription="Create a new document." ma:contentTypeScope="" ma:versionID="c32302c77d4085ecf495bdddb7f5e889">
   <xsd:schema xmlns:xsd="http://www.w3.org/2001/XMLSchema" xmlns:xs="http://www.w3.org/2001/XMLSchema" xmlns:p="http://schemas.microsoft.com/office/2006/metadata/properties" xmlns:ns2="a4f35948-e619-41b3-aa29-22878b09cfd2" xmlns:ns3="40262f94-9f35-4ac3-9a90-690165a166b7" targetNamespace="http://schemas.microsoft.com/office/2006/metadata/properties" ma:root="true" ma:fieldsID="4ab5ae46be95f9d0be6107e8200be7a2" ns2:_="" ns3:_="">
     <xsd:import namespace="a4f35948-e619-41b3-aa29-22878b09cfd2"/>
@@ -17820,17 +19380,6 @@
 </ct:contentTypeSchema>
 </file>
 
-<file path=customXml/item3.xml><?xml version="1.0" encoding="utf-8"?>
-<p:properties xmlns:p="http://schemas.microsoft.com/office/2006/metadata/properties" xmlns:xsi="http://www.w3.org/2001/XMLSchema-instance" xmlns:pc="http://schemas.microsoft.com/office/infopath/2007/PartnerControls">
-  <documentManagement>
-    <VSO_x0020_item_x0020_id xmlns="40262f94-9f35-4ac3-9a90-690165a166b7" xsi:nil="true"/>
-    <Assetid_x0020_ xmlns="40262f94-9f35-4ac3-9a90-690165a166b7" xsi:nil="true"/>
-    <Item_x0020_Details xmlns="40262f94-9f35-4ac3-9a90-690165a166b7" xsi:nil="true"/>
-    <Template_x0020_details xmlns="40262f94-9f35-4ac3-9a90-690165a166b7" xsi:nil="true"/>
-  </documentManagement>
-</p:properties>
-</file>
-
 <file path=customXml/itemProps1.xml><?xml version="1.0" encoding="utf-8"?>
 <ds:datastoreItem xmlns:ds="http://schemas.openxmlformats.org/officeDocument/2006/customXml" ds:itemID="{7F9B8BCC-BF24-4800-92E1-9F891BBB27E6}">
   <ds:schemaRefs>
@@ -17840,6 +19389,23 @@
 </file>
 
 <file path=customXml/itemProps2.xml><?xml version="1.0" encoding="utf-8"?>
+<ds:datastoreItem xmlns:ds="http://schemas.openxmlformats.org/officeDocument/2006/customXml" ds:itemID="{50AACE6D-8EB6-447A-8DFD-C2C0C52916AC}">
+  <ds:schemaRefs>
+    <ds:schemaRef ds:uri="http://schemas.microsoft.com/office/infopath/2007/PartnerControls"/>
+    <ds:schemaRef ds:uri="http://schemas.microsoft.com/office/2006/documentManagement/types"/>
+    <ds:schemaRef ds:uri="http://purl.org/dc/elements/1.1/"/>
+    <ds:schemaRef ds:uri="http://purl.org/dc/terms/"/>
+    <ds:schemaRef ds:uri="40262f94-9f35-4ac3-9a90-690165a166b7"/>
+    <ds:schemaRef ds:uri="http://www.w3.org/XML/1998/namespace"/>
+    <ds:schemaRef ds:uri="http://schemas.microsoft.com/office/2006/metadata/properties"/>
+    <ds:schemaRef ds:uri="http://schemas.openxmlformats.org/package/2006/metadata/core-properties"/>
+    <ds:schemaRef ds:uri="a4f35948-e619-41b3-aa29-22878b09cfd2"/>
+    <ds:schemaRef ds:uri="http://purl.org/dc/dcmitype/"/>
+  </ds:schemaRefs>
+</ds:datastoreItem>
+</file>
+
+<file path=customXml/itemProps3.xml><?xml version="1.0" encoding="utf-8"?>
 <ds:datastoreItem xmlns:ds="http://schemas.openxmlformats.org/officeDocument/2006/customXml" ds:itemID="{5CCB2C71-1ED8-4540-B003-293B5E75C71F}">
   <ds:schemaRefs>
     <ds:schemaRef ds:uri="http://schemas.microsoft.com/office/2006/metadata/contentType"/>
@@ -17856,21 +19422,4 @@
     <ds:schemaRef ds:uri="http://schemas.microsoft.com/internal/obd"/>
   </ds:schemaRefs>
 </ds:datastoreItem>
-</file>
-
-<file path=customXml/itemProps3.xml><?xml version="1.0" encoding="utf-8"?>
-<ds:datastoreItem xmlns:ds="http://schemas.openxmlformats.org/officeDocument/2006/customXml" ds:itemID="{50AACE6D-8EB6-447A-8DFD-C2C0C52916AC}">
-  <ds:schemaRefs>
-    <ds:schemaRef ds:uri="http://schemas.microsoft.com/office/infopath/2007/PartnerControls"/>
-    <ds:schemaRef ds:uri="http://schemas.microsoft.com/office/2006/documentManagement/types"/>
-    <ds:schemaRef ds:uri="http://purl.org/dc/elements/1.1/"/>
-    <ds:schemaRef ds:uri="http://purl.org/dc/terms/"/>
-    <ds:schemaRef ds:uri="40262f94-9f35-4ac3-9a90-690165a166b7"/>
-    <ds:schemaRef ds:uri="http://www.w3.org/XML/1998/namespace"/>
-    <ds:schemaRef ds:uri="http://schemas.microsoft.com/office/2006/metadata/properties"/>
-    <ds:schemaRef ds:uri="http://schemas.openxmlformats.org/package/2006/metadata/core-properties"/>
-    <ds:schemaRef ds:uri="a4f35948-e619-41b3-aa29-22878b09cfd2"/>
-    <ds:schemaRef ds:uri="http://purl.org/dc/dcmitype/"/>
-  </ds:schemaRefs>
-</ds:datastoreItem>
 </file>